--- a/decks/day1/module-1-landscape.pptx
+++ b/decks/day1/module-1-landscape.pptx
@@ -5425,7 +5425,7 @@
             <a:off x="365760" y="4343400"/>
             <a:ext cx="8412480" cy="457200"/>
           </a:xfrm>
-          <a:prstGeom prst="1">
+          <a:prstGeom prst="rect">
             <a:avLst/>
           </a:prstGeom>
           <a:solidFill>

--- a/decks/day1/module-1-landscape.pptx
+++ b/decks/day1/module-1-landscape.pptx
@@ -14,9 +14,11 @@
     <p:sldId id="262" r:id="rId8"/>
     <p:sldId id="263" r:id="rId9"/>
     <p:sldId id="264" r:id="rId10"/>
+    <p:sldId id="265" r:id="rId11"/>
+    <p:sldId id="266" r:id="rId12"/>
   </p:sldIdLst>
   <p:notesMasterIdLst>
-    <p:notesMasterId r:id="rId11"/>
+    <p:notesMasterId r:id="rId13"/>
   </p:notesMasterIdLst>
   <p:sldSz cx="9144000" cy="5143500"/>
   <p:notesSz cx="5143500" cy="9144000"/>
@@ -552,6 +554,182 @@
 </p:notes>
 </file>
 
+<file path=ppt/notesSlides/notesSlide10.xml><?xml version="1.0" encoding="utf-8"?>
+<p:notes xmlns:a="http://schemas.openxmlformats.org/drawingml/2006/main" xmlns:r="http://schemas.openxmlformats.org/officeDocument/2006/relationships" xmlns:p="http://schemas.openxmlformats.org/presentationml/2006/main">
+  <p:cSld>
+    <p:spTree>
+      <p:nvGrpSpPr>
+        <p:cNvPr id="1" name=""/>
+        <p:cNvGrpSpPr/>
+        <p:nvPr/>
+      </p:nvGrpSpPr>
+      <p:grpSpPr>
+        <a:xfrm>
+          <a:off x="0" y="0"/>
+          <a:ext cx="0" cy="0"/>
+          <a:chOff x="0" y="0"/>
+          <a:chExt cx="0" cy="0"/>
+        </a:xfrm>
+      </p:grpSpPr>
+      <p:sp>
+        <p:nvSpPr>
+          <p:cNvPr id="2" name="Slide Image Placeholder 1"/>
+          <p:cNvSpPr>
+            <a:spLocks noGrp="1" noRot="1" noChangeAspect="1"/>
+          </p:cNvSpPr>
+          <p:nvPr>
+            <p:ph type="sldImg"/>
+          </p:nvPr>
+        </p:nvSpPr>
+        <p:spPr/>
+      </p:sp>
+      <p:sp>
+        <p:nvSpPr>
+          <p:cNvPr id="3" name="Notes Placeholder 2"/>
+          <p:cNvSpPr>
+            <a:spLocks noGrp="1"/>
+          </p:cNvSpPr>
+          <p:nvPr>
+            <p:ph type="body" idx="1"/>
+          </p:nvPr>
+        </p:nvSpPr>
+        <p:spPr/>
+        <p:txBody>
+          <a:bodyPr/>
+          <a:lstStyle/>
+          <a:p>
+            <a:r>
+              <a:rPr lang="en-US" dirty="0"/>
+              <a:t>Preview the arc. Mention every day builds on the same 'docs assistant' reference project.</a:t>
+            </a:r>
+            <a:endParaRPr lang="en-US" dirty="0"/>
+          </a:p>
+        </p:txBody>
+      </p:sp>
+      <p:sp>
+        <p:nvSpPr>
+          <p:cNvPr id="4" name="Slide Number Placeholder 3"/>
+          <p:cNvSpPr>
+            <a:spLocks noGrp="1"/>
+          </p:cNvSpPr>
+          <p:nvPr>
+            <p:ph type="sldNum" sz="quarter" idx="10"/>
+          </p:nvPr>
+        </p:nvSpPr>
+        <p:spPr/>
+        <p:txBody>
+          <a:bodyPr/>
+          <a:lstStyle/>
+          <a:p>
+            <a:fld id="{F7021451-1387-4CA6-816F-3879F97B5CBC}" type="slidenum">
+              <a:rPr lang="en-US"/>
+              <a:t>10</a:t>
+            </a:fld>
+            <a:endParaRPr lang="en-US"/>
+          </a:p>
+        </p:txBody>
+      </p:sp>
+    </p:spTree>
+    <p:extLst>
+      <p:ext uri="{BB962C8B-B14F-4D97-AF65-F5344CB8AC3E}">
+        <p14:creationId xmlns:p14="http://schemas.microsoft.com/office/powerpoint/2010/main" val="1024086991"/>
+      </p:ext>
+    </p:extLst>
+  </p:cSld>
+  <p:clrMapOvr>
+    <a:masterClrMapping/>
+  </p:clrMapOvr>
+</p:notes>
+</file>
+
+<file path=ppt/notesSlides/notesSlide11.xml><?xml version="1.0" encoding="utf-8"?>
+<p:notes xmlns:a="http://schemas.openxmlformats.org/drawingml/2006/main" xmlns:r="http://schemas.openxmlformats.org/officeDocument/2006/relationships" xmlns:p="http://schemas.openxmlformats.org/presentationml/2006/main">
+  <p:cSld>
+    <p:spTree>
+      <p:nvGrpSpPr>
+        <p:cNvPr id="1" name=""/>
+        <p:cNvGrpSpPr/>
+        <p:nvPr/>
+      </p:nvGrpSpPr>
+      <p:grpSpPr>
+        <a:xfrm>
+          <a:off x="0" y="0"/>
+          <a:ext cx="0" cy="0"/>
+          <a:chOff x="0" y="0"/>
+          <a:chExt cx="0" cy="0"/>
+        </a:xfrm>
+      </p:grpSpPr>
+      <p:sp>
+        <p:nvSpPr>
+          <p:cNvPr id="2" name="Slide Image Placeholder 1"/>
+          <p:cNvSpPr>
+            <a:spLocks noGrp="1" noRot="1" noChangeAspect="1"/>
+          </p:cNvSpPr>
+          <p:nvPr>
+            <p:ph type="sldImg"/>
+          </p:nvPr>
+        </p:nvSpPr>
+        <p:spPr/>
+      </p:sp>
+      <p:sp>
+        <p:nvSpPr>
+          <p:cNvPr id="3" name="Notes Placeholder 2"/>
+          <p:cNvSpPr>
+            <a:spLocks noGrp="1"/>
+          </p:cNvSpPr>
+          <p:nvPr>
+            <p:ph type="body" idx="1"/>
+          </p:nvPr>
+        </p:nvSpPr>
+        <p:spPr/>
+        <p:txBody>
+          <a:bodyPr/>
+          <a:lstStyle/>
+          <a:p>
+            <a:r>
+              <a:rPr lang="en-US" dirty="0"/>
+              <a:t>Recap in 60 seconds. Take one or two questions max, then transition.</a:t>
+            </a:r>
+            <a:endParaRPr lang="en-US" dirty="0"/>
+          </a:p>
+        </p:txBody>
+      </p:sp>
+      <p:sp>
+        <p:nvSpPr>
+          <p:cNvPr id="4" name="Slide Number Placeholder 3"/>
+          <p:cNvSpPr>
+            <a:spLocks noGrp="1"/>
+          </p:cNvSpPr>
+          <p:nvPr>
+            <p:ph type="sldNum" sz="quarter" idx="10"/>
+          </p:nvPr>
+        </p:nvSpPr>
+        <p:spPr/>
+        <p:txBody>
+          <a:bodyPr/>
+          <a:lstStyle/>
+          <a:p>
+            <a:fld id="{F7021451-1387-4CA6-816F-3879F97B5CBC}" type="slidenum">
+              <a:rPr lang="en-US"/>
+              <a:t>11</a:t>
+            </a:fld>
+            <a:endParaRPr lang="en-US"/>
+          </a:p>
+        </p:txBody>
+      </p:sp>
+    </p:spTree>
+    <p:extLst>
+      <p:ext uri="{BB962C8B-B14F-4D97-AF65-F5344CB8AC3E}">
+        <p14:creationId xmlns:p14="http://schemas.microsoft.com/office/powerpoint/2010/main" val="1024086991"/>
+      </p:ext>
+    </p:extLst>
+  </p:cSld>
+  <p:clrMapOvr>
+    <a:masterClrMapping/>
+  </p:clrMapOvr>
+</p:notes>
+</file>
+
 <file path=ppt/notesSlides/notesSlide2.xml><?xml version="1.0" encoding="utf-8"?>
 <p:notes xmlns:a="http://schemas.openxmlformats.org/drawingml/2006/main" xmlns:r="http://schemas.openxmlformats.org/officeDocument/2006/relationships" xmlns:p="http://schemas.openxmlformats.org/presentationml/2006/main">
   <p:cSld>
@@ -774,7 +952,7 @@
           <a:p>
             <a:r>
               <a:rPr lang="en-US" dirty="0"/>
-              <a:t>This is the mental filter. Pause here for questions — some attendees will have already been sold on Copilot Studio; be respectful, redirect to appropriate resources after class.</a:t>
+              <a:t>Anchor slide. Emphasize that the problem shape is the same across all three; the layer of abstraction is what shifts. Sets up the next slide's spectrum framing.</a:t>
             </a:r>
             <a:endParaRPr lang="en-US" dirty="0"/>
           </a:p>
@@ -862,7 +1040,7 @@
           <a:p>
             <a:r>
               <a:rPr lang="en-US" dirty="0"/>
-              <a:t>Preview only. PromptAgent, HostedAgent, Toolbox, and Foundry IQ each get their own module or day. Don't dive into any of them here.</a:t>
+              <a:t>Use the familiar IaaS/PaaS/SaaS trio — attendees already know it. This replaces a bullet list and lands harder. Emphasize 'this workshop = PaaS.'</a:t>
             </a:r>
             <a:endParaRPr lang="en-US" dirty="0"/>
           </a:p>
@@ -950,7 +1128,7 @@
           <a:p>
             <a:r>
               <a:rPr lang="en-US" dirty="0"/>
-              <a:t>Emphasize 'one vocabulary' — attendees coming from SK / AutoGen will spot the lineage. Call SK 'still supported, not the forward path.' Don't disparage.</a:t>
+              <a:t>This slide prevents the anti-pattern of building an agent for what should be a plain LLM call. Ask attendees which pattern their current use case actually needs.</a:t>
             </a:r>
             <a:endParaRPr lang="en-US" dirty="0"/>
           </a:p>
@@ -1038,7 +1216,7 @@
           <a:p>
             <a:r>
               <a:rPr lang="en-US" dirty="0"/>
-              <a:t>This is important framing. Attendees with adjacent expectations need to know we're not going there today.</a:t>
+              <a:t>Preview only. PromptAgent, HostedAgent, Toolbox, and Foundry IQ each get their own module or day. Don't dive into any of them here.</a:t>
             </a:r>
             <a:endParaRPr lang="en-US" dirty="0"/>
           </a:p>
@@ -1126,7 +1304,7 @@
           <a:p>
             <a:r>
               <a:rPr lang="en-US" dirty="0"/>
-              <a:t>Preview the arc. Mention every day builds on the same 'docs assistant' reference project.</a:t>
+              <a:t>Emphasize 'one vocabulary' — attendees coming from SK / AutoGen will spot the lineage. Call SK 'still supported, not the forward path.' Don't disparage.</a:t>
             </a:r>
             <a:endParaRPr lang="en-US" dirty="0"/>
           </a:p>
@@ -1214,7 +1392,7 @@
           <a:p>
             <a:r>
               <a:rPr lang="en-US" dirty="0"/>
-              <a:t>Recap in 60 seconds. Take one or two questions max, then transition.</a:t>
+              <a:t>This is important framing. Attendees with adjacent expectations need to know we're not going there today.</a:t>
             </a:r>
             <a:endParaRPr lang="en-US" dirty="0"/>
           </a:p>
@@ -1751,6 +1929,1282 @@
 </p:sld>
 </file>
 
+<file path=ppt/slides/slide10.xml><?xml version="1.0" encoding="utf-8"?>
+<p:sld xmlns:a="http://schemas.openxmlformats.org/drawingml/2006/main" xmlns:r="http://schemas.openxmlformats.org/officeDocument/2006/relationships" xmlns:p="http://schemas.openxmlformats.org/presentationml/2006/main">
+  <p:cSld name="Slide 10">
+    <p:bg>
+      <p:bgPr>
+        <a:solidFill>
+          <a:srgbClr val="FFFFFF"/>
+        </a:solidFill>
+      </p:bgPr>
+    </p:bg>
+    <p:spTree>
+      <p:nvGrpSpPr>
+        <p:cNvPr id="1" name=""/>
+        <p:cNvGrpSpPr/>
+        <p:nvPr/>
+      </p:nvGrpSpPr>
+      <p:grpSpPr>
+        <a:xfrm>
+          <a:off x="0" y="0"/>
+          <a:ext cx="0" cy="0"/>
+          <a:chOff x="0" y="0"/>
+          <a:chExt cx="0" cy="0"/>
+        </a:xfrm>
+      </p:grpSpPr>
+      <p:sp>
+        <p:nvSpPr>
+          <p:cNvPr id="2" name="Shape 0"/>
+          <p:cNvSpPr/>
+          <p:nvPr/>
+        </p:nvSpPr>
+        <p:spPr>
+          <a:xfrm>
+            <a:off x="0" y="0"/>
+            <a:ext cx="54864" cy="5143500"/>
+          </a:xfrm>
+          <a:prstGeom prst="rect">
+            <a:avLst/>
+          </a:prstGeom>
+          <a:solidFill>
+            <a:srgbClr val="1E2761"/>
+          </a:solidFill>
+          <a:ln/>
+        </p:spPr>
+      </p:sp>
+      <p:sp>
+        <p:nvSpPr>
+          <p:cNvPr id="3" name="Text 1"/>
+          <p:cNvSpPr/>
+          <p:nvPr/>
+        </p:nvSpPr>
+        <p:spPr>
+          <a:xfrm>
+            <a:off x="5669280" y="274320"/>
+            <a:ext cx="3291840" cy="274320"/>
+          </a:xfrm>
+          <a:prstGeom prst="rect">
+            <a:avLst/>
+          </a:prstGeom>
+          <a:noFill/>
+          <a:ln/>
+        </p:spPr>
+        <p:txBody>
+          <a:bodyPr wrap="square" lIns="0" tIns="0" rIns="0" bIns="0" rtlCol="0" anchor="ctr"/>
+          <a:lstStyle/>
+          <a:p>
+            <a:pPr algn="r" indent="0" marL="0">
+              <a:buNone/>
+            </a:pPr>
+            <a:r>
+              <a:rPr lang="en-US" sz="1000" dirty="0">
+                <a:solidFill>
+                  <a:srgbClr val="6B7280"/>
+                </a:solidFill>
+                <a:latin typeface="Calibri" pitchFamily="34" charset="0"/>
+                <a:ea typeface="Calibri" pitchFamily="34" charset="-122"/>
+                <a:cs typeface="Calibri" pitchFamily="34" charset="-120"/>
+              </a:rPr>
+              <a:t>Day 1 · Module 1</a:t>
+            </a:r>
+            <a:endParaRPr lang="en-US" sz="1000" dirty="0"/>
+          </a:p>
+        </p:txBody>
+      </p:sp>
+      <p:sp>
+        <p:nvSpPr>
+          <p:cNvPr id="4" name="Text 2"/>
+          <p:cNvSpPr/>
+          <p:nvPr/>
+        </p:nvSpPr>
+        <p:spPr>
+          <a:xfrm>
+            <a:off x="365760" y="320040"/>
+            <a:ext cx="6217920" cy="640080"/>
+          </a:xfrm>
+          <a:prstGeom prst="rect">
+            <a:avLst/>
+          </a:prstGeom>
+          <a:noFill/>
+          <a:ln/>
+        </p:spPr>
+        <p:txBody>
+          <a:bodyPr wrap="square" lIns="0" tIns="0" rIns="0" bIns="0" rtlCol="0" anchor="ctr"/>
+          <a:lstStyle/>
+          <a:p>
+            <a:pPr indent="0" marL="0">
+              <a:buNone/>
+            </a:pPr>
+            <a:r>
+              <a:rPr lang="en-US" sz="2800" b="1" dirty="0">
+                <a:solidFill>
+                  <a:srgbClr val="1E2761"/>
+                </a:solidFill>
+                <a:latin typeface="Calibri" pitchFamily="34" charset="0"/>
+                <a:ea typeface="Calibri" pitchFamily="34" charset="-122"/>
+                <a:cs typeface="Calibri" pitchFamily="34" charset="-120"/>
+              </a:rPr>
+              <a:t>Roadmap — how the week hangs together</a:t>
+            </a:r>
+            <a:endParaRPr lang="en-US" sz="2800" dirty="0"/>
+          </a:p>
+        </p:txBody>
+      </p:sp>
+      <p:graphicFrame>
+        <p:nvGraphicFramePr>
+          <p:cNvPr id="11" name="Table 0"/>
+          <p:cNvGraphicFramePr>
+            <a:graphicFrameLocks noGrp="1"/>
+          </p:cNvGraphicFramePr>
+          <p:nvPr>
+            <p:extLst>
+              <p:ext uri="{D42A27DB-BD31-4B8C-83A1-F6EECF244321}">
+                <p14:modId xmlns:p14="http://schemas.microsoft.com/office/powerpoint/2010/main" val="1579011935"/>
+              </p:ext>
+            </p:extLst>
+          </p:nvPr>
+        </p:nvGraphicFramePr>
+        <p:xfrm>
+          <a:off x="365760" y="1097280"/>
+          <a:ext cx="8412480" cy="914400"/>
+        </p:xfrm>
+        <a:graphic>
+          <a:graphicData uri="http://schemas.openxmlformats.org/drawingml/2006/table">
+            <a:tbl>
+              <a:tblPr/>
+              <a:tblGrid>
+                <a:gridCol w="731520"/>
+                <a:gridCol w="7680960"/>
+              </a:tblGrid>
+              <a:tr h="457200">
+                <a:tc>
+                  <a:txBody>
+                    <a:bodyPr/>
+                    <a:lstStyle/>
+                    <a:p>
+                      <a:pPr indent="0" marL="0">
+                        <a:buNone/>
+                      </a:pPr>
+                      <a:r>
+                        <a:rPr lang="en-US" sz="1300" b="1" dirty="0">
+                          <a:solidFill>
+                            <a:srgbClr val="FFFFFF"/>
+                          </a:solidFill>
+                          <a:latin typeface="Calibri" pitchFamily="34" charset="0"/>
+                          <a:ea typeface="Calibri" pitchFamily="34" charset="-122"/>
+                          <a:cs typeface="Calibri" pitchFamily="34" charset="-120"/>
+                        </a:rPr>
+                        <a:t>Day</a:t>
+                      </a:r>
+                      <a:endParaRPr lang="en-US" sz="1300" dirty="0">
+                        <a:latin typeface="Calibri" charset="0"/>
+                        <a:ea typeface="Calibri" charset="0"/>
+                        <a:cs typeface="Calibri" charset="0"/>
+                      </a:endParaRPr>
+                    </a:p>
+                  </a:txBody>
+                  <a:tcPr marL="54864" marR="54864" marT="54864" marB="54864" anchor="ctr">
+                    <a:lnL w="6350" cap="flat" cmpd="sng" algn="ctr">
+                      <a:solidFill>
+                        <a:srgbClr val="D1D5DB"/>
+                      </a:solidFill>
+                      <a:prstDash val="solid"/>
+                      <a:round/>
+                      <a:headEnd type="none" w="med" len="med"/>
+                      <a:tailEnd type="none" w="med" len="med"/>
+                    </a:lnL>
+                    <a:lnR w="6350" cap="flat" cmpd="sng" algn="ctr">
+                      <a:solidFill>
+                        <a:srgbClr val="D1D5DB"/>
+                      </a:solidFill>
+                      <a:prstDash val="solid"/>
+                      <a:round/>
+                      <a:headEnd type="none" w="med" len="med"/>
+                      <a:tailEnd type="none" w="med" len="med"/>
+                    </a:lnR>
+                    <a:lnT w="6350" cap="flat" cmpd="sng" algn="ctr">
+                      <a:solidFill>
+                        <a:srgbClr val="D1D5DB"/>
+                      </a:solidFill>
+                      <a:prstDash val="solid"/>
+                      <a:round/>
+                      <a:headEnd type="none" w="med" len="med"/>
+                      <a:tailEnd type="none" w="med" len="med"/>
+                    </a:lnT>
+                    <a:lnB w="6350" cap="flat" cmpd="sng" algn="ctr">
+                      <a:solidFill>
+                        <a:srgbClr val="D1D5DB"/>
+                      </a:solidFill>
+                      <a:prstDash val="solid"/>
+                      <a:round/>
+                      <a:headEnd type="none" w="med" len="med"/>
+                      <a:tailEnd type="none" w="med" len="med"/>
+                    </a:lnB>
+                    <a:solidFill>
+                      <a:srgbClr val="1E2761"/>
+                    </a:solidFill>
+                  </a:tcPr>
+                </a:tc>
+                <a:tc>
+                  <a:txBody>
+                    <a:bodyPr/>
+                    <a:lstStyle/>
+                    <a:p>
+                      <a:pPr indent="0" marL="0">
+                        <a:buNone/>
+                      </a:pPr>
+                      <a:r>
+                        <a:rPr lang="en-US" sz="1300" b="1" dirty="0">
+                          <a:solidFill>
+                            <a:srgbClr val="FFFFFF"/>
+                          </a:solidFill>
+                          <a:latin typeface="Calibri" pitchFamily="34" charset="0"/>
+                          <a:ea typeface="Calibri" pitchFamily="34" charset="-122"/>
+                          <a:cs typeface="Calibri" pitchFamily="34" charset="-120"/>
+                        </a:rPr>
+                        <a:t>Theme</a:t>
+                      </a:r>
+                      <a:endParaRPr lang="en-US" sz="1300" dirty="0">
+                        <a:latin typeface="Calibri" charset="0"/>
+                        <a:ea typeface="Calibri" charset="0"/>
+                        <a:cs typeface="Calibri" charset="0"/>
+                      </a:endParaRPr>
+                    </a:p>
+                  </a:txBody>
+                  <a:tcPr marL="54864" marR="54864" marT="54864" marB="54864" anchor="ctr">
+                    <a:lnL w="6350" cap="flat" cmpd="sng" algn="ctr">
+                      <a:solidFill>
+                        <a:srgbClr val="D1D5DB"/>
+                      </a:solidFill>
+                      <a:prstDash val="solid"/>
+                      <a:round/>
+                      <a:headEnd type="none" w="med" len="med"/>
+                      <a:tailEnd type="none" w="med" len="med"/>
+                    </a:lnL>
+                    <a:lnR w="6350" cap="flat" cmpd="sng" algn="ctr">
+                      <a:solidFill>
+                        <a:srgbClr val="D1D5DB"/>
+                      </a:solidFill>
+                      <a:prstDash val="solid"/>
+                      <a:round/>
+                      <a:headEnd type="none" w="med" len="med"/>
+                      <a:tailEnd type="none" w="med" len="med"/>
+                    </a:lnR>
+                    <a:lnT w="6350" cap="flat" cmpd="sng" algn="ctr">
+                      <a:solidFill>
+                        <a:srgbClr val="D1D5DB"/>
+                      </a:solidFill>
+                      <a:prstDash val="solid"/>
+                      <a:round/>
+                      <a:headEnd type="none" w="med" len="med"/>
+                      <a:tailEnd type="none" w="med" len="med"/>
+                    </a:lnT>
+                    <a:lnB w="6350" cap="flat" cmpd="sng" algn="ctr">
+                      <a:solidFill>
+                        <a:srgbClr val="D1D5DB"/>
+                      </a:solidFill>
+                      <a:prstDash val="solid"/>
+                      <a:round/>
+                      <a:headEnd type="none" w="med" len="med"/>
+                      <a:tailEnd type="none" w="med" len="med"/>
+                    </a:lnB>
+                    <a:solidFill>
+                      <a:srgbClr val="1E2761"/>
+                    </a:solidFill>
+                  </a:tcPr>
+                </a:tc>
+              </a:tr>
+              <a:tr h="457200">
+                <a:tc>
+                  <a:txBody>
+                    <a:bodyPr/>
+                    <a:lstStyle/>
+                    <a:p>
+                      <a:pPr indent="0" marL="0">
+                        <a:buNone/>
+                      </a:pPr>
+                      <a:r>
+                        <a:rPr lang="en-US" sz="1300" dirty="0">
+                          <a:solidFill>
+                            <a:srgbClr val="212121"/>
+                          </a:solidFill>
+                          <a:latin typeface="Calibri" pitchFamily="34" charset="0"/>
+                          <a:ea typeface="Calibri" pitchFamily="34" charset="-122"/>
+                          <a:cs typeface="Calibri" pitchFamily="34" charset="-120"/>
+                        </a:rPr>
+                        <a:t>1</a:t>
+                      </a:r>
+                      <a:endParaRPr lang="en-US" sz="1300" dirty="0">
+                        <a:latin typeface="Calibri" charset="0"/>
+                        <a:ea typeface="Calibri" charset="0"/>
+                        <a:cs typeface="Calibri" charset="0"/>
+                      </a:endParaRPr>
+                    </a:p>
+                  </a:txBody>
+                  <a:tcPr marL="54864" marR="54864" marT="54864" marB="54864" anchor="ctr">
+                    <a:lnL w="6350" cap="flat" cmpd="sng" algn="ctr">
+                      <a:solidFill>
+                        <a:srgbClr val="D1D5DB"/>
+                      </a:solidFill>
+                      <a:prstDash val="solid"/>
+                      <a:round/>
+                      <a:headEnd type="none" w="med" len="med"/>
+                      <a:tailEnd type="none" w="med" len="med"/>
+                    </a:lnL>
+                    <a:lnR w="6350" cap="flat" cmpd="sng" algn="ctr">
+                      <a:solidFill>
+                        <a:srgbClr val="D1D5DB"/>
+                      </a:solidFill>
+                      <a:prstDash val="solid"/>
+                      <a:round/>
+                      <a:headEnd type="none" w="med" len="med"/>
+                      <a:tailEnd type="none" w="med" len="med"/>
+                    </a:lnR>
+                    <a:lnT w="6350" cap="flat" cmpd="sng" algn="ctr">
+                      <a:solidFill>
+                        <a:srgbClr val="D1D5DB"/>
+                      </a:solidFill>
+                      <a:prstDash val="solid"/>
+                      <a:round/>
+                      <a:headEnd type="none" w="med" len="med"/>
+                      <a:tailEnd type="none" w="med" len="med"/>
+                    </a:lnT>
+                    <a:lnB w="6350" cap="flat" cmpd="sng" algn="ctr">
+                      <a:solidFill>
+                        <a:srgbClr val="D1D5DB"/>
+                      </a:solidFill>
+                      <a:prstDash val="solid"/>
+                      <a:round/>
+                      <a:headEnd type="none" w="med" len="med"/>
+                      <a:tailEnd type="none" w="med" len="med"/>
+                    </a:lnB>
+                    <a:solidFill>
+                      <a:srgbClr val="FFFFFF"/>
+                    </a:solidFill>
+                  </a:tcPr>
+                </a:tc>
+                <a:tc>
+                  <a:txBody>
+                    <a:bodyPr/>
+                    <a:lstStyle/>
+                    <a:p>
+                      <a:pPr indent="0" marL="0">
+                        <a:buNone/>
+                      </a:pPr>
+                      <a:r>
+                        <a:rPr lang="en-US" sz="1300" dirty="0">
+                          <a:solidFill>
+                            <a:srgbClr val="212121"/>
+                          </a:solidFill>
+                          <a:latin typeface="Calibri" pitchFamily="34" charset="0"/>
+                          <a:ea typeface="Calibri" pitchFamily="34" charset="-122"/>
+                          <a:cs typeface="Calibri" pitchFamily="34" charset="-120"/>
+                        </a:rPr>
+                        <a:t>Foundations: the stack, both hosting styles, first working agents</a:t>
+                      </a:r>
+                      <a:endParaRPr lang="en-US" sz="1300" dirty="0">
+                        <a:latin typeface="Calibri" charset="0"/>
+                        <a:ea typeface="Calibri" charset="0"/>
+                        <a:cs typeface="Calibri" charset="0"/>
+                      </a:endParaRPr>
+                    </a:p>
+                  </a:txBody>
+                  <a:tcPr marL="54864" marR="54864" marT="54864" marB="54864" anchor="ctr">
+                    <a:lnL w="6350" cap="flat" cmpd="sng" algn="ctr">
+                      <a:solidFill>
+                        <a:srgbClr val="D1D5DB"/>
+                      </a:solidFill>
+                      <a:prstDash val="solid"/>
+                      <a:round/>
+                      <a:headEnd type="none" w="med" len="med"/>
+                      <a:tailEnd type="none" w="med" len="med"/>
+                    </a:lnL>
+                    <a:lnR w="6350" cap="flat" cmpd="sng" algn="ctr">
+                      <a:solidFill>
+                        <a:srgbClr val="D1D5DB"/>
+                      </a:solidFill>
+                      <a:prstDash val="solid"/>
+                      <a:round/>
+                      <a:headEnd type="none" w="med" len="med"/>
+                      <a:tailEnd type="none" w="med" len="med"/>
+                    </a:lnR>
+                    <a:lnT w="6350" cap="flat" cmpd="sng" algn="ctr">
+                      <a:solidFill>
+                        <a:srgbClr val="D1D5DB"/>
+                      </a:solidFill>
+                      <a:prstDash val="solid"/>
+                      <a:round/>
+                      <a:headEnd type="none" w="med" len="med"/>
+                      <a:tailEnd type="none" w="med" len="med"/>
+                    </a:lnT>
+                    <a:lnB w="6350" cap="flat" cmpd="sng" algn="ctr">
+                      <a:solidFill>
+                        <a:srgbClr val="D1D5DB"/>
+                      </a:solidFill>
+                      <a:prstDash val="solid"/>
+                      <a:round/>
+                      <a:headEnd type="none" w="med" len="med"/>
+                      <a:tailEnd type="none" w="med" len="med"/>
+                    </a:lnB>
+                    <a:solidFill>
+                      <a:srgbClr val="FFFFFF"/>
+                    </a:solidFill>
+                  </a:tcPr>
+                </a:tc>
+              </a:tr>
+              <a:tr h="457200">
+                <a:tc>
+                  <a:txBody>
+                    <a:bodyPr/>
+                    <a:lstStyle/>
+                    <a:p>
+                      <a:pPr indent="0" marL="0">
+                        <a:buNone/>
+                      </a:pPr>
+                      <a:r>
+                        <a:rPr lang="en-US" sz="1300" dirty="0">
+                          <a:solidFill>
+                            <a:srgbClr val="212121"/>
+                          </a:solidFill>
+                          <a:latin typeface="Calibri" pitchFamily="34" charset="0"/>
+                          <a:ea typeface="Calibri" pitchFamily="34" charset="-122"/>
+                          <a:cs typeface="Calibri" pitchFamily="34" charset="-120"/>
+                        </a:rPr>
+                        <a:t>2</a:t>
+                      </a:r>
+                      <a:endParaRPr lang="en-US" sz="1300" dirty="0">
+                        <a:latin typeface="Calibri" charset="0"/>
+                        <a:ea typeface="Calibri" charset="0"/>
+                        <a:cs typeface="Calibri" charset="0"/>
+                      </a:endParaRPr>
+                    </a:p>
+                  </a:txBody>
+                  <a:tcPr marL="54864" marR="54864" marT="54864" marB="54864" anchor="ctr">
+                    <a:lnL w="6350" cap="flat" cmpd="sng" algn="ctr">
+                      <a:solidFill>
+                        <a:srgbClr val="D1D5DB"/>
+                      </a:solidFill>
+                      <a:prstDash val="solid"/>
+                      <a:round/>
+                      <a:headEnd type="none" w="med" len="med"/>
+                      <a:tailEnd type="none" w="med" len="med"/>
+                    </a:lnL>
+                    <a:lnR w="6350" cap="flat" cmpd="sng" algn="ctr">
+                      <a:solidFill>
+                        <a:srgbClr val="D1D5DB"/>
+                      </a:solidFill>
+                      <a:prstDash val="solid"/>
+                      <a:round/>
+                      <a:headEnd type="none" w="med" len="med"/>
+                      <a:tailEnd type="none" w="med" len="med"/>
+                    </a:lnR>
+                    <a:lnT w="6350" cap="flat" cmpd="sng" algn="ctr">
+                      <a:solidFill>
+                        <a:srgbClr val="D1D5DB"/>
+                      </a:solidFill>
+                      <a:prstDash val="solid"/>
+                      <a:round/>
+                      <a:headEnd type="none" w="med" len="med"/>
+                      <a:tailEnd type="none" w="med" len="med"/>
+                    </a:lnT>
+                    <a:lnB w="6350" cap="flat" cmpd="sng" algn="ctr">
+                      <a:solidFill>
+                        <a:srgbClr val="D1D5DB"/>
+                      </a:solidFill>
+                      <a:prstDash val="solid"/>
+                      <a:round/>
+                      <a:headEnd type="none" w="med" len="med"/>
+                      <a:tailEnd type="none" w="med" len="med"/>
+                    </a:lnB>
+                    <a:solidFill>
+                      <a:srgbClr val="F3F4F6"/>
+                    </a:solidFill>
+                  </a:tcPr>
+                </a:tc>
+                <a:tc>
+                  <a:txBody>
+                    <a:bodyPr/>
+                    <a:lstStyle/>
+                    <a:p>
+                      <a:pPr indent="0" marL="0">
+                        <a:buNone/>
+                      </a:pPr>
+                      <a:r>
+                        <a:rPr lang="en-US" sz="1300" dirty="0">
+                          <a:solidFill>
+                            <a:srgbClr val="212121"/>
+                          </a:solidFill>
+                          <a:latin typeface="Calibri" pitchFamily="34" charset="0"/>
+                          <a:ea typeface="Calibri" pitchFamily="34" charset="-122"/>
+                          <a:cs typeface="Calibri" pitchFamily="34" charset="-120"/>
+                        </a:rPr>
+                        <a:t>Grounding (Foundry IQ + custom RAG) and tools in depth</a:t>
+                      </a:r>
+                      <a:endParaRPr lang="en-US" sz="1300" dirty="0">
+                        <a:latin typeface="Calibri" charset="0"/>
+                        <a:ea typeface="Calibri" charset="0"/>
+                        <a:cs typeface="Calibri" charset="0"/>
+                      </a:endParaRPr>
+                    </a:p>
+                  </a:txBody>
+                  <a:tcPr marL="54864" marR="54864" marT="54864" marB="54864" anchor="ctr">
+                    <a:lnL w="6350" cap="flat" cmpd="sng" algn="ctr">
+                      <a:solidFill>
+                        <a:srgbClr val="D1D5DB"/>
+                      </a:solidFill>
+                      <a:prstDash val="solid"/>
+                      <a:round/>
+                      <a:headEnd type="none" w="med" len="med"/>
+                      <a:tailEnd type="none" w="med" len="med"/>
+                    </a:lnL>
+                    <a:lnR w="6350" cap="flat" cmpd="sng" algn="ctr">
+                      <a:solidFill>
+                        <a:srgbClr val="D1D5DB"/>
+                      </a:solidFill>
+                      <a:prstDash val="solid"/>
+                      <a:round/>
+                      <a:headEnd type="none" w="med" len="med"/>
+                      <a:tailEnd type="none" w="med" len="med"/>
+                    </a:lnR>
+                    <a:lnT w="6350" cap="flat" cmpd="sng" algn="ctr">
+                      <a:solidFill>
+                        <a:srgbClr val="D1D5DB"/>
+                      </a:solidFill>
+                      <a:prstDash val="solid"/>
+                      <a:round/>
+                      <a:headEnd type="none" w="med" len="med"/>
+                      <a:tailEnd type="none" w="med" len="med"/>
+                    </a:lnT>
+                    <a:lnB w="6350" cap="flat" cmpd="sng" algn="ctr">
+                      <a:solidFill>
+                        <a:srgbClr val="D1D5DB"/>
+                      </a:solidFill>
+                      <a:prstDash val="solid"/>
+                      <a:round/>
+                      <a:headEnd type="none" w="med" len="med"/>
+                      <a:tailEnd type="none" w="med" len="med"/>
+                    </a:lnB>
+                    <a:solidFill>
+                      <a:srgbClr val="F3F4F6"/>
+                    </a:solidFill>
+                  </a:tcPr>
+                </a:tc>
+              </a:tr>
+              <a:tr h="457200">
+                <a:tc>
+                  <a:txBody>
+                    <a:bodyPr/>
+                    <a:lstStyle/>
+                    <a:p>
+                      <a:pPr indent="0" marL="0">
+                        <a:buNone/>
+                      </a:pPr>
+                      <a:r>
+                        <a:rPr lang="en-US" sz="1300" dirty="0">
+                          <a:solidFill>
+                            <a:srgbClr val="212121"/>
+                          </a:solidFill>
+                          <a:latin typeface="Calibri" pitchFamily="34" charset="0"/>
+                          <a:ea typeface="Calibri" pitchFamily="34" charset="-122"/>
+                          <a:cs typeface="Calibri" pitchFamily="34" charset="-120"/>
+                        </a:rPr>
+                        <a:t>3</a:t>
+                      </a:r>
+                      <a:endParaRPr lang="en-US" sz="1300" dirty="0">
+                        <a:latin typeface="Calibri" charset="0"/>
+                        <a:ea typeface="Calibri" charset="0"/>
+                        <a:cs typeface="Calibri" charset="0"/>
+                      </a:endParaRPr>
+                    </a:p>
+                  </a:txBody>
+                  <a:tcPr marL="54864" marR="54864" marT="54864" marB="54864" anchor="ctr">
+                    <a:lnL w="6350" cap="flat" cmpd="sng" algn="ctr">
+                      <a:solidFill>
+                        <a:srgbClr val="D1D5DB"/>
+                      </a:solidFill>
+                      <a:prstDash val="solid"/>
+                      <a:round/>
+                      <a:headEnd type="none" w="med" len="med"/>
+                      <a:tailEnd type="none" w="med" len="med"/>
+                    </a:lnL>
+                    <a:lnR w="6350" cap="flat" cmpd="sng" algn="ctr">
+                      <a:solidFill>
+                        <a:srgbClr val="D1D5DB"/>
+                      </a:solidFill>
+                      <a:prstDash val="solid"/>
+                      <a:round/>
+                      <a:headEnd type="none" w="med" len="med"/>
+                      <a:tailEnd type="none" w="med" len="med"/>
+                    </a:lnR>
+                    <a:lnT w="6350" cap="flat" cmpd="sng" algn="ctr">
+                      <a:solidFill>
+                        <a:srgbClr val="D1D5DB"/>
+                      </a:solidFill>
+                      <a:prstDash val="solid"/>
+                      <a:round/>
+                      <a:headEnd type="none" w="med" len="med"/>
+                      <a:tailEnd type="none" w="med" len="med"/>
+                    </a:lnT>
+                    <a:lnB w="6350" cap="flat" cmpd="sng" algn="ctr">
+                      <a:solidFill>
+                        <a:srgbClr val="D1D5DB"/>
+                      </a:solidFill>
+                      <a:prstDash val="solid"/>
+                      <a:round/>
+                      <a:headEnd type="none" w="med" len="med"/>
+                      <a:tailEnd type="none" w="med" len="med"/>
+                    </a:lnB>
+                    <a:solidFill>
+                      <a:srgbClr val="FFFFFF"/>
+                    </a:solidFill>
+                  </a:tcPr>
+                </a:tc>
+                <a:tc>
+                  <a:txBody>
+                    <a:bodyPr/>
+                    <a:lstStyle/>
+                    <a:p>
+                      <a:pPr indent="0" marL="0">
+                        <a:buNone/>
+                      </a:pPr>
+                      <a:r>
+                        <a:rPr lang="en-US" sz="1300" dirty="0">
+                          <a:solidFill>
+                            <a:srgbClr val="212121"/>
+                          </a:solidFill>
+                          <a:latin typeface="Calibri" pitchFamily="34" charset="0"/>
+                          <a:ea typeface="Calibri" pitchFamily="34" charset="-122"/>
+                          <a:cs typeface="Calibri" pitchFamily="34" charset="-120"/>
+                        </a:rPr>
+                        <a:t>Single-agent depth: memory, streaming, structured outputs, MCP</a:t>
+                      </a:r>
+                      <a:endParaRPr lang="en-US" sz="1300" dirty="0">
+                        <a:latin typeface="Calibri" charset="0"/>
+                        <a:ea typeface="Calibri" charset="0"/>
+                        <a:cs typeface="Calibri" charset="0"/>
+                      </a:endParaRPr>
+                    </a:p>
+                  </a:txBody>
+                  <a:tcPr marL="54864" marR="54864" marT="54864" marB="54864" anchor="ctr">
+                    <a:lnL w="6350" cap="flat" cmpd="sng" algn="ctr">
+                      <a:solidFill>
+                        <a:srgbClr val="D1D5DB"/>
+                      </a:solidFill>
+                      <a:prstDash val="solid"/>
+                      <a:round/>
+                      <a:headEnd type="none" w="med" len="med"/>
+                      <a:tailEnd type="none" w="med" len="med"/>
+                    </a:lnL>
+                    <a:lnR w="6350" cap="flat" cmpd="sng" algn="ctr">
+                      <a:solidFill>
+                        <a:srgbClr val="D1D5DB"/>
+                      </a:solidFill>
+                      <a:prstDash val="solid"/>
+                      <a:round/>
+                      <a:headEnd type="none" w="med" len="med"/>
+                      <a:tailEnd type="none" w="med" len="med"/>
+                    </a:lnR>
+                    <a:lnT w="6350" cap="flat" cmpd="sng" algn="ctr">
+                      <a:solidFill>
+                        <a:srgbClr val="D1D5DB"/>
+                      </a:solidFill>
+                      <a:prstDash val="solid"/>
+                      <a:round/>
+                      <a:headEnd type="none" w="med" len="med"/>
+                      <a:tailEnd type="none" w="med" len="med"/>
+                    </a:lnT>
+                    <a:lnB w="6350" cap="flat" cmpd="sng" algn="ctr">
+                      <a:solidFill>
+                        <a:srgbClr val="D1D5DB"/>
+                      </a:solidFill>
+                      <a:prstDash val="solid"/>
+                      <a:round/>
+                      <a:headEnd type="none" w="med" len="med"/>
+                      <a:tailEnd type="none" w="med" len="med"/>
+                    </a:lnB>
+                    <a:solidFill>
+                      <a:srgbClr val="FFFFFF"/>
+                    </a:solidFill>
+                  </a:tcPr>
+                </a:tc>
+              </a:tr>
+              <a:tr h="457200">
+                <a:tc>
+                  <a:txBody>
+                    <a:bodyPr/>
+                    <a:lstStyle/>
+                    <a:p>
+                      <a:pPr indent="0" marL="0">
+                        <a:buNone/>
+                      </a:pPr>
+                      <a:r>
+                        <a:rPr lang="en-US" sz="1300" dirty="0">
+                          <a:solidFill>
+                            <a:srgbClr val="212121"/>
+                          </a:solidFill>
+                          <a:latin typeface="Calibri" pitchFamily="34" charset="0"/>
+                          <a:ea typeface="Calibri" pitchFamily="34" charset="-122"/>
+                          <a:cs typeface="Calibri" pitchFamily="34" charset="-120"/>
+                        </a:rPr>
+                        <a:t>4</a:t>
+                      </a:r>
+                      <a:endParaRPr lang="en-US" sz="1300" dirty="0">
+                        <a:latin typeface="Calibri" charset="0"/>
+                        <a:ea typeface="Calibri" charset="0"/>
+                        <a:cs typeface="Calibri" charset="0"/>
+                      </a:endParaRPr>
+                    </a:p>
+                  </a:txBody>
+                  <a:tcPr marL="54864" marR="54864" marT="54864" marB="54864" anchor="ctr">
+                    <a:lnL w="6350" cap="flat" cmpd="sng" algn="ctr">
+                      <a:solidFill>
+                        <a:srgbClr val="D1D5DB"/>
+                      </a:solidFill>
+                      <a:prstDash val="solid"/>
+                      <a:round/>
+                      <a:headEnd type="none" w="med" len="med"/>
+                      <a:tailEnd type="none" w="med" len="med"/>
+                    </a:lnL>
+                    <a:lnR w="6350" cap="flat" cmpd="sng" algn="ctr">
+                      <a:solidFill>
+                        <a:srgbClr val="D1D5DB"/>
+                      </a:solidFill>
+                      <a:prstDash val="solid"/>
+                      <a:round/>
+                      <a:headEnd type="none" w="med" len="med"/>
+                      <a:tailEnd type="none" w="med" len="med"/>
+                    </a:lnR>
+                    <a:lnT w="6350" cap="flat" cmpd="sng" algn="ctr">
+                      <a:solidFill>
+                        <a:srgbClr val="D1D5DB"/>
+                      </a:solidFill>
+                      <a:prstDash val="solid"/>
+                      <a:round/>
+                      <a:headEnd type="none" w="med" len="med"/>
+                      <a:tailEnd type="none" w="med" len="med"/>
+                    </a:lnT>
+                    <a:lnB w="6350" cap="flat" cmpd="sng" algn="ctr">
+                      <a:solidFill>
+                        <a:srgbClr val="D1D5DB"/>
+                      </a:solidFill>
+                      <a:prstDash val="solid"/>
+                      <a:round/>
+                      <a:headEnd type="none" w="med" len="med"/>
+                      <a:tailEnd type="none" w="med" len="med"/>
+                    </a:lnB>
+                    <a:solidFill>
+                      <a:srgbClr val="F3F4F6"/>
+                    </a:solidFill>
+                  </a:tcPr>
+                </a:tc>
+                <a:tc>
+                  <a:txBody>
+                    <a:bodyPr/>
+                    <a:lstStyle/>
+                    <a:p>
+                      <a:pPr indent="0" marL="0">
+                        <a:buNone/>
+                      </a:pPr>
+                      <a:r>
+                        <a:rPr lang="en-US" sz="1300" dirty="0">
+                          <a:solidFill>
+                            <a:srgbClr val="212121"/>
+                          </a:solidFill>
+                          <a:latin typeface="Calibri" pitchFamily="34" charset="0"/>
+                          <a:ea typeface="Calibri" pitchFamily="34" charset="-122"/>
+                          <a:cs typeface="Calibri" pitchFamily="34" charset="-120"/>
+                        </a:rPr>
+                        <a:t>Multi-agent patterns + evaluation as a first-class activity</a:t>
+                      </a:r>
+                      <a:endParaRPr lang="en-US" sz="1300" dirty="0">
+                        <a:latin typeface="Calibri" charset="0"/>
+                        <a:ea typeface="Calibri" charset="0"/>
+                        <a:cs typeface="Calibri" charset="0"/>
+                      </a:endParaRPr>
+                    </a:p>
+                  </a:txBody>
+                  <a:tcPr marL="54864" marR="54864" marT="54864" marB="54864" anchor="ctr">
+                    <a:lnL w="6350" cap="flat" cmpd="sng" algn="ctr">
+                      <a:solidFill>
+                        <a:srgbClr val="D1D5DB"/>
+                      </a:solidFill>
+                      <a:prstDash val="solid"/>
+                      <a:round/>
+                      <a:headEnd type="none" w="med" len="med"/>
+                      <a:tailEnd type="none" w="med" len="med"/>
+                    </a:lnL>
+                    <a:lnR w="6350" cap="flat" cmpd="sng" algn="ctr">
+                      <a:solidFill>
+                        <a:srgbClr val="D1D5DB"/>
+                      </a:solidFill>
+                      <a:prstDash val="solid"/>
+                      <a:round/>
+                      <a:headEnd type="none" w="med" len="med"/>
+                      <a:tailEnd type="none" w="med" len="med"/>
+                    </a:lnR>
+                    <a:lnT w="6350" cap="flat" cmpd="sng" algn="ctr">
+                      <a:solidFill>
+                        <a:srgbClr val="D1D5DB"/>
+                      </a:solidFill>
+                      <a:prstDash val="solid"/>
+                      <a:round/>
+                      <a:headEnd type="none" w="med" len="med"/>
+                      <a:tailEnd type="none" w="med" len="med"/>
+                    </a:lnT>
+                    <a:lnB w="6350" cap="flat" cmpd="sng" algn="ctr">
+                      <a:solidFill>
+                        <a:srgbClr val="D1D5DB"/>
+                      </a:solidFill>
+                      <a:prstDash val="solid"/>
+                      <a:round/>
+                      <a:headEnd type="none" w="med" len="med"/>
+                      <a:tailEnd type="none" w="med" len="med"/>
+                    </a:lnB>
+                    <a:solidFill>
+                      <a:srgbClr val="F3F4F6"/>
+                    </a:solidFill>
+                  </a:tcPr>
+                </a:tc>
+              </a:tr>
+              <a:tr h="457200">
+                <a:tc>
+                  <a:txBody>
+                    <a:bodyPr/>
+                    <a:lstStyle/>
+                    <a:p>
+                      <a:pPr indent="0" marL="0">
+                        <a:buNone/>
+                      </a:pPr>
+                      <a:r>
+                        <a:rPr lang="en-US" sz="1300" dirty="0">
+                          <a:solidFill>
+                            <a:srgbClr val="212121"/>
+                          </a:solidFill>
+                          <a:latin typeface="Calibri" pitchFamily="34" charset="0"/>
+                          <a:ea typeface="Calibri" pitchFamily="34" charset="-122"/>
+                          <a:cs typeface="Calibri" pitchFamily="34" charset="-120"/>
+                        </a:rPr>
+                        <a:t>5</a:t>
+                      </a:r>
+                      <a:endParaRPr lang="en-US" sz="1300" dirty="0">
+                        <a:latin typeface="Calibri" charset="0"/>
+                        <a:ea typeface="Calibri" charset="0"/>
+                        <a:cs typeface="Calibri" charset="0"/>
+                      </a:endParaRPr>
+                    </a:p>
+                  </a:txBody>
+                  <a:tcPr marL="54864" marR="54864" marT="54864" marB="54864" anchor="ctr">
+                    <a:lnL w="6350" cap="flat" cmpd="sng" algn="ctr">
+                      <a:solidFill>
+                        <a:srgbClr val="D1D5DB"/>
+                      </a:solidFill>
+                      <a:prstDash val="solid"/>
+                      <a:round/>
+                      <a:headEnd type="none" w="med" len="med"/>
+                      <a:tailEnd type="none" w="med" len="med"/>
+                    </a:lnL>
+                    <a:lnR w="6350" cap="flat" cmpd="sng" algn="ctr">
+                      <a:solidFill>
+                        <a:srgbClr val="D1D5DB"/>
+                      </a:solidFill>
+                      <a:prstDash val="solid"/>
+                      <a:round/>
+                      <a:headEnd type="none" w="med" len="med"/>
+                      <a:tailEnd type="none" w="med" len="med"/>
+                    </a:lnR>
+                    <a:lnT w="6350" cap="flat" cmpd="sng" algn="ctr">
+                      <a:solidFill>
+                        <a:srgbClr val="D1D5DB"/>
+                      </a:solidFill>
+                      <a:prstDash val="solid"/>
+                      <a:round/>
+                      <a:headEnd type="none" w="med" len="med"/>
+                      <a:tailEnd type="none" w="med" len="med"/>
+                    </a:lnT>
+                    <a:lnB w="6350" cap="flat" cmpd="sng" algn="ctr">
+                      <a:solidFill>
+                        <a:srgbClr val="D1D5DB"/>
+                      </a:solidFill>
+                      <a:prstDash val="solid"/>
+                      <a:round/>
+                      <a:headEnd type="none" w="med" len="med"/>
+                      <a:tailEnd type="none" w="med" len="med"/>
+                    </a:lnB>
+                    <a:solidFill>
+                      <a:srgbClr val="FFFFFF"/>
+                    </a:solidFill>
+                  </a:tcPr>
+                </a:tc>
+                <a:tc>
+                  <a:txBody>
+                    <a:bodyPr/>
+                    <a:lstStyle/>
+                    <a:p>
+                      <a:pPr indent="0" marL="0">
+                        <a:buNone/>
+                      </a:pPr>
+                      <a:r>
+                        <a:rPr lang="en-US" sz="1300" dirty="0">
+                          <a:solidFill>
+                            <a:srgbClr val="212121"/>
+                          </a:solidFill>
+                          <a:latin typeface="Calibri" pitchFamily="34" charset="0"/>
+                          <a:ea typeface="Calibri" pitchFamily="34" charset="-122"/>
+                          <a:cs typeface="Calibri" pitchFamily="34" charset="-120"/>
+                        </a:rPr>
+                        <a:t>Production concerns; capstone project kickoff</a:t>
+                      </a:r>
+                      <a:endParaRPr lang="en-US" sz="1300" dirty="0">
+                        <a:latin typeface="Calibri" charset="0"/>
+                        <a:ea typeface="Calibri" charset="0"/>
+                        <a:cs typeface="Calibri" charset="0"/>
+                      </a:endParaRPr>
+                    </a:p>
+                  </a:txBody>
+                  <a:tcPr marL="54864" marR="54864" marT="54864" marB="54864" anchor="ctr">
+                    <a:lnL w="6350" cap="flat" cmpd="sng" algn="ctr">
+                      <a:solidFill>
+                        <a:srgbClr val="D1D5DB"/>
+                      </a:solidFill>
+                      <a:prstDash val="solid"/>
+                      <a:round/>
+                      <a:headEnd type="none" w="med" len="med"/>
+                      <a:tailEnd type="none" w="med" len="med"/>
+                    </a:lnL>
+                    <a:lnR w="6350" cap="flat" cmpd="sng" algn="ctr">
+                      <a:solidFill>
+                        <a:srgbClr val="D1D5DB"/>
+                      </a:solidFill>
+                      <a:prstDash val="solid"/>
+                      <a:round/>
+                      <a:headEnd type="none" w="med" len="med"/>
+                      <a:tailEnd type="none" w="med" len="med"/>
+                    </a:lnR>
+                    <a:lnT w="6350" cap="flat" cmpd="sng" algn="ctr">
+                      <a:solidFill>
+                        <a:srgbClr val="D1D5DB"/>
+                      </a:solidFill>
+                      <a:prstDash val="solid"/>
+                      <a:round/>
+                      <a:headEnd type="none" w="med" len="med"/>
+                      <a:tailEnd type="none" w="med" len="med"/>
+                    </a:lnT>
+                    <a:lnB w="6350" cap="flat" cmpd="sng" algn="ctr">
+                      <a:solidFill>
+                        <a:srgbClr val="D1D5DB"/>
+                      </a:solidFill>
+                      <a:prstDash val="solid"/>
+                      <a:round/>
+                      <a:headEnd type="none" w="med" len="med"/>
+                      <a:tailEnd type="none" w="med" len="med"/>
+                    </a:lnB>
+                    <a:solidFill>
+                      <a:srgbClr val="FFFFFF"/>
+                    </a:solidFill>
+                  </a:tcPr>
+                </a:tc>
+              </a:tr>
+            </a:tbl>
+          </a:graphicData>
+        </a:graphic>
+      </p:graphicFrame>
+    </p:spTree>
+  </p:cSld>
+  <p:clrMapOvr>
+    <a:masterClrMapping/>
+  </p:clrMapOvr>
+</p:sld>
+</file>
+
+<file path=ppt/slides/slide11.xml><?xml version="1.0" encoding="utf-8"?>
+<p:sld xmlns:a="http://schemas.openxmlformats.org/drawingml/2006/main" xmlns:r="http://schemas.openxmlformats.org/officeDocument/2006/relationships" xmlns:p="http://schemas.openxmlformats.org/presentationml/2006/main">
+  <p:cSld name="Slide 11">
+    <p:bg>
+      <p:bgPr>
+        <a:solidFill>
+          <a:srgbClr val="FFFFFF"/>
+        </a:solidFill>
+      </p:bgPr>
+    </p:bg>
+    <p:spTree>
+      <p:nvGrpSpPr>
+        <p:cNvPr id="1" name=""/>
+        <p:cNvGrpSpPr/>
+        <p:nvPr/>
+      </p:nvGrpSpPr>
+      <p:grpSpPr>
+        <a:xfrm>
+          <a:off x="0" y="0"/>
+          <a:ext cx="0" cy="0"/>
+          <a:chOff x="0" y="0"/>
+          <a:chExt cx="0" cy="0"/>
+        </a:xfrm>
+      </p:grpSpPr>
+      <p:sp>
+        <p:nvSpPr>
+          <p:cNvPr id="2" name="Shape 0"/>
+          <p:cNvSpPr/>
+          <p:nvPr/>
+        </p:nvSpPr>
+        <p:spPr>
+          <a:xfrm>
+            <a:off x="0" y="0"/>
+            <a:ext cx="54864" cy="5143500"/>
+          </a:xfrm>
+          <a:prstGeom prst="rect">
+            <a:avLst/>
+          </a:prstGeom>
+          <a:solidFill>
+            <a:srgbClr val="1E2761"/>
+          </a:solidFill>
+          <a:ln/>
+        </p:spPr>
+      </p:sp>
+      <p:sp>
+        <p:nvSpPr>
+          <p:cNvPr id="3" name="Text 1"/>
+          <p:cNvSpPr/>
+          <p:nvPr/>
+        </p:nvSpPr>
+        <p:spPr>
+          <a:xfrm>
+            <a:off x="5669280" y="274320"/>
+            <a:ext cx="3291840" cy="274320"/>
+          </a:xfrm>
+          <a:prstGeom prst="rect">
+            <a:avLst/>
+          </a:prstGeom>
+          <a:noFill/>
+          <a:ln/>
+        </p:spPr>
+        <p:txBody>
+          <a:bodyPr wrap="square" lIns="0" tIns="0" rIns="0" bIns="0" rtlCol="0" anchor="ctr"/>
+          <a:lstStyle/>
+          <a:p>
+            <a:pPr algn="r" indent="0" marL="0">
+              <a:buNone/>
+            </a:pPr>
+            <a:r>
+              <a:rPr lang="en-US" sz="1000" dirty="0">
+                <a:solidFill>
+                  <a:srgbClr val="6B7280"/>
+                </a:solidFill>
+                <a:latin typeface="Calibri" pitchFamily="34" charset="0"/>
+                <a:ea typeface="Calibri" pitchFamily="34" charset="-122"/>
+                <a:cs typeface="Calibri" pitchFamily="34" charset="-120"/>
+              </a:rPr>
+              <a:t>Day 1 · Module 1</a:t>
+            </a:r>
+            <a:endParaRPr lang="en-US" sz="1000" dirty="0"/>
+          </a:p>
+        </p:txBody>
+      </p:sp>
+      <p:sp>
+        <p:nvSpPr>
+          <p:cNvPr id="4" name="Text 2"/>
+          <p:cNvSpPr/>
+          <p:nvPr/>
+        </p:nvSpPr>
+        <p:spPr>
+          <a:xfrm>
+            <a:off x="365760" y="320040"/>
+            <a:ext cx="6217920" cy="640080"/>
+          </a:xfrm>
+          <a:prstGeom prst="rect">
+            <a:avLst/>
+          </a:prstGeom>
+          <a:noFill/>
+          <a:ln/>
+        </p:spPr>
+        <p:txBody>
+          <a:bodyPr wrap="square" lIns="0" tIns="0" rIns="0" bIns="0" rtlCol="0" anchor="ctr"/>
+          <a:lstStyle/>
+          <a:p>
+            <a:pPr indent="0" marL="0">
+              <a:buNone/>
+            </a:pPr>
+            <a:r>
+              <a:rPr lang="en-US" sz="2800" b="1" dirty="0">
+                <a:solidFill>
+                  <a:srgbClr val="1E2761"/>
+                </a:solidFill>
+                <a:latin typeface="Calibri" pitchFamily="34" charset="0"/>
+                <a:ea typeface="Calibri" pitchFamily="34" charset="-122"/>
+                <a:cs typeface="Calibri" pitchFamily="34" charset="-120"/>
+              </a:rPr>
+              <a:t>Takeaways</a:t>
+            </a:r>
+            <a:endParaRPr lang="en-US" sz="2800" dirty="0"/>
+          </a:p>
+        </p:txBody>
+      </p:sp>
+      <p:sp>
+        <p:nvSpPr>
+          <p:cNvPr id="5" name="Text 3"/>
+          <p:cNvSpPr/>
+          <p:nvPr/>
+        </p:nvSpPr>
+        <p:spPr>
+          <a:xfrm>
+            <a:off x="365760" y="1097280"/>
+            <a:ext cx="8412480" cy="3108960"/>
+          </a:xfrm>
+          <a:prstGeom prst="rect">
+            <a:avLst/>
+          </a:prstGeom>
+          <a:noFill/>
+          <a:ln/>
+        </p:spPr>
+        <p:txBody>
+          <a:bodyPr wrap="square" rtlCol="0" anchor="ctr"/>
+          <a:lstStyle/>
+          <a:p>
+            <a:pPr marL="342900" indent="-342900">
+              <a:spcAft>
+                <a:spcPts val="600"/>
+              </a:spcAft>
+              <a:buSzPct val="100000"/>
+              <a:buChar char="•"/>
+            </a:pPr>
+            <a:r>
+              <a:rPr lang="en-US" sz="1500" dirty="0">
+                <a:solidFill>
+                  <a:srgbClr val="212121"/>
+                </a:solidFill>
+                <a:latin typeface="Calibri" pitchFamily="34" charset="0"/>
+                <a:ea typeface="Calibri" pitchFamily="34" charset="-122"/>
+                <a:cs typeface="Calibri" pitchFamily="34" charset="-120"/>
+              </a:rPr>
+              <a:t>Three surfaces target different audiences: Copilot Studio, Foundry, MAF.</a:t>
+            </a:r>
+            <a:endParaRPr lang="en-US" sz="1500" dirty="0"/>
+          </a:p>
+          <a:p>
+            <a:pPr marL="342900" indent="-342900">
+              <a:spcAft>
+                <a:spcPts val="600"/>
+              </a:spcAft>
+              <a:buSzPct val="100000"/>
+              <a:buChar char="•"/>
+            </a:pPr>
+            <a:r>
+              <a:rPr lang="en-US" sz="1500" dirty="0">
+                <a:solidFill>
+                  <a:srgbClr val="212121"/>
+                </a:solidFill>
+                <a:latin typeface="Calibri" pitchFamily="34" charset="0"/>
+                <a:ea typeface="Calibri" pitchFamily="34" charset="-122"/>
+                <a:cs typeface="Calibri" pitchFamily="34" charset="-120"/>
+              </a:rPr>
+              <a:t>This workshop lives at Foundry + MAF.</a:t>
+            </a:r>
+            <a:endParaRPr lang="en-US" sz="1500" dirty="0"/>
+          </a:p>
+          <a:p>
+            <a:pPr marL="342900" indent="-342900">
+              <a:spcAft>
+                <a:spcPts val="600"/>
+              </a:spcAft>
+              <a:buSzPct val="100000"/>
+              <a:buChar char="•"/>
+            </a:pPr>
+            <a:r>
+              <a:rPr lang="en-US" sz="1500" dirty="0">
+                <a:solidFill>
+                  <a:srgbClr val="212121"/>
+                </a:solidFill>
+                <a:latin typeface="Calibri" pitchFamily="34" charset="0"/>
+                <a:ea typeface="Calibri" pitchFamily="34" charset="-122"/>
+                <a:cs typeface="Calibri" pitchFamily="34" charset="-120"/>
+              </a:rPr>
+              <a:t>MAF is Microsoft's forward direction for agent SDKs; SK and AutoGen are not.</a:t>
+            </a:r>
+            <a:endParaRPr lang="en-US" sz="1500" dirty="0"/>
+          </a:p>
+        </p:txBody>
+      </p:sp>
+      <p:sp>
+        <p:nvSpPr>
+          <p:cNvPr id="6" name="Shape 4"/>
+          <p:cNvSpPr/>
+          <p:nvPr/>
+        </p:nvSpPr>
+        <p:spPr>
+          <a:xfrm>
+            <a:off x="365760" y="4343400"/>
+            <a:ext cx="8412480" cy="457200"/>
+          </a:xfrm>
+          <a:prstGeom prst="rect">
+            <a:avLst/>
+          </a:prstGeom>
+          <a:solidFill>
+            <a:srgbClr val="CADCFC"/>
+          </a:solidFill>
+          <a:ln/>
+        </p:spPr>
+      </p:sp>
+      <p:sp>
+        <p:nvSpPr>
+          <p:cNvPr id="7" name="Text 5"/>
+          <p:cNvSpPr/>
+          <p:nvPr/>
+        </p:nvSpPr>
+        <p:spPr>
+          <a:xfrm>
+            <a:off x="502920" y="4370832"/>
+            <a:ext cx="8138160" cy="402336"/>
+          </a:xfrm>
+          <a:prstGeom prst="rect">
+            <a:avLst/>
+          </a:prstGeom>
+          <a:noFill/>
+          <a:ln/>
+        </p:spPr>
+        <p:txBody>
+          <a:bodyPr wrap="square" lIns="0" tIns="0" rIns="0" bIns="0" rtlCol="0" anchor="ctr"/>
+          <a:lstStyle/>
+          <a:p>
+            <a:pPr indent="0" marL="0">
+              <a:buNone/>
+            </a:pPr>
+            <a:r>
+              <a:rPr lang="en-US" sz="1600" b="1" dirty="0">
+                <a:solidFill>
+                  <a:srgbClr val="1E2761"/>
+                </a:solidFill>
+                <a:latin typeface="Calibri" pitchFamily="34" charset="0"/>
+                <a:ea typeface="Calibri" pitchFamily="34" charset="-122"/>
+                <a:cs typeface="Calibri" pitchFamily="34" charset="-120"/>
+              </a:rPr>
+              <a:t>Next: </a:t>
+            </a:r>
+            <a:pPr indent="0" marL="0">
+              <a:buNone/>
+            </a:pPr>
+            <a:r>
+              <a:rPr lang="en-US" sz="1600" dirty="0">
+                <a:solidFill>
+                  <a:srgbClr val="1E2761"/>
+                </a:solidFill>
+                <a:latin typeface="Calibri" pitchFamily="34" charset="0"/>
+                <a:ea typeface="Calibri" pitchFamily="34" charset="-122"/>
+                <a:cs typeface="Calibri" pitchFamily="34" charset="-120"/>
+              </a:rPr>
+              <a:t>A working tour of the Foundry portal — projects, models, deployments, Toolbox, Foundry IQ.</a:t>
+            </a:r>
+            <a:endParaRPr lang="en-US" sz="1600" dirty="0"/>
+          </a:p>
+        </p:txBody>
+      </p:sp>
+    </p:spTree>
+  </p:cSld>
+  <p:clrMapOvr>
+    <a:masterClrMapping/>
+  </p:clrMapOvr>
+</p:sld>
+</file>
+
 <file path=ppt/slides/slide2.xml><?xml version="1.0" encoding="utf-8"?>
 <p:sld xmlns:a="http://schemas.openxmlformats.org/drawingml/2006/main" xmlns:r="http://schemas.openxmlformats.org/officeDocument/2006/relationships" xmlns:p="http://schemas.openxmlformats.org/presentationml/2006/main">
   <p:cSld name="Slide 2">
@@ -3021,7 +4475,7 @@
                 <a:ea typeface="Calibri" pitchFamily="34" charset="-122"/>
                 <a:cs typeface="Calibri" pitchFamily="34" charset="-120"/>
               </a:rPr>
-              <a:t>A one-line decision framework</a:t>
+              <a:t>Same three ingredients across every surface</a:t>
             </a:r>
             <a:endParaRPr lang="en-US" sz="2800" dirty="0"/>
           </a:p>
@@ -3029,14 +4483,39 @@
       </p:sp>
       <p:sp>
         <p:nvSpPr>
-          <p:cNvPr id="5" name="Text 3"/>
-          <p:cNvSpPr/>
-          <p:nvPr/>
-        </p:nvSpPr>
-        <p:spPr>
-          <a:xfrm>
-            <a:off x="365760" y="1097280"/>
-            <a:ext cx="8412480" cy="3749040"/>
+          <p:cNvPr id="5" name="Shape 3"/>
+          <p:cNvSpPr/>
+          <p:nvPr/>
+        </p:nvSpPr>
+        <p:spPr>
+          <a:xfrm>
+            <a:off x="365760" y="1188720"/>
+            <a:ext cx="2651760" cy="1280160"/>
+          </a:xfrm>
+          <a:prstGeom prst="rect">
+            <a:avLst/>
+          </a:prstGeom>
+          <a:solidFill>
+            <a:srgbClr val="FFFFFF"/>
+          </a:solidFill>
+          <a:ln w="12700">
+            <a:solidFill>
+              <a:srgbClr val="1E2761"/>
+            </a:solidFill>
+            <a:prstDash val="solid"/>
+          </a:ln>
+        </p:spPr>
+      </p:sp>
+      <p:sp>
+        <p:nvSpPr>
+          <p:cNvPr id="6" name="Text 4"/>
+          <p:cNvSpPr/>
+          <p:nvPr/>
+        </p:nvSpPr>
+        <p:spPr>
+          <a:xfrm>
+            <a:off x="457200" y="1325880"/>
+            <a:ext cx="2468880" cy="457200"/>
           </a:xfrm>
           <a:prstGeom prst="rect">
             <a:avLst/>
@@ -3045,109 +4524,530 @@
           <a:ln/>
         </p:spPr>
         <p:txBody>
+          <a:bodyPr wrap="square" lIns="0" tIns="0" rIns="0" bIns="0" rtlCol="0" anchor="ctr"/>
+          <a:lstStyle/>
+          <a:p>
+            <a:pPr algn="ctr" indent="0" marL="0">
+              <a:buNone/>
+            </a:pPr>
+            <a:r>
+              <a:rPr lang="en-US" sz="1800" b="1" dirty="0">
+                <a:solidFill>
+                  <a:srgbClr val="1E2761"/>
+                </a:solidFill>
+                <a:latin typeface="Calibri" pitchFamily="34" charset="0"/>
+                <a:ea typeface="Calibri" pitchFamily="34" charset="-122"/>
+                <a:cs typeface="Calibri" pitchFamily="34" charset="-120"/>
+              </a:rPr>
+              <a:t>Copilot Studio</a:t>
+            </a:r>
+            <a:endParaRPr lang="en-US" sz="1800" dirty="0"/>
+          </a:p>
+        </p:txBody>
+      </p:sp>
+      <p:sp>
+        <p:nvSpPr>
+          <p:cNvPr id="7" name="Text 5"/>
+          <p:cNvSpPr/>
+          <p:nvPr/>
+        </p:nvSpPr>
+        <p:spPr>
+          <a:xfrm>
+            <a:off x="457200" y="1874520"/>
+            <a:ext cx="2468880" cy="365760"/>
+          </a:xfrm>
+          <a:prstGeom prst="rect">
+            <a:avLst/>
+          </a:prstGeom>
+          <a:noFill/>
+          <a:ln/>
+        </p:spPr>
+        <p:txBody>
+          <a:bodyPr wrap="square" lIns="0" tIns="0" rIns="0" bIns="0" rtlCol="0" anchor="ctr"/>
+          <a:lstStyle/>
+          <a:p>
+            <a:pPr algn="ctr" indent="0" marL="0">
+              <a:buNone/>
+            </a:pPr>
+            <a:r>
+              <a:rPr lang="en-US" sz="1300" dirty="0">
+                <a:solidFill>
+                  <a:srgbClr val="6B7280"/>
+                </a:solidFill>
+                <a:latin typeface="Calibri" pitchFamily="34" charset="0"/>
+                <a:ea typeface="Calibri" pitchFamily="34" charset="-122"/>
+                <a:cs typeface="Calibri" pitchFamily="34" charset="-120"/>
+              </a:rPr>
+              <a:t>SaaS · low-code</a:t>
+            </a:r>
+            <a:endParaRPr lang="en-US" sz="1300" dirty="0"/>
+          </a:p>
+        </p:txBody>
+      </p:sp>
+      <p:sp>
+        <p:nvSpPr>
+          <p:cNvPr id="8" name="Shape 6"/>
+          <p:cNvSpPr/>
+          <p:nvPr/>
+        </p:nvSpPr>
+        <p:spPr>
+          <a:xfrm>
+            <a:off x="3246120" y="1188720"/>
+            <a:ext cx="2651760" cy="1280160"/>
+          </a:xfrm>
+          <a:prstGeom prst="rect">
+            <a:avLst/>
+          </a:prstGeom>
+          <a:solidFill>
+            <a:srgbClr val="FFFFFF"/>
+          </a:solidFill>
+          <a:ln w="12700">
+            <a:solidFill>
+              <a:srgbClr val="1E2761"/>
+            </a:solidFill>
+            <a:prstDash val="solid"/>
+          </a:ln>
+        </p:spPr>
+      </p:sp>
+      <p:sp>
+        <p:nvSpPr>
+          <p:cNvPr id="9" name="Text 7"/>
+          <p:cNvSpPr/>
+          <p:nvPr/>
+        </p:nvSpPr>
+        <p:spPr>
+          <a:xfrm>
+            <a:off x="3337560" y="1325880"/>
+            <a:ext cx="2468880" cy="457200"/>
+          </a:xfrm>
+          <a:prstGeom prst="rect">
+            <a:avLst/>
+          </a:prstGeom>
+          <a:noFill/>
+          <a:ln/>
+        </p:spPr>
+        <p:txBody>
+          <a:bodyPr wrap="square" lIns="0" tIns="0" rIns="0" bIns="0" rtlCol="0" anchor="ctr"/>
+          <a:lstStyle/>
+          <a:p>
+            <a:pPr algn="ctr" indent="0" marL="0">
+              <a:buNone/>
+            </a:pPr>
+            <a:r>
+              <a:rPr lang="en-US" sz="1800" b="1" dirty="0">
+                <a:solidFill>
+                  <a:srgbClr val="1E2761"/>
+                </a:solidFill>
+                <a:latin typeface="Calibri" pitchFamily="34" charset="0"/>
+                <a:ea typeface="Calibri" pitchFamily="34" charset="-122"/>
+                <a:cs typeface="Calibri" pitchFamily="34" charset="-120"/>
+              </a:rPr>
+              <a:t>Foundry Agent Service</a:t>
+            </a:r>
+            <a:endParaRPr lang="en-US" sz="1800" dirty="0"/>
+          </a:p>
+        </p:txBody>
+      </p:sp>
+      <p:sp>
+        <p:nvSpPr>
+          <p:cNvPr id="10" name="Text 8"/>
+          <p:cNvSpPr/>
+          <p:nvPr/>
+        </p:nvSpPr>
+        <p:spPr>
+          <a:xfrm>
+            <a:off x="3337560" y="1874520"/>
+            <a:ext cx="2468880" cy="365760"/>
+          </a:xfrm>
+          <a:prstGeom prst="rect">
+            <a:avLst/>
+          </a:prstGeom>
+          <a:noFill/>
+          <a:ln/>
+        </p:spPr>
+        <p:txBody>
+          <a:bodyPr wrap="square" lIns="0" tIns="0" rIns="0" bIns="0" rtlCol="0" anchor="ctr"/>
+          <a:lstStyle/>
+          <a:p>
+            <a:pPr algn="ctr" indent="0" marL="0">
+              <a:buNone/>
+            </a:pPr>
+            <a:r>
+              <a:rPr lang="en-US" sz="1300" dirty="0">
+                <a:solidFill>
+                  <a:srgbClr val="6B7280"/>
+                </a:solidFill>
+                <a:latin typeface="Calibri" pitchFamily="34" charset="0"/>
+                <a:ea typeface="Calibri" pitchFamily="34" charset="-122"/>
+                <a:cs typeface="Calibri" pitchFamily="34" charset="-120"/>
+              </a:rPr>
+              <a:t>PaaS · managed runtime</a:t>
+            </a:r>
+            <a:endParaRPr lang="en-US" sz="1300" dirty="0"/>
+          </a:p>
+        </p:txBody>
+      </p:sp>
+      <p:sp>
+        <p:nvSpPr>
+          <p:cNvPr id="11" name="Shape 9"/>
+          <p:cNvSpPr/>
+          <p:nvPr/>
+        </p:nvSpPr>
+        <p:spPr>
+          <a:xfrm>
+            <a:off x="6126480" y="1188720"/>
+            <a:ext cx="2651760" cy="1280160"/>
+          </a:xfrm>
+          <a:prstGeom prst="rect">
+            <a:avLst/>
+          </a:prstGeom>
+          <a:solidFill>
+            <a:srgbClr val="FFFFFF"/>
+          </a:solidFill>
+          <a:ln w="12700">
+            <a:solidFill>
+              <a:srgbClr val="1E2761"/>
+            </a:solidFill>
+            <a:prstDash val="solid"/>
+          </a:ln>
+        </p:spPr>
+      </p:sp>
+      <p:sp>
+        <p:nvSpPr>
+          <p:cNvPr id="12" name="Text 10"/>
+          <p:cNvSpPr/>
+          <p:nvPr/>
+        </p:nvSpPr>
+        <p:spPr>
+          <a:xfrm>
+            <a:off x="6217920" y="1325880"/>
+            <a:ext cx="2468880" cy="457200"/>
+          </a:xfrm>
+          <a:prstGeom prst="rect">
+            <a:avLst/>
+          </a:prstGeom>
+          <a:noFill/>
+          <a:ln/>
+        </p:spPr>
+        <p:txBody>
+          <a:bodyPr wrap="square" lIns="0" tIns="0" rIns="0" bIns="0" rtlCol="0" anchor="ctr"/>
+          <a:lstStyle/>
+          <a:p>
+            <a:pPr algn="ctr" indent="0" marL="0">
+              <a:buNone/>
+            </a:pPr>
+            <a:r>
+              <a:rPr lang="en-US" sz="1800" b="1" dirty="0">
+                <a:solidFill>
+                  <a:srgbClr val="1E2761"/>
+                </a:solidFill>
+                <a:latin typeface="Calibri" pitchFamily="34" charset="0"/>
+                <a:ea typeface="Calibri" pitchFamily="34" charset="-122"/>
+                <a:cs typeface="Calibri" pitchFamily="34" charset="-120"/>
+              </a:rPr>
+              <a:t>MAF + containers</a:t>
+            </a:r>
+            <a:endParaRPr lang="en-US" sz="1800" dirty="0"/>
+          </a:p>
+        </p:txBody>
+      </p:sp>
+      <p:sp>
+        <p:nvSpPr>
+          <p:cNvPr id="13" name="Text 11"/>
+          <p:cNvSpPr/>
+          <p:nvPr/>
+        </p:nvSpPr>
+        <p:spPr>
+          <a:xfrm>
+            <a:off x="6217920" y="1874520"/>
+            <a:ext cx="2468880" cy="365760"/>
+          </a:xfrm>
+          <a:prstGeom prst="rect">
+            <a:avLst/>
+          </a:prstGeom>
+          <a:noFill/>
+          <a:ln/>
+        </p:spPr>
+        <p:txBody>
+          <a:bodyPr wrap="square" lIns="0" tIns="0" rIns="0" bIns="0" rtlCol="0" anchor="ctr"/>
+          <a:lstStyle/>
+          <a:p>
+            <a:pPr algn="ctr" indent="0" marL="0">
+              <a:buNone/>
+            </a:pPr>
+            <a:r>
+              <a:rPr lang="en-US" sz="1300" dirty="0">
+                <a:solidFill>
+                  <a:srgbClr val="6B7280"/>
+                </a:solidFill>
+                <a:latin typeface="Calibri" pitchFamily="34" charset="0"/>
+                <a:ea typeface="Calibri" pitchFamily="34" charset="-122"/>
+                <a:cs typeface="Calibri" pitchFamily="34" charset="-120"/>
+              </a:rPr>
+              <a:t>IaaS · you own everything</a:t>
+            </a:r>
+            <a:endParaRPr lang="en-US" sz="1300" dirty="0"/>
+          </a:p>
+        </p:txBody>
+      </p:sp>
+      <p:sp>
+        <p:nvSpPr>
+          <p:cNvPr id="14" name="Text 12"/>
+          <p:cNvSpPr/>
+          <p:nvPr/>
+        </p:nvSpPr>
+        <p:spPr>
+          <a:xfrm>
+            <a:off x="365760" y="2788920"/>
+            <a:ext cx="8412480" cy="320040"/>
+          </a:xfrm>
+          <a:prstGeom prst="rect">
+            <a:avLst/>
+          </a:prstGeom>
+          <a:noFill/>
+          <a:ln/>
+        </p:spPr>
+        <p:txBody>
+          <a:bodyPr wrap="square" lIns="0" tIns="0" rIns="0" bIns="0" rtlCol="0" anchor="ctr"/>
+          <a:lstStyle/>
+          <a:p>
+            <a:pPr algn="ctr" indent="0" marL="0">
+              <a:buNone/>
+            </a:pPr>
+            <a:r>
+              <a:rPr lang="en-US" sz="1400" i="1" dirty="0">
+                <a:solidFill>
+                  <a:srgbClr val="6B7280"/>
+                </a:solidFill>
+                <a:latin typeface="Calibri" pitchFamily="34" charset="0"/>
+                <a:ea typeface="Calibri" pitchFamily="34" charset="-122"/>
+                <a:cs typeface="Calibri" pitchFamily="34" charset="-120"/>
+              </a:rPr>
+              <a:t>All three need:</a:t>
+            </a:r>
+            <a:endParaRPr lang="en-US" sz="1400" dirty="0"/>
+          </a:p>
+        </p:txBody>
+      </p:sp>
+      <p:sp>
+        <p:nvSpPr>
+          <p:cNvPr id="15" name="Shape 13"/>
+          <p:cNvSpPr/>
+          <p:nvPr/>
+        </p:nvSpPr>
+        <p:spPr>
+          <a:xfrm>
+            <a:off x="685800" y="3200400"/>
+            <a:ext cx="2377440" cy="731520"/>
+          </a:xfrm>
+          <a:prstGeom prst="roundRect">
+            <a:avLst>
+              <a:gd name="adj" fmla="val 18750"/>
+            </a:avLst>
+          </a:prstGeom>
+          <a:solidFill>
+            <a:srgbClr val="1E2761"/>
+          </a:solidFill>
+          <a:ln/>
+        </p:spPr>
+      </p:sp>
+      <p:sp>
+        <p:nvSpPr>
+          <p:cNvPr id="16" name="Text 14"/>
+          <p:cNvSpPr/>
+          <p:nvPr/>
+        </p:nvSpPr>
+        <p:spPr>
+          <a:xfrm>
+            <a:off x="685800" y="3200400"/>
+            <a:ext cx="2377440" cy="731520"/>
+          </a:xfrm>
+          <a:prstGeom prst="rect">
+            <a:avLst/>
+          </a:prstGeom>
+          <a:noFill/>
+          <a:ln/>
+        </p:spPr>
+        <p:txBody>
+          <a:bodyPr wrap="square" lIns="0" tIns="0" rIns="0" bIns="0" rtlCol="0" anchor="ctr"/>
+          <a:lstStyle/>
+          <a:p>
+            <a:pPr algn="ctr" indent="0" marL="0">
+              <a:buNone/>
+            </a:pPr>
+            <a:r>
+              <a:rPr lang="en-US" sz="2200" b="1" dirty="0">
+                <a:solidFill>
+                  <a:srgbClr val="FFFFFF"/>
+                </a:solidFill>
+                <a:latin typeface="Calibri" pitchFamily="34" charset="0"/>
+                <a:ea typeface="Calibri" pitchFamily="34" charset="-122"/>
+                <a:cs typeface="Calibri" pitchFamily="34" charset="-120"/>
+              </a:rPr>
+              <a:t>Model</a:t>
+            </a:r>
+            <a:endParaRPr lang="en-US" sz="2200" dirty="0"/>
+          </a:p>
+        </p:txBody>
+      </p:sp>
+      <p:sp>
+        <p:nvSpPr>
+          <p:cNvPr id="17" name="Shape 15"/>
+          <p:cNvSpPr/>
+          <p:nvPr/>
+        </p:nvSpPr>
+        <p:spPr>
+          <a:xfrm>
+            <a:off x="3383280" y="3200400"/>
+            <a:ext cx="2377440" cy="731520"/>
+          </a:xfrm>
+          <a:prstGeom prst="roundRect">
+            <a:avLst>
+              <a:gd name="adj" fmla="val 18750"/>
+            </a:avLst>
+          </a:prstGeom>
+          <a:solidFill>
+            <a:srgbClr val="1E2761"/>
+          </a:solidFill>
+          <a:ln/>
+        </p:spPr>
+      </p:sp>
+      <p:sp>
+        <p:nvSpPr>
+          <p:cNvPr id="18" name="Text 16"/>
+          <p:cNvSpPr/>
+          <p:nvPr/>
+        </p:nvSpPr>
+        <p:spPr>
+          <a:xfrm>
+            <a:off x="3383280" y="3200400"/>
+            <a:ext cx="2377440" cy="731520"/>
+          </a:xfrm>
+          <a:prstGeom prst="rect">
+            <a:avLst/>
+          </a:prstGeom>
+          <a:noFill/>
+          <a:ln/>
+        </p:spPr>
+        <p:txBody>
+          <a:bodyPr wrap="square" lIns="0" tIns="0" rIns="0" bIns="0" rtlCol="0" anchor="ctr"/>
+          <a:lstStyle/>
+          <a:p>
+            <a:pPr algn="ctr" indent="0" marL="0">
+              <a:buNone/>
+            </a:pPr>
+            <a:r>
+              <a:rPr lang="en-US" sz="2200" b="1" dirty="0">
+                <a:solidFill>
+                  <a:srgbClr val="FFFFFF"/>
+                </a:solidFill>
+                <a:latin typeface="Calibri" pitchFamily="34" charset="0"/>
+                <a:ea typeface="Calibri" pitchFamily="34" charset="-122"/>
+                <a:cs typeface="Calibri" pitchFamily="34" charset="-120"/>
+              </a:rPr>
+              <a:t>Instructions</a:t>
+            </a:r>
+            <a:endParaRPr lang="en-US" sz="2200" dirty="0"/>
+          </a:p>
+        </p:txBody>
+      </p:sp>
+      <p:sp>
+        <p:nvSpPr>
+          <p:cNvPr id="19" name="Shape 17"/>
+          <p:cNvSpPr/>
+          <p:nvPr/>
+        </p:nvSpPr>
+        <p:spPr>
+          <a:xfrm>
+            <a:off x="6080760" y="3200400"/>
+            <a:ext cx="2377440" cy="731520"/>
+          </a:xfrm>
+          <a:prstGeom prst="roundRect">
+            <a:avLst>
+              <a:gd name="adj" fmla="val 18750"/>
+            </a:avLst>
+          </a:prstGeom>
+          <a:solidFill>
+            <a:srgbClr val="1E2761"/>
+          </a:solidFill>
+          <a:ln/>
+        </p:spPr>
+      </p:sp>
+      <p:sp>
+        <p:nvSpPr>
+          <p:cNvPr id="20" name="Text 18"/>
+          <p:cNvSpPr/>
+          <p:nvPr/>
+        </p:nvSpPr>
+        <p:spPr>
+          <a:xfrm>
+            <a:off x="6080760" y="3200400"/>
+            <a:ext cx="2377440" cy="731520"/>
+          </a:xfrm>
+          <a:prstGeom prst="rect">
+            <a:avLst/>
+          </a:prstGeom>
+          <a:noFill/>
+          <a:ln/>
+        </p:spPr>
+        <p:txBody>
+          <a:bodyPr wrap="square" lIns="0" tIns="0" rIns="0" bIns="0" rtlCol="0" anchor="ctr"/>
+          <a:lstStyle/>
+          <a:p>
+            <a:pPr algn="ctr" indent="0" marL="0">
+              <a:buNone/>
+            </a:pPr>
+            <a:r>
+              <a:rPr lang="en-US" sz="2200" b="1" dirty="0">
+                <a:solidFill>
+                  <a:srgbClr val="FFFFFF"/>
+                </a:solidFill>
+                <a:latin typeface="Calibri" pitchFamily="34" charset="0"/>
+                <a:ea typeface="Calibri" pitchFamily="34" charset="-122"/>
+                <a:cs typeface="Calibri" pitchFamily="34" charset="-120"/>
+              </a:rPr>
+              <a:t>Tools</a:t>
+            </a:r>
+            <a:endParaRPr lang="en-US" sz="2200" dirty="0"/>
+          </a:p>
+        </p:txBody>
+      </p:sp>
+      <p:sp>
+        <p:nvSpPr>
+          <p:cNvPr id="21" name="Text 19"/>
+          <p:cNvSpPr/>
+          <p:nvPr/>
+        </p:nvSpPr>
+        <p:spPr>
+          <a:xfrm>
+            <a:off x="365760" y="4297680"/>
+            <a:ext cx="8412480" cy="457200"/>
+          </a:xfrm>
+          <a:prstGeom prst="rect">
+            <a:avLst/>
+          </a:prstGeom>
+          <a:noFill/>
+          <a:ln/>
+        </p:spPr>
+        <p:txBody>
           <a:bodyPr wrap="square" rtlCol="0" anchor="ctr"/>
           <a:lstStyle/>
           <a:p>
-            <a:pPr marL="342900" indent="-342900">
-              <a:spcAft>
-                <a:spcPts val="600"/>
-              </a:spcAft>
-              <a:buSzPct val="100000"/>
-              <a:buChar char="•"/>
-            </a:pPr>
-            <a:r>
-              <a:rPr lang="en-US" sz="1500" dirty="0">
-                <a:solidFill>
-                  <a:srgbClr val="212121"/>
-                </a:solidFill>
-                <a:latin typeface="Calibri" pitchFamily="34" charset="0"/>
-                <a:ea typeface="Calibri" pitchFamily="34" charset="-122"/>
-                <a:cs typeface="Calibri" pitchFamily="34" charset="-120"/>
-              </a:rPr>
-              <a:t>Copilot Studio — when the maker is the audience and the destination is M365 / Teams. Not covered further.</a:t>
-            </a:r>
-            <a:endParaRPr lang="en-US" sz="1500" dirty="0"/>
-          </a:p>
-          <a:p>
-            <a:pPr marL="342900" indent="-342900">
-              <a:spcAft>
-                <a:spcPts val="600"/>
-              </a:spcAft>
-              <a:buSzPct val="100000"/>
-              <a:buChar char="•"/>
-            </a:pPr>
-            <a:r>
-              <a:rPr lang="en-US" sz="1500" dirty="0">
-                <a:solidFill>
-                  <a:srgbClr val="212121"/>
-                </a:solidFill>
-                <a:latin typeface="Calibri" pitchFamily="34" charset="0"/>
-                <a:ea typeface="Calibri" pitchFamily="34" charset="-122"/>
-                <a:cs typeface="Calibri" pitchFamily="34" charset="-120"/>
-              </a:rPr>
-              <a:t>Foundry alone — when you want to build, deploy, and share an agent from a portal with minimal code.</a:t>
-            </a:r>
-            <a:endParaRPr lang="en-US" sz="1500" dirty="0"/>
-          </a:p>
-          <a:p>
-            <a:pPr marL="342900" indent="-342900">
-              <a:spcAft>
-                <a:spcPts val="600"/>
-              </a:spcAft>
-              <a:buSzPct val="100000"/>
-              <a:buChar char="•"/>
-            </a:pPr>
-            <a:r>
-              <a:rPr lang="en-US" sz="1500" dirty="0">
-                <a:solidFill>
-                  <a:srgbClr val="212121"/>
-                </a:solidFill>
-                <a:latin typeface="Calibri" pitchFamily="34" charset="0"/>
-                <a:ea typeface="Calibri" pitchFamily="34" charset="-122"/>
-                <a:cs typeface="Calibri" pitchFamily="34" charset="-120"/>
-              </a:rPr>
-              <a:t>Foundry + MAF — when you're writing production code and want to control agent construction, orchestration, tools, and evaluation.</a:t>
-            </a:r>
-            <a:endParaRPr lang="en-US" sz="1500" dirty="0"/>
-          </a:p>
-        </p:txBody>
-      </p:sp>
-      <p:sp>
-        <p:nvSpPr>
-          <p:cNvPr id="6" name="Text 4"/>
-          <p:cNvSpPr/>
-          <p:nvPr/>
-        </p:nvSpPr>
-        <p:spPr>
-          <a:xfrm>
-            <a:off x="365760" y="4114800"/>
-            <a:ext cx="8412480" cy="365760"/>
-          </a:xfrm>
-          <a:prstGeom prst="rect">
-            <a:avLst/>
-          </a:prstGeom>
-          <a:noFill/>
-          <a:ln/>
-        </p:spPr>
-        <p:txBody>
-          <a:bodyPr wrap="square" rtlCol="0" anchor="ctr"/>
-          <a:lstStyle/>
-          <a:p>
-            <a:pPr indent="0" marL="0">
+            <a:pPr algn="ctr" indent="0" marL="0">
               <a:buNone/>
             </a:pPr>
             <a:r>
-              <a:rPr lang="en-US" sz="1200" i="1" dirty="0">
-                <a:solidFill>
-                  <a:srgbClr val="6B7280"/>
-                </a:solidFill>
-                <a:latin typeface="Calibri" pitchFamily="34" charset="0"/>
-                <a:ea typeface="Calibri" pitchFamily="34" charset="-122"/>
-                <a:cs typeface="Calibri" pitchFamily="34" charset="-120"/>
-              </a:rPr>
-              <a:t>From Module 2 forward we assume Foundry + MAF.</a:t>
-            </a:r>
-            <a:endParaRPr lang="en-US" sz="1200" dirty="0"/>
+              <a:rPr lang="en-US" sz="1400" i="1" dirty="0">
+                <a:solidFill>
+                  <a:srgbClr val="1E2761"/>
+                </a:solidFill>
+                <a:latin typeface="Calibri" pitchFamily="34" charset="0"/>
+                <a:ea typeface="Calibri" pitchFamily="34" charset="-122"/>
+                <a:cs typeface="Calibri" pitchFamily="34" charset="-120"/>
+              </a:rPr>
+              <a:t>Same ingredients everywhere. What changes is how much code you write and who owns the runtime.</a:t>
+            </a:r>
+            <a:endParaRPr lang="en-US" sz="1400" dirty="0"/>
           </a:p>
         </p:txBody>
       </p:sp>
@@ -3275,7 +5175,7 @@
                 <a:ea typeface="Calibri" pitchFamily="34" charset="-122"/>
                 <a:cs typeface="Calibri" pitchFamily="34" charset="-120"/>
               </a:rPr>
-              <a:t>What Foundry gives you</a:t>
+              <a:t>A decision framework, visualized</a:t>
             </a:r>
             <a:endParaRPr lang="en-US" sz="2800" dirty="0"/>
           </a:p>
@@ -3289,8 +5189,8 @@
         </p:nvSpPr>
         <p:spPr>
           <a:xfrm>
-            <a:off x="365760" y="1097280"/>
-            <a:ext cx="8412480" cy="3749040"/>
+            <a:off x="365760" y="1143000"/>
+            <a:ext cx="4023360" cy="320040"/>
           </a:xfrm>
           <a:prstGeom prst="rect">
             <a:avLst/>
@@ -3299,18 +5199,401 @@
           <a:ln/>
         </p:spPr>
         <p:txBody>
-          <a:bodyPr wrap="square" rtlCol="0" anchor="ctr"/>
-          <a:lstStyle/>
-          <a:p>
-            <a:pPr marL="342900" indent="-342900">
-              <a:spcAft>
-                <a:spcPts val="600"/>
-              </a:spcAft>
-              <a:buSzPct val="100000"/>
-              <a:buChar char="•"/>
-            </a:pPr>
-            <a:r>
-              <a:rPr lang="en-US" sz="1500" dirty="0">
+          <a:bodyPr wrap="square" lIns="0" tIns="0" rIns="0" bIns="0" rtlCol="0" anchor="ctr"/>
+          <a:lstStyle/>
+          <a:p>
+            <a:pPr algn="l" indent="0" marL="0">
+              <a:buNone/>
+            </a:pPr>
+            <a:r>
+              <a:rPr lang="en-US" sz="1300" b="1" dirty="0">
+                <a:solidFill>
+                  <a:srgbClr val="1E2761"/>
+                </a:solidFill>
+                <a:latin typeface="Calibri" pitchFamily="34" charset="0"/>
+                <a:ea typeface="Calibri" pitchFamily="34" charset="-122"/>
+                <a:cs typeface="Calibri" pitchFamily="34" charset="-120"/>
+              </a:rPr>
+              <a:t>More control, more code</a:t>
+            </a:r>
+            <a:endParaRPr lang="en-US" sz="1300" dirty="0"/>
+          </a:p>
+        </p:txBody>
+      </p:sp>
+      <p:sp>
+        <p:nvSpPr>
+          <p:cNvPr id="6" name="Text 4"/>
+          <p:cNvSpPr/>
+          <p:nvPr/>
+        </p:nvSpPr>
+        <p:spPr>
+          <a:xfrm>
+            <a:off x="4754880" y="1143000"/>
+            <a:ext cx="4023360" cy="320040"/>
+          </a:xfrm>
+          <a:prstGeom prst="rect">
+            <a:avLst/>
+          </a:prstGeom>
+          <a:noFill/>
+          <a:ln/>
+        </p:spPr>
+        <p:txBody>
+          <a:bodyPr wrap="square" lIns="0" tIns="0" rIns="0" bIns="0" rtlCol="0" anchor="ctr"/>
+          <a:lstStyle/>
+          <a:p>
+            <a:pPr algn="r" indent="0" marL="0">
+              <a:buNone/>
+            </a:pPr>
+            <a:r>
+              <a:rPr lang="en-US" sz="1300" b="1" dirty="0">
+                <a:solidFill>
+                  <a:srgbClr val="1E2761"/>
+                </a:solidFill>
+                <a:latin typeface="Calibri" pitchFamily="34" charset="0"/>
+                <a:ea typeface="Calibri" pitchFamily="34" charset="-122"/>
+                <a:cs typeface="Calibri" pitchFamily="34" charset="-120"/>
+              </a:rPr>
+              <a:t>Faster to build, less customization</a:t>
+            </a:r>
+            <a:endParaRPr lang="en-US" sz="1300" dirty="0"/>
+          </a:p>
+        </p:txBody>
+      </p:sp>
+      <p:sp>
+        <p:nvSpPr>
+          <p:cNvPr id="7" name="Shape 5"/>
+          <p:cNvSpPr/>
+          <p:nvPr/>
+        </p:nvSpPr>
+        <p:spPr>
+          <a:xfrm>
+            <a:off x="548640" y="1645920"/>
+            <a:ext cx="2682240" cy="640080"/>
+          </a:xfrm>
+          <a:prstGeom prst="rect">
+            <a:avLst/>
+          </a:prstGeom>
+          <a:solidFill>
+            <a:srgbClr val="0F1A44"/>
+          </a:solidFill>
+          <a:ln w="12700">
+            <a:solidFill>
+              <a:srgbClr val="FFFFFF"/>
+            </a:solidFill>
+            <a:prstDash val="solid"/>
+          </a:ln>
+        </p:spPr>
+      </p:sp>
+      <p:sp>
+        <p:nvSpPr>
+          <p:cNvPr id="8" name="Text 6"/>
+          <p:cNvSpPr/>
+          <p:nvPr/>
+        </p:nvSpPr>
+        <p:spPr>
+          <a:xfrm>
+            <a:off x="548640" y="1645920"/>
+            <a:ext cx="2682240" cy="640080"/>
+          </a:xfrm>
+          <a:prstGeom prst="rect">
+            <a:avLst/>
+          </a:prstGeom>
+          <a:noFill/>
+          <a:ln/>
+        </p:spPr>
+        <p:txBody>
+          <a:bodyPr wrap="square" lIns="0" tIns="0" rIns="0" bIns="0" rtlCol="0" anchor="ctr"/>
+          <a:lstStyle/>
+          <a:p>
+            <a:pPr algn="ctr" indent="0" marL="0">
+              <a:buNone/>
+            </a:pPr>
+            <a:r>
+              <a:rPr lang="en-US" sz="2200" b="1" dirty="0">
+                <a:solidFill>
+                  <a:srgbClr val="FFFFFF"/>
+                </a:solidFill>
+                <a:latin typeface="Calibri" pitchFamily="34" charset="0"/>
+                <a:ea typeface="Calibri" pitchFamily="34" charset="-122"/>
+                <a:cs typeface="Calibri" pitchFamily="34" charset="-120"/>
+              </a:rPr>
+              <a:t>IaaS</a:t>
+            </a:r>
+            <a:endParaRPr lang="en-US" sz="2200" dirty="0"/>
+          </a:p>
+        </p:txBody>
+      </p:sp>
+      <p:sp>
+        <p:nvSpPr>
+          <p:cNvPr id="9" name="Shape 7"/>
+          <p:cNvSpPr/>
+          <p:nvPr/>
+        </p:nvSpPr>
+        <p:spPr>
+          <a:xfrm>
+            <a:off x="3230880" y="1645920"/>
+            <a:ext cx="2682240" cy="640080"/>
+          </a:xfrm>
+          <a:prstGeom prst="rect">
+            <a:avLst/>
+          </a:prstGeom>
+          <a:solidFill>
+            <a:srgbClr val="1E2761"/>
+          </a:solidFill>
+          <a:ln w="12700">
+            <a:solidFill>
+              <a:srgbClr val="FFFFFF"/>
+            </a:solidFill>
+            <a:prstDash val="solid"/>
+          </a:ln>
+        </p:spPr>
+      </p:sp>
+      <p:sp>
+        <p:nvSpPr>
+          <p:cNvPr id="10" name="Text 8"/>
+          <p:cNvSpPr/>
+          <p:nvPr/>
+        </p:nvSpPr>
+        <p:spPr>
+          <a:xfrm>
+            <a:off x="3230880" y="1645920"/>
+            <a:ext cx="2682240" cy="640080"/>
+          </a:xfrm>
+          <a:prstGeom prst="rect">
+            <a:avLst/>
+          </a:prstGeom>
+          <a:noFill/>
+          <a:ln/>
+        </p:spPr>
+        <p:txBody>
+          <a:bodyPr wrap="square" lIns="0" tIns="0" rIns="0" bIns="0" rtlCol="0" anchor="ctr"/>
+          <a:lstStyle/>
+          <a:p>
+            <a:pPr algn="ctr" indent="0" marL="0">
+              <a:buNone/>
+            </a:pPr>
+            <a:r>
+              <a:rPr lang="en-US" sz="2200" b="1" dirty="0">
+                <a:solidFill>
+                  <a:srgbClr val="FFFFFF"/>
+                </a:solidFill>
+                <a:latin typeface="Calibri" pitchFamily="34" charset="0"/>
+                <a:ea typeface="Calibri" pitchFamily="34" charset="-122"/>
+                <a:cs typeface="Calibri" pitchFamily="34" charset="-120"/>
+              </a:rPr>
+              <a:t>PaaS</a:t>
+            </a:r>
+            <a:endParaRPr lang="en-US" sz="2200" dirty="0"/>
+          </a:p>
+        </p:txBody>
+      </p:sp>
+      <p:sp>
+        <p:nvSpPr>
+          <p:cNvPr id="11" name="Shape 9"/>
+          <p:cNvSpPr/>
+          <p:nvPr/>
+        </p:nvSpPr>
+        <p:spPr>
+          <a:xfrm>
+            <a:off x="5913120" y="1645920"/>
+            <a:ext cx="2682240" cy="640080"/>
+          </a:xfrm>
+          <a:prstGeom prst="rect">
+            <a:avLst/>
+          </a:prstGeom>
+          <a:solidFill>
+            <a:srgbClr val="6B7BB0"/>
+          </a:solidFill>
+          <a:ln w="12700">
+            <a:solidFill>
+              <a:srgbClr val="FFFFFF"/>
+            </a:solidFill>
+            <a:prstDash val="solid"/>
+          </a:ln>
+        </p:spPr>
+      </p:sp>
+      <p:sp>
+        <p:nvSpPr>
+          <p:cNvPr id="12" name="Text 10"/>
+          <p:cNvSpPr/>
+          <p:nvPr/>
+        </p:nvSpPr>
+        <p:spPr>
+          <a:xfrm>
+            <a:off x="5913120" y="1645920"/>
+            <a:ext cx="2682240" cy="640080"/>
+          </a:xfrm>
+          <a:prstGeom prst="rect">
+            <a:avLst/>
+          </a:prstGeom>
+          <a:noFill/>
+          <a:ln/>
+        </p:spPr>
+        <p:txBody>
+          <a:bodyPr wrap="square" lIns="0" tIns="0" rIns="0" bIns="0" rtlCol="0" anchor="ctr"/>
+          <a:lstStyle/>
+          <a:p>
+            <a:pPr algn="ctr" indent="0" marL="0">
+              <a:buNone/>
+            </a:pPr>
+            <a:r>
+              <a:rPr lang="en-US" sz="2200" b="1" dirty="0">
+                <a:solidFill>
+                  <a:srgbClr val="FFFFFF"/>
+                </a:solidFill>
+                <a:latin typeface="Calibri" pitchFamily="34" charset="0"/>
+                <a:ea typeface="Calibri" pitchFamily="34" charset="-122"/>
+                <a:cs typeface="Calibri" pitchFamily="34" charset="-120"/>
+              </a:rPr>
+              <a:t>SaaS</a:t>
+            </a:r>
+            <a:endParaRPr lang="en-US" sz="2200" dirty="0"/>
+          </a:p>
+        </p:txBody>
+      </p:sp>
+      <p:sp>
+        <p:nvSpPr>
+          <p:cNvPr id="13" name="Text 11"/>
+          <p:cNvSpPr/>
+          <p:nvPr/>
+        </p:nvSpPr>
+        <p:spPr>
+          <a:xfrm>
+            <a:off x="548640" y="2377440"/>
+            <a:ext cx="2682240" cy="365760"/>
+          </a:xfrm>
+          <a:prstGeom prst="rect">
+            <a:avLst/>
+          </a:prstGeom>
+          <a:noFill/>
+          <a:ln/>
+        </p:spPr>
+        <p:txBody>
+          <a:bodyPr wrap="square" lIns="0" tIns="0" rIns="0" bIns="0" rtlCol="0" anchor="ctr"/>
+          <a:lstStyle/>
+          <a:p>
+            <a:pPr algn="ctr" indent="0" marL="0">
+              <a:buNone/>
+            </a:pPr>
+            <a:r>
+              <a:rPr lang="en-US" sz="1300" b="1" dirty="0">
+                <a:solidFill>
+                  <a:srgbClr val="1E2761"/>
+                </a:solidFill>
+                <a:latin typeface="Calibri" pitchFamily="34" charset="0"/>
+                <a:ea typeface="Calibri" pitchFamily="34" charset="-122"/>
+                <a:cs typeface="Calibri" pitchFamily="34" charset="-120"/>
+              </a:rPr>
+              <a:t>Containers + OSS frameworks</a:t>
+            </a:r>
+            <a:endParaRPr lang="en-US" sz="1300" dirty="0"/>
+          </a:p>
+        </p:txBody>
+      </p:sp>
+      <p:sp>
+        <p:nvSpPr>
+          <p:cNvPr id="14" name="Text 12"/>
+          <p:cNvSpPr/>
+          <p:nvPr/>
+        </p:nvSpPr>
+        <p:spPr>
+          <a:xfrm>
+            <a:off x="3230880" y="2377440"/>
+            <a:ext cx="2682240" cy="365760"/>
+          </a:xfrm>
+          <a:prstGeom prst="rect">
+            <a:avLst/>
+          </a:prstGeom>
+          <a:noFill/>
+          <a:ln/>
+        </p:spPr>
+        <p:txBody>
+          <a:bodyPr wrap="square" lIns="0" tIns="0" rIns="0" bIns="0" rtlCol="0" anchor="ctr"/>
+          <a:lstStyle/>
+          <a:p>
+            <a:pPr algn="ctr" indent="0" marL="0">
+              <a:buNone/>
+            </a:pPr>
+            <a:r>
+              <a:rPr lang="en-US" sz="1300" b="1" dirty="0">
+                <a:solidFill>
+                  <a:srgbClr val="1E2761"/>
+                </a:solidFill>
+                <a:latin typeface="Calibri" pitchFamily="34" charset="0"/>
+                <a:ea typeface="Calibri" pitchFamily="34" charset="-122"/>
+                <a:cs typeface="Calibri" pitchFamily="34" charset="-120"/>
+              </a:rPr>
+              <a:t>Foundry Agent Service + MAF</a:t>
+            </a:r>
+            <a:endParaRPr lang="en-US" sz="1300" dirty="0"/>
+          </a:p>
+        </p:txBody>
+      </p:sp>
+      <p:sp>
+        <p:nvSpPr>
+          <p:cNvPr id="15" name="Text 13"/>
+          <p:cNvSpPr/>
+          <p:nvPr/>
+        </p:nvSpPr>
+        <p:spPr>
+          <a:xfrm>
+            <a:off x="5913120" y="2377440"/>
+            <a:ext cx="2682240" cy="365760"/>
+          </a:xfrm>
+          <a:prstGeom prst="rect">
+            <a:avLst/>
+          </a:prstGeom>
+          <a:noFill/>
+          <a:ln/>
+        </p:spPr>
+        <p:txBody>
+          <a:bodyPr wrap="square" lIns="0" tIns="0" rIns="0" bIns="0" rtlCol="0" anchor="ctr"/>
+          <a:lstStyle/>
+          <a:p>
+            <a:pPr algn="ctr" indent="0" marL="0">
+              <a:buNone/>
+            </a:pPr>
+            <a:r>
+              <a:rPr lang="en-US" sz="1300" b="1" dirty="0">
+                <a:solidFill>
+                  <a:srgbClr val="1E2761"/>
+                </a:solidFill>
+                <a:latin typeface="Calibri" pitchFamily="34" charset="0"/>
+                <a:ea typeface="Calibri" pitchFamily="34" charset="-122"/>
+                <a:cs typeface="Calibri" pitchFamily="34" charset="-120"/>
+              </a:rPr>
+              <a:t>Copilot Studio</a:t>
+            </a:r>
+            <a:endParaRPr lang="en-US" sz="1300" dirty="0"/>
+          </a:p>
+        </p:txBody>
+      </p:sp>
+      <p:sp>
+        <p:nvSpPr>
+          <p:cNvPr id="16" name="Text 14"/>
+          <p:cNvSpPr/>
+          <p:nvPr/>
+        </p:nvSpPr>
+        <p:spPr>
+          <a:xfrm>
+            <a:off x="640080" y="2788920"/>
+            <a:ext cx="2499360" cy="1280160"/>
+          </a:xfrm>
+          <a:prstGeom prst="rect">
+            <a:avLst/>
+          </a:prstGeom>
+          <a:noFill/>
+          <a:ln/>
+        </p:spPr>
+        <p:txBody>
+          <a:bodyPr wrap="square" lIns="0" tIns="0" rIns="0" bIns="0" rtlCol="0" anchor="t"/>
+          <a:lstStyle/>
+          <a:p>
+            <a:pPr algn="ctr" indent="0" marL="0">
+              <a:buNone/>
+            </a:pPr>
+            <a:r>
+              <a:rPr lang="en-US" sz="1200" dirty="0">
                 <a:solidFill>
                   <a:srgbClr val="212121"/>
                 </a:solidFill>
@@ -3318,20 +5601,38 @@
                 <a:ea typeface="Calibri" pitchFamily="34" charset="-122"/>
                 <a:cs typeface="Calibri" pitchFamily="34" charset="-120"/>
               </a:rPr>
-              <a:t>Model deployments (frontier and open models)</a:t>
-            </a:r>
-            <a:endParaRPr lang="en-US" sz="1500" dirty="0"/>
-          </a:p>
-          <a:p>
-            <a:pPr marL="342900" indent="-342900">
-              <a:spcAft>
-                <a:spcPts val="600"/>
-              </a:spcAft>
-              <a:buSzPct val="100000"/>
-              <a:buChar char="•"/>
-            </a:pPr>
-            <a:r>
-              <a:rPr lang="en-US" sz="1500" dirty="0">
+              <a:t>You own everything. Not covered.</a:t>
+            </a:r>
+            <a:endParaRPr lang="en-US" sz="1200" dirty="0"/>
+          </a:p>
+        </p:txBody>
+      </p:sp>
+      <p:sp>
+        <p:nvSpPr>
+          <p:cNvPr id="17" name="Text 15"/>
+          <p:cNvSpPr/>
+          <p:nvPr/>
+        </p:nvSpPr>
+        <p:spPr>
+          <a:xfrm>
+            <a:off x="3322320" y="2788920"/>
+            <a:ext cx="2499360" cy="1280160"/>
+          </a:xfrm>
+          <a:prstGeom prst="rect">
+            <a:avLst/>
+          </a:prstGeom>
+          <a:noFill/>
+          <a:ln/>
+        </p:spPr>
+        <p:txBody>
+          <a:bodyPr wrap="square" lIns="0" tIns="0" rIns="0" bIns="0" rtlCol="0" anchor="t"/>
+          <a:lstStyle/>
+          <a:p>
+            <a:pPr algn="ctr" indent="0" marL="0">
+              <a:buNone/>
+            </a:pPr>
+            <a:r>
+              <a:rPr lang="en-US" sz="1200" dirty="0">
                 <a:solidFill>
                   <a:srgbClr val="212121"/>
                 </a:solidFill>
@@ -3339,20 +5640,38 @@
                 <a:ea typeface="Calibri" pitchFamily="34" charset="-122"/>
                 <a:cs typeface="Calibri" pitchFamily="34" charset="-120"/>
               </a:rPr>
-              <a:t>Playgrounds — chat, agent, evaluation</a:t>
-            </a:r>
-            <a:endParaRPr lang="en-US" sz="1500" dirty="0"/>
-          </a:p>
-          <a:p>
-            <a:pPr marL="342900" indent="-342900">
-              <a:spcAft>
-                <a:spcPts val="600"/>
-              </a:spcAft>
-              <a:buSzPct val="100000"/>
-              <a:buChar char="•"/>
-            </a:pPr>
-            <a:r>
-              <a:rPr lang="en-US" sz="1500" dirty="0">
+              <a:t>Managed runtime; you own the agent code. This workshop.</a:t>
+            </a:r>
+            <a:endParaRPr lang="en-US" sz="1200" dirty="0"/>
+          </a:p>
+        </p:txBody>
+      </p:sp>
+      <p:sp>
+        <p:nvSpPr>
+          <p:cNvPr id="18" name="Text 16"/>
+          <p:cNvSpPr/>
+          <p:nvPr/>
+        </p:nvSpPr>
+        <p:spPr>
+          <a:xfrm>
+            <a:off x="6004560" y="2788920"/>
+            <a:ext cx="2499360" cy="1280160"/>
+          </a:xfrm>
+          <a:prstGeom prst="rect">
+            <a:avLst/>
+          </a:prstGeom>
+          <a:noFill/>
+          <a:ln/>
+        </p:spPr>
+        <p:txBody>
+          <a:bodyPr wrap="square" lIns="0" tIns="0" rIns="0" bIns="0" rtlCol="0" anchor="t"/>
+          <a:lstStyle/>
+          <a:p>
+            <a:pPr algn="ctr" indent="0" marL="0">
+              <a:buNone/>
+            </a:pPr>
+            <a:r>
+              <a:rPr lang="en-US" sz="1200" dirty="0">
                 <a:solidFill>
                   <a:srgbClr val="212121"/>
                 </a:solidFill>
@@ -3360,72 +5679,82 @@
                 <a:ea typeface="Calibri" pitchFamily="34" charset="-122"/>
                 <a:cs typeface="Calibri" pitchFamily="34" charset="-120"/>
               </a:rPr>
-              <a:t>Foundry Agent Service — server-hosted agents (PromptAgent, HostedAgent)</a:t>
-            </a:r>
-            <a:endParaRPr lang="en-US" sz="1500" dirty="0"/>
-          </a:p>
-          <a:p>
-            <a:pPr marL="342900" indent="-342900">
-              <a:spcAft>
-                <a:spcPts val="600"/>
-              </a:spcAft>
-              <a:buSzPct val="100000"/>
-              <a:buChar char="•"/>
-            </a:pPr>
-            <a:r>
-              <a:rPr lang="en-US" sz="1500" dirty="0">
-                <a:solidFill>
-                  <a:srgbClr val="212121"/>
-                </a:solidFill>
-                <a:latin typeface="Calibri" pitchFamily="34" charset="0"/>
-                <a:ea typeface="Calibri" pitchFamily="34" charset="-122"/>
-                <a:cs typeface="Calibri" pitchFamily="34" charset="-120"/>
-              </a:rPr>
-              <a:t>Foundry Toolbox — curated tool/connector catalog, exposed via MCP</a:t>
-            </a:r>
-            <a:endParaRPr lang="en-US" sz="1500" dirty="0"/>
-          </a:p>
-          <a:p>
-            <a:pPr marL="342900" indent="-342900">
-              <a:spcAft>
-                <a:spcPts val="600"/>
-              </a:spcAft>
-              <a:buSzPct val="100000"/>
-              <a:buChar char="•"/>
-            </a:pPr>
-            <a:r>
-              <a:rPr lang="en-US" sz="1500" dirty="0">
-                <a:solidFill>
-                  <a:srgbClr val="212121"/>
-                </a:solidFill>
-                <a:latin typeface="Calibri" pitchFamily="34" charset="0"/>
-                <a:ea typeface="Calibri" pitchFamily="34" charset="-122"/>
-                <a:cs typeface="Calibri" pitchFamily="34" charset="-120"/>
-              </a:rPr>
-              <a:t>Foundry IQ — enterprise knowledge and grounding layer</a:t>
-            </a:r>
-            <a:endParaRPr lang="en-US" sz="1500" dirty="0"/>
-          </a:p>
-          <a:p>
-            <a:pPr marL="342900" indent="-342900">
-              <a:spcAft>
-                <a:spcPts val="600"/>
-              </a:spcAft>
-              <a:buSzPct val="100000"/>
-              <a:buChar char="•"/>
-            </a:pPr>
-            <a:r>
-              <a:rPr lang="en-US" sz="1500" dirty="0">
-                <a:solidFill>
-                  <a:srgbClr val="212121"/>
-                </a:solidFill>
-                <a:latin typeface="Calibri" pitchFamily="34" charset="0"/>
-                <a:ea typeface="Calibri" pitchFamily="34" charset="-122"/>
-                <a:cs typeface="Calibri" pitchFamily="34" charset="-120"/>
-              </a:rPr>
-              <a:t>Evaluators, tracing, and safety</a:t>
-            </a:r>
-            <a:endParaRPr lang="en-US" sz="1500" dirty="0"/>
+              <a:t>Portal-first, low-code. Not covered.</a:t>
+            </a:r>
+            <a:endParaRPr lang="en-US" sz="1200" dirty="0"/>
+          </a:p>
+        </p:txBody>
+      </p:sp>
+      <p:sp>
+        <p:nvSpPr>
+          <p:cNvPr id="19" name="Shape 17"/>
+          <p:cNvSpPr/>
+          <p:nvPr/>
+        </p:nvSpPr>
+        <p:spPr>
+          <a:xfrm>
+            <a:off x="365760" y="4343400"/>
+            <a:ext cx="8412480" cy="457200"/>
+          </a:xfrm>
+          <a:prstGeom prst="rect">
+            <a:avLst/>
+          </a:prstGeom>
+          <a:solidFill>
+            <a:srgbClr val="CADCFC"/>
+          </a:solidFill>
+          <a:ln/>
+        </p:spPr>
+      </p:sp>
+      <p:sp>
+        <p:nvSpPr>
+          <p:cNvPr id="20" name="Text 18"/>
+          <p:cNvSpPr/>
+          <p:nvPr/>
+        </p:nvSpPr>
+        <p:spPr>
+          <a:xfrm>
+            <a:off x="502920" y="4370832"/>
+            <a:ext cx="8138160" cy="402336"/>
+          </a:xfrm>
+          <a:prstGeom prst="rect">
+            <a:avLst/>
+          </a:prstGeom>
+          <a:noFill/>
+          <a:ln/>
+        </p:spPr>
+        <p:txBody>
+          <a:bodyPr wrap="square" lIns="0" tIns="0" rIns="0" bIns="0" rtlCol="0" anchor="ctr"/>
+          <a:lstStyle/>
+          <a:p>
+            <a:pPr indent="0" marL="0">
+              <a:buNone/>
+            </a:pPr>
+            <a:r>
+              <a:rPr lang="en-US" sz="1400" b="1" dirty="0">
+                <a:solidFill>
+                  <a:srgbClr val="1E2761"/>
+                </a:solidFill>
+                <a:latin typeface="Calibri" pitchFamily="34" charset="0"/>
+                <a:ea typeface="Calibri" pitchFamily="34" charset="-122"/>
+                <a:cs typeface="Calibri" pitchFamily="34" charset="-120"/>
+              </a:rPr>
+              <a:t>This workshop lives in PaaS territory. </a:t>
+            </a:r>
+            <a:pPr indent="0" marL="0">
+              <a:buNone/>
+            </a:pPr>
+            <a:r>
+              <a:rPr lang="en-US" sz="1400" dirty="0">
+                <a:solidFill>
+                  <a:srgbClr val="1E2761"/>
+                </a:solidFill>
+                <a:latin typeface="Calibri" pitchFamily="34" charset="0"/>
+                <a:ea typeface="Calibri" pitchFamily="34" charset="-122"/>
+                <a:cs typeface="Calibri" pitchFamily="34" charset="-120"/>
+              </a:rPr>
+              <a:t>You write real code; you don't run the infrastructure.</a:t>
+            </a:r>
+            <a:endParaRPr lang="en-US" sz="1400" dirty="0"/>
           </a:p>
         </p:txBody>
       </p:sp>
@@ -3553,7 +5882,7 @@
                 <a:ea typeface="Calibri" pitchFamily="34" charset="-122"/>
                 <a:cs typeface="Calibri" pitchFamily="34" charset="-120"/>
               </a:rPr>
-              <a:t>What MAF gives you</a:t>
+              <a:t>When is an agent the right answer?</a:t>
             </a:r>
             <a:endParaRPr lang="en-US" sz="2800" dirty="0"/>
           </a:p>
@@ -3568,7 +5897,7 @@
         <p:spPr>
           <a:xfrm>
             <a:off x="365760" y="1097280"/>
-            <a:ext cx="8412480" cy="3749040"/>
+            <a:ext cx="8412480" cy="365760"/>
           </a:xfrm>
           <a:prstGeom prst="rect">
             <a:avLst/>
@@ -3577,18 +5906,180 @@
           <a:ln/>
         </p:spPr>
         <p:txBody>
-          <a:bodyPr wrap="square" rtlCol="0" anchor="ctr"/>
-          <a:lstStyle/>
-          <a:p>
-            <a:pPr marL="342900" indent="-342900">
-              <a:spcAft>
-                <a:spcPts val="600"/>
-              </a:spcAft>
-              <a:buSzPct val="100000"/>
-              <a:buChar char="•"/>
-            </a:pPr>
-            <a:r>
-              <a:rPr lang="en-US" sz="1500" dirty="0">
+          <a:bodyPr wrap="square" lIns="0" tIns="0" rIns="0" bIns="0" rtlCol="0" anchor="ctr"/>
+          <a:lstStyle/>
+          <a:p>
+            <a:pPr indent="0" marL="0">
+              <a:buNone/>
+            </a:pPr>
+            <a:r>
+              <a:rPr lang="en-US" sz="1400" i="1" dirty="0">
+                <a:solidFill>
+                  <a:srgbClr val="6B7280"/>
+                </a:solidFill>
+                <a:latin typeface="Calibri" pitchFamily="34" charset="0"/>
+                <a:ea typeface="Calibri" pitchFamily="34" charset="-122"/>
+                <a:cs typeface="Calibri" pitchFamily="34" charset="-120"/>
+              </a:rPr>
+              <a:t>Not every LLM problem needs an agent. Match complexity to need.</a:t>
+            </a:r>
+            <a:endParaRPr lang="en-US" sz="1400" dirty="0"/>
+          </a:p>
+        </p:txBody>
+      </p:sp>
+      <p:sp>
+        <p:nvSpPr>
+          <p:cNvPr id="6" name="Shape 4"/>
+          <p:cNvSpPr/>
+          <p:nvPr/>
+        </p:nvSpPr>
+        <p:spPr>
+          <a:xfrm>
+            <a:off x="640080" y="4160520"/>
+            <a:ext cx="7863840" cy="0"/>
+          </a:xfrm>
+          <a:prstGeom prst="line">
+            <a:avLst/>
+          </a:prstGeom>
+          <a:noFill/>
+          <a:ln w="25400">
+            <a:solidFill>
+              <a:srgbClr val="1E2761"/>
+            </a:solidFill>
+            <a:prstDash val="solid"/>
+            <a:tailEnd type="triangle"/>
+          </a:ln>
+        </p:spPr>
+      </p:sp>
+      <p:sp>
+        <p:nvSpPr>
+          <p:cNvPr id="7" name="Text 5"/>
+          <p:cNvSpPr/>
+          <p:nvPr/>
+        </p:nvSpPr>
+        <p:spPr>
+          <a:xfrm>
+            <a:off x="365760" y="4389120"/>
+            <a:ext cx="8412480" cy="320040"/>
+          </a:xfrm>
+          <a:prstGeom prst="rect">
+            <a:avLst/>
+          </a:prstGeom>
+          <a:noFill/>
+          <a:ln/>
+        </p:spPr>
+        <p:txBody>
+          <a:bodyPr wrap="square" lIns="0" tIns="0" rIns="0" bIns="0" rtlCol="0" anchor="ctr"/>
+          <a:lstStyle/>
+          <a:p>
+            <a:pPr algn="ctr" indent="0" marL="0">
+              <a:buNone/>
+            </a:pPr>
+            <a:r>
+              <a:rPr lang="en-US" sz="1200" i="1" dirty="0">
+                <a:solidFill>
+                  <a:srgbClr val="6B7280"/>
+                </a:solidFill>
+                <a:latin typeface="Calibri" pitchFamily="34" charset="0"/>
+                <a:ea typeface="Calibri" pitchFamily="34" charset="-122"/>
+                <a:cs typeface="Calibri" pitchFamily="34" charset="-120"/>
+              </a:rPr>
+              <a:t>Reach for the leftmost pattern that actually solves your problem</a:t>
+            </a:r>
+            <a:endParaRPr lang="en-US" sz="1200" dirty="0"/>
+          </a:p>
+        </p:txBody>
+      </p:sp>
+      <p:sp>
+        <p:nvSpPr>
+          <p:cNvPr id="8" name="Shape 6"/>
+          <p:cNvSpPr/>
+          <p:nvPr/>
+        </p:nvSpPr>
+        <p:spPr>
+          <a:xfrm>
+            <a:off x="365760" y="1737360"/>
+            <a:ext cx="2651760" cy="2286000"/>
+          </a:xfrm>
+          <a:prstGeom prst="rect">
+            <a:avLst/>
+          </a:prstGeom>
+          <a:solidFill>
+            <a:srgbClr val="FFFFFF"/>
+          </a:solidFill>
+          <a:ln w="12700">
+            <a:solidFill>
+              <a:srgbClr val="1E2761"/>
+            </a:solidFill>
+            <a:prstDash val="solid"/>
+          </a:ln>
+        </p:spPr>
+      </p:sp>
+      <p:sp>
+        <p:nvSpPr>
+          <p:cNvPr id="9" name="Text 7"/>
+          <p:cNvSpPr/>
+          <p:nvPr/>
+        </p:nvSpPr>
+        <p:spPr>
+          <a:xfrm>
+            <a:off x="502920" y="1874520"/>
+            <a:ext cx="2377440" cy="457200"/>
+          </a:xfrm>
+          <a:prstGeom prst="rect">
+            <a:avLst/>
+          </a:prstGeom>
+          <a:noFill/>
+          <a:ln/>
+        </p:spPr>
+        <p:txBody>
+          <a:bodyPr wrap="square" lIns="0" tIns="0" rIns="0" bIns="0" rtlCol="0" anchor="ctr"/>
+          <a:lstStyle/>
+          <a:p>
+            <a:pPr algn="ctr" indent="0" marL="0">
+              <a:buNone/>
+            </a:pPr>
+            <a:r>
+              <a:rPr lang="en-US" sz="1600" b="1" dirty="0">
+                <a:solidFill>
+                  <a:srgbClr val="1E2761"/>
+                </a:solidFill>
+                <a:latin typeface="Calibri" pitchFamily="34" charset="0"/>
+                <a:ea typeface="Calibri" pitchFamily="34" charset="-122"/>
+                <a:cs typeface="Calibri" pitchFamily="34" charset="-120"/>
+              </a:rPr>
+              <a:t>Direct LLM call</a:t>
+            </a:r>
+            <a:endParaRPr lang="en-US" sz="1600" dirty="0"/>
+          </a:p>
+        </p:txBody>
+      </p:sp>
+      <p:sp>
+        <p:nvSpPr>
+          <p:cNvPr id="10" name="Text 8"/>
+          <p:cNvSpPr/>
+          <p:nvPr/>
+        </p:nvSpPr>
+        <p:spPr>
+          <a:xfrm>
+            <a:off x="502920" y="2423160"/>
+            <a:ext cx="2377440" cy="822960"/>
+          </a:xfrm>
+          <a:prstGeom prst="rect">
+            <a:avLst/>
+          </a:prstGeom>
+          <a:noFill/>
+          <a:ln/>
+        </p:spPr>
+        <p:txBody>
+          <a:bodyPr wrap="square" lIns="0" tIns="0" rIns="0" bIns="0" rtlCol="0" anchor="t"/>
+          <a:lstStyle/>
+          <a:p>
+            <a:pPr algn="ctr" indent="0" marL="0">
+              <a:buNone/>
+            </a:pPr>
+            <a:r>
+              <a:rPr lang="en-US" sz="1200" i="1" dirty="0">
                 <a:solidFill>
                   <a:srgbClr val="212121"/>
                 </a:solidFill>
@@ -3596,20 +6087,141 @@
                 <a:ea typeface="Calibri" pitchFamily="34" charset="-122"/>
                 <a:cs typeface="Calibri" pitchFamily="34" charset="-120"/>
               </a:rPr>
-              <a:t>One SDK for authoring agents — Python and C#</a:t>
-            </a:r>
-            <a:endParaRPr lang="en-US" sz="1500" dirty="0"/>
-          </a:p>
-          <a:p>
-            <a:pPr marL="342900" indent="-342900">
-              <a:spcAft>
-                <a:spcPts val="600"/>
-              </a:spcAft>
-              <a:buSzPct val="100000"/>
-              <a:buChar char="•"/>
-            </a:pPr>
-            <a:r>
-              <a:rPr lang="en-US" sz="1500" dirty="0">
+              <a:t>"Summarize this document."</a:t>
+            </a:r>
+            <a:endParaRPr lang="en-US" sz="1200" dirty="0"/>
+          </a:p>
+        </p:txBody>
+      </p:sp>
+      <p:sp>
+        <p:nvSpPr>
+          <p:cNvPr id="11" name="Text 9"/>
+          <p:cNvSpPr/>
+          <p:nvPr/>
+        </p:nvSpPr>
+        <p:spPr>
+          <a:xfrm>
+            <a:off x="502920" y="3337560"/>
+            <a:ext cx="2377440" cy="640080"/>
+          </a:xfrm>
+          <a:prstGeom prst="rect">
+            <a:avLst/>
+          </a:prstGeom>
+          <a:noFill/>
+          <a:ln/>
+        </p:spPr>
+        <p:txBody>
+          <a:bodyPr wrap="square" lIns="0" tIns="0" rIns="0" bIns="0" rtlCol="0" anchor="t"/>
+          <a:lstStyle/>
+          <a:p>
+            <a:pPr algn="ctr" indent="0" marL="0">
+              <a:buNone/>
+            </a:pPr>
+            <a:r>
+              <a:rPr lang="en-US" sz="1100" dirty="0">
+                <a:solidFill>
+                  <a:srgbClr val="6B7280"/>
+                </a:solidFill>
+                <a:latin typeface="Calibri" pitchFamily="34" charset="0"/>
+                <a:ea typeface="Calibri" pitchFamily="34" charset="-122"/>
+                <a:cs typeface="Calibri" pitchFamily="34" charset="-120"/>
+              </a:rPr>
+              <a:t>No tools · no iteration · cheap · easy to eval</a:t>
+            </a:r>
+            <a:endParaRPr lang="en-US" sz="1100" dirty="0"/>
+          </a:p>
+        </p:txBody>
+      </p:sp>
+      <p:sp>
+        <p:nvSpPr>
+          <p:cNvPr id="12" name="Shape 10"/>
+          <p:cNvSpPr/>
+          <p:nvPr/>
+        </p:nvSpPr>
+        <p:spPr>
+          <a:xfrm>
+            <a:off x="3246120" y="1737360"/>
+            <a:ext cx="2651760" cy="2286000"/>
+          </a:xfrm>
+          <a:prstGeom prst="rect">
+            <a:avLst/>
+          </a:prstGeom>
+          <a:solidFill>
+            <a:srgbClr val="FFFFFF"/>
+          </a:solidFill>
+          <a:ln w="12700">
+            <a:solidFill>
+              <a:srgbClr val="1E2761"/>
+            </a:solidFill>
+            <a:prstDash val="solid"/>
+          </a:ln>
+        </p:spPr>
+      </p:sp>
+      <p:sp>
+        <p:nvSpPr>
+          <p:cNvPr id="13" name="Text 11"/>
+          <p:cNvSpPr/>
+          <p:nvPr/>
+        </p:nvSpPr>
+        <p:spPr>
+          <a:xfrm>
+            <a:off x="3383280" y="1874520"/>
+            <a:ext cx="2377440" cy="457200"/>
+          </a:xfrm>
+          <a:prstGeom prst="rect">
+            <a:avLst/>
+          </a:prstGeom>
+          <a:noFill/>
+          <a:ln/>
+        </p:spPr>
+        <p:txBody>
+          <a:bodyPr wrap="square" lIns="0" tIns="0" rIns="0" bIns="0" rtlCol="0" anchor="ctr"/>
+          <a:lstStyle/>
+          <a:p>
+            <a:pPr algn="ctr" indent="0" marL="0">
+              <a:buNone/>
+            </a:pPr>
+            <a:r>
+              <a:rPr lang="en-US" sz="1600" b="1" dirty="0">
+                <a:solidFill>
+                  <a:srgbClr val="1E2761"/>
+                </a:solidFill>
+                <a:latin typeface="Calibri" pitchFamily="34" charset="0"/>
+                <a:ea typeface="Calibri" pitchFamily="34" charset="-122"/>
+                <a:cs typeface="Calibri" pitchFamily="34" charset="-120"/>
+              </a:rPr>
+              <a:t>Single agent with tools</a:t>
+            </a:r>
+            <a:endParaRPr lang="en-US" sz="1600" dirty="0"/>
+          </a:p>
+        </p:txBody>
+      </p:sp>
+      <p:sp>
+        <p:nvSpPr>
+          <p:cNvPr id="14" name="Text 12"/>
+          <p:cNvSpPr/>
+          <p:nvPr/>
+        </p:nvSpPr>
+        <p:spPr>
+          <a:xfrm>
+            <a:off x="3383280" y="2423160"/>
+            <a:ext cx="2377440" cy="822960"/>
+          </a:xfrm>
+          <a:prstGeom prst="rect">
+            <a:avLst/>
+          </a:prstGeom>
+          <a:noFill/>
+          <a:ln/>
+        </p:spPr>
+        <p:txBody>
+          <a:bodyPr wrap="square" lIns="0" tIns="0" rIns="0" bIns="0" rtlCol="0" anchor="t"/>
+          <a:lstStyle/>
+          <a:p>
+            <a:pPr algn="ctr" indent="0" marL="0">
+              <a:buNone/>
+            </a:pPr>
+            <a:r>
+              <a:rPr lang="en-US" sz="1200" i="1" dirty="0">
                 <a:solidFill>
                   <a:srgbClr val="212121"/>
                 </a:solidFill>
@@ -3617,20 +6229,141 @@
                 <a:ea typeface="Calibri" pitchFamily="34" charset="-122"/>
                 <a:cs typeface="Calibri" pitchFamily="34" charset="-120"/>
               </a:rPr>
-              <a:t>One vocabulary: agents, threads, tools, runs</a:t>
-            </a:r>
-            <a:endParaRPr lang="en-US" sz="1500" dirty="0"/>
-          </a:p>
-          <a:p>
-            <a:pPr marL="342900" indent="-342900">
-              <a:spcAft>
-                <a:spcPts val="600"/>
-              </a:spcAft>
-              <a:buSzPct val="100000"/>
-              <a:buChar char="•"/>
-            </a:pPr>
-            <a:r>
-              <a:rPr lang="en-US" sz="1500" dirty="0">
+              <a:t>"Answer with sources; open a ticket if needed."</a:t>
+            </a:r>
+            <a:endParaRPr lang="en-US" sz="1200" dirty="0"/>
+          </a:p>
+        </p:txBody>
+      </p:sp>
+      <p:sp>
+        <p:nvSpPr>
+          <p:cNvPr id="15" name="Text 13"/>
+          <p:cNvSpPr/>
+          <p:nvPr/>
+        </p:nvSpPr>
+        <p:spPr>
+          <a:xfrm>
+            <a:off x="3383280" y="3337560"/>
+            <a:ext cx="2377440" cy="640080"/>
+          </a:xfrm>
+          <a:prstGeom prst="rect">
+            <a:avLst/>
+          </a:prstGeom>
+          <a:noFill/>
+          <a:ln/>
+        </p:spPr>
+        <p:txBody>
+          <a:bodyPr wrap="square" lIns="0" tIns="0" rIns="0" bIns="0" rtlCol="0" anchor="t"/>
+          <a:lstStyle/>
+          <a:p>
+            <a:pPr algn="ctr" indent="0" marL="0">
+              <a:buNone/>
+            </a:pPr>
+            <a:r>
+              <a:rPr lang="en-US" sz="1100" dirty="0">
+                <a:solidFill>
+                  <a:srgbClr val="6B7280"/>
+                </a:solidFill>
+                <a:latin typeface="Calibri" pitchFamily="34" charset="0"/>
+                <a:ea typeface="Calibri" pitchFamily="34" charset="-122"/>
+                <a:cs typeface="Calibri" pitchFamily="34" charset="-120"/>
+              </a:rPr>
+              <a:t>Iteration · tool calls · harder to eval</a:t>
+            </a:r>
+            <a:endParaRPr lang="en-US" sz="1100" dirty="0"/>
+          </a:p>
+        </p:txBody>
+      </p:sp>
+      <p:sp>
+        <p:nvSpPr>
+          <p:cNvPr id="16" name="Shape 14"/>
+          <p:cNvSpPr/>
+          <p:nvPr/>
+        </p:nvSpPr>
+        <p:spPr>
+          <a:xfrm>
+            <a:off x="6126480" y="1737360"/>
+            <a:ext cx="2651760" cy="2286000"/>
+          </a:xfrm>
+          <a:prstGeom prst="rect">
+            <a:avLst/>
+          </a:prstGeom>
+          <a:solidFill>
+            <a:srgbClr val="FFFFFF"/>
+          </a:solidFill>
+          <a:ln w="12700">
+            <a:solidFill>
+              <a:srgbClr val="1E2761"/>
+            </a:solidFill>
+            <a:prstDash val="solid"/>
+          </a:ln>
+        </p:spPr>
+      </p:sp>
+      <p:sp>
+        <p:nvSpPr>
+          <p:cNvPr id="17" name="Text 15"/>
+          <p:cNvSpPr/>
+          <p:nvPr/>
+        </p:nvSpPr>
+        <p:spPr>
+          <a:xfrm>
+            <a:off x="6263640" y="1874520"/>
+            <a:ext cx="2377440" cy="457200"/>
+          </a:xfrm>
+          <a:prstGeom prst="rect">
+            <a:avLst/>
+          </a:prstGeom>
+          <a:noFill/>
+          <a:ln/>
+        </p:spPr>
+        <p:txBody>
+          <a:bodyPr wrap="square" lIns="0" tIns="0" rIns="0" bIns="0" rtlCol="0" anchor="ctr"/>
+          <a:lstStyle/>
+          <a:p>
+            <a:pPr algn="ctr" indent="0" marL="0">
+              <a:buNone/>
+            </a:pPr>
+            <a:r>
+              <a:rPr lang="en-US" sz="1600" b="1" dirty="0">
+                <a:solidFill>
+                  <a:srgbClr val="1E2761"/>
+                </a:solidFill>
+                <a:latin typeface="Calibri" pitchFamily="34" charset="0"/>
+                <a:ea typeface="Calibri" pitchFamily="34" charset="-122"/>
+                <a:cs typeface="Calibri" pitchFamily="34" charset="-120"/>
+              </a:rPr>
+              <a:t>Multi-agent workflow</a:t>
+            </a:r>
+            <a:endParaRPr lang="en-US" sz="1600" dirty="0"/>
+          </a:p>
+        </p:txBody>
+      </p:sp>
+      <p:sp>
+        <p:nvSpPr>
+          <p:cNvPr id="18" name="Text 16"/>
+          <p:cNvSpPr/>
+          <p:nvPr/>
+        </p:nvSpPr>
+        <p:spPr>
+          <a:xfrm>
+            <a:off x="6263640" y="2423160"/>
+            <a:ext cx="2377440" cy="822960"/>
+          </a:xfrm>
+          <a:prstGeom prst="rect">
+            <a:avLst/>
+          </a:prstGeom>
+          <a:noFill/>
+          <a:ln/>
+        </p:spPr>
+        <p:txBody>
+          <a:bodyPr wrap="square" lIns="0" tIns="0" rIns="0" bIns="0" rtlCol="0" anchor="t"/>
+          <a:lstStyle/>
+          <a:p>
+            <a:pPr algn="ctr" indent="0" marL="0">
+              <a:buNone/>
+            </a:pPr>
+            <a:r>
+              <a:rPr lang="en-US" sz="1200" i="1" dirty="0">
                 <a:solidFill>
                   <a:srgbClr val="212121"/>
                 </a:solidFill>
@@ -3638,72 +6371,48 @@
                 <a:ea typeface="Calibri" pitchFamily="34" charset="-122"/>
                 <a:cs typeface="Calibri" pitchFamily="34" charset="-120"/>
               </a:rPr>
-              <a:t>First-class streaming, memory, structured outputs</a:t>
-            </a:r>
-            <a:endParaRPr lang="en-US" sz="1500" dirty="0"/>
-          </a:p>
-          <a:p>
-            <a:pPr marL="342900" indent="-342900">
-              <a:spcAft>
-                <a:spcPts val="600"/>
-              </a:spcAft>
-              <a:buSzPct val="100000"/>
-              <a:buChar char="•"/>
-            </a:pPr>
-            <a:r>
-              <a:rPr lang="en-US" sz="1500" dirty="0">
-                <a:solidFill>
-                  <a:srgbClr val="212121"/>
-                </a:solidFill>
-                <a:latin typeface="Calibri" pitchFamily="34" charset="0"/>
-                <a:ea typeface="Calibri" pitchFamily="34" charset="-122"/>
-                <a:cs typeface="Calibri" pitchFamily="34" charset="-120"/>
-              </a:rPr>
-              <a:t>Multi-agent orchestration primitives</a:t>
-            </a:r>
-            <a:endParaRPr lang="en-US" sz="1500" dirty="0"/>
-          </a:p>
-          <a:p>
-            <a:pPr marL="342900" indent="-342900">
-              <a:spcAft>
-                <a:spcPts val="600"/>
-              </a:spcAft>
-              <a:buSzPct val="100000"/>
-              <a:buChar char="•"/>
-            </a:pPr>
-            <a:r>
-              <a:rPr lang="en-US" sz="1500" dirty="0">
-                <a:solidFill>
-                  <a:srgbClr val="212121"/>
-                </a:solidFill>
-                <a:latin typeface="Calibri" pitchFamily="34" charset="0"/>
-                <a:ea typeface="Calibri" pitchFamily="34" charset="-122"/>
-                <a:cs typeface="Calibri" pitchFamily="34" charset="-120"/>
-              </a:rPr>
-              <a:t>Consumes Foundry Toolbox and MCP servers</a:t>
-            </a:r>
-            <a:endParaRPr lang="en-US" sz="1500" dirty="0"/>
-          </a:p>
-          <a:p>
-            <a:pPr marL="342900" indent="-342900">
-              <a:spcAft>
-                <a:spcPts val="600"/>
-              </a:spcAft>
-              <a:buSzPct val="100000"/>
-              <a:buChar char="•"/>
-            </a:pPr>
-            <a:r>
-              <a:rPr lang="en-US" sz="1500" dirty="0">
-                <a:solidFill>
-                  <a:srgbClr val="212121"/>
-                </a:solidFill>
-                <a:latin typeface="Calibri" pitchFamily="34" charset="0"/>
-                <a:ea typeface="Calibri" pitchFamily="34" charset="-122"/>
-                <a:cs typeface="Calibri" pitchFamily="34" charset="-120"/>
-              </a:rPr>
-              <a:t>The successor to Semantic Kernel and AutoGen patterns (both out of scope)</a:t>
-            </a:r>
-            <a:endParaRPr lang="en-US" sz="1500" dirty="0"/>
+              <a:t>"Plan → retrieve → verify → act."</a:t>
+            </a:r>
+            <a:endParaRPr lang="en-US" sz="1200" dirty="0"/>
+          </a:p>
+        </p:txBody>
+      </p:sp>
+      <p:sp>
+        <p:nvSpPr>
+          <p:cNvPr id="19" name="Text 17"/>
+          <p:cNvSpPr/>
+          <p:nvPr/>
+        </p:nvSpPr>
+        <p:spPr>
+          <a:xfrm>
+            <a:off x="6263640" y="3337560"/>
+            <a:ext cx="2377440" cy="640080"/>
+          </a:xfrm>
+          <a:prstGeom prst="rect">
+            <a:avLst/>
+          </a:prstGeom>
+          <a:noFill/>
+          <a:ln/>
+        </p:spPr>
+        <p:txBody>
+          <a:bodyPr wrap="square" lIns="0" tIns="0" rIns="0" bIns="0" rtlCol="0" anchor="t"/>
+          <a:lstStyle/>
+          <a:p>
+            <a:pPr algn="ctr" indent="0" marL="0">
+              <a:buNone/>
+            </a:pPr>
+            <a:r>
+              <a:rPr lang="en-US" sz="1100" dirty="0">
+                <a:solidFill>
+                  <a:srgbClr val="6B7280"/>
+                </a:solidFill>
+                <a:latin typeface="Calibri" pitchFamily="34" charset="0"/>
+                <a:ea typeface="Calibri" pitchFamily="34" charset="-122"/>
+                <a:cs typeface="Calibri" pitchFamily="34" charset="-120"/>
+              </a:rPr>
+              <a:t>Multiple roles · costly · new failure modes</a:t>
+            </a:r>
+            <a:endParaRPr lang="en-US" sz="1100" dirty="0"/>
           </a:p>
         </p:txBody>
       </p:sp>
@@ -3831,7 +6540,7 @@
                 <a:ea typeface="Calibri" pitchFamily="34" charset="-122"/>
                 <a:cs typeface="Calibri" pitchFamily="34" charset="-120"/>
               </a:rPr>
-              <a:t>What we will and won't cover</a:t>
+              <a:t>What Foundry gives you</a:t>
             </a:r>
             <a:endParaRPr lang="en-US" sz="2800" dirty="0"/>
           </a:p>
@@ -3846,85 +6555,7 @@
         <p:spPr>
           <a:xfrm>
             <a:off x="365760" y="1097280"/>
-            <a:ext cx="4069080" cy="365760"/>
-          </a:xfrm>
-          <a:prstGeom prst="rect">
-            <a:avLst/>
-          </a:prstGeom>
-          <a:noFill/>
-          <a:ln/>
-        </p:spPr>
-        <p:txBody>
-          <a:bodyPr wrap="square" lIns="0" tIns="0" rIns="0" bIns="0" rtlCol="0" anchor="ctr"/>
-          <a:lstStyle/>
-          <a:p>
-            <a:pPr indent="0" marL="0">
-              <a:buNone/>
-            </a:pPr>
-            <a:r>
-              <a:rPr lang="en-US" sz="2000" b="1" dirty="0">
-                <a:solidFill>
-                  <a:srgbClr val="1E2761"/>
-                </a:solidFill>
-                <a:latin typeface="Calibri" pitchFamily="34" charset="0"/>
-                <a:ea typeface="Calibri" pitchFamily="34" charset="-122"/>
-                <a:cs typeface="Calibri" pitchFamily="34" charset="-120"/>
-              </a:rPr>
-              <a:t>Covered</a:t>
-            </a:r>
-            <a:endParaRPr lang="en-US" sz="2000" dirty="0"/>
-          </a:p>
-        </p:txBody>
-      </p:sp>
-      <p:sp>
-        <p:nvSpPr>
-          <p:cNvPr id="6" name="Text 4"/>
-          <p:cNvSpPr/>
-          <p:nvPr/>
-        </p:nvSpPr>
-        <p:spPr>
-          <a:xfrm>
-            <a:off x="4709160" y="1097280"/>
-            <a:ext cx="4069080" cy="365760"/>
-          </a:xfrm>
-          <a:prstGeom prst="rect">
-            <a:avLst/>
-          </a:prstGeom>
-          <a:noFill/>
-          <a:ln/>
-        </p:spPr>
-        <p:txBody>
-          <a:bodyPr wrap="square" lIns="0" tIns="0" rIns="0" bIns="0" rtlCol="0" anchor="ctr"/>
-          <a:lstStyle/>
-          <a:p>
-            <a:pPr indent="0" marL="0">
-              <a:buNone/>
-            </a:pPr>
-            <a:r>
-              <a:rPr lang="en-US" sz="2000" b="1" dirty="0">
-                <a:solidFill>
-                  <a:srgbClr val="1E2761"/>
-                </a:solidFill>
-                <a:latin typeface="Calibri" pitchFamily="34" charset="0"/>
-                <a:ea typeface="Calibri" pitchFamily="34" charset="-122"/>
-                <a:cs typeface="Calibri" pitchFamily="34" charset="-120"/>
-              </a:rPr>
-              <a:t>Out of scope</a:t>
-            </a:r>
-            <a:endParaRPr lang="en-US" sz="2000" dirty="0"/>
-          </a:p>
-        </p:txBody>
-      </p:sp>
-      <p:sp>
-        <p:nvSpPr>
-          <p:cNvPr id="7" name="Text 5"/>
-          <p:cNvSpPr/>
-          <p:nvPr/>
-        </p:nvSpPr>
-        <p:spPr>
-          <a:xfrm>
-            <a:off x="365760" y="1554480"/>
-            <a:ext cx="4069080" cy="3291840"/>
+            <a:ext cx="8412480" cy="3749040"/>
           </a:xfrm>
           <a:prstGeom prst="rect">
             <a:avLst/>
@@ -3952,7 +6583,7 @@
                 <a:ea typeface="Calibri" pitchFamily="34" charset="-122"/>
                 <a:cs typeface="Calibri" pitchFamily="34" charset="-120"/>
               </a:rPr>
-              <a:t>Foundry (portal, deployments, connections)</a:t>
+              <a:t>Model deployments (frontier and open models)</a:t>
             </a:r>
             <a:endParaRPr lang="en-US" sz="1500" dirty="0"/>
           </a:p>
@@ -3973,7 +6604,7 @@
                 <a:ea typeface="Calibri" pitchFamily="34" charset="-122"/>
                 <a:cs typeface="Calibri" pitchFamily="34" charset="-120"/>
               </a:rPr>
-              <a:t>MAF (client-side + Foundry-hosted agents)</a:t>
+              <a:t>Playgrounds — chat, agent, evaluation</a:t>
             </a:r>
             <a:endParaRPr lang="en-US" sz="1500" dirty="0"/>
           </a:p>
@@ -3994,7 +6625,7 @@
                 <a:ea typeface="Calibri" pitchFamily="34" charset="-122"/>
                 <a:cs typeface="Calibri" pitchFamily="34" charset="-120"/>
               </a:rPr>
-              <a:t>Toolbox and Foundry IQ</a:t>
+              <a:t>Foundry Agent Service — server-hosted agents (PromptAgent, HostedAgent)</a:t>
             </a:r>
             <a:endParaRPr lang="en-US" sz="1500" dirty="0"/>
           </a:p>
@@ -4015,7 +6646,7 @@
                 <a:ea typeface="Calibri" pitchFamily="34" charset="-122"/>
                 <a:cs typeface="Calibri" pitchFamily="34" charset="-120"/>
               </a:rPr>
-              <a:t>MCP consumption and (stretch) authoring</a:t>
+              <a:t>Foundry Toolbox — curated tool/connector catalog, exposed via MCP</a:t>
             </a:r>
             <a:endParaRPr lang="en-US" sz="1500" dirty="0"/>
           </a:p>
@@ -4036,7 +6667,7 @@
                 <a:ea typeface="Calibri" pitchFamily="34" charset="-122"/>
                 <a:cs typeface="Calibri" pitchFamily="34" charset="-120"/>
               </a:rPr>
-              <a:t>Evaluation at every layer</a:t>
+              <a:t>Foundry IQ — enterprise knowledge and grounding layer</a:t>
             </a:r>
             <a:endParaRPr lang="en-US" sz="1500" dirty="0"/>
           </a:p>
@@ -4057,155 +6688,7 @@
                 <a:ea typeface="Calibri" pitchFamily="34" charset="-122"/>
                 <a:cs typeface="Calibri" pitchFamily="34" charset="-120"/>
               </a:rPr>
-              <a:t>Production concerns: observability, identity, cost</a:t>
-            </a:r>
-            <a:endParaRPr lang="en-US" sz="1500" dirty="0"/>
-          </a:p>
-        </p:txBody>
-      </p:sp>
-      <p:sp>
-        <p:nvSpPr>
-          <p:cNvPr id="8" name="Text 6"/>
-          <p:cNvSpPr/>
-          <p:nvPr/>
-        </p:nvSpPr>
-        <p:spPr>
-          <a:xfrm>
-            <a:off x="4709160" y="1554480"/>
-            <a:ext cx="4069080" cy="3291840"/>
-          </a:xfrm>
-          <a:prstGeom prst="rect">
-            <a:avLst/>
-          </a:prstGeom>
-          <a:noFill/>
-          <a:ln/>
-        </p:spPr>
-        <p:txBody>
-          <a:bodyPr wrap="square" rtlCol="0" anchor="ctr"/>
-          <a:lstStyle/>
-          <a:p>
-            <a:pPr marL="342900" indent="-342900">
-              <a:spcAft>
-                <a:spcPts val="600"/>
-              </a:spcAft>
-              <a:buSzPct val="100000"/>
-              <a:buChar char="•"/>
-            </a:pPr>
-            <a:r>
-              <a:rPr lang="en-US" sz="1500" dirty="0">
-                <a:solidFill>
-                  <a:srgbClr val="212121"/>
-                </a:solidFill>
-                <a:latin typeface="Calibri" pitchFamily="34" charset="0"/>
-                <a:ea typeface="Calibri" pitchFamily="34" charset="-122"/>
-                <a:cs typeface="Calibri" pitchFamily="34" charset="-120"/>
-              </a:rPr>
-              <a:t>Copilot Studio (different audience)</a:t>
-            </a:r>
-            <a:endParaRPr lang="en-US" sz="1500" dirty="0"/>
-          </a:p>
-          <a:p>
-            <a:pPr marL="342900" indent="-342900">
-              <a:spcAft>
-                <a:spcPts val="600"/>
-              </a:spcAft>
-              <a:buSzPct val="100000"/>
-              <a:buChar char="•"/>
-            </a:pPr>
-            <a:r>
-              <a:rPr lang="en-US" sz="1500" dirty="0">
-                <a:solidFill>
-                  <a:srgbClr val="212121"/>
-                </a:solidFill>
-                <a:latin typeface="Calibri" pitchFamily="34" charset="0"/>
-                <a:ea typeface="Calibri" pitchFamily="34" charset="-122"/>
-                <a:cs typeface="Calibri" pitchFamily="34" charset="-120"/>
-              </a:rPr>
-              <a:t>Semantic Kernel (MAF is the forward direction)</a:t>
-            </a:r>
-            <a:endParaRPr lang="en-US" sz="1500" dirty="0"/>
-          </a:p>
-          <a:p>
-            <a:pPr marL="342900" indent="-342900">
-              <a:spcAft>
-                <a:spcPts val="600"/>
-              </a:spcAft>
-              <a:buSzPct val="100000"/>
-              <a:buChar char="•"/>
-            </a:pPr>
-            <a:r>
-              <a:rPr lang="en-US" sz="1500" dirty="0">
-                <a:solidFill>
-                  <a:srgbClr val="212121"/>
-                </a:solidFill>
-                <a:latin typeface="Calibri" pitchFamily="34" charset="0"/>
-                <a:ea typeface="Calibri" pitchFamily="34" charset="-122"/>
-                <a:cs typeface="Calibri" pitchFamily="34" charset="-120"/>
-              </a:rPr>
-              <a:t>AutoGen (research-lineage predecessor)</a:t>
-            </a:r>
-            <a:endParaRPr lang="en-US" sz="1500" dirty="0"/>
-          </a:p>
-          <a:p>
-            <a:pPr marL="342900" indent="-342900">
-              <a:spcAft>
-                <a:spcPts val="600"/>
-              </a:spcAft>
-              <a:buSzPct val="100000"/>
-              <a:buChar char="•"/>
-            </a:pPr>
-            <a:r>
-              <a:rPr lang="en-US" sz="1500" dirty="0">
-                <a:solidFill>
-                  <a:srgbClr val="212121"/>
-                </a:solidFill>
-                <a:latin typeface="Calibri" pitchFamily="34" charset="0"/>
-                <a:ea typeface="Calibri" pitchFamily="34" charset="-122"/>
-                <a:cs typeface="Calibri" pitchFamily="34" charset="-120"/>
-              </a:rPr>
-              <a:t>Third-party frameworks (LangChain, CrewAI, etc.)</a:t>
-            </a:r>
-            <a:endParaRPr lang="en-US" sz="1500" dirty="0"/>
-          </a:p>
-          <a:p>
-            <a:pPr marL="342900" indent="-342900">
-              <a:spcAft>
-                <a:spcPts val="600"/>
-              </a:spcAft>
-              <a:buSzPct val="100000"/>
-              <a:buChar char="•"/>
-            </a:pPr>
-            <a:r>
-              <a:rPr lang="en-US" sz="1500" dirty="0">
-                <a:solidFill>
-                  <a:srgbClr val="212121"/>
-                </a:solidFill>
-                <a:latin typeface="Calibri" pitchFamily="34" charset="0"/>
-                <a:ea typeface="Calibri" pitchFamily="34" charset="-122"/>
-                <a:cs typeface="Calibri" pitchFamily="34" charset="-120"/>
-              </a:rPr>
-              <a:t>Model fine-tuning, distillation, training</a:t>
-            </a:r>
-            <a:endParaRPr lang="en-US" sz="1500" dirty="0"/>
-          </a:p>
-          <a:p>
-            <a:pPr marL="342900" indent="-342900">
-              <a:spcAft>
-                <a:spcPts val="600"/>
-              </a:spcAft>
-              <a:buSzPct val="100000"/>
-              <a:buChar char="•"/>
-            </a:pPr>
-            <a:r>
-              <a:rPr lang="en-US" sz="1500" dirty="0">
-                <a:solidFill>
-                  <a:srgbClr val="212121"/>
-                </a:solidFill>
-                <a:latin typeface="Calibri" pitchFamily="34" charset="0"/>
-                <a:ea typeface="Calibri" pitchFamily="34" charset="-122"/>
-                <a:cs typeface="Calibri" pitchFamily="34" charset="-120"/>
-              </a:rPr>
-              <a:t>On-prem / air-gapped deployments</a:t>
+              <a:t>Evaluators, tracing, and safety</a:t>
             </a:r>
             <a:endParaRPr lang="en-US" sz="1500" dirty="0"/>
           </a:p>
@@ -4335,870 +6818,160 @@
                 <a:ea typeface="Calibri" pitchFamily="34" charset="-122"/>
                 <a:cs typeface="Calibri" pitchFamily="34" charset="-120"/>
               </a:rPr>
-              <a:t>Roadmap — how the week hangs together</a:t>
+              <a:t>What MAF gives you</a:t>
             </a:r>
             <a:endParaRPr lang="en-US" sz="2800" dirty="0"/>
           </a:p>
         </p:txBody>
       </p:sp>
-      <p:graphicFrame>
-        <p:nvGraphicFramePr>
-          <p:cNvPr id="9" name="Table 0"/>
-          <p:cNvGraphicFramePr>
-            <a:graphicFrameLocks noGrp="1"/>
-          </p:cNvGraphicFramePr>
-          <p:nvPr>
-            <p:extLst>
-              <p:ext uri="{D42A27DB-BD31-4B8C-83A1-F6EECF244321}">
-                <p14:modId xmlns:p14="http://schemas.microsoft.com/office/powerpoint/2010/main" val="1579011935"/>
-              </p:ext>
-            </p:extLst>
-          </p:nvPr>
-        </p:nvGraphicFramePr>
-        <p:xfrm>
-          <a:off x="365760" y="1097280"/>
-          <a:ext cx="8412480" cy="914400"/>
-        </p:xfrm>
-        <a:graphic>
-          <a:graphicData uri="http://schemas.openxmlformats.org/drawingml/2006/table">
-            <a:tbl>
-              <a:tblPr/>
-              <a:tblGrid>
-                <a:gridCol w="731520"/>
-                <a:gridCol w="7680960"/>
-              </a:tblGrid>
-              <a:tr h="457200">
-                <a:tc>
-                  <a:txBody>
-                    <a:bodyPr/>
-                    <a:lstStyle/>
-                    <a:p>
-                      <a:pPr indent="0" marL="0">
-                        <a:buNone/>
-                      </a:pPr>
-                      <a:r>
-                        <a:rPr lang="en-US" sz="1300" b="1" dirty="0">
-                          <a:solidFill>
-                            <a:srgbClr val="FFFFFF"/>
-                          </a:solidFill>
-                          <a:latin typeface="Calibri" pitchFamily="34" charset="0"/>
-                          <a:ea typeface="Calibri" pitchFamily="34" charset="-122"/>
-                          <a:cs typeface="Calibri" pitchFamily="34" charset="-120"/>
-                        </a:rPr>
-                        <a:t>Day</a:t>
-                      </a:r>
-                      <a:endParaRPr lang="en-US" sz="1300" dirty="0">
-                        <a:latin typeface="Calibri" charset="0"/>
-                        <a:ea typeface="Calibri" charset="0"/>
-                        <a:cs typeface="Calibri" charset="0"/>
-                      </a:endParaRPr>
-                    </a:p>
-                  </a:txBody>
-                  <a:tcPr marL="54864" marR="54864" marT="54864" marB="54864" anchor="ctr">
-                    <a:lnL w="6350" cap="flat" cmpd="sng" algn="ctr">
-                      <a:solidFill>
-                        <a:srgbClr val="D1D5DB"/>
-                      </a:solidFill>
-                      <a:prstDash val="solid"/>
-                      <a:round/>
-                      <a:headEnd type="none" w="med" len="med"/>
-                      <a:tailEnd type="none" w="med" len="med"/>
-                    </a:lnL>
-                    <a:lnR w="6350" cap="flat" cmpd="sng" algn="ctr">
-                      <a:solidFill>
-                        <a:srgbClr val="D1D5DB"/>
-                      </a:solidFill>
-                      <a:prstDash val="solid"/>
-                      <a:round/>
-                      <a:headEnd type="none" w="med" len="med"/>
-                      <a:tailEnd type="none" w="med" len="med"/>
-                    </a:lnR>
-                    <a:lnT w="6350" cap="flat" cmpd="sng" algn="ctr">
-                      <a:solidFill>
-                        <a:srgbClr val="D1D5DB"/>
-                      </a:solidFill>
-                      <a:prstDash val="solid"/>
-                      <a:round/>
-                      <a:headEnd type="none" w="med" len="med"/>
-                      <a:tailEnd type="none" w="med" len="med"/>
-                    </a:lnT>
-                    <a:lnB w="6350" cap="flat" cmpd="sng" algn="ctr">
-                      <a:solidFill>
-                        <a:srgbClr val="D1D5DB"/>
-                      </a:solidFill>
-                      <a:prstDash val="solid"/>
-                      <a:round/>
-                      <a:headEnd type="none" w="med" len="med"/>
-                      <a:tailEnd type="none" w="med" len="med"/>
-                    </a:lnB>
-                    <a:solidFill>
-                      <a:srgbClr val="1E2761"/>
-                    </a:solidFill>
-                  </a:tcPr>
-                </a:tc>
-                <a:tc>
-                  <a:txBody>
-                    <a:bodyPr/>
-                    <a:lstStyle/>
-                    <a:p>
-                      <a:pPr indent="0" marL="0">
-                        <a:buNone/>
-                      </a:pPr>
-                      <a:r>
-                        <a:rPr lang="en-US" sz="1300" b="1" dirty="0">
-                          <a:solidFill>
-                            <a:srgbClr val="FFFFFF"/>
-                          </a:solidFill>
-                          <a:latin typeface="Calibri" pitchFamily="34" charset="0"/>
-                          <a:ea typeface="Calibri" pitchFamily="34" charset="-122"/>
-                          <a:cs typeface="Calibri" pitchFamily="34" charset="-120"/>
-                        </a:rPr>
-                        <a:t>Theme</a:t>
-                      </a:r>
-                      <a:endParaRPr lang="en-US" sz="1300" dirty="0">
-                        <a:latin typeface="Calibri" charset="0"/>
-                        <a:ea typeface="Calibri" charset="0"/>
-                        <a:cs typeface="Calibri" charset="0"/>
-                      </a:endParaRPr>
-                    </a:p>
-                  </a:txBody>
-                  <a:tcPr marL="54864" marR="54864" marT="54864" marB="54864" anchor="ctr">
-                    <a:lnL w="6350" cap="flat" cmpd="sng" algn="ctr">
-                      <a:solidFill>
-                        <a:srgbClr val="D1D5DB"/>
-                      </a:solidFill>
-                      <a:prstDash val="solid"/>
-                      <a:round/>
-                      <a:headEnd type="none" w="med" len="med"/>
-                      <a:tailEnd type="none" w="med" len="med"/>
-                    </a:lnL>
-                    <a:lnR w="6350" cap="flat" cmpd="sng" algn="ctr">
-                      <a:solidFill>
-                        <a:srgbClr val="D1D5DB"/>
-                      </a:solidFill>
-                      <a:prstDash val="solid"/>
-                      <a:round/>
-                      <a:headEnd type="none" w="med" len="med"/>
-                      <a:tailEnd type="none" w="med" len="med"/>
-                    </a:lnR>
-                    <a:lnT w="6350" cap="flat" cmpd="sng" algn="ctr">
-                      <a:solidFill>
-                        <a:srgbClr val="D1D5DB"/>
-                      </a:solidFill>
-                      <a:prstDash val="solid"/>
-                      <a:round/>
-                      <a:headEnd type="none" w="med" len="med"/>
-                      <a:tailEnd type="none" w="med" len="med"/>
-                    </a:lnT>
-                    <a:lnB w="6350" cap="flat" cmpd="sng" algn="ctr">
-                      <a:solidFill>
-                        <a:srgbClr val="D1D5DB"/>
-                      </a:solidFill>
-                      <a:prstDash val="solid"/>
-                      <a:round/>
-                      <a:headEnd type="none" w="med" len="med"/>
-                      <a:tailEnd type="none" w="med" len="med"/>
-                    </a:lnB>
-                    <a:solidFill>
-                      <a:srgbClr val="1E2761"/>
-                    </a:solidFill>
-                  </a:tcPr>
-                </a:tc>
-              </a:tr>
-              <a:tr h="457200">
-                <a:tc>
-                  <a:txBody>
-                    <a:bodyPr/>
-                    <a:lstStyle/>
-                    <a:p>
-                      <a:pPr indent="0" marL="0">
-                        <a:buNone/>
-                      </a:pPr>
-                      <a:r>
-                        <a:rPr lang="en-US" sz="1300" dirty="0">
-                          <a:solidFill>
-                            <a:srgbClr val="212121"/>
-                          </a:solidFill>
-                          <a:latin typeface="Calibri" pitchFamily="34" charset="0"/>
-                          <a:ea typeface="Calibri" pitchFamily="34" charset="-122"/>
-                          <a:cs typeface="Calibri" pitchFamily="34" charset="-120"/>
-                        </a:rPr>
-                        <a:t>1</a:t>
-                      </a:r>
-                      <a:endParaRPr lang="en-US" sz="1300" dirty="0">
-                        <a:latin typeface="Calibri" charset="0"/>
-                        <a:ea typeface="Calibri" charset="0"/>
-                        <a:cs typeface="Calibri" charset="0"/>
-                      </a:endParaRPr>
-                    </a:p>
-                  </a:txBody>
-                  <a:tcPr marL="54864" marR="54864" marT="54864" marB="54864" anchor="ctr">
-                    <a:lnL w="6350" cap="flat" cmpd="sng" algn="ctr">
-                      <a:solidFill>
-                        <a:srgbClr val="D1D5DB"/>
-                      </a:solidFill>
-                      <a:prstDash val="solid"/>
-                      <a:round/>
-                      <a:headEnd type="none" w="med" len="med"/>
-                      <a:tailEnd type="none" w="med" len="med"/>
-                    </a:lnL>
-                    <a:lnR w="6350" cap="flat" cmpd="sng" algn="ctr">
-                      <a:solidFill>
-                        <a:srgbClr val="D1D5DB"/>
-                      </a:solidFill>
-                      <a:prstDash val="solid"/>
-                      <a:round/>
-                      <a:headEnd type="none" w="med" len="med"/>
-                      <a:tailEnd type="none" w="med" len="med"/>
-                    </a:lnR>
-                    <a:lnT w="6350" cap="flat" cmpd="sng" algn="ctr">
-                      <a:solidFill>
-                        <a:srgbClr val="D1D5DB"/>
-                      </a:solidFill>
-                      <a:prstDash val="solid"/>
-                      <a:round/>
-                      <a:headEnd type="none" w="med" len="med"/>
-                      <a:tailEnd type="none" w="med" len="med"/>
-                    </a:lnT>
-                    <a:lnB w="6350" cap="flat" cmpd="sng" algn="ctr">
-                      <a:solidFill>
-                        <a:srgbClr val="D1D5DB"/>
-                      </a:solidFill>
-                      <a:prstDash val="solid"/>
-                      <a:round/>
-                      <a:headEnd type="none" w="med" len="med"/>
-                      <a:tailEnd type="none" w="med" len="med"/>
-                    </a:lnB>
-                    <a:solidFill>
-                      <a:srgbClr val="FFFFFF"/>
-                    </a:solidFill>
-                  </a:tcPr>
-                </a:tc>
-                <a:tc>
-                  <a:txBody>
-                    <a:bodyPr/>
-                    <a:lstStyle/>
-                    <a:p>
-                      <a:pPr indent="0" marL="0">
-                        <a:buNone/>
-                      </a:pPr>
-                      <a:r>
-                        <a:rPr lang="en-US" sz="1300" dirty="0">
-                          <a:solidFill>
-                            <a:srgbClr val="212121"/>
-                          </a:solidFill>
-                          <a:latin typeface="Calibri" pitchFamily="34" charset="0"/>
-                          <a:ea typeface="Calibri" pitchFamily="34" charset="-122"/>
-                          <a:cs typeface="Calibri" pitchFamily="34" charset="-120"/>
-                        </a:rPr>
-                        <a:t>Foundations: the stack, both hosting styles, first working agents</a:t>
-                      </a:r>
-                      <a:endParaRPr lang="en-US" sz="1300" dirty="0">
-                        <a:latin typeface="Calibri" charset="0"/>
-                        <a:ea typeface="Calibri" charset="0"/>
-                        <a:cs typeface="Calibri" charset="0"/>
-                      </a:endParaRPr>
-                    </a:p>
-                  </a:txBody>
-                  <a:tcPr marL="54864" marR="54864" marT="54864" marB="54864" anchor="ctr">
-                    <a:lnL w="6350" cap="flat" cmpd="sng" algn="ctr">
-                      <a:solidFill>
-                        <a:srgbClr val="D1D5DB"/>
-                      </a:solidFill>
-                      <a:prstDash val="solid"/>
-                      <a:round/>
-                      <a:headEnd type="none" w="med" len="med"/>
-                      <a:tailEnd type="none" w="med" len="med"/>
-                    </a:lnL>
-                    <a:lnR w="6350" cap="flat" cmpd="sng" algn="ctr">
-                      <a:solidFill>
-                        <a:srgbClr val="D1D5DB"/>
-                      </a:solidFill>
-                      <a:prstDash val="solid"/>
-                      <a:round/>
-                      <a:headEnd type="none" w="med" len="med"/>
-                      <a:tailEnd type="none" w="med" len="med"/>
-                    </a:lnR>
-                    <a:lnT w="6350" cap="flat" cmpd="sng" algn="ctr">
-                      <a:solidFill>
-                        <a:srgbClr val="D1D5DB"/>
-                      </a:solidFill>
-                      <a:prstDash val="solid"/>
-                      <a:round/>
-                      <a:headEnd type="none" w="med" len="med"/>
-                      <a:tailEnd type="none" w="med" len="med"/>
-                    </a:lnT>
-                    <a:lnB w="6350" cap="flat" cmpd="sng" algn="ctr">
-                      <a:solidFill>
-                        <a:srgbClr val="D1D5DB"/>
-                      </a:solidFill>
-                      <a:prstDash val="solid"/>
-                      <a:round/>
-                      <a:headEnd type="none" w="med" len="med"/>
-                      <a:tailEnd type="none" w="med" len="med"/>
-                    </a:lnB>
-                    <a:solidFill>
-                      <a:srgbClr val="FFFFFF"/>
-                    </a:solidFill>
-                  </a:tcPr>
-                </a:tc>
-              </a:tr>
-              <a:tr h="457200">
-                <a:tc>
-                  <a:txBody>
-                    <a:bodyPr/>
-                    <a:lstStyle/>
-                    <a:p>
-                      <a:pPr indent="0" marL="0">
-                        <a:buNone/>
-                      </a:pPr>
-                      <a:r>
-                        <a:rPr lang="en-US" sz="1300" dirty="0">
-                          <a:solidFill>
-                            <a:srgbClr val="212121"/>
-                          </a:solidFill>
-                          <a:latin typeface="Calibri" pitchFamily="34" charset="0"/>
-                          <a:ea typeface="Calibri" pitchFamily="34" charset="-122"/>
-                          <a:cs typeface="Calibri" pitchFamily="34" charset="-120"/>
-                        </a:rPr>
-                        <a:t>2</a:t>
-                      </a:r>
-                      <a:endParaRPr lang="en-US" sz="1300" dirty="0">
-                        <a:latin typeface="Calibri" charset="0"/>
-                        <a:ea typeface="Calibri" charset="0"/>
-                        <a:cs typeface="Calibri" charset="0"/>
-                      </a:endParaRPr>
-                    </a:p>
-                  </a:txBody>
-                  <a:tcPr marL="54864" marR="54864" marT="54864" marB="54864" anchor="ctr">
-                    <a:lnL w="6350" cap="flat" cmpd="sng" algn="ctr">
-                      <a:solidFill>
-                        <a:srgbClr val="D1D5DB"/>
-                      </a:solidFill>
-                      <a:prstDash val="solid"/>
-                      <a:round/>
-                      <a:headEnd type="none" w="med" len="med"/>
-                      <a:tailEnd type="none" w="med" len="med"/>
-                    </a:lnL>
-                    <a:lnR w="6350" cap="flat" cmpd="sng" algn="ctr">
-                      <a:solidFill>
-                        <a:srgbClr val="D1D5DB"/>
-                      </a:solidFill>
-                      <a:prstDash val="solid"/>
-                      <a:round/>
-                      <a:headEnd type="none" w="med" len="med"/>
-                      <a:tailEnd type="none" w="med" len="med"/>
-                    </a:lnR>
-                    <a:lnT w="6350" cap="flat" cmpd="sng" algn="ctr">
-                      <a:solidFill>
-                        <a:srgbClr val="D1D5DB"/>
-                      </a:solidFill>
-                      <a:prstDash val="solid"/>
-                      <a:round/>
-                      <a:headEnd type="none" w="med" len="med"/>
-                      <a:tailEnd type="none" w="med" len="med"/>
-                    </a:lnT>
-                    <a:lnB w="6350" cap="flat" cmpd="sng" algn="ctr">
-                      <a:solidFill>
-                        <a:srgbClr val="D1D5DB"/>
-                      </a:solidFill>
-                      <a:prstDash val="solid"/>
-                      <a:round/>
-                      <a:headEnd type="none" w="med" len="med"/>
-                      <a:tailEnd type="none" w="med" len="med"/>
-                    </a:lnB>
-                    <a:solidFill>
-                      <a:srgbClr val="F3F4F6"/>
-                    </a:solidFill>
-                  </a:tcPr>
-                </a:tc>
-                <a:tc>
-                  <a:txBody>
-                    <a:bodyPr/>
-                    <a:lstStyle/>
-                    <a:p>
-                      <a:pPr indent="0" marL="0">
-                        <a:buNone/>
-                      </a:pPr>
-                      <a:r>
-                        <a:rPr lang="en-US" sz="1300" dirty="0">
-                          <a:solidFill>
-                            <a:srgbClr val="212121"/>
-                          </a:solidFill>
-                          <a:latin typeface="Calibri" pitchFamily="34" charset="0"/>
-                          <a:ea typeface="Calibri" pitchFamily="34" charset="-122"/>
-                          <a:cs typeface="Calibri" pitchFamily="34" charset="-120"/>
-                        </a:rPr>
-                        <a:t>Grounding (Foundry IQ + custom RAG) and tools in depth</a:t>
-                      </a:r>
-                      <a:endParaRPr lang="en-US" sz="1300" dirty="0">
-                        <a:latin typeface="Calibri" charset="0"/>
-                        <a:ea typeface="Calibri" charset="0"/>
-                        <a:cs typeface="Calibri" charset="0"/>
-                      </a:endParaRPr>
-                    </a:p>
-                  </a:txBody>
-                  <a:tcPr marL="54864" marR="54864" marT="54864" marB="54864" anchor="ctr">
-                    <a:lnL w="6350" cap="flat" cmpd="sng" algn="ctr">
-                      <a:solidFill>
-                        <a:srgbClr val="D1D5DB"/>
-                      </a:solidFill>
-                      <a:prstDash val="solid"/>
-                      <a:round/>
-                      <a:headEnd type="none" w="med" len="med"/>
-                      <a:tailEnd type="none" w="med" len="med"/>
-                    </a:lnL>
-                    <a:lnR w="6350" cap="flat" cmpd="sng" algn="ctr">
-                      <a:solidFill>
-                        <a:srgbClr val="D1D5DB"/>
-                      </a:solidFill>
-                      <a:prstDash val="solid"/>
-                      <a:round/>
-                      <a:headEnd type="none" w="med" len="med"/>
-                      <a:tailEnd type="none" w="med" len="med"/>
-                    </a:lnR>
-                    <a:lnT w="6350" cap="flat" cmpd="sng" algn="ctr">
-                      <a:solidFill>
-                        <a:srgbClr val="D1D5DB"/>
-                      </a:solidFill>
-                      <a:prstDash val="solid"/>
-                      <a:round/>
-                      <a:headEnd type="none" w="med" len="med"/>
-                      <a:tailEnd type="none" w="med" len="med"/>
-                    </a:lnT>
-                    <a:lnB w="6350" cap="flat" cmpd="sng" algn="ctr">
-                      <a:solidFill>
-                        <a:srgbClr val="D1D5DB"/>
-                      </a:solidFill>
-                      <a:prstDash val="solid"/>
-                      <a:round/>
-                      <a:headEnd type="none" w="med" len="med"/>
-                      <a:tailEnd type="none" w="med" len="med"/>
-                    </a:lnB>
-                    <a:solidFill>
-                      <a:srgbClr val="F3F4F6"/>
-                    </a:solidFill>
-                  </a:tcPr>
-                </a:tc>
-              </a:tr>
-              <a:tr h="457200">
-                <a:tc>
-                  <a:txBody>
-                    <a:bodyPr/>
-                    <a:lstStyle/>
-                    <a:p>
-                      <a:pPr indent="0" marL="0">
-                        <a:buNone/>
-                      </a:pPr>
-                      <a:r>
-                        <a:rPr lang="en-US" sz="1300" dirty="0">
-                          <a:solidFill>
-                            <a:srgbClr val="212121"/>
-                          </a:solidFill>
-                          <a:latin typeface="Calibri" pitchFamily="34" charset="0"/>
-                          <a:ea typeface="Calibri" pitchFamily="34" charset="-122"/>
-                          <a:cs typeface="Calibri" pitchFamily="34" charset="-120"/>
-                        </a:rPr>
-                        <a:t>3</a:t>
-                      </a:r>
-                      <a:endParaRPr lang="en-US" sz="1300" dirty="0">
-                        <a:latin typeface="Calibri" charset="0"/>
-                        <a:ea typeface="Calibri" charset="0"/>
-                        <a:cs typeface="Calibri" charset="0"/>
-                      </a:endParaRPr>
-                    </a:p>
-                  </a:txBody>
-                  <a:tcPr marL="54864" marR="54864" marT="54864" marB="54864" anchor="ctr">
-                    <a:lnL w="6350" cap="flat" cmpd="sng" algn="ctr">
-                      <a:solidFill>
-                        <a:srgbClr val="D1D5DB"/>
-                      </a:solidFill>
-                      <a:prstDash val="solid"/>
-                      <a:round/>
-                      <a:headEnd type="none" w="med" len="med"/>
-                      <a:tailEnd type="none" w="med" len="med"/>
-                    </a:lnL>
-                    <a:lnR w="6350" cap="flat" cmpd="sng" algn="ctr">
-                      <a:solidFill>
-                        <a:srgbClr val="D1D5DB"/>
-                      </a:solidFill>
-                      <a:prstDash val="solid"/>
-                      <a:round/>
-                      <a:headEnd type="none" w="med" len="med"/>
-                      <a:tailEnd type="none" w="med" len="med"/>
-                    </a:lnR>
-                    <a:lnT w="6350" cap="flat" cmpd="sng" algn="ctr">
-                      <a:solidFill>
-                        <a:srgbClr val="D1D5DB"/>
-                      </a:solidFill>
-                      <a:prstDash val="solid"/>
-                      <a:round/>
-                      <a:headEnd type="none" w="med" len="med"/>
-                      <a:tailEnd type="none" w="med" len="med"/>
-                    </a:lnT>
-                    <a:lnB w="6350" cap="flat" cmpd="sng" algn="ctr">
-                      <a:solidFill>
-                        <a:srgbClr val="D1D5DB"/>
-                      </a:solidFill>
-                      <a:prstDash val="solid"/>
-                      <a:round/>
-                      <a:headEnd type="none" w="med" len="med"/>
-                      <a:tailEnd type="none" w="med" len="med"/>
-                    </a:lnB>
-                    <a:solidFill>
-                      <a:srgbClr val="FFFFFF"/>
-                    </a:solidFill>
-                  </a:tcPr>
-                </a:tc>
-                <a:tc>
-                  <a:txBody>
-                    <a:bodyPr/>
-                    <a:lstStyle/>
-                    <a:p>
-                      <a:pPr indent="0" marL="0">
-                        <a:buNone/>
-                      </a:pPr>
-                      <a:r>
-                        <a:rPr lang="en-US" sz="1300" dirty="0">
-                          <a:solidFill>
-                            <a:srgbClr val="212121"/>
-                          </a:solidFill>
-                          <a:latin typeface="Calibri" pitchFamily="34" charset="0"/>
-                          <a:ea typeface="Calibri" pitchFamily="34" charset="-122"/>
-                          <a:cs typeface="Calibri" pitchFamily="34" charset="-120"/>
-                        </a:rPr>
-                        <a:t>Single-agent depth: memory, streaming, structured outputs, MCP</a:t>
-                      </a:r>
-                      <a:endParaRPr lang="en-US" sz="1300" dirty="0">
-                        <a:latin typeface="Calibri" charset="0"/>
-                        <a:ea typeface="Calibri" charset="0"/>
-                        <a:cs typeface="Calibri" charset="0"/>
-                      </a:endParaRPr>
-                    </a:p>
-                  </a:txBody>
-                  <a:tcPr marL="54864" marR="54864" marT="54864" marB="54864" anchor="ctr">
-                    <a:lnL w="6350" cap="flat" cmpd="sng" algn="ctr">
-                      <a:solidFill>
-                        <a:srgbClr val="D1D5DB"/>
-                      </a:solidFill>
-                      <a:prstDash val="solid"/>
-                      <a:round/>
-                      <a:headEnd type="none" w="med" len="med"/>
-                      <a:tailEnd type="none" w="med" len="med"/>
-                    </a:lnL>
-                    <a:lnR w="6350" cap="flat" cmpd="sng" algn="ctr">
-                      <a:solidFill>
-                        <a:srgbClr val="D1D5DB"/>
-                      </a:solidFill>
-                      <a:prstDash val="solid"/>
-                      <a:round/>
-                      <a:headEnd type="none" w="med" len="med"/>
-                      <a:tailEnd type="none" w="med" len="med"/>
-                    </a:lnR>
-                    <a:lnT w="6350" cap="flat" cmpd="sng" algn="ctr">
-                      <a:solidFill>
-                        <a:srgbClr val="D1D5DB"/>
-                      </a:solidFill>
-                      <a:prstDash val="solid"/>
-                      <a:round/>
-                      <a:headEnd type="none" w="med" len="med"/>
-                      <a:tailEnd type="none" w="med" len="med"/>
-                    </a:lnT>
-                    <a:lnB w="6350" cap="flat" cmpd="sng" algn="ctr">
-                      <a:solidFill>
-                        <a:srgbClr val="D1D5DB"/>
-                      </a:solidFill>
-                      <a:prstDash val="solid"/>
-                      <a:round/>
-                      <a:headEnd type="none" w="med" len="med"/>
-                      <a:tailEnd type="none" w="med" len="med"/>
-                    </a:lnB>
-                    <a:solidFill>
-                      <a:srgbClr val="FFFFFF"/>
-                    </a:solidFill>
-                  </a:tcPr>
-                </a:tc>
-              </a:tr>
-              <a:tr h="457200">
-                <a:tc>
-                  <a:txBody>
-                    <a:bodyPr/>
-                    <a:lstStyle/>
-                    <a:p>
-                      <a:pPr indent="0" marL="0">
-                        <a:buNone/>
-                      </a:pPr>
-                      <a:r>
-                        <a:rPr lang="en-US" sz="1300" dirty="0">
-                          <a:solidFill>
-                            <a:srgbClr val="212121"/>
-                          </a:solidFill>
-                          <a:latin typeface="Calibri" pitchFamily="34" charset="0"/>
-                          <a:ea typeface="Calibri" pitchFamily="34" charset="-122"/>
-                          <a:cs typeface="Calibri" pitchFamily="34" charset="-120"/>
-                        </a:rPr>
-                        <a:t>4</a:t>
-                      </a:r>
-                      <a:endParaRPr lang="en-US" sz="1300" dirty="0">
-                        <a:latin typeface="Calibri" charset="0"/>
-                        <a:ea typeface="Calibri" charset="0"/>
-                        <a:cs typeface="Calibri" charset="0"/>
-                      </a:endParaRPr>
-                    </a:p>
-                  </a:txBody>
-                  <a:tcPr marL="54864" marR="54864" marT="54864" marB="54864" anchor="ctr">
-                    <a:lnL w="6350" cap="flat" cmpd="sng" algn="ctr">
-                      <a:solidFill>
-                        <a:srgbClr val="D1D5DB"/>
-                      </a:solidFill>
-                      <a:prstDash val="solid"/>
-                      <a:round/>
-                      <a:headEnd type="none" w="med" len="med"/>
-                      <a:tailEnd type="none" w="med" len="med"/>
-                    </a:lnL>
-                    <a:lnR w="6350" cap="flat" cmpd="sng" algn="ctr">
-                      <a:solidFill>
-                        <a:srgbClr val="D1D5DB"/>
-                      </a:solidFill>
-                      <a:prstDash val="solid"/>
-                      <a:round/>
-                      <a:headEnd type="none" w="med" len="med"/>
-                      <a:tailEnd type="none" w="med" len="med"/>
-                    </a:lnR>
-                    <a:lnT w="6350" cap="flat" cmpd="sng" algn="ctr">
-                      <a:solidFill>
-                        <a:srgbClr val="D1D5DB"/>
-                      </a:solidFill>
-                      <a:prstDash val="solid"/>
-                      <a:round/>
-                      <a:headEnd type="none" w="med" len="med"/>
-                      <a:tailEnd type="none" w="med" len="med"/>
-                    </a:lnT>
-                    <a:lnB w="6350" cap="flat" cmpd="sng" algn="ctr">
-                      <a:solidFill>
-                        <a:srgbClr val="D1D5DB"/>
-                      </a:solidFill>
-                      <a:prstDash val="solid"/>
-                      <a:round/>
-                      <a:headEnd type="none" w="med" len="med"/>
-                      <a:tailEnd type="none" w="med" len="med"/>
-                    </a:lnB>
-                    <a:solidFill>
-                      <a:srgbClr val="F3F4F6"/>
-                    </a:solidFill>
-                  </a:tcPr>
-                </a:tc>
-                <a:tc>
-                  <a:txBody>
-                    <a:bodyPr/>
-                    <a:lstStyle/>
-                    <a:p>
-                      <a:pPr indent="0" marL="0">
-                        <a:buNone/>
-                      </a:pPr>
-                      <a:r>
-                        <a:rPr lang="en-US" sz="1300" dirty="0">
-                          <a:solidFill>
-                            <a:srgbClr val="212121"/>
-                          </a:solidFill>
-                          <a:latin typeface="Calibri" pitchFamily="34" charset="0"/>
-                          <a:ea typeface="Calibri" pitchFamily="34" charset="-122"/>
-                          <a:cs typeface="Calibri" pitchFamily="34" charset="-120"/>
-                        </a:rPr>
-                        <a:t>Multi-agent patterns + evaluation as a first-class activity</a:t>
-                      </a:r>
-                      <a:endParaRPr lang="en-US" sz="1300" dirty="0">
-                        <a:latin typeface="Calibri" charset="0"/>
-                        <a:ea typeface="Calibri" charset="0"/>
-                        <a:cs typeface="Calibri" charset="0"/>
-                      </a:endParaRPr>
-                    </a:p>
-                  </a:txBody>
-                  <a:tcPr marL="54864" marR="54864" marT="54864" marB="54864" anchor="ctr">
-                    <a:lnL w="6350" cap="flat" cmpd="sng" algn="ctr">
-                      <a:solidFill>
-                        <a:srgbClr val="D1D5DB"/>
-                      </a:solidFill>
-                      <a:prstDash val="solid"/>
-                      <a:round/>
-                      <a:headEnd type="none" w="med" len="med"/>
-                      <a:tailEnd type="none" w="med" len="med"/>
-                    </a:lnL>
-                    <a:lnR w="6350" cap="flat" cmpd="sng" algn="ctr">
-                      <a:solidFill>
-                        <a:srgbClr val="D1D5DB"/>
-                      </a:solidFill>
-                      <a:prstDash val="solid"/>
-                      <a:round/>
-                      <a:headEnd type="none" w="med" len="med"/>
-                      <a:tailEnd type="none" w="med" len="med"/>
-                    </a:lnR>
-                    <a:lnT w="6350" cap="flat" cmpd="sng" algn="ctr">
-                      <a:solidFill>
-                        <a:srgbClr val="D1D5DB"/>
-                      </a:solidFill>
-                      <a:prstDash val="solid"/>
-                      <a:round/>
-                      <a:headEnd type="none" w="med" len="med"/>
-                      <a:tailEnd type="none" w="med" len="med"/>
-                    </a:lnT>
-                    <a:lnB w="6350" cap="flat" cmpd="sng" algn="ctr">
-                      <a:solidFill>
-                        <a:srgbClr val="D1D5DB"/>
-                      </a:solidFill>
-                      <a:prstDash val="solid"/>
-                      <a:round/>
-                      <a:headEnd type="none" w="med" len="med"/>
-                      <a:tailEnd type="none" w="med" len="med"/>
-                    </a:lnB>
-                    <a:solidFill>
-                      <a:srgbClr val="F3F4F6"/>
-                    </a:solidFill>
-                  </a:tcPr>
-                </a:tc>
-              </a:tr>
-              <a:tr h="457200">
-                <a:tc>
-                  <a:txBody>
-                    <a:bodyPr/>
-                    <a:lstStyle/>
-                    <a:p>
-                      <a:pPr indent="0" marL="0">
-                        <a:buNone/>
-                      </a:pPr>
-                      <a:r>
-                        <a:rPr lang="en-US" sz="1300" dirty="0">
-                          <a:solidFill>
-                            <a:srgbClr val="212121"/>
-                          </a:solidFill>
-                          <a:latin typeface="Calibri" pitchFamily="34" charset="0"/>
-                          <a:ea typeface="Calibri" pitchFamily="34" charset="-122"/>
-                          <a:cs typeface="Calibri" pitchFamily="34" charset="-120"/>
-                        </a:rPr>
-                        <a:t>5</a:t>
-                      </a:r>
-                      <a:endParaRPr lang="en-US" sz="1300" dirty="0">
-                        <a:latin typeface="Calibri" charset="0"/>
-                        <a:ea typeface="Calibri" charset="0"/>
-                        <a:cs typeface="Calibri" charset="0"/>
-                      </a:endParaRPr>
-                    </a:p>
-                  </a:txBody>
-                  <a:tcPr marL="54864" marR="54864" marT="54864" marB="54864" anchor="ctr">
-                    <a:lnL w="6350" cap="flat" cmpd="sng" algn="ctr">
-                      <a:solidFill>
-                        <a:srgbClr val="D1D5DB"/>
-                      </a:solidFill>
-                      <a:prstDash val="solid"/>
-                      <a:round/>
-                      <a:headEnd type="none" w="med" len="med"/>
-                      <a:tailEnd type="none" w="med" len="med"/>
-                    </a:lnL>
-                    <a:lnR w="6350" cap="flat" cmpd="sng" algn="ctr">
-                      <a:solidFill>
-                        <a:srgbClr val="D1D5DB"/>
-                      </a:solidFill>
-                      <a:prstDash val="solid"/>
-                      <a:round/>
-                      <a:headEnd type="none" w="med" len="med"/>
-                      <a:tailEnd type="none" w="med" len="med"/>
-                    </a:lnR>
-                    <a:lnT w="6350" cap="flat" cmpd="sng" algn="ctr">
-                      <a:solidFill>
-                        <a:srgbClr val="D1D5DB"/>
-                      </a:solidFill>
-                      <a:prstDash val="solid"/>
-                      <a:round/>
-                      <a:headEnd type="none" w="med" len="med"/>
-                      <a:tailEnd type="none" w="med" len="med"/>
-                    </a:lnT>
-                    <a:lnB w="6350" cap="flat" cmpd="sng" algn="ctr">
-                      <a:solidFill>
-                        <a:srgbClr val="D1D5DB"/>
-                      </a:solidFill>
-                      <a:prstDash val="solid"/>
-                      <a:round/>
-                      <a:headEnd type="none" w="med" len="med"/>
-                      <a:tailEnd type="none" w="med" len="med"/>
-                    </a:lnB>
-                    <a:solidFill>
-                      <a:srgbClr val="FFFFFF"/>
-                    </a:solidFill>
-                  </a:tcPr>
-                </a:tc>
-                <a:tc>
-                  <a:txBody>
-                    <a:bodyPr/>
-                    <a:lstStyle/>
-                    <a:p>
-                      <a:pPr indent="0" marL="0">
-                        <a:buNone/>
-                      </a:pPr>
-                      <a:r>
-                        <a:rPr lang="en-US" sz="1300" dirty="0">
-                          <a:solidFill>
-                            <a:srgbClr val="212121"/>
-                          </a:solidFill>
-                          <a:latin typeface="Calibri" pitchFamily="34" charset="0"/>
-                          <a:ea typeface="Calibri" pitchFamily="34" charset="-122"/>
-                          <a:cs typeface="Calibri" pitchFamily="34" charset="-120"/>
-                        </a:rPr>
-                        <a:t>Production concerns; capstone project kickoff</a:t>
-                      </a:r>
-                      <a:endParaRPr lang="en-US" sz="1300" dirty="0">
-                        <a:latin typeface="Calibri" charset="0"/>
-                        <a:ea typeface="Calibri" charset="0"/>
-                        <a:cs typeface="Calibri" charset="0"/>
-                      </a:endParaRPr>
-                    </a:p>
-                  </a:txBody>
-                  <a:tcPr marL="54864" marR="54864" marT="54864" marB="54864" anchor="ctr">
-                    <a:lnL w="6350" cap="flat" cmpd="sng" algn="ctr">
-                      <a:solidFill>
-                        <a:srgbClr val="D1D5DB"/>
-                      </a:solidFill>
-                      <a:prstDash val="solid"/>
-                      <a:round/>
-                      <a:headEnd type="none" w="med" len="med"/>
-                      <a:tailEnd type="none" w="med" len="med"/>
-                    </a:lnL>
-                    <a:lnR w="6350" cap="flat" cmpd="sng" algn="ctr">
-                      <a:solidFill>
-                        <a:srgbClr val="D1D5DB"/>
-                      </a:solidFill>
-                      <a:prstDash val="solid"/>
-                      <a:round/>
-                      <a:headEnd type="none" w="med" len="med"/>
-                      <a:tailEnd type="none" w="med" len="med"/>
-                    </a:lnR>
-                    <a:lnT w="6350" cap="flat" cmpd="sng" algn="ctr">
-                      <a:solidFill>
-                        <a:srgbClr val="D1D5DB"/>
-                      </a:solidFill>
-                      <a:prstDash val="solid"/>
-                      <a:round/>
-                      <a:headEnd type="none" w="med" len="med"/>
-                      <a:tailEnd type="none" w="med" len="med"/>
-                    </a:lnT>
-                    <a:lnB w="6350" cap="flat" cmpd="sng" algn="ctr">
-                      <a:solidFill>
-                        <a:srgbClr val="D1D5DB"/>
-                      </a:solidFill>
-                      <a:prstDash val="solid"/>
-                      <a:round/>
-                      <a:headEnd type="none" w="med" len="med"/>
-                      <a:tailEnd type="none" w="med" len="med"/>
-                    </a:lnB>
-                    <a:solidFill>
-                      <a:srgbClr val="FFFFFF"/>
-                    </a:solidFill>
-                  </a:tcPr>
-                </a:tc>
-              </a:tr>
-            </a:tbl>
-          </a:graphicData>
-        </a:graphic>
-      </p:graphicFrame>
+      <p:sp>
+        <p:nvSpPr>
+          <p:cNvPr id="5" name="Text 3"/>
+          <p:cNvSpPr/>
+          <p:nvPr/>
+        </p:nvSpPr>
+        <p:spPr>
+          <a:xfrm>
+            <a:off x="365760" y="1097280"/>
+            <a:ext cx="8412480" cy="3749040"/>
+          </a:xfrm>
+          <a:prstGeom prst="rect">
+            <a:avLst/>
+          </a:prstGeom>
+          <a:noFill/>
+          <a:ln/>
+        </p:spPr>
+        <p:txBody>
+          <a:bodyPr wrap="square" rtlCol="0" anchor="ctr"/>
+          <a:lstStyle/>
+          <a:p>
+            <a:pPr marL="342900" indent="-342900">
+              <a:spcAft>
+                <a:spcPts val="600"/>
+              </a:spcAft>
+              <a:buSzPct val="100000"/>
+              <a:buChar char="•"/>
+            </a:pPr>
+            <a:r>
+              <a:rPr lang="en-US" sz="1500" dirty="0">
+                <a:solidFill>
+                  <a:srgbClr val="212121"/>
+                </a:solidFill>
+                <a:latin typeface="Calibri" pitchFamily="34" charset="0"/>
+                <a:ea typeface="Calibri" pitchFamily="34" charset="-122"/>
+                <a:cs typeface="Calibri" pitchFamily="34" charset="-120"/>
+              </a:rPr>
+              <a:t>One SDK for authoring agents — Python and C#</a:t>
+            </a:r>
+            <a:endParaRPr lang="en-US" sz="1500" dirty="0"/>
+          </a:p>
+          <a:p>
+            <a:pPr marL="342900" indent="-342900">
+              <a:spcAft>
+                <a:spcPts val="600"/>
+              </a:spcAft>
+              <a:buSzPct val="100000"/>
+              <a:buChar char="•"/>
+            </a:pPr>
+            <a:r>
+              <a:rPr lang="en-US" sz="1500" dirty="0">
+                <a:solidFill>
+                  <a:srgbClr val="212121"/>
+                </a:solidFill>
+                <a:latin typeface="Calibri" pitchFamily="34" charset="0"/>
+                <a:ea typeface="Calibri" pitchFamily="34" charset="-122"/>
+                <a:cs typeface="Calibri" pitchFamily="34" charset="-120"/>
+              </a:rPr>
+              <a:t>One vocabulary: agents, threads, tools, runs</a:t>
+            </a:r>
+            <a:endParaRPr lang="en-US" sz="1500" dirty="0"/>
+          </a:p>
+          <a:p>
+            <a:pPr marL="342900" indent="-342900">
+              <a:spcAft>
+                <a:spcPts val="600"/>
+              </a:spcAft>
+              <a:buSzPct val="100000"/>
+              <a:buChar char="•"/>
+            </a:pPr>
+            <a:r>
+              <a:rPr lang="en-US" sz="1500" dirty="0">
+                <a:solidFill>
+                  <a:srgbClr val="212121"/>
+                </a:solidFill>
+                <a:latin typeface="Calibri" pitchFamily="34" charset="0"/>
+                <a:ea typeface="Calibri" pitchFamily="34" charset="-122"/>
+                <a:cs typeface="Calibri" pitchFamily="34" charset="-120"/>
+              </a:rPr>
+              <a:t>First-class streaming, memory, structured outputs</a:t>
+            </a:r>
+            <a:endParaRPr lang="en-US" sz="1500" dirty="0"/>
+          </a:p>
+          <a:p>
+            <a:pPr marL="342900" indent="-342900">
+              <a:spcAft>
+                <a:spcPts val="600"/>
+              </a:spcAft>
+              <a:buSzPct val="100000"/>
+              <a:buChar char="•"/>
+            </a:pPr>
+            <a:r>
+              <a:rPr lang="en-US" sz="1500" dirty="0">
+                <a:solidFill>
+                  <a:srgbClr val="212121"/>
+                </a:solidFill>
+                <a:latin typeface="Calibri" pitchFamily="34" charset="0"/>
+                <a:ea typeface="Calibri" pitchFamily="34" charset="-122"/>
+                <a:cs typeface="Calibri" pitchFamily="34" charset="-120"/>
+              </a:rPr>
+              <a:t>Multi-agent orchestration primitives</a:t>
+            </a:r>
+            <a:endParaRPr lang="en-US" sz="1500" dirty="0"/>
+          </a:p>
+          <a:p>
+            <a:pPr marL="342900" indent="-342900">
+              <a:spcAft>
+                <a:spcPts val="600"/>
+              </a:spcAft>
+              <a:buSzPct val="100000"/>
+              <a:buChar char="•"/>
+            </a:pPr>
+            <a:r>
+              <a:rPr lang="en-US" sz="1500" dirty="0">
+                <a:solidFill>
+                  <a:srgbClr val="212121"/>
+                </a:solidFill>
+                <a:latin typeface="Calibri" pitchFamily="34" charset="0"/>
+                <a:ea typeface="Calibri" pitchFamily="34" charset="-122"/>
+                <a:cs typeface="Calibri" pitchFamily="34" charset="-120"/>
+              </a:rPr>
+              <a:t>Consumes Foundry Toolbox and MCP servers</a:t>
+            </a:r>
+            <a:endParaRPr lang="en-US" sz="1500" dirty="0"/>
+          </a:p>
+          <a:p>
+            <a:pPr marL="342900" indent="-342900">
+              <a:spcAft>
+                <a:spcPts val="600"/>
+              </a:spcAft>
+              <a:buSzPct val="100000"/>
+              <a:buChar char="•"/>
+            </a:pPr>
+            <a:r>
+              <a:rPr lang="en-US" sz="1500" dirty="0">
+                <a:solidFill>
+                  <a:srgbClr val="212121"/>
+                </a:solidFill>
+                <a:latin typeface="Calibri" pitchFamily="34" charset="0"/>
+                <a:ea typeface="Calibri" pitchFamily="34" charset="-122"/>
+                <a:cs typeface="Calibri" pitchFamily="34" charset="-120"/>
+              </a:rPr>
+              <a:t>The successor to Semantic Kernel and AutoGen patterns (both out of scope)</a:t>
+            </a:r>
+            <a:endParaRPr lang="en-US" sz="1500" dirty="0"/>
+          </a:p>
+        </p:txBody>
+      </p:sp>
     </p:spTree>
   </p:cSld>
   <p:clrMapOvr>
@@ -5323,7 +7096,7 @@
                 <a:ea typeface="Calibri" pitchFamily="34" charset="-122"/>
                 <a:cs typeface="Calibri" pitchFamily="34" charset="-120"/>
               </a:rPr>
-              <a:t>Takeaways</a:t>
+              <a:t>What we will and won't cover</a:t>
             </a:r>
             <a:endParaRPr lang="en-US" sz="2800" dirty="0"/>
           </a:p>
@@ -5338,7 +7111,85 @@
         <p:spPr>
           <a:xfrm>
             <a:off x="365760" y="1097280"/>
-            <a:ext cx="8412480" cy="3108960"/>
+            <a:ext cx="4069080" cy="365760"/>
+          </a:xfrm>
+          <a:prstGeom prst="rect">
+            <a:avLst/>
+          </a:prstGeom>
+          <a:noFill/>
+          <a:ln/>
+        </p:spPr>
+        <p:txBody>
+          <a:bodyPr wrap="square" lIns="0" tIns="0" rIns="0" bIns="0" rtlCol="0" anchor="ctr"/>
+          <a:lstStyle/>
+          <a:p>
+            <a:pPr indent="0" marL="0">
+              <a:buNone/>
+            </a:pPr>
+            <a:r>
+              <a:rPr lang="en-US" sz="2000" b="1" dirty="0">
+                <a:solidFill>
+                  <a:srgbClr val="1E2761"/>
+                </a:solidFill>
+                <a:latin typeface="Calibri" pitchFamily="34" charset="0"/>
+                <a:ea typeface="Calibri" pitchFamily="34" charset="-122"/>
+                <a:cs typeface="Calibri" pitchFamily="34" charset="-120"/>
+              </a:rPr>
+              <a:t>Covered</a:t>
+            </a:r>
+            <a:endParaRPr lang="en-US" sz="2000" dirty="0"/>
+          </a:p>
+        </p:txBody>
+      </p:sp>
+      <p:sp>
+        <p:nvSpPr>
+          <p:cNvPr id="6" name="Text 4"/>
+          <p:cNvSpPr/>
+          <p:nvPr/>
+        </p:nvSpPr>
+        <p:spPr>
+          <a:xfrm>
+            <a:off x="4709160" y="1097280"/>
+            <a:ext cx="4069080" cy="365760"/>
+          </a:xfrm>
+          <a:prstGeom prst="rect">
+            <a:avLst/>
+          </a:prstGeom>
+          <a:noFill/>
+          <a:ln/>
+        </p:spPr>
+        <p:txBody>
+          <a:bodyPr wrap="square" lIns="0" tIns="0" rIns="0" bIns="0" rtlCol="0" anchor="ctr"/>
+          <a:lstStyle/>
+          <a:p>
+            <a:pPr indent="0" marL="0">
+              <a:buNone/>
+            </a:pPr>
+            <a:r>
+              <a:rPr lang="en-US" sz="2000" b="1" dirty="0">
+                <a:solidFill>
+                  <a:srgbClr val="1E2761"/>
+                </a:solidFill>
+                <a:latin typeface="Calibri" pitchFamily="34" charset="0"/>
+                <a:ea typeface="Calibri" pitchFamily="34" charset="-122"/>
+                <a:cs typeface="Calibri" pitchFamily="34" charset="-120"/>
+              </a:rPr>
+              <a:t>Out of scope</a:t>
+            </a:r>
+            <a:endParaRPr lang="en-US" sz="2000" dirty="0"/>
+          </a:p>
+        </p:txBody>
+      </p:sp>
+      <p:sp>
+        <p:nvSpPr>
+          <p:cNvPr id="7" name="Text 5"/>
+          <p:cNvSpPr/>
+          <p:nvPr/>
+        </p:nvSpPr>
+        <p:spPr>
+          <a:xfrm>
+            <a:off x="365760" y="1554480"/>
+            <a:ext cx="4069080" cy="3291840"/>
           </a:xfrm>
           <a:prstGeom prst="rect">
             <a:avLst/>
@@ -5366,7 +7217,7 @@
                 <a:ea typeface="Calibri" pitchFamily="34" charset="-122"/>
                 <a:cs typeface="Calibri" pitchFamily="34" charset="-120"/>
               </a:rPr>
-              <a:t>Three surfaces target different audiences: Copilot Studio, Foundry, MAF.</a:t>
+              <a:t>Foundry (portal, deployments, connections)</a:t>
             </a:r>
             <a:endParaRPr lang="en-US" sz="1500" dirty="0"/>
           </a:p>
@@ -5387,7 +7238,7 @@
                 <a:ea typeface="Calibri" pitchFamily="34" charset="-122"/>
                 <a:cs typeface="Calibri" pitchFamily="34" charset="-120"/>
               </a:rPr>
-              <a:t>This workshop lives at Foundry + MAF.</a:t>
+              <a:t>MAF (client-side + Foundry-hosted agents)</a:t>
             </a:r>
             <a:endParaRPr lang="en-US" sz="1500" dirty="0"/>
           </a:p>
@@ -5408,42 +7259,85 @@
                 <a:ea typeface="Calibri" pitchFamily="34" charset="-122"/>
                 <a:cs typeface="Calibri" pitchFamily="34" charset="-120"/>
               </a:rPr>
-              <a:t>MAF is Microsoft's forward direction for agent SDKs; SK and AutoGen are not.</a:t>
+              <a:t>Toolbox and Foundry IQ</a:t>
             </a:r>
             <a:endParaRPr lang="en-US" sz="1500" dirty="0"/>
           </a:p>
-        </p:txBody>
-      </p:sp>
-      <p:sp>
-        <p:nvSpPr>
-          <p:cNvPr id="6" name="Shape 4"/>
-          <p:cNvSpPr/>
-          <p:nvPr/>
-        </p:nvSpPr>
-        <p:spPr>
-          <a:xfrm>
-            <a:off x="365760" y="4343400"/>
-            <a:ext cx="8412480" cy="457200"/>
-          </a:xfrm>
-          <a:prstGeom prst="rect">
-            <a:avLst/>
-          </a:prstGeom>
-          <a:solidFill>
-            <a:srgbClr val="CADCFC"/>
-          </a:solidFill>
-          <a:ln/>
-        </p:spPr>
-      </p:sp>
-      <p:sp>
-        <p:nvSpPr>
-          <p:cNvPr id="7" name="Text 5"/>
-          <p:cNvSpPr/>
-          <p:nvPr/>
-        </p:nvSpPr>
-        <p:spPr>
-          <a:xfrm>
-            <a:off x="502920" y="4370832"/>
-            <a:ext cx="8138160" cy="402336"/>
+          <a:p>
+            <a:pPr marL="342900" indent="-342900">
+              <a:spcAft>
+                <a:spcPts val="600"/>
+              </a:spcAft>
+              <a:buSzPct val="100000"/>
+              <a:buChar char="•"/>
+            </a:pPr>
+            <a:r>
+              <a:rPr lang="en-US" sz="1500" dirty="0">
+                <a:solidFill>
+                  <a:srgbClr val="212121"/>
+                </a:solidFill>
+                <a:latin typeface="Calibri" pitchFamily="34" charset="0"/>
+                <a:ea typeface="Calibri" pitchFamily="34" charset="-122"/>
+                <a:cs typeface="Calibri" pitchFamily="34" charset="-120"/>
+              </a:rPr>
+              <a:t>MCP consumption and (stretch) authoring</a:t>
+            </a:r>
+            <a:endParaRPr lang="en-US" sz="1500" dirty="0"/>
+          </a:p>
+          <a:p>
+            <a:pPr marL="342900" indent="-342900">
+              <a:spcAft>
+                <a:spcPts val="600"/>
+              </a:spcAft>
+              <a:buSzPct val="100000"/>
+              <a:buChar char="•"/>
+            </a:pPr>
+            <a:r>
+              <a:rPr lang="en-US" sz="1500" dirty="0">
+                <a:solidFill>
+                  <a:srgbClr val="212121"/>
+                </a:solidFill>
+                <a:latin typeface="Calibri" pitchFamily="34" charset="0"/>
+                <a:ea typeface="Calibri" pitchFamily="34" charset="-122"/>
+                <a:cs typeface="Calibri" pitchFamily="34" charset="-120"/>
+              </a:rPr>
+              <a:t>Evaluation at every layer</a:t>
+            </a:r>
+            <a:endParaRPr lang="en-US" sz="1500" dirty="0"/>
+          </a:p>
+          <a:p>
+            <a:pPr marL="342900" indent="-342900">
+              <a:spcAft>
+                <a:spcPts val="600"/>
+              </a:spcAft>
+              <a:buSzPct val="100000"/>
+              <a:buChar char="•"/>
+            </a:pPr>
+            <a:r>
+              <a:rPr lang="en-US" sz="1500" dirty="0">
+                <a:solidFill>
+                  <a:srgbClr val="212121"/>
+                </a:solidFill>
+                <a:latin typeface="Calibri" pitchFamily="34" charset="0"/>
+                <a:ea typeface="Calibri" pitchFamily="34" charset="-122"/>
+                <a:cs typeface="Calibri" pitchFamily="34" charset="-120"/>
+              </a:rPr>
+              <a:t>Production concerns: observability, identity, cost</a:t>
+            </a:r>
+            <a:endParaRPr lang="en-US" sz="1500" dirty="0"/>
+          </a:p>
+        </p:txBody>
+      </p:sp>
+      <p:sp>
+        <p:nvSpPr>
+          <p:cNvPr id="8" name="Text 6"/>
+          <p:cNvSpPr/>
+          <p:nvPr/>
+        </p:nvSpPr>
+        <p:spPr>
+          <a:xfrm>
+            <a:off x="4709160" y="1554480"/>
+            <a:ext cx="4069080" cy="3291840"/>
           </a:xfrm>
           <a:prstGeom prst="rect">
             <a:avLst/>
@@ -5452,38 +7346,133 @@
           <a:ln/>
         </p:spPr>
         <p:txBody>
-          <a:bodyPr wrap="square" lIns="0" tIns="0" rIns="0" bIns="0" rtlCol="0" anchor="ctr"/>
-          <a:lstStyle/>
-          <a:p>
-            <a:pPr indent="0" marL="0">
-              <a:buNone/>
-            </a:pPr>
-            <a:r>
-              <a:rPr lang="en-US" sz="1600" b="1" dirty="0">
-                <a:solidFill>
-                  <a:srgbClr val="1E2761"/>
-                </a:solidFill>
-                <a:latin typeface="Calibri" pitchFamily="34" charset="0"/>
-                <a:ea typeface="Calibri" pitchFamily="34" charset="-122"/>
-                <a:cs typeface="Calibri" pitchFamily="34" charset="-120"/>
-              </a:rPr>
-              <a:t>Next: </a:t>
-            </a:r>
-            <a:pPr indent="0" marL="0">
-              <a:buNone/>
-            </a:pPr>
-            <a:r>
-              <a:rPr lang="en-US" sz="1600" dirty="0">
-                <a:solidFill>
-                  <a:srgbClr val="1E2761"/>
-                </a:solidFill>
-                <a:latin typeface="Calibri" pitchFamily="34" charset="0"/>
-                <a:ea typeface="Calibri" pitchFamily="34" charset="-122"/>
-                <a:cs typeface="Calibri" pitchFamily="34" charset="-120"/>
-              </a:rPr>
-              <a:t>A working tour of the Foundry portal — projects, models, deployments, Toolbox, Foundry IQ.</a:t>
-            </a:r>
-            <a:endParaRPr lang="en-US" sz="1600" dirty="0"/>
+          <a:bodyPr wrap="square" rtlCol="0" anchor="ctr"/>
+          <a:lstStyle/>
+          <a:p>
+            <a:pPr marL="342900" indent="-342900">
+              <a:spcAft>
+                <a:spcPts val="600"/>
+              </a:spcAft>
+              <a:buSzPct val="100000"/>
+              <a:buChar char="•"/>
+            </a:pPr>
+            <a:r>
+              <a:rPr lang="en-US" sz="1500" dirty="0">
+                <a:solidFill>
+                  <a:srgbClr val="212121"/>
+                </a:solidFill>
+                <a:latin typeface="Calibri" pitchFamily="34" charset="0"/>
+                <a:ea typeface="Calibri" pitchFamily="34" charset="-122"/>
+                <a:cs typeface="Calibri" pitchFamily="34" charset="-120"/>
+              </a:rPr>
+              <a:t>Copilot Studio (different audience)</a:t>
+            </a:r>
+            <a:endParaRPr lang="en-US" sz="1500" dirty="0"/>
+          </a:p>
+          <a:p>
+            <a:pPr marL="342900" indent="-342900">
+              <a:spcAft>
+                <a:spcPts val="600"/>
+              </a:spcAft>
+              <a:buSzPct val="100000"/>
+              <a:buChar char="•"/>
+            </a:pPr>
+            <a:r>
+              <a:rPr lang="en-US" sz="1500" dirty="0">
+                <a:solidFill>
+                  <a:srgbClr val="212121"/>
+                </a:solidFill>
+                <a:latin typeface="Calibri" pitchFamily="34" charset="0"/>
+                <a:ea typeface="Calibri" pitchFamily="34" charset="-122"/>
+                <a:cs typeface="Calibri" pitchFamily="34" charset="-120"/>
+              </a:rPr>
+              <a:t>Semantic Kernel (MAF is the forward direction)</a:t>
+            </a:r>
+            <a:endParaRPr lang="en-US" sz="1500" dirty="0"/>
+          </a:p>
+          <a:p>
+            <a:pPr marL="342900" indent="-342900">
+              <a:spcAft>
+                <a:spcPts val="600"/>
+              </a:spcAft>
+              <a:buSzPct val="100000"/>
+              <a:buChar char="•"/>
+            </a:pPr>
+            <a:r>
+              <a:rPr lang="en-US" sz="1500" dirty="0">
+                <a:solidFill>
+                  <a:srgbClr val="212121"/>
+                </a:solidFill>
+                <a:latin typeface="Calibri" pitchFamily="34" charset="0"/>
+                <a:ea typeface="Calibri" pitchFamily="34" charset="-122"/>
+                <a:cs typeface="Calibri" pitchFamily="34" charset="-120"/>
+              </a:rPr>
+              <a:t>AutoGen (research-lineage predecessor)</a:t>
+            </a:r>
+            <a:endParaRPr lang="en-US" sz="1500" dirty="0"/>
+          </a:p>
+          <a:p>
+            <a:pPr marL="342900" indent="-342900">
+              <a:spcAft>
+                <a:spcPts val="600"/>
+              </a:spcAft>
+              <a:buSzPct val="100000"/>
+              <a:buChar char="•"/>
+            </a:pPr>
+            <a:r>
+              <a:rPr lang="en-US" sz="1500" dirty="0">
+                <a:solidFill>
+                  <a:srgbClr val="212121"/>
+                </a:solidFill>
+                <a:latin typeface="Calibri" pitchFamily="34" charset="0"/>
+                <a:ea typeface="Calibri" pitchFamily="34" charset="-122"/>
+                <a:cs typeface="Calibri" pitchFamily="34" charset="-120"/>
+              </a:rPr>
+              <a:t>Third-party frameworks (LangChain, CrewAI, etc.)</a:t>
+            </a:r>
+            <a:endParaRPr lang="en-US" sz="1500" dirty="0"/>
+          </a:p>
+          <a:p>
+            <a:pPr marL="342900" indent="-342900">
+              <a:spcAft>
+                <a:spcPts val="600"/>
+              </a:spcAft>
+              <a:buSzPct val="100000"/>
+              <a:buChar char="•"/>
+            </a:pPr>
+            <a:r>
+              <a:rPr lang="en-US" sz="1500" dirty="0">
+                <a:solidFill>
+                  <a:srgbClr val="212121"/>
+                </a:solidFill>
+                <a:latin typeface="Calibri" pitchFamily="34" charset="0"/>
+                <a:ea typeface="Calibri" pitchFamily="34" charset="-122"/>
+                <a:cs typeface="Calibri" pitchFamily="34" charset="-120"/>
+              </a:rPr>
+              <a:t>Model fine-tuning, distillation, training</a:t>
+            </a:r>
+            <a:endParaRPr lang="en-US" sz="1500" dirty="0"/>
+          </a:p>
+          <a:p>
+            <a:pPr marL="342900" indent="-342900">
+              <a:spcAft>
+                <a:spcPts val="600"/>
+              </a:spcAft>
+              <a:buSzPct val="100000"/>
+              <a:buChar char="•"/>
+            </a:pPr>
+            <a:r>
+              <a:rPr lang="en-US" sz="1500" dirty="0">
+                <a:solidFill>
+                  <a:srgbClr val="212121"/>
+                </a:solidFill>
+                <a:latin typeface="Calibri" pitchFamily="34" charset="0"/>
+                <a:ea typeface="Calibri" pitchFamily="34" charset="-122"/>
+                <a:cs typeface="Calibri" pitchFamily="34" charset="-120"/>
+              </a:rPr>
+              <a:t>On-prem / air-gapped deployments</a:t>
+            </a:r>
+            <a:endParaRPr lang="en-US" sz="1500" dirty="0"/>
           </a:p>
         </p:txBody>
       </p:sp>

--- a/decks/day1/module-1-landscape.pptx
+++ b/decks/day1/module-1-landscape.pptx
@@ -1216,7 +1216,7 @@
           <a:p>
             <a:r>
               <a:rPr lang="en-US" dirty="0"/>
-              <a:t>Preview only. PromptAgent, HostedAgent, Toolbox, and Foundry IQ each get their own module or day. Don't dive into any of them here.</a:t>
+              <a:t>Preview only. Prompt agents, Hosted agents, Toolbox, and Foundry IQ each get their own module or day. Don't dive into any of them here.</a:t>
             </a:r>
             <a:endParaRPr lang="en-US" dirty="0"/>
           </a:p>
@@ -2301,7 +2301,7 @@
                           <a:ea typeface="Calibri" pitchFamily="34" charset="-122"/>
                           <a:cs typeface="Calibri" pitchFamily="34" charset="-120"/>
                         </a:rPr>
-                        <a:t>Foundations: the stack, both hosting styles, first working agents</a:t>
+                        <a:t>Foundations: the stack; the three ways to run an agent with Foundry; first working agents</a:t>
                       </a:r>
                       <a:endParaRPr lang="en-US" sz="1300" dirty="0">
                         <a:latin typeface="Calibri" charset="0"/>
@@ -6625,7 +6625,28 @@
                 <a:ea typeface="Calibri" pitchFamily="34" charset="-122"/>
                 <a:cs typeface="Calibri" pitchFamily="34" charset="-120"/>
               </a:rPr>
-              <a:t>Foundry Agent Service — server-hosted agents (PromptAgent, HostedAgent)</a:t>
+              <a:t>Foundry Agent Service — runtime for Prompt agents (portal-authored, no code) and Hosted agents (your code, containerized, Foundry-run)</a:t>
+            </a:r>
+            <a:endParaRPr lang="en-US" sz="1500" dirty="0"/>
+          </a:p>
+          <a:p>
+            <a:pPr marL="342900" indent="-342900">
+              <a:spcAft>
+                <a:spcPts val="600"/>
+              </a:spcAft>
+              <a:buSzPct val="100000"/>
+              <a:buChar char="•"/>
+            </a:pPr>
+            <a:r>
+              <a:rPr lang="en-US" sz="1500" dirty="0">
+                <a:solidFill>
+                  <a:srgbClr val="212121"/>
+                </a:solidFill>
+                <a:latin typeface="Calibri" pitchFamily="34" charset="0"/>
+                <a:ea typeface="Calibri" pitchFamily="34" charset="-122"/>
+                <a:cs typeface="Calibri" pitchFamily="34" charset="-120"/>
+              </a:rPr>
+              <a:t>Responses API — the single model + tools entry point; call it from your own code running anywhere</a:t>
             </a:r>
             <a:endParaRPr lang="en-US" sz="1500" dirty="0"/>
           </a:p>
@@ -7238,7 +7259,7 @@
                 <a:ea typeface="Calibri" pitchFamily="34" charset="-122"/>
                 <a:cs typeface="Calibri" pitchFamily="34" charset="-120"/>
               </a:rPr>
-              <a:t>MAF (client-side + Foundry-hosted agents)</a:t>
+              <a:t>MAF — three ways to run an agent (Prompt agent, Hosted agent, Responses API from your own code)</a:t>
             </a:r>
             <a:endParaRPr lang="en-US" sz="1500" dirty="0"/>
           </a:p>

--- a/decks/day1/module-1-landscape.pptx
+++ b/decks/day1/module-1-landscape.pptx
@@ -2301,7 +2301,7 @@
                           <a:ea typeface="Calibri" pitchFamily="34" charset="-122"/>
                           <a:cs typeface="Calibri" pitchFamily="34" charset="-120"/>
                         </a:rPr>
-                        <a:t>Foundations: the stack; the three ways to run an agent with Foundry; first working agents</a:t>
+                        <a:t>Foundations: the stack; three hosting options; first working agents</a:t>
                       </a:r>
                       <a:endParaRPr lang="en-US" sz="1300" dirty="0">
                         <a:latin typeface="Calibri" charset="0"/>

--- a/decks/day1/module-1-landscape.pptx
+++ b/decks/day1/module-1-landscape.pptx
@@ -512,7 +512,11 @@
           <a:p>
             <a:r>
               <a:rPr lang="en-US" dirty="0"/>
-              <a:t>Set the stage. Attendees include senior devs and architects who need a compass before hands-on. Emphasize this is decision-first, code-later.</a:t>
+              <a:t>• Say: this module is a compass, not code
+• Audience: senior devs + solution architects — respect their experience
+• Set expectation: decisions first, code starts Module 4
+• Time: 25 min total — keep it moving
+• Nothing in this module needs a demo</a:t>
             </a:r>
             <a:endParaRPr lang="en-US" dirty="0"/>
           </a:p>
@@ -600,7 +604,12 @@
           <a:p>
             <a:r>
               <a:rPr lang="en-US" dirty="0"/>
-              <a:t>Preview the arc. Mention every day builds on the same 'docs assistant' reference project.</a:t>
+              <a:t>• Preview the 5-day arc in 60 seconds
+• Days 1–3 build on the same 'docs assistant' reference project
+• Day 4 turns the single agent into a multi-agent workflow
+• Day 5 covers production + capstone kickoff
+• Every day maps to the four-layer stack (Module 5)
+• Post-workshop: capstone project reviewed 1:1</a:t>
             </a:r>
             <a:endParaRPr lang="en-US" dirty="0"/>
           </a:p>
@@ -776,7 +785,11 @@
           <a:p>
             <a:r>
               <a:rPr lang="en-US" dirty="0"/>
-              <a:t>This slide is the frame. Reassure that this module is short (25 min) and light on code. Set expectation: decisions today, code Module 4+.</a:t>
+              <a:t>• Frame the whole module in one sentence: 'before you write a line of code, decide which surface to build on'
+• Reassure: this module is short (25 min), light on code
+• Ask: who's already been sold on a specific approach?
+• If hands go up, promise you'll cover fit vs. their situation
+• Move quickly — the payoff slides come next</a:t>
             </a:r>
             <a:endParaRPr lang="en-US" dirty="0"/>
           </a:p>
@@ -864,7 +877,13 @@
           <a:p>
             <a:r>
               <a:rPr lang="en-US" dirty="0"/>
-              <a:t>Copilot Studio and Foundry can be complementary. This workshop = Foundry + MAF. Make it explicit: 'if your target audience is makers, this is not your workshop.'</a:t>
+              <a:t>• The three surfaces are complementary, not competitive
+• Copilot Studio → makers, business analysts, M365 destinations
+• Foundry → developer platform on Azure
+• MAF → the SDK your code uses on top of Foundry
+• Be explicit: 'if your target audience is makers, this is not your workshop'
+• Do not disparage Copilot Studio — it's the right tool for a different job
+• Publix has both audiences; this workshop targets the developer audience</a:t>
             </a:r>
             <a:endParaRPr lang="en-US" dirty="0"/>
           </a:p>
@@ -952,7 +971,12 @@
           <a:p>
             <a:r>
               <a:rPr lang="en-US" dirty="0"/>
-              <a:t>Anchor slide. Emphasize that the problem shape is the same across all three; the layer of abstraction is what shifts. Sets up the next slide's spectrum framing.</a:t>
+              <a:t>• Anchor slide — the payoff for the whole module
+• Every agent needs three things: Model, Instructions, Tools
+• That's true whether you're in Copilot Studio, Foundry, or writing raw MAF code
+• What changes across surfaces: how much code you write, who owns the runtime
+• Sets up the next slide's IaaS/PaaS/SaaS spectrum
+• Pause for questions here — this is where the mental model clicks or doesn't</a:t>
             </a:r>
             <a:endParaRPr lang="en-US" dirty="0"/>
           </a:p>
@@ -1040,7 +1064,13 @@
           <a:p>
             <a:r>
               <a:rPr lang="en-US" dirty="0"/>
-              <a:t>Use the familiar IaaS/PaaS/SaaS trio — attendees already know it. This replaces a bullet list and lands harder. Emphasize 'this workshop = PaaS.'</a:t>
+              <a:t>• Piggyback on vocabulary attendees already know
+• IaaS = OSS frameworks + containers you run
+• PaaS = Foundry Agent Service + MAF (this workshop)
+• SaaS = Copilot Studio
+• Say clearly: 'this workshop lives in PaaS territory'
+• PaaS = you write real code, you don't run the infrastructure
+• This slide replaces a bullet list — the visual lands harder, let it breathe</a:t>
             </a:r>
             <a:endParaRPr lang="en-US" dirty="0"/>
           </a:p>
@@ -1128,7 +1158,14 @@
           <a:p>
             <a:r>
               <a:rPr lang="en-US" dirty="0"/>
-              <a:t>This slide prevents the anti-pattern of building an agent for what should be a plain LLM call. Ask attendees which pattern their current use case actually needs.</a:t>
+              <a:t>• Prevents the #1 anti-pattern: 'everything must be an agent'
+• Match complexity to need — not every LLM problem needs orchestration
+• Direct LLM call: summarize this doc — cheap, easy to eval
+• Single agent w/ tools: iterative work that needs to *do* something
+• Multi-agent workflow: distinct roles, hand-offs — costly, new failure modes
+• Rule: reach for the leftmost pattern that solves the problem
+• Ask 2–3 attendees: 'what pattern does your current use case actually need?'
+• This connects directly to Day 4 (multi-agent) — plant the flag</a:t>
             </a:r>
             <a:endParaRPr lang="en-US" dirty="0"/>
           </a:p>
@@ -1216,7 +1253,13 @@
           <a:p>
             <a:r>
               <a:rPr lang="en-US" dirty="0"/>
-              <a:t>Preview only. Prompt agents, Hosted agents, Toolbox, and Foundry IQ each get their own module or day. Don't dive into any of them here.</a:t>
+              <a:t>• Preview only — resist the urge to teach any of these
+• Prompt agents / Hosted agents → Module 6 today
+• Toolbox → Day 2 (Actions layer)
+• Foundry IQ → Day 2 (Knowledge layer)
+• Responses API → Module 6 today, deeper in Days 2–3
+• Evaluators / tracing → Day 4 and Day 5
+• This slide's job: land the vocabulary once so nothing feels new later</a:t>
             </a:r>
             <a:endParaRPr lang="en-US" dirty="0"/>
           </a:p>
@@ -1304,7 +1347,13 @@
           <a:p>
             <a:r>
               <a:rPr lang="en-US" dirty="0"/>
-              <a:t>Emphasize 'one vocabulary' — attendees coming from SK / AutoGen will spot the lineage. Call SK 'still supported, not the forward path.' Don't disparage.</a:t>
+              <a:t>• One vocabulary is the key selling point of MAF
+• Same primitives (agent, thread, tool, run) in Python and C#
+• For attendees coming from SK or AutoGen: acknowledge the lineage
+• Say: 'SK is still supported, not the forward path for new work'
+• Say: 'AutoGen was the research predecessor to MAF'
+• Don't disparage — attendees have shipped code with both
+• MAF absorbed the lessons; the surface is cleaner</a:t>
             </a:r>
             <a:endParaRPr lang="en-US" dirty="0"/>
           </a:p>
@@ -1392,7 +1441,12 @@
           <a:p>
             <a:r>
               <a:rPr lang="en-US" dirty="0"/>
-              <a:t>This is important framing. Attendees with adjacent expectations need to know we're not going there today.</a:t>
+              <a:t>• Set explicit expectations about scope
+• If someone came expecting Copilot Studio depth: not this workshop
+• If someone came expecting fine-tuning or model training: not this workshop
+• Copilot Studio, SK, AutoGen, LangChain, CrewAI — all out of scope
+• Explain why: MAF is the forward direction for Publix code
+• Redirect anyone who needs the excluded topics to appropriate resources</a:t>
             </a:r>
             <a:endParaRPr lang="en-US" dirty="0"/>
           </a:p>

--- a/decks/day1/module-1-landscape.pptx
+++ b/decks/day1/module-1-landscape.pptx
@@ -883,7 +883,7 @@
 • MAF → the SDK your code uses on top of Foundry
 • Be explicit: 'if your target audience is makers, this is not your workshop'
 • Do not disparage Copilot Studio — it's the right tool for a different job
-• Publix has both audiences; this workshop targets the developer audience</a:t>
+• This workshop is for the developer audience</a:t>
             </a:r>
             <a:endParaRPr lang="en-US" dirty="0"/>
           </a:p>
@@ -1445,7 +1445,7 @@
 • If someone came expecting Copilot Studio depth: not this workshop
 • If someone came expecting fine-tuning or model training: not this workshop
 • Copilot Studio, SK, AutoGen, LangChain, CrewAI — all out of scope
-• Explain why: MAF is the forward direction for Publix code
+• Explain why: MAF is the forward direction for production agent code
 • Redirect anyone who needs the excluded topics to appropriate resources</a:t>
             </a:r>
             <a:endParaRPr lang="en-US" dirty="0"/>

--- a/decks/day1/module-1-landscape.pptx
+++ b/decks/day1/module-1-landscape.pptx
@@ -16,9 +16,12 @@
     <p:sldId id="264" r:id="rId10"/>
     <p:sldId id="265" r:id="rId11"/>
     <p:sldId id="266" r:id="rId12"/>
+    <p:sldId id="267" r:id="rId13"/>
+    <p:sldId id="268" r:id="rId14"/>
+    <p:sldId id="269" r:id="rId15"/>
   </p:sldIdLst>
   <p:notesMasterIdLst>
-    <p:notesMasterId r:id="rId13"/>
+    <p:notesMasterId r:id="rId16"/>
   </p:notesMasterIdLst>
   <p:sldSz cx="9144000" cy="5143500"/>
   <p:notesSz cx="5143500" cy="9144000"/>
@@ -604,12 +607,13 @@
           <a:p>
             <a:r>
               <a:rPr lang="en-US" dirty="0"/>
-              <a:t>• Preview the 5-day arc in 60 seconds
-• Days 1–3 build on the same 'docs assistant' reference project
-• Day 4 turns the single agent into a multi-agent workflow
-• Day 5 covers production + capstone kickoff
-• Every day maps to the four-layer stack (Module 5)
-• Post-workshop: capstone project reviewed 1:1</a:t>
+              <a:t>• Preview only — resist the urge to teach any of these
+• Prompt agents / Hosted agents → Module 6 today
+• Toolbox → Day 2 (Actions layer)
+• Foundry IQ → Day 2 (Knowledge layer)
+• Responses API → Module 6 today, deeper in Days 2–3
+• Evaluators / tracing → Day 4 and Day 5
+• This slide's job: land the vocabulary once so nothing feels new later</a:t>
             </a:r>
             <a:endParaRPr lang="en-US" dirty="0"/>
           </a:p>
@@ -697,7 +701,13 @@
           <a:p>
             <a:r>
               <a:rPr lang="en-US" dirty="0"/>
-              <a:t>Recap in 60 seconds. Take one or two questions max, then transition.</a:t>
+              <a:t>• One vocabulary is the key selling point of MAF
+• Same primitives (agent, session, tool, run) in Python and C#
+• For attendees coming from SK or AutoGen: acknowledge the lineage
+• Say: 'SK is still supported, not the forward path for new work'
+• Say: 'AutoGen was the research predecessor to MAF'
+• Don't disparage — attendees have shipped code with both
+• MAF absorbed the lessons; the surface is cleaner</a:t>
             </a:r>
             <a:endParaRPr lang="en-US" dirty="0"/>
           </a:p>
@@ -721,6 +731,280 @@
             <a:fld id="{F7021451-1387-4CA6-816F-3879F97B5CBC}" type="slidenum">
               <a:rPr lang="en-US"/>
               <a:t>11</a:t>
+            </a:fld>
+            <a:endParaRPr lang="en-US"/>
+          </a:p>
+        </p:txBody>
+      </p:sp>
+    </p:spTree>
+    <p:extLst>
+      <p:ext uri="{BB962C8B-B14F-4D97-AF65-F5344CB8AC3E}">
+        <p14:creationId xmlns:p14="http://schemas.microsoft.com/office/powerpoint/2010/main" val="1024086991"/>
+      </p:ext>
+    </p:extLst>
+  </p:cSld>
+  <p:clrMapOvr>
+    <a:masterClrMapping/>
+  </p:clrMapOvr>
+</p:notes>
+</file>
+
+<file path=ppt/notesSlides/notesSlide12.xml><?xml version="1.0" encoding="utf-8"?>
+<p:notes xmlns:a="http://schemas.openxmlformats.org/drawingml/2006/main" xmlns:r="http://schemas.openxmlformats.org/officeDocument/2006/relationships" xmlns:p="http://schemas.openxmlformats.org/presentationml/2006/main">
+  <p:cSld>
+    <p:spTree>
+      <p:nvGrpSpPr>
+        <p:cNvPr id="1" name=""/>
+        <p:cNvGrpSpPr/>
+        <p:nvPr/>
+      </p:nvGrpSpPr>
+      <p:grpSpPr>
+        <a:xfrm>
+          <a:off x="0" y="0"/>
+          <a:ext cx="0" cy="0"/>
+          <a:chOff x="0" y="0"/>
+          <a:chExt cx="0" cy="0"/>
+        </a:xfrm>
+      </p:grpSpPr>
+      <p:sp>
+        <p:nvSpPr>
+          <p:cNvPr id="2" name="Slide Image Placeholder 1"/>
+          <p:cNvSpPr>
+            <a:spLocks noGrp="1" noRot="1" noChangeAspect="1"/>
+          </p:cNvSpPr>
+          <p:nvPr>
+            <p:ph type="sldImg"/>
+          </p:nvPr>
+        </p:nvSpPr>
+        <p:spPr/>
+      </p:sp>
+      <p:sp>
+        <p:nvSpPr>
+          <p:cNvPr id="3" name="Notes Placeholder 2"/>
+          <p:cNvSpPr>
+            <a:spLocks noGrp="1"/>
+          </p:cNvSpPr>
+          <p:nvPr>
+            <p:ph type="body" idx="1"/>
+          </p:nvPr>
+        </p:nvSpPr>
+        <p:spPr/>
+        <p:txBody>
+          <a:bodyPr/>
+          <a:lstStyle/>
+          <a:p>
+            <a:r>
+              <a:rPr lang="en-US" dirty="0"/>
+              <a:t>• Set explicit expectations about scope
+• If someone came expecting Copilot Studio depth: not this workshop
+• If someone came expecting fine-tuning or model training: not this workshop
+• Copilot Studio, SK, AutoGen, LangChain, CrewAI — all out of scope
+• Explain why: MAF is the forward direction for production agent code
+• Redirect anyone who needs the excluded topics to appropriate resources</a:t>
+            </a:r>
+            <a:endParaRPr lang="en-US" dirty="0"/>
+          </a:p>
+        </p:txBody>
+      </p:sp>
+      <p:sp>
+        <p:nvSpPr>
+          <p:cNvPr id="4" name="Slide Number Placeholder 3"/>
+          <p:cNvSpPr>
+            <a:spLocks noGrp="1"/>
+          </p:cNvSpPr>
+          <p:nvPr>
+            <p:ph type="sldNum" sz="quarter" idx="10"/>
+          </p:nvPr>
+        </p:nvSpPr>
+        <p:spPr/>
+        <p:txBody>
+          <a:bodyPr/>
+          <a:lstStyle/>
+          <a:p>
+            <a:fld id="{F7021451-1387-4CA6-816F-3879F97B5CBC}" type="slidenum">
+              <a:rPr lang="en-US"/>
+              <a:t>12</a:t>
+            </a:fld>
+            <a:endParaRPr lang="en-US"/>
+          </a:p>
+        </p:txBody>
+      </p:sp>
+    </p:spTree>
+    <p:extLst>
+      <p:ext uri="{BB962C8B-B14F-4D97-AF65-F5344CB8AC3E}">
+        <p14:creationId xmlns:p14="http://schemas.microsoft.com/office/powerpoint/2010/main" val="1024086991"/>
+      </p:ext>
+    </p:extLst>
+  </p:cSld>
+  <p:clrMapOvr>
+    <a:masterClrMapping/>
+  </p:clrMapOvr>
+</p:notes>
+</file>
+
+<file path=ppt/notesSlides/notesSlide13.xml><?xml version="1.0" encoding="utf-8"?>
+<p:notes xmlns:a="http://schemas.openxmlformats.org/drawingml/2006/main" xmlns:r="http://schemas.openxmlformats.org/officeDocument/2006/relationships" xmlns:p="http://schemas.openxmlformats.org/presentationml/2006/main">
+  <p:cSld>
+    <p:spTree>
+      <p:nvGrpSpPr>
+        <p:cNvPr id="1" name=""/>
+        <p:cNvGrpSpPr/>
+        <p:nvPr/>
+      </p:nvGrpSpPr>
+      <p:grpSpPr>
+        <a:xfrm>
+          <a:off x="0" y="0"/>
+          <a:ext cx="0" cy="0"/>
+          <a:chOff x="0" y="0"/>
+          <a:chExt cx="0" cy="0"/>
+        </a:xfrm>
+      </p:grpSpPr>
+      <p:sp>
+        <p:nvSpPr>
+          <p:cNvPr id="2" name="Slide Image Placeholder 1"/>
+          <p:cNvSpPr>
+            <a:spLocks noGrp="1" noRot="1" noChangeAspect="1"/>
+          </p:cNvSpPr>
+          <p:nvPr>
+            <p:ph type="sldImg"/>
+          </p:nvPr>
+        </p:nvSpPr>
+        <p:spPr/>
+      </p:sp>
+      <p:sp>
+        <p:nvSpPr>
+          <p:cNvPr id="3" name="Notes Placeholder 2"/>
+          <p:cNvSpPr>
+            <a:spLocks noGrp="1"/>
+          </p:cNvSpPr>
+          <p:nvPr>
+            <p:ph type="body" idx="1"/>
+          </p:nvPr>
+        </p:nvSpPr>
+        <p:spPr/>
+        <p:txBody>
+          <a:bodyPr/>
+          <a:lstStyle/>
+          <a:p>
+            <a:r>
+              <a:rPr lang="en-US" dirty="0"/>
+              <a:t>• Preview the 5-day arc in 60 seconds
+• Days 1–3 build on the same 'docs assistant' reference project
+• Day 4 turns the single agent into a multi-agent workflow
+• Day 5 covers production + capstone kickoff
+• Every day maps to the four-layer stack (Module 5)
+• Post-workshop: capstone project reviewed 1:1</a:t>
+            </a:r>
+            <a:endParaRPr lang="en-US" dirty="0"/>
+          </a:p>
+        </p:txBody>
+      </p:sp>
+      <p:sp>
+        <p:nvSpPr>
+          <p:cNvPr id="4" name="Slide Number Placeholder 3"/>
+          <p:cNvSpPr>
+            <a:spLocks noGrp="1"/>
+          </p:cNvSpPr>
+          <p:nvPr>
+            <p:ph type="sldNum" sz="quarter" idx="10"/>
+          </p:nvPr>
+        </p:nvSpPr>
+        <p:spPr/>
+        <p:txBody>
+          <a:bodyPr/>
+          <a:lstStyle/>
+          <a:p>
+            <a:fld id="{F7021451-1387-4CA6-816F-3879F97B5CBC}" type="slidenum">
+              <a:rPr lang="en-US"/>
+              <a:t>13</a:t>
+            </a:fld>
+            <a:endParaRPr lang="en-US"/>
+          </a:p>
+        </p:txBody>
+      </p:sp>
+    </p:spTree>
+    <p:extLst>
+      <p:ext uri="{BB962C8B-B14F-4D97-AF65-F5344CB8AC3E}">
+        <p14:creationId xmlns:p14="http://schemas.microsoft.com/office/powerpoint/2010/main" val="1024086991"/>
+      </p:ext>
+    </p:extLst>
+  </p:cSld>
+  <p:clrMapOvr>
+    <a:masterClrMapping/>
+  </p:clrMapOvr>
+</p:notes>
+</file>
+
+<file path=ppt/notesSlides/notesSlide14.xml><?xml version="1.0" encoding="utf-8"?>
+<p:notes xmlns:a="http://schemas.openxmlformats.org/drawingml/2006/main" xmlns:r="http://schemas.openxmlformats.org/officeDocument/2006/relationships" xmlns:p="http://schemas.openxmlformats.org/presentationml/2006/main">
+  <p:cSld>
+    <p:spTree>
+      <p:nvGrpSpPr>
+        <p:cNvPr id="1" name=""/>
+        <p:cNvGrpSpPr/>
+        <p:nvPr/>
+      </p:nvGrpSpPr>
+      <p:grpSpPr>
+        <a:xfrm>
+          <a:off x="0" y="0"/>
+          <a:ext cx="0" cy="0"/>
+          <a:chOff x="0" y="0"/>
+          <a:chExt cx="0" cy="0"/>
+        </a:xfrm>
+      </p:grpSpPr>
+      <p:sp>
+        <p:nvSpPr>
+          <p:cNvPr id="2" name="Slide Image Placeholder 1"/>
+          <p:cNvSpPr>
+            <a:spLocks noGrp="1" noRot="1" noChangeAspect="1"/>
+          </p:cNvSpPr>
+          <p:nvPr>
+            <p:ph type="sldImg"/>
+          </p:nvPr>
+        </p:nvSpPr>
+        <p:spPr/>
+      </p:sp>
+      <p:sp>
+        <p:nvSpPr>
+          <p:cNvPr id="3" name="Notes Placeholder 2"/>
+          <p:cNvSpPr>
+            <a:spLocks noGrp="1"/>
+          </p:cNvSpPr>
+          <p:nvPr>
+            <p:ph type="body" idx="1"/>
+          </p:nvPr>
+        </p:nvSpPr>
+        <p:spPr/>
+        <p:txBody>
+          <a:bodyPr/>
+          <a:lstStyle/>
+          <a:p>
+            <a:r>
+              <a:rPr lang="en-US" dirty="0"/>
+              <a:t>Recap in 60 seconds. Take one or two questions max, then transition.</a:t>
+            </a:r>
+            <a:endParaRPr lang="en-US" dirty="0"/>
+          </a:p>
+        </p:txBody>
+      </p:sp>
+      <p:sp>
+        <p:nvSpPr>
+          <p:cNvPr id="4" name="Slide Number Placeholder 3"/>
+          <p:cNvSpPr>
+            <a:spLocks noGrp="1"/>
+          </p:cNvSpPr>
+          <p:nvPr>
+            <p:ph type="sldNum" sz="quarter" idx="10"/>
+          </p:nvPr>
+        </p:nvSpPr>
+        <p:spPr/>
+        <p:txBody>
+          <a:bodyPr/>
+          <a:lstStyle/>
+          <a:p>
+            <a:fld id="{F7021451-1387-4CA6-816F-3879F97B5CBC}" type="slidenum">
+              <a:rPr lang="en-US"/>
+              <a:t>14</a:t>
             </a:fld>
             <a:endParaRPr lang="en-US"/>
           </a:p>
@@ -877,13 +1161,13 @@
           <a:p>
             <a:r>
               <a:rPr lang="en-US" dirty="0"/>
-              <a:t>• The three surfaces are complementary, not competitive
-• Copilot Studio → makers, business analysts, M365 destinations
-• Foundry → developer platform on Azure
-• MAF → the SDK your code uses on top of Foundry
-• Be explicit: 'if your target audience is makers, this is not your workshop'
-• Do not disparage Copilot Studio — it's the right tool for a different job
-• This workshop is for the developer audience</a:t>
+              <a:t>• NEW 2026-08-19: Module 1 previously used 'agent' without defining it
+• This slide defines it before we build with it
+• The definition is a direct quote from Learn — 'agent wraps an LLM with the structure...'
+• Left column of the trade-off table = MAF's docs 'raw LLM call' side
+• Right column = what MAF gives you (which the NEXT slide diagrams)
+• Anchor: 'you're not here to write raw LLM calls; the workshop teaches how to compose the right side of that table'
+• Source: aka.ms/agent-framework/journey/from-llms-to-agents</a:t>
             </a:r>
             <a:endParaRPr lang="en-US" dirty="0"/>
           </a:p>
@@ -971,12 +1255,15 @@
           <a:p>
             <a:r>
               <a:rPr lang="en-US" dirty="0"/>
-              <a:t>• Anchor slide — the payoff for the whole module
-• Every agent needs three things: Model, Instructions, Tools
-• That's true whether you're in Copilot Studio, Foundry, or writing raw MAF code
-• What changes across surfaces: how much code you write, who owns the runtime
-• Sets up the next slide's IaaS/PaaS/SaaS spectrum
-• Pause for questions here — this is where the mental model clicks or doesn't</a:t>
+              <a:t>• Diagram + table adapted verbatim from Learn — From LLMs to Agents
+• Walk each layer aloud (this is what the audience needs to leave with):
+•   Instructions — persona, constraints, output format. Set once, applied to every call.
+•   Tools — the ability to act (call APIs, query databases, run code). Framework handles the tool-call loop.
+•   Session — conversation history and multi-turn state. Agent remembers what happened before.
+•   Middleware — intercept requests/responses for logging, guardrails, caching, behavioral overrides.
+•   LLM Provider — swappable backend. Foundry, OpenAI, Anthropic — without rewriting agent code.
+• Say: 'this week you'll write code that composes each of these boxes'
+• Day 4 covers middleware in depth; Day 3 covers tools + session; Day 5 covers guardrails + providers</a:t>
             </a:r>
             <a:endParaRPr lang="en-US" dirty="0"/>
           </a:p>
@@ -1064,13 +1351,15 @@
           <a:p>
             <a:r>
               <a:rPr lang="en-US" dirty="0"/>
-              <a:t>• Piggyback on vocabulary attendees already know
-• IaaS = OSS frameworks + containers you run
-• PaaS = Foundry Agent Service + MAF (this workshop)
-• SaaS = Copilot Studio
-• Say clearly: 'this workshop lives in PaaS territory'
-• PaaS = you write real code, you don't run the infrastructure
-• This slide replaces a bullet list — the visual lands harder, let it breathe</a:t>
+              <a:t>• DEMO 1.2 · ~4 min
+• Split terminal, both panes ready
+• Left = raw_llm.py, right = agent_with_context.py
+• Question in both: 'What time is it right now, and remember I asked you this.'
+• Left Turn 1: model hedges (no real-time info); Turn 2: forgets
+• Right Turn 1: calls get_current_time, prints real ISO timestamp; Turn 2: recalls specific earlier question
+• Point at the diff: same-size code, different capability
+• Fallback: pre-recorded video at demos/day1/recordings/module1-demo2-agent-diff.mp4
+• Payoff line: 'Every layer on the previous slide is doing real work in the right pane.'</a:t>
             </a:r>
             <a:endParaRPr lang="en-US" dirty="0"/>
           </a:p>
@@ -1158,14 +1447,13 @@
           <a:p>
             <a:r>
               <a:rPr lang="en-US" dirty="0"/>
-              <a:t>• Prevents the #1 anti-pattern: 'everything must be an agent'
-• Match complexity to need — not every LLM problem needs orchestration
-• Direct LLM call: summarize this doc — cheap, easy to eval
-• Single agent w/ tools: iterative work that needs to *do* something
-• Multi-agent workflow: distinct roles, hand-offs — costly, new failure modes
-• Rule: reach for the leftmost pattern that solves the problem
-• Ask 2–3 attendees: 'what pattern does your current use case actually need?'
-• This connects directly to Day 4 (multi-agent) — plant the flag</a:t>
+              <a:t>• The three surfaces are complementary, not competitive
+• Copilot Studio → makers, business analysts, M365 destinations
+• Foundry → developer platform on Azure
+• MAF → the SDK your code uses on top of Foundry
+• Be explicit: 'if your target audience is makers, this is not your workshop'
+• Do not disparage Copilot Studio — it's the right tool for a different job
+• This workshop is for the developer audience</a:t>
             </a:r>
             <a:endParaRPr lang="en-US" dirty="0"/>
           </a:p>
@@ -1253,13 +1541,12 @@
           <a:p>
             <a:r>
               <a:rPr lang="en-US" dirty="0"/>
-              <a:t>• Preview only — resist the urge to teach any of these
-• Prompt agents / Hosted agents → Module 6 today
-• Toolbox → Day 2 (Actions layer)
-• Foundry IQ → Day 2 (Knowledge layer)
-• Responses API → Module 6 today, deeper in Days 2–3
-• Evaluators / tracing → Day 4 and Day 5
-• This slide's job: land the vocabulary once so nothing feels new later</a:t>
+              <a:t>• Anchor slide — the payoff for the whole module
+• Every agent needs three things: Model, Instructions, Tools
+• That's true whether you're in Copilot Studio, Foundry, or writing raw MAF code
+• What changes across surfaces: how much code you write, who owns the runtime
+• Sets up the next slide's IaaS/PaaS/SaaS spectrum
+• Pause for questions here — this is where the mental model clicks or doesn't</a:t>
             </a:r>
             <a:endParaRPr lang="en-US" dirty="0"/>
           </a:p>
@@ -1347,13 +1634,13 @@
           <a:p>
             <a:r>
               <a:rPr lang="en-US" dirty="0"/>
-              <a:t>• One vocabulary is the key selling point of MAF
-• Same primitives (agent, thread, tool, run) in Python and C#
-• For attendees coming from SK or AutoGen: acknowledge the lineage
-• Say: 'SK is still supported, not the forward path for new work'
-• Say: 'AutoGen was the research predecessor to MAF'
-• Don't disparage — attendees have shipped code with both
-• MAF absorbed the lessons; the surface is cleaner</a:t>
+              <a:t>• Piggyback on vocabulary attendees already know
+• IaaS = OSS frameworks + containers you run
+• PaaS = Foundry Agent Service + MAF (this workshop)
+• SaaS = Copilot Studio
+• Say clearly: 'this workshop lives in PaaS territory'
+• PaaS = you write real code, you don't run the infrastructure
+• This slide replaces a bullet list — the visual lands harder, let it breathe</a:t>
             </a:r>
             <a:endParaRPr lang="en-US" dirty="0"/>
           </a:p>
@@ -1441,12 +1728,14 @@
           <a:p>
             <a:r>
               <a:rPr lang="en-US" dirty="0"/>
-              <a:t>• Set explicit expectations about scope
-• If someone came expecting Copilot Studio depth: not this workshop
-• If someone came expecting fine-tuning or model training: not this workshop
-• Copilot Studio, SK, AutoGen, LangChain, CrewAI — all out of scope
-• Explain why: MAF is the forward direction for production agent code
-• Redirect anyone who needs the excluded topics to appropriate resources</a:t>
+              <a:t>• Prevents the #1 anti-pattern: 'everything must be an agent'
+• Match complexity to need — not every LLM problem needs orchestration
+• Direct LLM call: summarize this doc — cheap, easy to eval
+• Single agent w/ tools: iterative work that needs to *do* something
+• Multi-agent workflow: distinct roles, hand-offs — costly, new failure modes
+• Rule: reach for the leftmost pattern that solves the problem
+• Ask 2–3 attendees: 'what pattern does your current use case actually need?'
+• This connects directly to Day 4 (multi-agent) — plant the flag</a:t>
             </a:r>
             <a:endParaRPr lang="en-US" dirty="0"/>
           </a:p>
@@ -2099,6 +2388,1087 @@
                 <a:ea typeface="Calibri" pitchFamily="34" charset="-122"/>
                 <a:cs typeface="Calibri" pitchFamily="34" charset="-120"/>
               </a:rPr>
+              <a:t>What Foundry gives you</a:t>
+            </a:r>
+            <a:endParaRPr lang="en-US" sz="2800" dirty="0"/>
+          </a:p>
+        </p:txBody>
+      </p:sp>
+      <p:sp>
+        <p:nvSpPr>
+          <p:cNvPr id="5" name="Text 3"/>
+          <p:cNvSpPr/>
+          <p:nvPr/>
+        </p:nvSpPr>
+        <p:spPr>
+          <a:xfrm>
+            <a:off x="365760" y="1097280"/>
+            <a:ext cx="8412480" cy="3749040"/>
+          </a:xfrm>
+          <a:prstGeom prst="rect">
+            <a:avLst/>
+          </a:prstGeom>
+          <a:noFill/>
+          <a:ln/>
+        </p:spPr>
+        <p:txBody>
+          <a:bodyPr wrap="square" rtlCol="0" anchor="ctr"/>
+          <a:lstStyle/>
+          <a:p>
+            <a:pPr marL="342900" indent="-342900">
+              <a:spcAft>
+                <a:spcPts val="600"/>
+              </a:spcAft>
+              <a:buSzPct val="100000"/>
+              <a:buChar char="•"/>
+            </a:pPr>
+            <a:r>
+              <a:rPr lang="en-US" sz="1500" dirty="0">
+                <a:solidFill>
+                  <a:srgbClr val="212121"/>
+                </a:solidFill>
+                <a:latin typeface="Calibri" pitchFamily="34" charset="0"/>
+                <a:ea typeface="Calibri" pitchFamily="34" charset="-122"/>
+                <a:cs typeface="Calibri" pitchFamily="34" charset="-120"/>
+              </a:rPr>
+              <a:t>Model deployments (frontier and open models)</a:t>
+            </a:r>
+            <a:endParaRPr lang="en-US" sz="1500" dirty="0"/>
+          </a:p>
+          <a:p>
+            <a:pPr marL="342900" indent="-342900">
+              <a:spcAft>
+                <a:spcPts val="600"/>
+              </a:spcAft>
+              <a:buSzPct val="100000"/>
+              <a:buChar char="•"/>
+            </a:pPr>
+            <a:r>
+              <a:rPr lang="en-US" sz="1500" dirty="0">
+                <a:solidFill>
+                  <a:srgbClr val="212121"/>
+                </a:solidFill>
+                <a:latin typeface="Calibri" pitchFamily="34" charset="0"/>
+                <a:ea typeface="Calibri" pitchFamily="34" charset="-122"/>
+                <a:cs typeface="Calibri" pitchFamily="34" charset="-120"/>
+              </a:rPr>
+              <a:t>Playgrounds — chat, agent, evaluation</a:t>
+            </a:r>
+            <a:endParaRPr lang="en-US" sz="1500" dirty="0"/>
+          </a:p>
+          <a:p>
+            <a:pPr marL="342900" indent="-342900">
+              <a:spcAft>
+                <a:spcPts val="600"/>
+              </a:spcAft>
+              <a:buSzPct val="100000"/>
+              <a:buChar char="•"/>
+            </a:pPr>
+            <a:r>
+              <a:rPr lang="en-US" sz="1500" dirty="0">
+                <a:solidFill>
+                  <a:srgbClr val="212121"/>
+                </a:solidFill>
+                <a:latin typeface="Calibri" pitchFamily="34" charset="0"/>
+                <a:ea typeface="Calibri" pitchFamily="34" charset="-122"/>
+                <a:cs typeface="Calibri" pitchFamily="34" charset="-120"/>
+              </a:rPr>
+              <a:t>Foundry Agent Service — runtime for Prompt agents (portal-authored, no code) and Hosted agents (your code, containerized, Foundry-run)</a:t>
+            </a:r>
+            <a:endParaRPr lang="en-US" sz="1500" dirty="0"/>
+          </a:p>
+          <a:p>
+            <a:pPr marL="342900" indent="-342900">
+              <a:spcAft>
+                <a:spcPts val="600"/>
+              </a:spcAft>
+              <a:buSzPct val="100000"/>
+              <a:buChar char="•"/>
+            </a:pPr>
+            <a:r>
+              <a:rPr lang="en-US" sz="1500" dirty="0">
+                <a:solidFill>
+                  <a:srgbClr val="212121"/>
+                </a:solidFill>
+                <a:latin typeface="Calibri" pitchFamily="34" charset="0"/>
+                <a:ea typeface="Calibri" pitchFamily="34" charset="-122"/>
+                <a:cs typeface="Calibri" pitchFamily="34" charset="-120"/>
+              </a:rPr>
+              <a:t>Responses API — the single model + tools entry point; call it from your own code running anywhere</a:t>
+            </a:r>
+            <a:endParaRPr lang="en-US" sz="1500" dirty="0"/>
+          </a:p>
+          <a:p>
+            <a:pPr marL="342900" indent="-342900">
+              <a:spcAft>
+                <a:spcPts val="600"/>
+              </a:spcAft>
+              <a:buSzPct val="100000"/>
+              <a:buChar char="•"/>
+            </a:pPr>
+            <a:r>
+              <a:rPr lang="en-US" sz="1500" dirty="0">
+                <a:solidFill>
+                  <a:srgbClr val="212121"/>
+                </a:solidFill>
+                <a:latin typeface="Calibri" pitchFamily="34" charset="0"/>
+                <a:ea typeface="Calibri" pitchFamily="34" charset="-122"/>
+                <a:cs typeface="Calibri" pitchFamily="34" charset="-120"/>
+              </a:rPr>
+              <a:t>Foundry Toolbox — curated tool/connector catalog, exposed via MCP</a:t>
+            </a:r>
+            <a:endParaRPr lang="en-US" sz="1500" dirty="0"/>
+          </a:p>
+          <a:p>
+            <a:pPr marL="342900" indent="-342900">
+              <a:spcAft>
+                <a:spcPts val="600"/>
+              </a:spcAft>
+              <a:buSzPct val="100000"/>
+              <a:buChar char="•"/>
+            </a:pPr>
+            <a:r>
+              <a:rPr lang="en-US" sz="1500" dirty="0">
+                <a:solidFill>
+                  <a:srgbClr val="212121"/>
+                </a:solidFill>
+                <a:latin typeface="Calibri" pitchFamily="34" charset="0"/>
+                <a:ea typeface="Calibri" pitchFamily="34" charset="-122"/>
+                <a:cs typeface="Calibri" pitchFamily="34" charset="-120"/>
+              </a:rPr>
+              <a:t>Foundry IQ — enterprise knowledge and grounding layer</a:t>
+            </a:r>
+            <a:endParaRPr lang="en-US" sz="1500" dirty="0"/>
+          </a:p>
+          <a:p>
+            <a:pPr marL="342900" indent="-342900">
+              <a:spcAft>
+                <a:spcPts val="600"/>
+              </a:spcAft>
+              <a:buSzPct val="100000"/>
+              <a:buChar char="•"/>
+            </a:pPr>
+            <a:r>
+              <a:rPr lang="en-US" sz="1500" dirty="0">
+                <a:solidFill>
+                  <a:srgbClr val="212121"/>
+                </a:solidFill>
+                <a:latin typeface="Calibri" pitchFamily="34" charset="0"/>
+                <a:ea typeface="Calibri" pitchFamily="34" charset="-122"/>
+                <a:cs typeface="Calibri" pitchFamily="34" charset="-120"/>
+              </a:rPr>
+              <a:t>Evaluators, tracing, and safety</a:t>
+            </a:r>
+            <a:endParaRPr lang="en-US" sz="1500" dirty="0"/>
+          </a:p>
+        </p:txBody>
+      </p:sp>
+    </p:spTree>
+  </p:cSld>
+  <p:clrMapOvr>
+    <a:masterClrMapping/>
+  </p:clrMapOvr>
+</p:sld>
+</file>
+
+<file path=ppt/slides/slide11.xml><?xml version="1.0" encoding="utf-8"?>
+<p:sld xmlns:a="http://schemas.openxmlformats.org/drawingml/2006/main" xmlns:r="http://schemas.openxmlformats.org/officeDocument/2006/relationships" xmlns:p="http://schemas.openxmlformats.org/presentationml/2006/main">
+  <p:cSld name="Slide 11">
+    <p:bg>
+      <p:bgPr>
+        <a:solidFill>
+          <a:srgbClr val="FFFFFF"/>
+        </a:solidFill>
+      </p:bgPr>
+    </p:bg>
+    <p:spTree>
+      <p:nvGrpSpPr>
+        <p:cNvPr id="1" name=""/>
+        <p:cNvGrpSpPr/>
+        <p:nvPr/>
+      </p:nvGrpSpPr>
+      <p:grpSpPr>
+        <a:xfrm>
+          <a:off x="0" y="0"/>
+          <a:ext cx="0" cy="0"/>
+          <a:chOff x="0" y="0"/>
+          <a:chExt cx="0" cy="0"/>
+        </a:xfrm>
+      </p:grpSpPr>
+      <p:sp>
+        <p:nvSpPr>
+          <p:cNvPr id="2" name="Shape 0"/>
+          <p:cNvSpPr/>
+          <p:nvPr/>
+        </p:nvSpPr>
+        <p:spPr>
+          <a:xfrm>
+            <a:off x="0" y="0"/>
+            <a:ext cx="54864" cy="5143500"/>
+          </a:xfrm>
+          <a:prstGeom prst="rect">
+            <a:avLst/>
+          </a:prstGeom>
+          <a:solidFill>
+            <a:srgbClr val="1E2761"/>
+          </a:solidFill>
+          <a:ln/>
+        </p:spPr>
+      </p:sp>
+      <p:sp>
+        <p:nvSpPr>
+          <p:cNvPr id="3" name="Text 1"/>
+          <p:cNvSpPr/>
+          <p:nvPr/>
+        </p:nvSpPr>
+        <p:spPr>
+          <a:xfrm>
+            <a:off x="5669280" y="274320"/>
+            <a:ext cx="3291840" cy="274320"/>
+          </a:xfrm>
+          <a:prstGeom prst="rect">
+            <a:avLst/>
+          </a:prstGeom>
+          <a:noFill/>
+          <a:ln/>
+        </p:spPr>
+        <p:txBody>
+          <a:bodyPr wrap="square" lIns="0" tIns="0" rIns="0" bIns="0" rtlCol="0" anchor="ctr"/>
+          <a:lstStyle/>
+          <a:p>
+            <a:pPr algn="r" indent="0" marL="0">
+              <a:buNone/>
+            </a:pPr>
+            <a:r>
+              <a:rPr lang="en-US" sz="1000" dirty="0">
+                <a:solidFill>
+                  <a:srgbClr val="6B7280"/>
+                </a:solidFill>
+                <a:latin typeface="Calibri" pitchFamily="34" charset="0"/>
+                <a:ea typeface="Calibri" pitchFamily="34" charset="-122"/>
+                <a:cs typeface="Calibri" pitchFamily="34" charset="-120"/>
+              </a:rPr>
+              <a:t>Day 1 · Module 1</a:t>
+            </a:r>
+            <a:endParaRPr lang="en-US" sz="1000" dirty="0"/>
+          </a:p>
+        </p:txBody>
+      </p:sp>
+      <p:sp>
+        <p:nvSpPr>
+          <p:cNvPr id="4" name="Text 2"/>
+          <p:cNvSpPr/>
+          <p:nvPr/>
+        </p:nvSpPr>
+        <p:spPr>
+          <a:xfrm>
+            <a:off x="365760" y="320040"/>
+            <a:ext cx="6217920" cy="640080"/>
+          </a:xfrm>
+          <a:prstGeom prst="rect">
+            <a:avLst/>
+          </a:prstGeom>
+          <a:noFill/>
+          <a:ln/>
+        </p:spPr>
+        <p:txBody>
+          <a:bodyPr wrap="square" lIns="0" tIns="0" rIns="0" bIns="0" rtlCol="0" anchor="ctr"/>
+          <a:lstStyle/>
+          <a:p>
+            <a:pPr indent="0" marL="0">
+              <a:buNone/>
+            </a:pPr>
+            <a:r>
+              <a:rPr lang="en-US" sz="2800" b="1" dirty="0">
+                <a:solidFill>
+                  <a:srgbClr val="1E2761"/>
+                </a:solidFill>
+                <a:latin typeface="Calibri" pitchFamily="34" charset="0"/>
+                <a:ea typeface="Calibri" pitchFamily="34" charset="-122"/>
+                <a:cs typeface="Calibri" pitchFamily="34" charset="-120"/>
+              </a:rPr>
+              <a:t>What MAF gives you</a:t>
+            </a:r>
+            <a:endParaRPr lang="en-US" sz="2800" dirty="0"/>
+          </a:p>
+        </p:txBody>
+      </p:sp>
+      <p:sp>
+        <p:nvSpPr>
+          <p:cNvPr id="5" name="Text 3"/>
+          <p:cNvSpPr/>
+          <p:nvPr/>
+        </p:nvSpPr>
+        <p:spPr>
+          <a:xfrm>
+            <a:off x="365760" y="1097280"/>
+            <a:ext cx="8412480" cy="3749040"/>
+          </a:xfrm>
+          <a:prstGeom prst="rect">
+            <a:avLst/>
+          </a:prstGeom>
+          <a:noFill/>
+          <a:ln/>
+        </p:spPr>
+        <p:txBody>
+          <a:bodyPr wrap="square" rtlCol="0" anchor="ctr"/>
+          <a:lstStyle/>
+          <a:p>
+            <a:pPr marL="342900" indent="-342900">
+              <a:spcAft>
+                <a:spcPts val="600"/>
+              </a:spcAft>
+              <a:buSzPct val="100000"/>
+              <a:buChar char="•"/>
+            </a:pPr>
+            <a:r>
+              <a:rPr lang="en-US" sz="1500" dirty="0">
+                <a:solidFill>
+                  <a:srgbClr val="212121"/>
+                </a:solidFill>
+                <a:latin typeface="Calibri" pitchFamily="34" charset="0"/>
+                <a:ea typeface="Calibri" pitchFamily="34" charset="-122"/>
+                <a:cs typeface="Calibri" pitchFamily="34" charset="-120"/>
+              </a:rPr>
+              <a:t>One SDK for authoring agents — Python and C#</a:t>
+            </a:r>
+            <a:endParaRPr lang="en-US" sz="1500" dirty="0"/>
+          </a:p>
+          <a:p>
+            <a:pPr marL="342900" indent="-342900">
+              <a:spcAft>
+                <a:spcPts val="600"/>
+              </a:spcAft>
+              <a:buSzPct val="100000"/>
+              <a:buChar char="•"/>
+            </a:pPr>
+            <a:r>
+              <a:rPr lang="en-US" sz="1500" dirty="0">
+                <a:solidFill>
+                  <a:srgbClr val="212121"/>
+                </a:solidFill>
+                <a:latin typeface="Calibri" pitchFamily="34" charset="0"/>
+                <a:ea typeface="Calibri" pitchFamily="34" charset="-122"/>
+                <a:cs typeface="Calibri" pitchFamily="34" charset="-120"/>
+              </a:rPr>
+              <a:t>One vocabulary: agents, sessions, tools, runs</a:t>
+            </a:r>
+            <a:endParaRPr lang="en-US" sz="1500" dirty="0"/>
+          </a:p>
+          <a:p>
+            <a:pPr marL="342900" indent="-342900">
+              <a:spcAft>
+                <a:spcPts val="600"/>
+              </a:spcAft>
+              <a:buSzPct val="100000"/>
+              <a:buChar char="•"/>
+            </a:pPr>
+            <a:r>
+              <a:rPr lang="en-US" sz="1500" dirty="0">
+                <a:solidFill>
+                  <a:srgbClr val="212121"/>
+                </a:solidFill>
+                <a:latin typeface="Calibri" pitchFamily="34" charset="0"/>
+                <a:ea typeface="Calibri" pitchFamily="34" charset="-122"/>
+                <a:cs typeface="Calibri" pitchFamily="34" charset="-120"/>
+              </a:rPr>
+              <a:t>First-class streaming, memory, structured outputs</a:t>
+            </a:r>
+            <a:endParaRPr lang="en-US" sz="1500" dirty="0"/>
+          </a:p>
+          <a:p>
+            <a:pPr marL="342900" indent="-342900">
+              <a:spcAft>
+                <a:spcPts val="600"/>
+              </a:spcAft>
+              <a:buSzPct val="100000"/>
+              <a:buChar char="•"/>
+            </a:pPr>
+            <a:r>
+              <a:rPr lang="en-US" sz="1500" dirty="0">
+                <a:solidFill>
+                  <a:srgbClr val="212121"/>
+                </a:solidFill>
+                <a:latin typeface="Calibri" pitchFamily="34" charset="0"/>
+                <a:ea typeface="Calibri" pitchFamily="34" charset="-122"/>
+                <a:cs typeface="Calibri" pitchFamily="34" charset="-120"/>
+              </a:rPr>
+              <a:t>Multi-agent orchestration primitives</a:t>
+            </a:r>
+            <a:endParaRPr lang="en-US" sz="1500" dirty="0"/>
+          </a:p>
+          <a:p>
+            <a:pPr marL="342900" indent="-342900">
+              <a:spcAft>
+                <a:spcPts val="600"/>
+              </a:spcAft>
+              <a:buSzPct val="100000"/>
+              <a:buChar char="•"/>
+            </a:pPr>
+            <a:r>
+              <a:rPr lang="en-US" sz="1500" dirty="0">
+                <a:solidFill>
+                  <a:srgbClr val="212121"/>
+                </a:solidFill>
+                <a:latin typeface="Calibri" pitchFamily="34" charset="0"/>
+                <a:ea typeface="Calibri" pitchFamily="34" charset="-122"/>
+                <a:cs typeface="Calibri" pitchFamily="34" charset="-120"/>
+              </a:rPr>
+              <a:t>Consumes Foundry Toolbox and MCP servers</a:t>
+            </a:r>
+            <a:endParaRPr lang="en-US" sz="1500" dirty="0"/>
+          </a:p>
+          <a:p>
+            <a:pPr marL="342900" indent="-342900">
+              <a:spcAft>
+                <a:spcPts val="600"/>
+              </a:spcAft>
+              <a:buSzPct val="100000"/>
+              <a:buChar char="•"/>
+            </a:pPr>
+            <a:r>
+              <a:rPr lang="en-US" sz="1500" dirty="0">
+                <a:solidFill>
+                  <a:srgbClr val="212121"/>
+                </a:solidFill>
+                <a:latin typeface="Calibri" pitchFamily="34" charset="0"/>
+                <a:ea typeface="Calibri" pitchFamily="34" charset="-122"/>
+                <a:cs typeface="Calibri" pitchFamily="34" charset="-120"/>
+              </a:rPr>
+              <a:t>The successor to Semantic Kernel and AutoGen patterns (both out of scope)</a:t>
+            </a:r>
+            <a:endParaRPr lang="en-US" sz="1500" dirty="0"/>
+          </a:p>
+        </p:txBody>
+      </p:sp>
+    </p:spTree>
+  </p:cSld>
+  <p:clrMapOvr>
+    <a:masterClrMapping/>
+  </p:clrMapOvr>
+</p:sld>
+</file>
+
+<file path=ppt/slides/slide12.xml><?xml version="1.0" encoding="utf-8"?>
+<p:sld xmlns:a="http://schemas.openxmlformats.org/drawingml/2006/main" xmlns:r="http://schemas.openxmlformats.org/officeDocument/2006/relationships" xmlns:p="http://schemas.openxmlformats.org/presentationml/2006/main">
+  <p:cSld name="Slide 12">
+    <p:bg>
+      <p:bgPr>
+        <a:solidFill>
+          <a:srgbClr val="FFFFFF"/>
+        </a:solidFill>
+      </p:bgPr>
+    </p:bg>
+    <p:spTree>
+      <p:nvGrpSpPr>
+        <p:cNvPr id="1" name=""/>
+        <p:cNvGrpSpPr/>
+        <p:nvPr/>
+      </p:nvGrpSpPr>
+      <p:grpSpPr>
+        <a:xfrm>
+          <a:off x="0" y="0"/>
+          <a:ext cx="0" cy="0"/>
+          <a:chOff x="0" y="0"/>
+          <a:chExt cx="0" cy="0"/>
+        </a:xfrm>
+      </p:grpSpPr>
+      <p:sp>
+        <p:nvSpPr>
+          <p:cNvPr id="2" name="Shape 0"/>
+          <p:cNvSpPr/>
+          <p:nvPr/>
+        </p:nvSpPr>
+        <p:spPr>
+          <a:xfrm>
+            <a:off x="0" y="0"/>
+            <a:ext cx="54864" cy="5143500"/>
+          </a:xfrm>
+          <a:prstGeom prst="rect">
+            <a:avLst/>
+          </a:prstGeom>
+          <a:solidFill>
+            <a:srgbClr val="1E2761"/>
+          </a:solidFill>
+          <a:ln/>
+        </p:spPr>
+      </p:sp>
+      <p:sp>
+        <p:nvSpPr>
+          <p:cNvPr id="3" name="Text 1"/>
+          <p:cNvSpPr/>
+          <p:nvPr/>
+        </p:nvSpPr>
+        <p:spPr>
+          <a:xfrm>
+            <a:off x="5669280" y="274320"/>
+            <a:ext cx="3291840" cy="274320"/>
+          </a:xfrm>
+          <a:prstGeom prst="rect">
+            <a:avLst/>
+          </a:prstGeom>
+          <a:noFill/>
+          <a:ln/>
+        </p:spPr>
+        <p:txBody>
+          <a:bodyPr wrap="square" lIns="0" tIns="0" rIns="0" bIns="0" rtlCol="0" anchor="ctr"/>
+          <a:lstStyle/>
+          <a:p>
+            <a:pPr algn="r" indent="0" marL="0">
+              <a:buNone/>
+            </a:pPr>
+            <a:r>
+              <a:rPr lang="en-US" sz="1000" dirty="0">
+                <a:solidFill>
+                  <a:srgbClr val="6B7280"/>
+                </a:solidFill>
+                <a:latin typeface="Calibri" pitchFamily="34" charset="0"/>
+                <a:ea typeface="Calibri" pitchFamily="34" charset="-122"/>
+                <a:cs typeface="Calibri" pitchFamily="34" charset="-120"/>
+              </a:rPr>
+              <a:t>Day 1 · Module 1</a:t>
+            </a:r>
+            <a:endParaRPr lang="en-US" sz="1000" dirty="0"/>
+          </a:p>
+        </p:txBody>
+      </p:sp>
+      <p:sp>
+        <p:nvSpPr>
+          <p:cNvPr id="4" name="Text 2"/>
+          <p:cNvSpPr/>
+          <p:nvPr/>
+        </p:nvSpPr>
+        <p:spPr>
+          <a:xfrm>
+            <a:off x="365760" y="320040"/>
+            <a:ext cx="6217920" cy="640080"/>
+          </a:xfrm>
+          <a:prstGeom prst="rect">
+            <a:avLst/>
+          </a:prstGeom>
+          <a:noFill/>
+          <a:ln/>
+        </p:spPr>
+        <p:txBody>
+          <a:bodyPr wrap="square" lIns="0" tIns="0" rIns="0" bIns="0" rtlCol="0" anchor="ctr"/>
+          <a:lstStyle/>
+          <a:p>
+            <a:pPr indent="0" marL="0">
+              <a:buNone/>
+            </a:pPr>
+            <a:r>
+              <a:rPr lang="en-US" sz="2800" b="1" dirty="0">
+                <a:solidFill>
+                  <a:srgbClr val="1E2761"/>
+                </a:solidFill>
+                <a:latin typeface="Calibri" pitchFamily="34" charset="0"/>
+                <a:ea typeface="Calibri" pitchFamily="34" charset="-122"/>
+                <a:cs typeface="Calibri" pitchFamily="34" charset="-120"/>
+              </a:rPr>
+              <a:t>What we will and won't cover</a:t>
+            </a:r>
+            <a:endParaRPr lang="en-US" sz="2800" dirty="0"/>
+          </a:p>
+        </p:txBody>
+      </p:sp>
+      <p:sp>
+        <p:nvSpPr>
+          <p:cNvPr id="5" name="Text 3"/>
+          <p:cNvSpPr/>
+          <p:nvPr/>
+        </p:nvSpPr>
+        <p:spPr>
+          <a:xfrm>
+            <a:off x="365760" y="1097280"/>
+            <a:ext cx="4069080" cy="365760"/>
+          </a:xfrm>
+          <a:prstGeom prst="rect">
+            <a:avLst/>
+          </a:prstGeom>
+          <a:noFill/>
+          <a:ln/>
+        </p:spPr>
+        <p:txBody>
+          <a:bodyPr wrap="square" lIns="0" tIns="0" rIns="0" bIns="0" rtlCol="0" anchor="ctr"/>
+          <a:lstStyle/>
+          <a:p>
+            <a:pPr indent="0" marL="0">
+              <a:buNone/>
+            </a:pPr>
+            <a:r>
+              <a:rPr lang="en-US" sz="2000" b="1" dirty="0">
+                <a:solidFill>
+                  <a:srgbClr val="1E2761"/>
+                </a:solidFill>
+                <a:latin typeface="Calibri" pitchFamily="34" charset="0"/>
+                <a:ea typeface="Calibri" pitchFamily="34" charset="-122"/>
+                <a:cs typeface="Calibri" pitchFamily="34" charset="-120"/>
+              </a:rPr>
+              <a:t>Covered</a:t>
+            </a:r>
+            <a:endParaRPr lang="en-US" sz="2000" dirty="0"/>
+          </a:p>
+        </p:txBody>
+      </p:sp>
+      <p:sp>
+        <p:nvSpPr>
+          <p:cNvPr id="6" name="Text 4"/>
+          <p:cNvSpPr/>
+          <p:nvPr/>
+        </p:nvSpPr>
+        <p:spPr>
+          <a:xfrm>
+            <a:off x="4709160" y="1097280"/>
+            <a:ext cx="4069080" cy="365760"/>
+          </a:xfrm>
+          <a:prstGeom prst="rect">
+            <a:avLst/>
+          </a:prstGeom>
+          <a:noFill/>
+          <a:ln/>
+        </p:spPr>
+        <p:txBody>
+          <a:bodyPr wrap="square" lIns="0" tIns="0" rIns="0" bIns="0" rtlCol="0" anchor="ctr"/>
+          <a:lstStyle/>
+          <a:p>
+            <a:pPr indent="0" marL="0">
+              <a:buNone/>
+            </a:pPr>
+            <a:r>
+              <a:rPr lang="en-US" sz="2000" b="1" dirty="0">
+                <a:solidFill>
+                  <a:srgbClr val="1E2761"/>
+                </a:solidFill>
+                <a:latin typeface="Calibri" pitchFamily="34" charset="0"/>
+                <a:ea typeface="Calibri" pitchFamily="34" charset="-122"/>
+                <a:cs typeface="Calibri" pitchFamily="34" charset="-120"/>
+              </a:rPr>
+              <a:t>Out of scope</a:t>
+            </a:r>
+            <a:endParaRPr lang="en-US" sz="2000" dirty="0"/>
+          </a:p>
+        </p:txBody>
+      </p:sp>
+      <p:sp>
+        <p:nvSpPr>
+          <p:cNvPr id="7" name="Text 5"/>
+          <p:cNvSpPr/>
+          <p:nvPr/>
+        </p:nvSpPr>
+        <p:spPr>
+          <a:xfrm>
+            <a:off x="365760" y="1554480"/>
+            <a:ext cx="4069080" cy="3291840"/>
+          </a:xfrm>
+          <a:prstGeom prst="rect">
+            <a:avLst/>
+          </a:prstGeom>
+          <a:noFill/>
+          <a:ln/>
+        </p:spPr>
+        <p:txBody>
+          <a:bodyPr wrap="square" rtlCol="0" anchor="ctr"/>
+          <a:lstStyle/>
+          <a:p>
+            <a:pPr marL="342900" indent="-342900">
+              <a:spcAft>
+                <a:spcPts val="600"/>
+              </a:spcAft>
+              <a:buSzPct val="100000"/>
+              <a:buChar char="•"/>
+            </a:pPr>
+            <a:r>
+              <a:rPr lang="en-US" sz="1500" dirty="0">
+                <a:solidFill>
+                  <a:srgbClr val="212121"/>
+                </a:solidFill>
+                <a:latin typeface="Calibri" pitchFamily="34" charset="0"/>
+                <a:ea typeface="Calibri" pitchFamily="34" charset="-122"/>
+                <a:cs typeface="Calibri" pitchFamily="34" charset="-120"/>
+              </a:rPr>
+              <a:t>Foundry (portal, deployments, connections)</a:t>
+            </a:r>
+            <a:endParaRPr lang="en-US" sz="1500" dirty="0"/>
+          </a:p>
+          <a:p>
+            <a:pPr marL="342900" indent="-342900">
+              <a:spcAft>
+                <a:spcPts val="600"/>
+              </a:spcAft>
+              <a:buSzPct val="100000"/>
+              <a:buChar char="•"/>
+            </a:pPr>
+            <a:r>
+              <a:rPr lang="en-US" sz="1500" dirty="0">
+                <a:solidFill>
+                  <a:srgbClr val="212121"/>
+                </a:solidFill>
+                <a:latin typeface="Calibri" pitchFamily="34" charset="0"/>
+                <a:ea typeface="Calibri" pitchFamily="34" charset="-122"/>
+                <a:cs typeface="Calibri" pitchFamily="34" charset="-120"/>
+              </a:rPr>
+              <a:t>MAF — two hosting families (Foundry-hosted and self-hosted), covered in Module 6</a:t>
+            </a:r>
+            <a:endParaRPr lang="en-US" sz="1500" dirty="0"/>
+          </a:p>
+          <a:p>
+            <a:pPr marL="342900" indent="-342900">
+              <a:spcAft>
+                <a:spcPts val="600"/>
+              </a:spcAft>
+              <a:buSzPct val="100000"/>
+              <a:buChar char="•"/>
+            </a:pPr>
+            <a:r>
+              <a:rPr lang="en-US" sz="1500" dirty="0">
+                <a:solidFill>
+                  <a:srgbClr val="212121"/>
+                </a:solidFill>
+                <a:latin typeface="Calibri" pitchFamily="34" charset="0"/>
+                <a:ea typeface="Calibri" pitchFamily="34" charset="-122"/>
+                <a:cs typeface="Calibri" pitchFamily="34" charset="-120"/>
+              </a:rPr>
+              <a:t>Toolbox and Foundry IQ</a:t>
+            </a:r>
+            <a:endParaRPr lang="en-US" sz="1500" dirty="0"/>
+          </a:p>
+          <a:p>
+            <a:pPr marL="342900" indent="-342900">
+              <a:spcAft>
+                <a:spcPts val="600"/>
+              </a:spcAft>
+              <a:buSzPct val="100000"/>
+              <a:buChar char="•"/>
+            </a:pPr>
+            <a:r>
+              <a:rPr lang="en-US" sz="1500" dirty="0">
+                <a:solidFill>
+                  <a:srgbClr val="212121"/>
+                </a:solidFill>
+                <a:latin typeface="Calibri" pitchFamily="34" charset="0"/>
+                <a:ea typeface="Calibri" pitchFamily="34" charset="-122"/>
+                <a:cs typeface="Calibri" pitchFamily="34" charset="-120"/>
+              </a:rPr>
+              <a:t>MCP consumption and (stretch) authoring</a:t>
+            </a:r>
+            <a:endParaRPr lang="en-US" sz="1500" dirty="0"/>
+          </a:p>
+          <a:p>
+            <a:pPr marL="342900" indent="-342900">
+              <a:spcAft>
+                <a:spcPts val="600"/>
+              </a:spcAft>
+              <a:buSzPct val="100000"/>
+              <a:buChar char="•"/>
+            </a:pPr>
+            <a:r>
+              <a:rPr lang="en-US" sz="1500" dirty="0">
+                <a:solidFill>
+                  <a:srgbClr val="212121"/>
+                </a:solidFill>
+                <a:latin typeface="Calibri" pitchFamily="34" charset="0"/>
+                <a:ea typeface="Calibri" pitchFamily="34" charset="-122"/>
+                <a:cs typeface="Calibri" pitchFamily="34" charset="-120"/>
+              </a:rPr>
+              <a:t>Evaluation at every layer</a:t>
+            </a:r>
+            <a:endParaRPr lang="en-US" sz="1500" dirty="0"/>
+          </a:p>
+          <a:p>
+            <a:pPr marL="342900" indent="-342900">
+              <a:spcAft>
+                <a:spcPts val="600"/>
+              </a:spcAft>
+              <a:buSzPct val="100000"/>
+              <a:buChar char="•"/>
+            </a:pPr>
+            <a:r>
+              <a:rPr lang="en-US" sz="1500" dirty="0">
+                <a:solidFill>
+                  <a:srgbClr val="212121"/>
+                </a:solidFill>
+                <a:latin typeface="Calibri" pitchFamily="34" charset="0"/>
+                <a:ea typeface="Calibri" pitchFamily="34" charset="-122"/>
+                <a:cs typeface="Calibri" pitchFamily="34" charset="-120"/>
+              </a:rPr>
+              <a:t>Production concerns: observability, identity, cost</a:t>
+            </a:r>
+            <a:endParaRPr lang="en-US" sz="1500" dirty="0"/>
+          </a:p>
+        </p:txBody>
+      </p:sp>
+      <p:sp>
+        <p:nvSpPr>
+          <p:cNvPr id="8" name="Text 6"/>
+          <p:cNvSpPr/>
+          <p:nvPr/>
+        </p:nvSpPr>
+        <p:spPr>
+          <a:xfrm>
+            <a:off x="4709160" y="1554480"/>
+            <a:ext cx="4069080" cy="3291840"/>
+          </a:xfrm>
+          <a:prstGeom prst="rect">
+            <a:avLst/>
+          </a:prstGeom>
+          <a:noFill/>
+          <a:ln/>
+        </p:spPr>
+        <p:txBody>
+          <a:bodyPr wrap="square" rtlCol="0" anchor="ctr"/>
+          <a:lstStyle/>
+          <a:p>
+            <a:pPr marL="342900" indent="-342900">
+              <a:spcAft>
+                <a:spcPts val="600"/>
+              </a:spcAft>
+              <a:buSzPct val="100000"/>
+              <a:buChar char="•"/>
+            </a:pPr>
+            <a:r>
+              <a:rPr lang="en-US" sz="1500" dirty="0">
+                <a:solidFill>
+                  <a:srgbClr val="212121"/>
+                </a:solidFill>
+                <a:latin typeface="Calibri" pitchFamily="34" charset="0"/>
+                <a:ea typeface="Calibri" pitchFamily="34" charset="-122"/>
+                <a:cs typeface="Calibri" pitchFamily="34" charset="-120"/>
+              </a:rPr>
+              <a:t>Copilot Studio (different audience)</a:t>
+            </a:r>
+            <a:endParaRPr lang="en-US" sz="1500" dirty="0"/>
+          </a:p>
+          <a:p>
+            <a:pPr marL="342900" indent="-342900">
+              <a:spcAft>
+                <a:spcPts val="600"/>
+              </a:spcAft>
+              <a:buSzPct val="100000"/>
+              <a:buChar char="•"/>
+            </a:pPr>
+            <a:r>
+              <a:rPr lang="en-US" sz="1500" dirty="0">
+                <a:solidFill>
+                  <a:srgbClr val="212121"/>
+                </a:solidFill>
+                <a:latin typeface="Calibri" pitchFamily="34" charset="0"/>
+                <a:ea typeface="Calibri" pitchFamily="34" charset="-122"/>
+                <a:cs typeface="Calibri" pitchFamily="34" charset="-120"/>
+              </a:rPr>
+              <a:t>Semantic Kernel (MAF is the forward direction)</a:t>
+            </a:r>
+            <a:endParaRPr lang="en-US" sz="1500" dirty="0"/>
+          </a:p>
+          <a:p>
+            <a:pPr marL="342900" indent="-342900">
+              <a:spcAft>
+                <a:spcPts val="600"/>
+              </a:spcAft>
+              <a:buSzPct val="100000"/>
+              <a:buChar char="•"/>
+            </a:pPr>
+            <a:r>
+              <a:rPr lang="en-US" sz="1500" dirty="0">
+                <a:solidFill>
+                  <a:srgbClr val="212121"/>
+                </a:solidFill>
+                <a:latin typeface="Calibri" pitchFamily="34" charset="0"/>
+                <a:ea typeface="Calibri" pitchFamily="34" charset="-122"/>
+                <a:cs typeface="Calibri" pitchFamily="34" charset="-120"/>
+              </a:rPr>
+              <a:t>AutoGen (research-lineage predecessor)</a:t>
+            </a:r>
+            <a:endParaRPr lang="en-US" sz="1500" dirty="0"/>
+          </a:p>
+          <a:p>
+            <a:pPr marL="342900" indent="-342900">
+              <a:spcAft>
+                <a:spcPts val="600"/>
+              </a:spcAft>
+              <a:buSzPct val="100000"/>
+              <a:buChar char="•"/>
+            </a:pPr>
+            <a:r>
+              <a:rPr lang="en-US" sz="1500" dirty="0">
+                <a:solidFill>
+                  <a:srgbClr val="212121"/>
+                </a:solidFill>
+                <a:latin typeface="Calibri" pitchFamily="34" charset="0"/>
+                <a:ea typeface="Calibri" pitchFamily="34" charset="-122"/>
+                <a:cs typeface="Calibri" pitchFamily="34" charset="-120"/>
+              </a:rPr>
+              <a:t>Third-party frameworks (LangChain, CrewAI, etc.)</a:t>
+            </a:r>
+            <a:endParaRPr lang="en-US" sz="1500" dirty="0"/>
+          </a:p>
+          <a:p>
+            <a:pPr marL="342900" indent="-342900">
+              <a:spcAft>
+                <a:spcPts val="600"/>
+              </a:spcAft>
+              <a:buSzPct val="100000"/>
+              <a:buChar char="•"/>
+            </a:pPr>
+            <a:r>
+              <a:rPr lang="en-US" sz="1500" dirty="0">
+                <a:solidFill>
+                  <a:srgbClr val="212121"/>
+                </a:solidFill>
+                <a:latin typeface="Calibri" pitchFamily="34" charset="0"/>
+                <a:ea typeface="Calibri" pitchFamily="34" charset="-122"/>
+                <a:cs typeface="Calibri" pitchFamily="34" charset="-120"/>
+              </a:rPr>
+              <a:t>Model fine-tuning, distillation, training</a:t>
+            </a:r>
+            <a:endParaRPr lang="en-US" sz="1500" dirty="0"/>
+          </a:p>
+          <a:p>
+            <a:pPr marL="342900" indent="-342900">
+              <a:spcAft>
+                <a:spcPts val="600"/>
+              </a:spcAft>
+              <a:buSzPct val="100000"/>
+              <a:buChar char="•"/>
+            </a:pPr>
+            <a:r>
+              <a:rPr lang="en-US" sz="1500" dirty="0">
+                <a:solidFill>
+                  <a:srgbClr val="212121"/>
+                </a:solidFill>
+                <a:latin typeface="Calibri" pitchFamily="34" charset="0"/>
+                <a:ea typeface="Calibri" pitchFamily="34" charset="-122"/>
+                <a:cs typeface="Calibri" pitchFamily="34" charset="-120"/>
+              </a:rPr>
+              <a:t>On-prem / air-gapped deployments</a:t>
+            </a:r>
+            <a:endParaRPr lang="en-US" sz="1500" dirty="0"/>
+          </a:p>
+        </p:txBody>
+      </p:sp>
+    </p:spTree>
+  </p:cSld>
+  <p:clrMapOvr>
+    <a:masterClrMapping/>
+  </p:clrMapOvr>
+</p:sld>
+</file>
+
+<file path=ppt/slides/slide13.xml><?xml version="1.0" encoding="utf-8"?>
+<p:sld xmlns:a="http://schemas.openxmlformats.org/drawingml/2006/main" xmlns:r="http://schemas.openxmlformats.org/officeDocument/2006/relationships" xmlns:p="http://schemas.openxmlformats.org/presentationml/2006/main">
+  <p:cSld name="Slide 13">
+    <p:bg>
+      <p:bgPr>
+        <a:solidFill>
+          <a:srgbClr val="FFFFFF"/>
+        </a:solidFill>
+      </p:bgPr>
+    </p:bg>
+    <p:spTree>
+      <p:nvGrpSpPr>
+        <p:cNvPr id="1" name=""/>
+        <p:cNvGrpSpPr/>
+        <p:nvPr/>
+      </p:nvGrpSpPr>
+      <p:grpSpPr>
+        <a:xfrm>
+          <a:off x="0" y="0"/>
+          <a:ext cx="0" cy="0"/>
+          <a:chOff x="0" y="0"/>
+          <a:chExt cx="0" cy="0"/>
+        </a:xfrm>
+      </p:grpSpPr>
+      <p:sp>
+        <p:nvSpPr>
+          <p:cNvPr id="2" name="Shape 0"/>
+          <p:cNvSpPr/>
+          <p:nvPr/>
+        </p:nvSpPr>
+        <p:spPr>
+          <a:xfrm>
+            <a:off x="0" y="0"/>
+            <a:ext cx="54864" cy="5143500"/>
+          </a:xfrm>
+          <a:prstGeom prst="rect">
+            <a:avLst/>
+          </a:prstGeom>
+          <a:solidFill>
+            <a:srgbClr val="1E2761"/>
+          </a:solidFill>
+          <a:ln/>
+        </p:spPr>
+      </p:sp>
+      <p:sp>
+        <p:nvSpPr>
+          <p:cNvPr id="3" name="Text 1"/>
+          <p:cNvSpPr/>
+          <p:nvPr/>
+        </p:nvSpPr>
+        <p:spPr>
+          <a:xfrm>
+            <a:off x="5669280" y="274320"/>
+            <a:ext cx="3291840" cy="274320"/>
+          </a:xfrm>
+          <a:prstGeom prst="rect">
+            <a:avLst/>
+          </a:prstGeom>
+          <a:noFill/>
+          <a:ln/>
+        </p:spPr>
+        <p:txBody>
+          <a:bodyPr wrap="square" lIns="0" tIns="0" rIns="0" bIns="0" rtlCol="0" anchor="ctr"/>
+          <a:lstStyle/>
+          <a:p>
+            <a:pPr algn="r" indent="0" marL="0">
+              <a:buNone/>
+            </a:pPr>
+            <a:r>
+              <a:rPr lang="en-US" sz="1000" dirty="0">
+                <a:solidFill>
+                  <a:srgbClr val="6B7280"/>
+                </a:solidFill>
+                <a:latin typeface="Calibri" pitchFamily="34" charset="0"/>
+                <a:ea typeface="Calibri" pitchFamily="34" charset="-122"/>
+                <a:cs typeface="Calibri" pitchFamily="34" charset="-120"/>
+              </a:rPr>
+              <a:t>Day 1 · Module 1</a:t>
+            </a:r>
+            <a:endParaRPr lang="en-US" sz="1000" dirty="0"/>
+          </a:p>
+        </p:txBody>
+      </p:sp>
+      <p:sp>
+        <p:nvSpPr>
+          <p:cNvPr id="4" name="Text 2"/>
+          <p:cNvSpPr/>
+          <p:nvPr/>
+        </p:nvSpPr>
+        <p:spPr>
+          <a:xfrm>
+            <a:off x="365760" y="320040"/>
+            <a:ext cx="6217920" cy="640080"/>
+          </a:xfrm>
+          <a:prstGeom prst="rect">
+            <a:avLst/>
+          </a:prstGeom>
+          <a:noFill/>
+          <a:ln/>
+        </p:spPr>
+        <p:txBody>
+          <a:bodyPr wrap="square" lIns="0" tIns="0" rIns="0" bIns="0" rtlCol="0" anchor="ctr"/>
+          <a:lstStyle/>
+          <a:p>
+            <a:pPr indent="0" marL="0">
+              <a:buNone/>
+            </a:pPr>
+            <a:r>
+              <a:rPr lang="en-US" sz="2800" b="1" dirty="0">
+                <a:solidFill>
+                  <a:srgbClr val="1E2761"/>
+                </a:solidFill>
+                <a:latin typeface="Calibri" pitchFamily="34" charset="0"/>
+                <a:ea typeface="Calibri" pitchFamily="34" charset="-122"/>
+                <a:cs typeface="Calibri" pitchFamily="34" charset="-120"/>
+              </a:rPr>
               <a:t>Roadmap — how the week hangs together</a:t>
             </a:r>
             <a:endParaRPr lang="en-US" sz="2800" dirty="0"/>
@@ -2107,7 +3477,7 @@
       </p:sp>
       <p:graphicFrame>
         <p:nvGraphicFramePr>
-          <p:cNvPr id="11" name="Table 0"/>
+          <p:cNvPr id="14" name="Table 0"/>
           <p:cNvGraphicFramePr>
             <a:graphicFrameLocks noGrp="1"/>
           </p:cNvGraphicFramePr>
@@ -2971,9 +4341,9 @@
 </p:sld>
 </file>
 
-<file path=ppt/slides/slide11.xml><?xml version="1.0" encoding="utf-8"?>
+<file path=ppt/slides/slide14.xml><?xml version="1.0" encoding="utf-8"?>
 <p:sld xmlns:a="http://schemas.openxmlformats.org/drawingml/2006/main" xmlns:r="http://schemas.openxmlformats.org/officeDocument/2006/relationships" xmlns:p="http://schemas.openxmlformats.org/presentationml/2006/main">
-  <p:cSld name="Slide 11">
+  <p:cSld name="Slide 14">
     <p:bg>
       <p:bgPr>
         <a:solidFill>
@@ -3544,15 +4914,1863 @@
                 <a:ea typeface="Calibri" pitchFamily="34" charset="-122"/>
                 <a:cs typeface="Calibri" pitchFamily="34" charset="-120"/>
               </a:rPr>
-              <a:t>Three surfaces you can build on</a:t>
+              <a:t>What is an agent?</a:t>
             </a:r>
             <a:endParaRPr lang="en-US" sz="2800" dirty="0"/>
+          </a:p>
+        </p:txBody>
+      </p:sp>
+      <p:sp>
+        <p:nvSpPr>
+          <p:cNvPr id="5" name="Text 3"/>
+          <p:cNvSpPr/>
+          <p:nvPr/>
+        </p:nvSpPr>
+        <p:spPr>
+          <a:xfrm>
+            <a:off x="365760" y="1097280"/>
+            <a:ext cx="8412480" cy="822960"/>
+          </a:xfrm>
+          <a:prstGeom prst="rect">
+            <a:avLst/>
+          </a:prstGeom>
+          <a:noFill/>
+          <a:ln/>
+        </p:spPr>
+        <p:txBody>
+          <a:bodyPr wrap="square" rtlCol="0" anchor="ctr"/>
+          <a:lstStyle/>
+          <a:p>
+            <a:pPr indent="0" marL="0">
+              <a:buNone/>
+            </a:pPr>
+            <a:r>
+              <a:rPr lang="en-US" sz="1500" dirty="0">
+                <a:solidFill>
+                  <a:srgbClr val="212121"/>
+                </a:solidFill>
+                <a:latin typeface="Calibri" pitchFamily="34" charset="0"/>
+                <a:ea typeface="Calibri" pitchFamily="34" charset="-122"/>
+                <a:cs typeface="Calibri" pitchFamily="34" charset="-120"/>
+              </a:rPr>
+              <a:t>A raw LLM call is stateless. Every request starts from scratch — no memory of prior turns, no tools wired up, no persistent identity, no guardrails.</a:t>
+            </a:r>
+            <a:endParaRPr lang="en-US" sz="1500" dirty="0"/>
+          </a:p>
+        </p:txBody>
+      </p:sp>
+      <p:sp>
+        <p:nvSpPr>
+          <p:cNvPr id="6" name="Text 4"/>
+          <p:cNvSpPr/>
+          <p:nvPr/>
+        </p:nvSpPr>
+        <p:spPr>
+          <a:xfrm>
+            <a:off x="365760" y="1965960"/>
+            <a:ext cx="8412480" cy="548640"/>
+          </a:xfrm>
+          <a:prstGeom prst="rect">
+            <a:avLst/>
+          </a:prstGeom>
+          <a:noFill/>
+          <a:ln/>
+        </p:spPr>
+        <p:txBody>
+          <a:bodyPr wrap="square" rtlCol="0" anchor="ctr"/>
+          <a:lstStyle/>
+          <a:p>
+            <a:pPr indent="0" marL="0">
+              <a:buNone/>
+            </a:pPr>
+            <a:r>
+              <a:rPr lang="en-US" sz="1300" i="1" dirty="0">
+                <a:solidFill>
+                  <a:srgbClr val="212121"/>
+                </a:solidFill>
+                <a:latin typeface="Calibri" pitchFamily="34" charset="0"/>
+                <a:ea typeface="Calibri" pitchFamily="34" charset="-122"/>
+                <a:cs typeface="Calibri" pitchFamily="34" charset="-120"/>
+              </a:rPr>
+              <a:t>That's fine for a single question. For anything real, you'd be reinventing the same plumbing for every application:</a:t>
+            </a:r>
+            <a:endParaRPr lang="en-US" sz="1300" dirty="0"/>
           </a:p>
         </p:txBody>
       </p:sp>
       <p:graphicFrame>
         <p:nvGraphicFramePr>
           <p:cNvPr id="4" name="Table 0"/>
+          <p:cNvGraphicFramePr>
+            <a:graphicFrameLocks noGrp="1"/>
+          </p:cNvGraphicFramePr>
+          <p:nvPr>
+            <p:extLst>
+              <p:ext uri="{D42A27DB-BD31-4B8C-83A1-F6EECF244321}">
+                <p14:modId xmlns:p14="http://schemas.microsoft.com/office/powerpoint/2010/main" val="1579011935"/>
+              </p:ext>
+            </p:extLst>
+          </p:nvPr>
+        </p:nvGraphicFramePr>
+        <p:xfrm>
+          <a:off x="365760" y="1097280"/>
+          <a:ext cx="8412480" cy="914400"/>
+        </p:xfrm>
+        <a:graphic>
+          <a:graphicData uri="http://schemas.openxmlformats.org/drawingml/2006/table">
+            <a:tbl>
+              <a:tblPr/>
+              <a:tblGrid>
+                <a:gridCol w="4023360"/>
+                <a:gridCol w="4389120"/>
+              </a:tblGrid>
+              <a:tr h="502920">
+                <a:tc>
+                  <a:txBody>
+                    <a:bodyPr/>
+                    <a:lstStyle/>
+                    <a:p>
+                      <a:pPr indent="0" marL="0">
+                        <a:buNone/>
+                      </a:pPr>
+                      <a:r>
+                        <a:rPr lang="en-US" sz="1200" b="1" dirty="0">
+                          <a:solidFill>
+                            <a:srgbClr val="FFFFFF"/>
+                          </a:solidFill>
+                          <a:latin typeface="Calibri" pitchFamily="34" charset="0"/>
+                          <a:ea typeface="Calibri" pitchFamily="34" charset="-122"/>
+                          <a:cs typeface="Calibri" pitchFamily="34" charset="-120"/>
+                        </a:rPr>
+                        <a:t>Raw LLM call</a:t>
+                      </a:r>
+                      <a:endParaRPr lang="en-US" sz="1200" dirty="0">
+                        <a:latin typeface="Calibri" charset="0"/>
+                        <a:ea typeface="Calibri" charset="0"/>
+                        <a:cs typeface="Calibri" charset="0"/>
+                      </a:endParaRPr>
+                    </a:p>
+                  </a:txBody>
+                  <a:tcPr marL="54864" marR="54864" marT="54864" marB="54864" anchor="ctr">
+                    <a:lnL w="6350" cap="flat" cmpd="sng" algn="ctr">
+                      <a:solidFill>
+                        <a:srgbClr val="D1D5DB"/>
+                      </a:solidFill>
+                      <a:prstDash val="solid"/>
+                      <a:round/>
+                      <a:headEnd type="none" w="med" len="med"/>
+                      <a:tailEnd type="none" w="med" len="med"/>
+                    </a:lnL>
+                    <a:lnR w="6350" cap="flat" cmpd="sng" algn="ctr">
+                      <a:solidFill>
+                        <a:srgbClr val="D1D5DB"/>
+                      </a:solidFill>
+                      <a:prstDash val="solid"/>
+                      <a:round/>
+                      <a:headEnd type="none" w="med" len="med"/>
+                      <a:tailEnd type="none" w="med" len="med"/>
+                    </a:lnR>
+                    <a:lnT w="6350" cap="flat" cmpd="sng" algn="ctr">
+                      <a:solidFill>
+                        <a:srgbClr val="D1D5DB"/>
+                      </a:solidFill>
+                      <a:prstDash val="solid"/>
+                      <a:round/>
+                      <a:headEnd type="none" w="med" len="med"/>
+                      <a:tailEnd type="none" w="med" len="med"/>
+                    </a:lnT>
+                    <a:lnB w="6350" cap="flat" cmpd="sng" algn="ctr">
+                      <a:solidFill>
+                        <a:srgbClr val="D1D5DB"/>
+                      </a:solidFill>
+                      <a:prstDash val="solid"/>
+                      <a:round/>
+                      <a:headEnd type="none" w="med" len="med"/>
+                      <a:tailEnd type="none" w="med" len="med"/>
+                    </a:lnB>
+                    <a:solidFill>
+                      <a:srgbClr val="1E2761"/>
+                    </a:solidFill>
+                  </a:tcPr>
+                </a:tc>
+                <a:tc>
+                  <a:txBody>
+                    <a:bodyPr/>
+                    <a:lstStyle/>
+                    <a:p>
+                      <a:pPr indent="0" marL="0">
+                        <a:buNone/>
+                      </a:pPr>
+                      <a:r>
+                        <a:rPr lang="en-US" sz="1200" b="1" dirty="0">
+                          <a:solidFill>
+                            <a:srgbClr val="FFFFFF"/>
+                          </a:solidFill>
+                          <a:latin typeface="Calibri" pitchFamily="34" charset="0"/>
+                          <a:ea typeface="Calibri" pitchFamily="34" charset="-122"/>
+                          <a:cs typeface="Calibri" pitchFamily="34" charset="-120"/>
+                        </a:rPr>
+                        <a:t>Agent</a:t>
+                      </a:r>
+                      <a:endParaRPr lang="en-US" sz="1200" dirty="0">
+                        <a:latin typeface="Calibri" charset="0"/>
+                        <a:ea typeface="Calibri" charset="0"/>
+                        <a:cs typeface="Calibri" charset="0"/>
+                      </a:endParaRPr>
+                    </a:p>
+                  </a:txBody>
+                  <a:tcPr marL="54864" marR="54864" marT="54864" marB="54864" anchor="ctr">
+                    <a:lnL w="6350" cap="flat" cmpd="sng" algn="ctr">
+                      <a:solidFill>
+                        <a:srgbClr val="D1D5DB"/>
+                      </a:solidFill>
+                      <a:prstDash val="solid"/>
+                      <a:round/>
+                      <a:headEnd type="none" w="med" len="med"/>
+                      <a:tailEnd type="none" w="med" len="med"/>
+                    </a:lnL>
+                    <a:lnR w="6350" cap="flat" cmpd="sng" algn="ctr">
+                      <a:solidFill>
+                        <a:srgbClr val="D1D5DB"/>
+                      </a:solidFill>
+                      <a:prstDash val="solid"/>
+                      <a:round/>
+                      <a:headEnd type="none" w="med" len="med"/>
+                      <a:tailEnd type="none" w="med" len="med"/>
+                    </a:lnR>
+                    <a:lnT w="6350" cap="flat" cmpd="sng" algn="ctr">
+                      <a:solidFill>
+                        <a:srgbClr val="D1D5DB"/>
+                      </a:solidFill>
+                      <a:prstDash val="solid"/>
+                      <a:round/>
+                      <a:headEnd type="none" w="med" len="med"/>
+                      <a:tailEnd type="none" w="med" len="med"/>
+                    </a:lnT>
+                    <a:lnB w="6350" cap="flat" cmpd="sng" algn="ctr">
+                      <a:solidFill>
+                        <a:srgbClr val="D1D5DB"/>
+                      </a:solidFill>
+                      <a:prstDash val="solid"/>
+                      <a:round/>
+                      <a:headEnd type="none" w="med" len="med"/>
+                      <a:tailEnd type="none" w="med" len="med"/>
+                    </a:lnB>
+                    <a:solidFill>
+                      <a:srgbClr val="1E2761"/>
+                    </a:solidFill>
+                  </a:tcPr>
+                </a:tc>
+              </a:tr>
+              <a:tr h="502920">
+                <a:tc>
+                  <a:txBody>
+                    <a:bodyPr/>
+                    <a:lstStyle/>
+                    <a:p>
+                      <a:pPr indent="0" marL="0">
+                        <a:buNone/>
+                      </a:pPr>
+                      <a:r>
+                        <a:rPr lang="en-US" sz="1200" dirty="0">
+                          <a:solidFill>
+                            <a:srgbClr val="212121"/>
+                          </a:solidFill>
+                          <a:latin typeface="Calibri" pitchFamily="34" charset="0"/>
+                          <a:ea typeface="Calibri" pitchFamily="34" charset="-122"/>
+                          <a:cs typeface="Calibri" pitchFamily="34" charset="-120"/>
+                        </a:rPr>
+                        <a:t>Full control over every API parameter</a:t>
+                      </a:r>
+                      <a:endParaRPr lang="en-US" sz="1200" dirty="0">
+                        <a:latin typeface="Calibri" charset="0"/>
+                        <a:ea typeface="Calibri" charset="0"/>
+                        <a:cs typeface="Calibri" charset="0"/>
+                      </a:endParaRPr>
+                    </a:p>
+                  </a:txBody>
+                  <a:tcPr marL="54864" marR="54864" marT="54864" marB="54864" anchor="ctr">
+                    <a:lnL w="6350" cap="flat" cmpd="sng" algn="ctr">
+                      <a:solidFill>
+                        <a:srgbClr val="D1D5DB"/>
+                      </a:solidFill>
+                      <a:prstDash val="solid"/>
+                      <a:round/>
+                      <a:headEnd type="none" w="med" len="med"/>
+                      <a:tailEnd type="none" w="med" len="med"/>
+                    </a:lnL>
+                    <a:lnR w="6350" cap="flat" cmpd="sng" algn="ctr">
+                      <a:solidFill>
+                        <a:srgbClr val="D1D5DB"/>
+                      </a:solidFill>
+                      <a:prstDash val="solid"/>
+                      <a:round/>
+                      <a:headEnd type="none" w="med" len="med"/>
+                      <a:tailEnd type="none" w="med" len="med"/>
+                    </a:lnR>
+                    <a:lnT w="6350" cap="flat" cmpd="sng" algn="ctr">
+                      <a:solidFill>
+                        <a:srgbClr val="D1D5DB"/>
+                      </a:solidFill>
+                      <a:prstDash val="solid"/>
+                      <a:round/>
+                      <a:headEnd type="none" w="med" len="med"/>
+                      <a:tailEnd type="none" w="med" len="med"/>
+                    </a:lnT>
+                    <a:lnB w="6350" cap="flat" cmpd="sng" algn="ctr">
+                      <a:solidFill>
+                        <a:srgbClr val="D1D5DB"/>
+                      </a:solidFill>
+                      <a:prstDash val="solid"/>
+                      <a:round/>
+                      <a:headEnd type="none" w="med" len="med"/>
+                      <a:tailEnd type="none" w="med" len="med"/>
+                    </a:lnB>
+                    <a:solidFill>
+                      <a:srgbClr val="FFFFFF"/>
+                    </a:solidFill>
+                  </a:tcPr>
+                </a:tc>
+                <a:tc>
+                  <a:txBody>
+                    <a:bodyPr/>
+                    <a:lstStyle/>
+                    <a:p>
+                      <a:pPr indent="0" marL="0">
+                        <a:buNone/>
+                      </a:pPr>
+                      <a:r>
+                        <a:rPr lang="en-US" sz="1200" dirty="0">
+                          <a:solidFill>
+                            <a:srgbClr val="212121"/>
+                          </a:solidFill>
+                          <a:latin typeface="Calibri" pitchFamily="34" charset="0"/>
+                          <a:ea typeface="Calibri" pitchFamily="34" charset="-122"/>
+                          <a:cs typeface="Calibri" pitchFamily="34" charset="-120"/>
+                        </a:rPr>
+                        <a:t>Opinionated abstractions that handle common patterns</a:t>
+                      </a:r>
+                      <a:endParaRPr lang="en-US" sz="1200" dirty="0">
+                        <a:latin typeface="Calibri" charset="0"/>
+                        <a:ea typeface="Calibri" charset="0"/>
+                        <a:cs typeface="Calibri" charset="0"/>
+                      </a:endParaRPr>
+                    </a:p>
+                  </a:txBody>
+                  <a:tcPr marL="54864" marR="54864" marT="54864" marB="54864" anchor="ctr">
+                    <a:lnL w="6350" cap="flat" cmpd="sng" algn="ctr">
+                      <a:solidFill>
+                        <a:srgbClr val="D1D5DB"/>
+                      </a:solidFill>
+                      <a:prstDash val="solid"/>
+                      <a:round/>
+                      <a:headEnd type="none" w="med" len="med"/>
+                      <a:tailEnd type="none" w="med" len="med"/>
+                    </a:lnL>
+                    <a:lnR w="6350" cap="flat" cmpd="sng" algn="ctr">
+                      <a:solidFill>
+                        <a:srgbClr val="D1D5DB"/>
+                      </a:solidFill>
+                      <a:prstDash val="solid"/>
+                      <a:round/>
+                      <a:headEnd type="none" w="med" len="med"/>
+                      <a:tailEnd type="none" w="med" len="med"/>
+                    </a:lnR>
+                    <a:lnT w="6350" cap="flat" cmpd="sng" algn="ctr">
+                      <a:solidFill>
+                        <a:srgbClr val="D1D5DB"/>
+                      </a:solidFill>
+                      <a:prstDash val="solid"/>
+                      <a:round/>
+                      <a:headEnd type="none" w="med" len="med"/>
+                      <a:tailEnd type="none" w="med" len="med"/>
+                    </a:lnT>
+                    <a:lnB w="6350" cap="flat" cmpd="sng" algn="ctr">
+                      <a:solidFill>
+                        <a:srgbClr val="D1D5DB"/>
+                      </a:solidFill>
+                      <a:prstDash val="solid"/>
+                      <a:round/>
+                      <a:headEnd type="none" w="med" len="med"/>
+                      <a:tailEnd type="none" w="med" len="med"/>
+                    </a:lnB>
+                    <a:solidFill>
+                      <a:srgbClr val="FFFFFF"/>
+                    </a:solidFill>
+                  </a:tcPr>
+                </a:tc>
+              </a:tr>
+              <a:tr h="502920">
+                <a:tc>
+                  <a:txBody>
+                    <a:bodyPr/>
+                    <a:lstStyle/>
+                    <a:p>
+                      <a:pPr indent="0" marL="0">
+                        <a:buNone/>
+                      </a:pPr>
+                      <a:r>
+                        <a:rPr lang="en-US" sz="1200" dirty="0">
+                          <a:solidFill>
+                            <a:srgbClr val="212121"/>
+                          </a:solidFill>
+                          <a:latin typeface="Calibri" pitchFamily="34" charset="0"/>
+                          <a:ea typeface="Calibri" pitchFamily="34" charset="-122"/>
+                          <a:cs typeface="Calibri" pitchFamily="34" charset="-120"/>
+                        </a:rPr>
+                        <a:t>No memory, no tools, no identity</a:t>
+                      </a:r>
+                      <a:endParaRPr lang="en-US" sz="1200" dirty="0">
+                        <a:latin typeface="Calibri" charset="0"/>
+                        <a:ea typeface="Calibri" charset="0"/>
+                        <a:cs typeface="Calibri" charset="0"/>
+                      </a:endParaRPr>
+                    </a:p>
+                  </a:txBody>
+                  <a:tcPr marL="54864" marR="54864" marT="54864" marB="54864" anchor="ctr">
+                    <a:lnL w="6350" cap="flat" cmpd="sng" algn="ctr">
+                      <a:solidFill>
+                        <a:srgbClr val="D1D5DB"/>
+                      </a:solidFill>
+                      <a:prstDash val="solid"/>
+                      <a:round/>
+                      <a:headEnd type="none" w="med" len="med"/>
+                      <a:tailEnd type="none" w="med" len="med"/>
+                    </a:lnL>
+                    <a:lnR w="6350" cap="flat" cmpd="sng" algn="ctr">
+                      <a:solidFill>
+                        <a:srgbClr val="D1D5DB"/>
+                      </a:solidFill>
+                      <a:prstDash val="solid"/>
+                      <a:round/>
+                      <a:headEnd type="none" w="med" len="med"/>
+                      <a:tailEnd type="none" w="med" len="med"/>
+                    </a:lnR>
+                    <a:lnT w="6350" cap="flat" cmpd="sng" algn="ctr">
+                      <a:solidFill>
+                        <a:srgbClr val="D1D5DB"/>
+                      </a:solidFill>
+                      <a:prstDash val="solid"/>
+                      <a:round/>
+                      <a:headEnd type="none" w="med" len="med"/>
+                      <a:tailEnd type="none" w="med" len="med"/>
+                    </a:lnT>
+                    <a:lnB w="6350" cap="flat" cmpd="sng" algn="ctr">
+                      <a:solidFill>
+                        <a:srgbClr val="D1D5DB"/>
+                      </a:solidFill>
+                      <a:prstDash val="solid"/>
+                      <a:round/>
+                      <a:headEnd type="none" w="med" len="med"/>
+                      <a:tailEnd type="none" w="med" len="med"/>
+                    </a:lnB>
+                    <a:solidFill>
+                      <a:srgbClr val="F3F4F6"/>
+                    </a:solidFill>
+                  </a:tcPr>
+                </a:tc>
+                <a:tc>
+                  <a:txBody>
+                    <a:bodyPr/>
+                    <a:lstStyle/>
+                    <a:p>
+                      <a:pPr indent="0" marL="0">
+                        <a:buNone/>
+                      </a:pPr>
+                      <a:r>
+                        <a:rPr lang="en-US" sz="1200" dirty="0">
+                          <a:solidFill>
+                            <a:srgbClr val="212121"/>
+                          </a:solidFill>
+                          <a:latin typeface="Calibri" pitchFamily="34" charset="0"/>
+                          <a:ea typeface="Calibri" pitchFamily="34" charset="-122"/>
+                          <a:cs typeface="Calibri" pitchFamily="34" charset="-120"/>
+                        </a:rPr>
+                        <a:t>Persistent identity + tools + session + middleware</a:t>
+                      </a:r>
+                      <a:endParaRPr lang="en-US" sz="1200" dirty="0">
+                        <a:latin typeface="Calibri" charset="0"/>
+                        <a:ea typeface="Calibri" charset="0"/>
+                        <a:cs typeface="Calibri" charset="0"/>
+                      </a:endParaRPr>
+                    </a:p>
+                  </a:txBody>
+                  <a:tcPr marL="54864" marR="54864" marT="54864" marB="54864" anchor="ctr">
+                    <a:lnL w="6350" cap="flat" cmpd="sng" algn="ctr">
+                      <a:solidFill>
+                        <a:srgbClr val="D1D5DB"/>
+                      </a:solidFill>
+                      <a:prstDash val="solid"/>
+                      <a:round/>
+                      <a:headEnd type="none" w="med" len="med"/>
+                      <a:tailEnd type="none" w="med" len="med"/>
+                    </a:lnL>
+                    <a:lnR w="6350" cap="flat" cmpd="sng" algn="ctr">
+                      <a:solidFill>
+                        <a:srgbClr val="D1D5DB"/>
+                      </a:solidFill>
+                      <a:prstDash val="solid"/>
+                      <a:round/>
+                      <a:headEnd type="none" w="med" len="med"/>
+                      <a:tailEnd type="none" w="med" len="med"/>
+                    </a:lnR>
+                    <a:lnT w="6350" cap="flat" cmpd="sng" algn="ctr">
+                      <a:solidFill>
+                        <a:srgbClr val="D1D5DB"/>
+                      </a:solidFill>
+                      <a:prstDash val="solid"/>
+                      <a:round/>
+                      <a:headEnd type="none" w="med" len="med"/>
+                      <a:tailEnd type="none" w="med" len="med"/>
+                    </a:lnT>
+                    <a:lnB w="6350" cap="flat" cmpd="sng" algn="ctr">
+                      <a:solidFill>
+                        <a:srgbClr val="D1D5DB"/>
+                      </a:solidFill>
+                      <a:prstDash val="solid"/>
+                      <a:round/>
+                      <a:headEnd type="none" w="med" len="med"/>
+                      <a:tailEnd type="none" w="med" len="med"/>
+                    </a:lnB>
+                    <a:solidFill>
+                      <a:srgbClr val="F3F4F6"/>
+                    </a:solidFill>
+                  </a:tcPr>
+                </a:tc>
+              </a:tr>
+              <a:tr h="502920">
+                <a:tc>
+                  <a:txBody>
+                    <a:bodyPr/>
+                    <a:lstStyle/>
+                    <a:p>
+                      <a:pPr indent="0" marL="0">
+                        <a:buNone/>
+                      </a:pPr>
+                      <a:r>
+                        <a:rPr lang="en-US" sz="1200" dirty="0">
+                          <a:solidFill>
+                            <a:srgbClr val="212121"/>
+                          </a:solidFill>
+                          <a:latin typeface="Calibri" pitchFamily="34" charset="0"/>
+                          <a:ea typeface="Calibri" pitchFamily="34" charset="-122"/>
+                          <a:cs typeface="Calibri" pitchFamily="34" charset="-120"/>
+                        </a:rPr>
+                        <a:t>You wire up state, tool dispatch, retry logic</a:t>
+                      </a:r>
+                      <a:endParaRPr lang="en-US" sz="1200" dirty="0">
+                        <a:latin typeface="Calibri" charset="0"/>
+                        <a:ea typeface="Calibri" charset="0"/>
+                        <a:cs typeface="Calibri" charset="0"/>
+                      </a:endParaRPr>
+                    </a:p>
+                  </a:txBody>
+                  <a:tcPr marL="54864" marR="54864" marT="54864" marB="54864" anchor="ctr">
+                    <a:lnL w="6350" cap="flat" cmpd="sng" algn="ctr">
+                      <a:solidFill>
+                        <a:srgbClr val="D1D5DB"/>
+                      </a:solidFill>
+                      <a:prstDash val="solid"/>
+                      <a:round/>
+                      <a:headEnd type="none" w="med" len="med"/>
+                      <a:tailEnd type="none" w="med" len="med"/>
+                    </a:lnL>
+                    <a:lnR w="6350" cap="flat" cmpd="sng" algn="ctr">
+                      <a:solidFill>
+                        <a:srgbClr val="D1D5DB"/>
+                      </a:solidFill>
+                      <a:prstDash val="solid"/>
+                      <a:round/>
+                      <a:headEnd type="none" w="med" len="med"/>
+                      <a:tailEnd type="none" w="med" len="med"/>
+                    </a:lnR>
+                    <a:lnT w="6350" cap="flat" cmpd="sng" algn="ctr">
+                      <a:solidFill>
+                        <a:srgbClr val="D1D5DB"/>
+                      </a:solidFill>
+                      <a:prstDash val="solid"/>
+                      <a:round/>
+                      <a:headEnd type="none" w="med" len="med"/>
+                      <a:tailEnd type="none" w="med" len="med"/>
+                    </a:lnT>
+                    <a:lnB w="6350" cap="flat" cmpd="sng" algn="ctr">
+                      <a:solidFill>
+                        <a:srgbClr val="D1D5DB"/>
+                      </a:solidFill>
+                      <a:prstDash val="solid"/>
+                      <a:round/>
+                      <a:headEnd type="none" w="med" len="med"/>
+                      <a:tailEnd type="none" w="med" len="med"/>
+                    </a:lnB>
+                    <a:solidFill>
+                      <a:srgbClr val="FFFFFF"/>
+                    </a:solidFill>
+                  </a:tcPr>
+                </a:tc>
+                <a:tc>
+                  <a:txBody>
+                    <a:bodyPr/>
+                    <a:lstStyle/>
+                    <a:p>
+                      <a:pPr indent="0" marL="0">
+                        <a:buNone/>
+                      </a:pPr>
+                      <a:r>
+                        <a:rPr lang="en-US" sz="1200" dirty="0">
+                          <a:solidFill>
+                            <a:srgbClr val="212121"/>
+                          </a:solidFill>
+                          <a:latin typeface="Calibri" pitchFamily="34" charset="0"/>
+                          <a:ea typeface="Calibri" pitchFamily="34" charset="-122"/>
+                          <a:cs typeface="Calibri" pitchFamily="34" charset="-120"/>
+                        </a:rPr>
+                        <a:t>Framework handles the loop</a:t>
+                      </a:r>
+                      <a:endParaRPr lang="en-US" sz="1200" dirty="0">
+                        <a:latin typeface="Calibri" charset="0"/>
+                        <a:ea typeface="Calibri" charset="0"/>
+                        <a:cs typeface="Calibri" charset="0"/>
+                      </a:endParaRPr>
+                    </a:p>
+                  </a:txBody>
+                  <a:tcPr marL="54864" marR="54864" marT="54864" marB="54864" anchor="ctr">
+                    <a:lnL w="6350" cap="flat" cmpd="sng" algn="ctr">
+                      <a:solidFill>
+                        <a:srgbClr val="D1D5DB"/>
+                      </a:solidFill>
+                      <a:prstDash val="solid"/>
+                      <a:round/>
+                      <a:headEnd type="none" w="med" len="med"/>
+                      <a:tailEnd type="none" w="med" len="med"/>
+                    </a:lnL>
+                    <a:lnR w="6350" cap="flat" cmpd="sng" algn="ctr">
+                      <a:solidFill>
+                        <a:srgbClr val="D1D5DB"/>
+                      </a:solidFill>
+                      <a:prstDash val="solid"/>
+                      <a:round/>
+                      <a:headEnd type="none" w="med" len="med"/>
+                      <a:tailEnd type="none" w="med" len="med"/>
+                    </a:lnR>
+                    <a:lnT w="6350" cap="flat" cmpd="sng" algn="ctr">
+                      <a:solidFill>
+                        <a:srgbClr val="D1D5DB"/>
+                      </a:solidFill>
+                      <a:prstDash val="solid"/>
+                      <a:round/>
+                      <a:headEnd type="none" w="med" len="med"/>
+                      <a:tailEnd type="none" w="med" len="med"/>
+                    </a:lnT>
+                    <a:lnB w="6350" cap="flat" cmpd="sng" algn="ctr">
+                      <a:solidFill>
+                        <a:srgbClr val="D1D5DB"/>
+                      </a:solidFill>
+                      <a:prstDash val="solid"/>
+                      <a:round/>
+                      <a:headEnd type="none" w="med" len="med"/>
+                      <a:tailEnd type="none" w="med" len="med"/>
+                    </a:lnB>
+                    <a:solidFill>
+                      <a:srgbClr val="FFFFFF"/>
+                    </a:solidFill>
+                  </a:tcPr>
+                </a:tc>
+              </a:tr>
+              <a:tr h="502920">
+                <a:tc>
+                  <a:txBody>
+                    <a:bodyPr/>
+                    <a:lstStyle/>
+                    <a:p>
+                      <a:pPr indent="0" marL="0">
+                        <a:buNone/>
+                      </a:pPr>
+                      <a:r>
+                        <a:rPr lang="en-US" sz="1200" dirty="0">
+                          <a:solidFill>
+                            <a:srgbClr val="212121"/>
+                          </a:solidFill>
+                          <a:latin typeface="Calibri" pitchFamily="34" charset="0"/>
+                          <a:ea typeface="Calibri" pitchFamily="34" charset="-122"/>
+                          <a:cs typeface="Calibri" pitchFamily="34" charset="-120"/>
+                        </a:rPr>
+                        <a:t>Tightly coupled to one provider</a:t>
+                      </a:r>
+                      <a:endParaRPr lang="en-US" sz="1200" dirty="0">
+                        <a:latin typeface="Calibri" charset="0"/>
+                        <a:ea typeface="Calibri" charset="0"/>
+                        <a:cs typeface="Calibri" charset="0"/>
+                      </a:endParaRPr>
+                    </a:p>
+                  </a:txBody>
+                  <a:tcPr marL="54864" marR="54864" marT="54864" marB="54864" anchor="ctr">
+                    <a:lnL w="6350" cap="flat" cmpd="sng" algn="ctr">
+                      <a:solidFill>
+                        <a:srgbClr val="D1D5DB"/>
+                      </a:solidFill>
+                      <a:prstDash val="solid"/>
+                      <a:round/>
+                      <a:headEnd type="none" w="med" len="med"/>
+                      <a:tailEnd type="none" w="med" len="med"/>
+                    </a:lnL>
+                    <a:lnR w="6350" cap="flat" cmpd="sng" algn="ctr">
+                      <a:solidFill>
+                        <a:srgbClr val="D1D5DB"/>
+                      </a:solidFill>
+                      <a:prstDash val="solid"/>
+                      <a:round/>
+                      <a:headEnd type="none" w="med" len="med"/>
+                      <a:tailEnd type="none" w="med" len="med"/>
+                    </a:lnR>
+                    <a:lnT w="6350" cap="flat" cmpd="sng" algn="ctr">
+                      <a:solidFill>
+                        <a:srgbClr val="D1D5DB"/>
+                      </a:solidFill>
+                      <a:prstDash val="solid"/>
+                      <a:round/>
+                      <a:headEnd type="none" w="med" len="med"/>
+                      <a:tailEnd type="none" w="med" len="med"/>
+                    </a:lnT>
+                    <a:lnB w="6350" cap="flat" cmpd="sng" algn="ctr">
+                      <a:solidFill>
+                        <a:srgbClr val="D1D5DB"/>
+                      </a:solidFill>
+                      <a:prstDash val="solid"/>
+                      <a:round/>
+                      <a:headEnd type="none" w="med" len="med"/>
+                      <a:tailEnd type="none" w="med" len="med"/>
+                    </a:lnB>
+                    <a:solidFill>
+                      <a:srgbClr val="F3F4F6"/>
+                    </a:solidFill>
+                  </a:tcPr>
+                </a:tc>
+                <a:tc>
+                  <a:txBody>
+                    <a:bodyPr/>
+                    <a:lstStyle/>
+                    <a:p>
+                      <a:pPr indent="0" marL="0">
+                        <a:buNone/>
+                      </a:pPr>
+                      <a:r>
+                        <a:rPr lang="en-US" sz="1200" dirty="0">
+                          <a:solidFill>
+                            <a:srgbClr val="212121"/>
+                          </a:solidFill>
+                          <a:latin typeface="Calibri" pitchFamily="34" charset="0"/>
+                          <a:ea typeface="Calibri" pitchFamily="34" charset="-122"/>
+                          <a:cs typeface="Calibri" pitchFamily="34" charset="-120"/>
+                        </a:rPr>
+                        <a:t>Swap providers without changing app code</a:t>
+                      </a:r>
+                      <a:endParaRPr lang="en-US" sz="1200" dirty="0">
+                        <a:latin typeface="Calibri" charset="0"/>
+                        <a:ea typeface="Calibri" charset="0"/>
+                        <a:cs typeface="Calibri" charset="0"/>
+                      </a:endParaRPr>
+                    </a:p>
+                  </a:txBody>
+                  <a:tcPr marL="54864" marR="54864" marT="54864" marB="54864" anchor="ctr">
+                    <a:lnL w="6350" cap="flat" cmpd="sng" algn="ctr">
+                      <a:solidFill>
+                        <a:srgbClr val="D1D5DB"/>
+                      </a:solidFill>
+                      <a:prstDash val="solid"/>
+                      <a:round/>
+                      <a:headEnd type="none" w="med" len="med"/>
+                      <a:tailEnd type="none" w="med" len="med"/>
+                    </a:lnL>
+                    <a:lnR w="6350" cap="flat" cmpd="sng" algn="ctr">
+                      <a:solidFill>
+                        <a:srgbClr val="D1D5DB"/>
+                      </a:solidFill>
+                      <a:prstDash val="solid"/>
+                      <a:round/>
+                      <a:headEnd type="none" w="med" len="med"/>
+                      <a:tailEnd type="none" w="med" len="med"/>
+                    </a:lnR>
+                    <a:lnT w="6350" cap="flat" cmpd="sng" algn="ctr">
+                      <a:solidFill>
+                        <a:srgbClr val="D1D5DB"/>
+                      </a:solidFill>
+                      <a:prstDash val="solid"/>
+                      <a:round/>
+                      <a:headEnd type="none" w="med" len="med"/>
+                      <a:tailEnd type="none" w="med" len="med"/>
+                    </a:lnT>
+                    <a:lnB w="6350" cap="flat" cmpd="sng" algn="ctr">
+                      <a:solidFill>
+                        <a:srgbClr val="D1D5DB"/>
+                      </a:solidFill>
+                      <a:prstDash val="solid"/>
+                      <a:round/>
+                      <a:headEnd type="none" w="med" len="med"/>
+                      <a:tailEnd type="none" w="med" len="med"/>
+                    </a:lnB>
+                    <a:solidFill>
+                      <a:srgbClr val="F3F4F6"/>
+                    </a:solidFill>
+                  </a:tcPr>
+                </a:tc>
+              </a:tr>
+            </a:tbl>
+          </a:graphicData>
+        </a:graphic>
+      </p:graphicFrame>
+      <p:sp>
+        <p:nvSpPr>
+          <p:cNvPr id="8" name="Text 5"/>
+          <p:cNvSpPr/>
+          <p:nvPr/>
+        </p:nvSpPr>
+        <p:spPr>
+          <a:xfrm>
+            <a:off x="365760" y="4617720"/>
+            <a:ext cx="8412480" cy="640080"/>
+          </a:xfrm>
+          <a:prstGeom prst="rect">
+            <a:avLst/>
+          </a:prstGeom>
+          <a:noFill/>
+          <a:ln/>
+        </p:spPr>
+        <p:txBody>
+          <a:bodyPr wrap="square" rtlCol="0" anchor="ctr"/>
+          <a:lstStyle/>
+          <a:p>
+            <a:pPr indent="0" marL="0">
+              <a:buNone/>
+            </a:pPr>
+            <a:r>
+              <a:rPr lang="en-US" sz="1300" b="1" i="1" dirty="0">
+                <a:solidFill>
+                  <a:srgbClr val="1E2761"/>
+                </a:solidFill>
+                <a:latin typeface="Calibri" pitchFamily="34" charset="0"/>
+                <a:ea typeface="Calibri" pitchFamily="34" charset="-122"/>
+                <a:cs typeface="Calibri" pitchFamily="34" charset="-120"/>
+              </a:rPr>
+              <a:t>An agent wraps an LLM with the structure needed to build real applications — persistent identity, instructions, tools, memory, and a runtime loop that orchestrates it all.</a:t>
+            </a:r>
+            <a:endParaRPr lang="en-US" sz="1300" dirty="0"/>
+          </a:p>
+        </p:txBody>
+      </p:sp>
+    </p:spTree>
+  </p:cSld>
+  <p:clrMapOvr>
+    <a:masterClrMapping/>
+  </p:clrMapOvr>
+</p:sld>
+</file>
+
+<file path=ppt/slides/slide4.xml><?xml version="1.0" encoding="utf-8"?>
+<p:sld xmlns:a="http://schemas.openxmlformats.org/drawingml/2006/main" xmlns:r="http://schemas.openxmlformats.org/officeDocument/2006/relationships" xmlns:p="http://schemas.openxmlformats.org/presentationml/2006/main">
+  <p:cSld name="Slide 4">
+    <p:bg>
+      <p:bgPr>
+        <a:solidFill>
+          <a:srgbClr val="FFFFFF"/>
+        </a:solidFill>
+      </p:bgPr>
+    </p:bg>
+    <p:spTree>
+      <p:nvGrpSpPr>
+        <p:cNvPr id="1" name=""/>
+        <p:cNvGrpSpPr/>
+        <p:nvPr/>
+      </p:nvGrpSpPr>
+      <p:grpSpPr>
+        <a:xfrm>
+          <a:off x="0" y="0"/>
+          <a:ext cx="0" cy="0"/>
+          <a:chOff x="0" y="0"/>
+          <a:chExt cx="0" cy="0"/>
+        </a:xfrm>
+      </p:grpSpPr>
+      <p:sp>
+        <p:nvSpPr>
+          <p:cNvPr id="2" name="Shape 0"/>
+          <p:cNvSpPr/>
+          <p:nvPr/>
+        </p:nvSpPr>
+        <p:spPr>
+          <a:xfrm>
+            <a:off x="0" y="0"/>
+            <a:ext cx="54864" cy="5143500"/>
+          </a:xfrm>
+          <a:prstGeom prst="rect">
+            <a:avLst/>
+          </a:prstGeom>
+          <a:solidFill>
+            <a:srgbClr val="1E2761"/>
+          </a:solidFill>
+          <a:ln/>
+        </p:spPr>
+      </p:sp>
+      <p:sp>
+        <p:nvSpPr>
+          <p:cNvPr id="3" name="Text 1"/>
+          <p:cNvSpPr/>
+          <p:nvPr/>
+        </p:nvSpPr>
+        <p:spPr>
+          <a:xfrm>
+            <a:off x="5669280" y="274320"/>
+            <a:ext cx="3291840" cy="274320"/>
+          </a:xfrm>
+          <a:prstGeom prst="rect">
+            <a:avLst/>
+          </a:prstGeom>
+          <a:noFill/>
+          <a:ln/>
+        </p:spPr>
+        <p:txBody>
+          <a:bodyPr wrap="square" lIns="0" tIns="0" rIns="0" bIns="0" rtlCol="0" anchor="ctr"/>
+          <a:lstStyle/>
+          <a:p>
+            <a:pPr algn="r" indent="0" marL="0">
+              <a:buNone/>
+            </a:pPr>
+            <a:r>
+              <a:rPr lang="en-US" sz="1000" dirty="0">
+                <a:solidFill>
+                  <a:srgbClr val="6B7280"/>
+                </a:solidFill>
+                <a:latin typeface="Calibri" pitchFamily="34" charset="0"/>
+                <a:ea typeface="Calibri" pitchFamily="34" charset="-122"/>
+                <a:cs typeface="Calibri" pitchFamily="34" charset="-120"/>
+              </a:rPr>
+              <a:t>Day 1 · Module 1</a:t>
+            </a:r>
+            <a:endParaRPr lang="en-US" sz="1000" dirty="0"/>
+          </a:p>
+        </p:txBody>
+      </p:sp>
+      <p:sp>
+        <p:nvSpPr>
+          <p:cNvPr id="4" name="Text 2"/>
+          <p:cNvSpPr/>
+          <p:nvPr/>
+        </p:nvSpPr>
+        <p:spPr>
+          <a:xfrm>
+            <a:off x="365760" y="320040"/>
+            <a:ext cx="6217920" cy="640080"/>
+          </a:xfrm>
+          <a:prstGeom prst="rect">
+            <a:avLst/>
+          </a:prstGeom>
+          <a:noFill/>
+          <a:ln/>
+        </p:spPr>
+        <p:txBody>
+          <a:bodyPr wrap="square" lIns="0" tIns="0" rIns="0" bIns="0" rtlCol="0" anchor="ctr"/>
+          <a:lstStyle/>
+          <a:p>
+            <a:pPr indent="0" marL="0">
+              <a:buNone/>
+            </a:pPr>
+            <a:r>
+              <a:rPr lang="en-US" sz="2800" b="1" dirty="0">
+                <a:solidFill>
+                  <a:srgbClr val="1E2761"/>
+                </a:solidFill>
+                <a:latin typeface="Calibri" pitchFamily="34" charset="0"/>
+                <a:ea typeface="Calibri" pitchFamily="34" charset="-122"/>
+                <a:cs typeface="Calibri" pitchFamily="34" charset="-120"/>
+              </a:rPr>
+              <a:t>What an agent adds</a:t>
+            </a:r>
+            <a:endParaRPr lang="en-US" sz="2800" dirty="0"/>
+          </a:p>
+        </p:txBody>
+      </p:sp>
+      <p:sp>
+        <p:nvSpPr>
+          <p:cNvPr id="5" name="Shape 3"/>
+          <p:cNvSpPr/>
+          <p:nvPr/>
+        </p:nvSpPr>
+        <p:spPr>
+          <a:xfrm>
+            <a:off x="914400" y="1097280"/>
+            <a:ext cx="7315200" cy="3474720"/>
+          </a:xfrm>
+          <a:prstGeom prst="rect">
+            <a:avLst/>
+          </a:prstGeom>
+          <a:solidFill>
+            <a:srgbClr val="FFFFFF"/>
+          </a:solidFill>
+          <a:ln w="25400">
+            <a:solidFill>
+              <a:srgbClr val="1E2761"/>
+            </a:solidFill>
+            <a:prstDash val="solid"/>
+          </a:ln>
+        </p:spPr>
+      </p:sp>
+      <p:sp>
+        <p:nvSpPr>
+          <p:cNvPr id="6" name="Text 4"/>
+          <p:cNvSpPr/>
+          <p:nvPr/>
+        </p:nvSpPr>
+        <p:spPr>
+          <a:xfrm>
+            <a:off x="1005840" y="1143000"/>
+            <a:ext cx="1371600" cy="320040"/>
+          </a:xfrm>
+          <a:prstGeom prst="rect">
+            <a:avLst/>
+          </a:prstGeom>
+          <a:noFill/>
+          <a:ln/>
+        </p:spPr>
+        <p:txBody>
+          <a:bodyPr wrap="square" lIns="0" tIns="0" rIns="0" bIns="0" rtlCol="0" anchor="ctr"/>
+          <a:lstStyle/>
+          <a:p>
+            <a:pPr indent="0" marL="0">
+              <a:buNone/>
+            </a:pPr>
+            <a:r>
+              <a:rPr lang="en-US" sz="1300" b="1" dirty="0">
+                <a:solidFill>
+                  <a:srgbClr val="1E2761"/>
+                </a:solidFill>
+                <a:latin typeface="Calibri" pitchFamily="34" charset="0"/>
+                <a:ea typeface="Calibri" pitchFamily="34" charset="-122"/>
+                <a:cs typeface="Calibri" pitchFamily="34" charset="-120"/>
+              </a:rPr>
+              <a:t>Agent</a:t>
+            </a:r>
+            <a:endParaRPr lang="en-US" sz="1300" dirty="0"/>
+          </a:p>
+        </p:txBody>
+      </p:sp>
+      <p:sp>
+        <p:nvSpPr>
+          <p:cNvPr id="7" name="Shape 5"/>
+          <p:cNvSpPr/>
+          <p:nvPr/>
+        </p:nvSpPr>
+        <p:spPr>
+          <a:xfrm>
+            <a:off x="1188720" y="1554480"/>
+            <a:ext cx="2133600" cy="822960"/>
+          </a:xfrm>
+          <a:prstGeom prst="rect">
+            <a:avLst/>
+          </a:prstGeom>
+          <a:solidFill>
+            <a:srgbClr val="CADCFC"/>
+          </a:solidFill>
+          <a:ln w="12700">
+            <a:solidFill>
+              <a:srgbClr val="1E2761"/>
+            </a:solidFill>
+            <a:prstDash val="solid"/>
+          </a:ln>
+        </p:spPr>
+      </p:sp>
+      <p:sp>
+        <p:nvSpPr>
+          <p:cNvPr id="8" name="Text 6"/>
+          <p:cNvSpPr/>
+          <p:nvPr/>
+        </p:nvSpPr>
+        <p:spPr>
+          <a:xfrm>
+            <a:off x="1188720" y="1554480"/>
+            <a:ext cx="2133600" cy="822960"/>
+          </a:xfrm>
+          <a:prstGeom prst="rect">
+            <a:avLst/>
+          </a:prstGeom>
+          <a:noFill/>
+          <a:ln/>
+        </p:spPr>
+        <p:txBody>
+          <a:bodyPr wrap="square" lIns="0" tIns="0" rIns="0" bIns="0" rtlCol="0" anchor="ctr"/>
+          <a:lstStyle/>
+          <a:p>
+            <a:pPr algn="ctr" indent="0" marL="0">
+              <a:buNone/>
+            </a:pPr>
+            <a:r>
+              <a:rPr lang="en-US" sz="1500" b="1" dirty="0">
+                <a:solidFill>
+                  <a:srgbClr val="1E2761"/>
+                </a:solidFill>
+                <a:latin typeface="Calibri" pitchFamily="34" charset="0"/>
+                <a:ea typeface="Calibri" pitchFamily="34" charset="-122"/>
+                <a:cs typeface="Calibri" pitchFamily="34" charset="-120"/>
+              </a:rPr>
+              <a:t>Instructions</a:t>
+            </a:r>
+            <a:endParaRPr lang="en-US" sz="1500" dirty="0"/>
+          </a:p>
+        </p:txBody>
+      </p:sp>
+      <p:sp>
+        <p:nvSpPr>
+          <p:cNvPr id="9" name="Shape 7"/>
+          <p:cNvSpPr/>
+          <p:nvPr/>
+        </p:nvSpPr>
+        <p:spPr>
+          <a:xfrm>
+            <a:off x="3505200" y="1554480"/>
+            <a:ext cx="2133600" cy="822960"/>
+          </a:xfrm>
+          <a:prstGeom prst="rect">
+            <a:avLst/>
+          </a:prstGeom>
+          <a:solidFill>
+            <a:srgbClr val="CADCFC"/>
+          </a:solidFill>
+          <a:ln w="12700">
+            <a:solidFill>
+              <a:srgbClr val="1E2761"/>
+            </a:solidFill>
+            <a:prstDash val="solid"/>
+          </a:ln>
+        </p:spPr>
+      </p:sp>
+      <p:sp>
+        <p:nvSpPr>
+          <p:cNvPr id="10" name="Text 8"/>
+          <p:cNvSpPr/>
+          <p:nvPr/>
+        </p:nvSpPr>
+        <p:spPr>
+          <a:xfrm>
+            <a:off x="3505200" y="1554480"/>
+            <a:ext cx="2133600" cy="822960"/>
+          </a:xfrm>
+          <a:prstGeom prst="rect">
+            <a:avLst/>
+          </a:prstGeom>
+          <a:noFill/>
+          <a:ln/>
+        </p:spPr>
+        <p:txBody>
+          <a:bodyPr wrap="square" lIns="0" tIns="0" rIns="0" bIns="0" rtlCol="0" anchor="ctr"/>
+          <a:lstStyle/>
+          <a:p>
+            <a:pPr algn="ctr" indent="0" marL="0">
+              <a:buNone/>
+            </a:pPr>
+            <a:r>
+              <a:rPr lang="en-US" sz="1500" b="1" dirty="0">
+                <a:solidFill>
+                  <a:srgbClr val="1E2761"/>
+                </a:solidFill>
+                <a:latin typeface="Calibri" pitchFamily="34" charset="0"/>
+                <a:ea typeface="Calibri" pitchFamily="34" charset="-122"/>
+                <a:cs typeface="Calibri" pitchFamily="34" charset="-120"/>
+              </a:rPr>
+              <a:t>Tools</a:t>
+            </a:r>
+            <a:endParaRPr lang="en-US" sz="1500" dirty="0"/>
+          </a:p>
+        </p:txBody>
+      </p:sp>
+      <p:sp>
+        <p:nvSpPr>
+          <p:cNvPr id="11" name="Shape 9"/>
+          <p:cNvSpPr/>
+          <p:nvPr/>
+        </p:nvSpPr>
+        <p:spPr>
+          <a:xfrm>
+            <a:off x="5821680" y="1554480"/>
+            <a:ext cx="2133600" cy="822960"/>
+          </a:xfrm>
+          <a:prstGeom prst="rect">
+            <a:avLst/>
+          </a:prstGeom>
+          <a:solidFill>
+            <a:srgbClr val="CADCFC"/>
+          </a:solidFill>
+          <a:ln w="12700">
+            <a:solidFill>
+              <a:srgbClr val="1E2761"/>
+            </a:solidFill>
+            <a:prstDash val="solid"/>
+          </a:ln>
+        </p:spPr>
+      </p:sp>
+      <p:sp>
+        <p:nvSpPr>
+          <p:cNvPr id="12" name="Text 10"/>
+          <p:cNvSpPr/>
+          <p:nvPr/>
+        </p:nvSpPr>
+        <p:spPr>
+          <a:xfrm>
+            <a:off x="5821680" y="1554480"/>
+            <a:ext cx="2133600" cy="822960"/>
+          </a:xfrm>
+          <a:prstGeom prst="rect">
+            <a:avLst/>
+          </a:prstGeom>
+          <a:noFill/>
+          <a:ln/>
+        </p:spPr>
+        <p:txBody>
+          <a:bodyPr wrap="square" lIns="0" tIns="0" rIns="0" bIns="0" rtlCol="0" anchor="ctr"/>
+          <a:lstStyle/>
+          <a:p>
+            <a:pPr algn="ctr" indent="0" marL="0">
+              <a:buNone/>
+            </a:pPr>
+            <a:r>
+              <a:rPr lang="en-US" sz="1500" b="1" dirty="0">
+                <a:solidFill>
+                  <a:srgbClr val="1E2761"/>
+                </a:solidFill>
+                <a:latin typeface="Calibri" pitchFamily="34" charset="0"/>
+                <a:ea typeface="Calibri" pitchFamily="34" charset="-122"/>
+                <a:cs typeface="Calibri" pitchFamily="34" charset="-120"/>
+              </a:rPr>
+              <a:t>Session</a:t>
+            </a:r>
+            <a:endParaRPr lang="en-US" sz="1500" dirty="0"/>
+          </a:p>
+        </p:txBody>
+      </p:sp>
+      <p:sp>
+        <p:nvSpPr>
+          <p:cNvPr id="13" name="Shape 11"/>
+          <p:cNvSpPr/>
+          <p:nvPr/>
+        </p:nvSpPr>
+        <p:spPr>
+          <a:xfrm>
+            <a:off x="1188720" y="2606040"/>
+            <a:ext cx="6766560" cy="640080"/>
+          </a:xfrm>
+          <a:prstGeom prst="rect">
+            <a:avLst/>
+          </a:prstGeom>
+          <a:solidFill>
+            <a:srgbClr val="CADCFC"/>
+          </a:solidFill>
+          <a:ln w="12700">
+            <a:solidFill>
+              <a:srgbClr val="1E2761"/>
+            </a:solidFill>
+            <a:prstDash val="solid"/>
+          </a:ln>
+        </p:spPr>
+      </p:sp>
+      <p:sp>
+        <p:nvSpPr>
+          <p:cNvPr id="14" name="Text 12"/>
+          <p:cNvSpPr/>
+          <p:nvPr/>
+        </p:nvSpPr>
+        <p:spPr>
+          <a:xfrm>
+            <a:off x="1188720" y="2606040"/>
+            <a:ext cx="6766560" cy="640080"/>
+          </a:xfrm>
+          <a:prstGeom prst="rect">
+            <a:avLst/>
+          </a:prstGeom>
+          <a:noFill/>
+          <a:ln/>
+        </p:spPr>
+        <p:txBody>
+          <a:bodyPr wrap="square" lIns="0" tIns="0" rIns="0" bIns="0" rtlCol="0" anchor="ctr"/>
+          <a:lstStyle/>
+          <a:p>
+            <a:pPr algn="ctr" indent="0" marL="0">
+              <a:buNone/>
+            </a:pPr>
+            <a:r>
+              <a:rPr lang="en-US" sz="1500" b="1" dirty="0">
+                <a:solidFill>
+                  <a:srgbClr val="1E2761"/>
+                </a:solidFill>
+                <a:latin typeface="Calibri" pitchFamily="34" charset="0"/>
+                <a:ea typeface="Calibri" pitchFamily="34" charset="-122"/>
+                <a:cs typeface="Calibri" pitchFamily="34" charset="-120"/>
+              </a:rPr>
+              <a:t>Middleware Pipeline</a:t>
+            </a:r>
+            <a:endParaRPr lang="en-US" sz="1500" dirty="0"/>
+          </a:p>
+        </p:txBody>
+      </p:sp>
+      <p:sp>
+        <p:nvSpPr>
+          <p:cNvPr id="15" name="Shape 13"/>
+          <p:cNvSpPr/>
+          <p:nvPr/>
+        </p:nvSpPr>
+        <p:spPr>
+          <a:xfrm>
+            <a:off x="1188720" y="3474720"/>
+            <a:ext cx="6766560" cy="640080"/>
+          </a:xfrm>
+          <a:prstGeom prst="rect">
+            <a:avLst/>
+          </a:prstGeom>
+          <a:solidFill>
+            <a:srgbClr val="CADCFC"/>
+          </a:solidFill>
+          <a:ln w="12700">
+            <a:solidFill>
+              <a:srgbClr val="1E2761"/>
+            </a:solidFill>
+            <a:prstDash val="solid"/>
+          </a:ln>
+        </p:spPr>
+      </p:sp>
+      <p:sp>
+        <p:nvSpPr>
+          <p:cNvPr id="16" name="Text 14"/>
+          <p:cNvSpPr/>
+          <p:nvPr/>
+        </p:nvSpPr>
+        <p:spPr>
+          <a:xfrm>
+            <a:off x="1188720" y="3474720"/>
+            <a:ext cx="6766560" cy="640080"/>
+          </a:xfrm>
+          <a:prstGeom prst="rect">
+            <a:avLst/>
+          </a:prstGeom>
+          <a:noFill/>
+          <a:ln/>
+        </p:spPr>
+        <p:txBody>
+          <a:bodyPr wrap="square" lIns="0" tIns="0" rIns="0" bIns="0" rtlCol="0" anchor="ctr"/>
+          <a:lstStyle/>
+          <a:p>
+            <a:pPr algn="ctr" indent="0" marL="0">
+              <a:buNone/>
+            </a:pPr>
+            <a:r>
+              <a:rPr lang="en-US" sz="1500" b="1" dirty="0">
+                <a:solidFill>
+                  <a:srgbClr val="1E2761"/>
+                </a:solidFill>
+                <a:latin typeface="Calibri" pitchFamily="34" charset="0"/>
+                <a:ea typeface="Calibri" pitchFamily="34" charset="-122"/>
+                <a:cs typeface="Calibri" pitchFamily="34" charset="-120"/>
+              </a:rPr>
+              <a:t>LLM Provider (swappable)</a:t>
+            </a:r>
+            <a:endParaRPr lang="en-US" sz="1500" dirty="0"/>
+          </a:p>
+        </p:txBody>
+      </p:sp>
+      <p:sp>
+        <p:nvSpPr>
+          <p:cNvPr id="17" name="Text 15"/>
+          <p:cNvSpPr/>
+          <p:nvPr/>
+        </p:nvSpPr>
+        <p:spPr>
+          <a:xfrm>
+            <a:off x="365760" y="4663440"/>
+            <a:ext cx="8412480" cy="320040"/>
+          </a:xfrm>
+          <a:prstGeom prst="rect">
+            <a:avLst/>
+          </a:prstGeom>
+          <a:noFill/>
+          <a:ln/>
+        </p:spPr>
+        <p:txBody>
+          <a:bodyPr wrap="square" rtlCol="0" anchor="ctr"/>
+          <a:lstStyle/>
+          <a:p>
+            <a:pPr algn="ctr" indent="0" marL="0">
+              <a:buNone/>
+            </a:pPr>
+            <a:r>
+              <a:rPr lang="en-US" sz="1300" b="1" i="1" dirty="0">
+                <a:solidFill>
+                  <a:srgbClr val="1E2761"/>
+                </a:solidFill>
+                <a:latin typeface="Calibri" pitchFamily="34" charset="0"/>
+                <a:ea typeface="Calibri" pitchFamily="34" charset="-122"/>
+                <a:cs typeface="Calibri" pitchFamily="34" charset="-120"/>
+              </a:rPr>
+              <a:t>The rest of the workshop works with one or more of these layers directly.</a:t>
+            </a:r>
+            <a:endParaRPr lang="en-US" sz="1300" dirty="0"/>
+          </a:p>
+        </p:txBody>
+      </p:sp>
+      <p:sp>
+        <p:nvSpPr>
+          <p:cNvPr id="18" name="Text 16"/>
+          <p:cNvSpPr/>
+          <p:nvPr/>
+        </p:nvSpPr>
+        <p:spPr>
+          <a:xfrm>
+            <a:off x="365760" y="5029200"/>
+            <a:ext cx="8412480" cy="228600"/>
+          </a:xfrm>
+          <a:prstGeom prst="rect">
+            <a:avLst/>
+          </a:prstGeom>
+          <a:noFill/>
+          <a:ln/>
+        </p:spPr>
+        <p:txBody>
+          <a:bodyPr wrap="square" rtlCol="0" anchor="ctr"/>
+          <a:lstStyle/>
+          <a:p>
+            <a:pPr algn="ctr" indent="0" marL="0">
+              <a:buNone/>
+            </a:pPr>
+            <a:r>
+              <a:rPr lang="en-US" sz="900" i="1" dirty="0">
+                <a:solidFill>
+                  <a:srgbClr val="6B7280"/>
+                </a:solidFill>
+                <a:latin typeface="Calibri" pitchFamily="34" charset="0"/>
+                <a:ea typeface="Calibri" pitchFamily="34" charset="-122"/>
+                <a:cs typeface="Calibri" pitchFamily="34" charset="-120"/>
+              </a:rPr>
+              <a:t>Diagram: Microsoft Learn · aka.ms/agent-framework/journey/from-llms-to-agents</a:t>
+            </a:r>
+            <a:endParaRPr lang="en-US" sz="900" dirty="0"/>
+          </a:p>
+        </p:txBody>
+      </p:sp>
+    </p:spTree>
+  </p:cSld>
+  <p:clrMapOvr>
+    <a:masterClrMapping/>
+  </p:clrMapOvr>
+</p:sld>
+</file>
+
+<file path=ppt/slides/slide5.xml><?xml version="1.0" encoding="utf-8"?>
+<p:sld xmlns:a="http://schemas.openxmlformats.org/drawingml/2006/main" xmlns:r="http://schemas.openxmlformats.org/officeDocument/2006/relationships" xmlns:p="http://schemas.openxmlformats.org/presentationml/2006/main">
+  <p:cSld name="Slide 5">
+    <p:bg>
+      <p:bgPr>
+        <a:solidFill>
+          <a:srgbClr val="CADCFC"/>
+        </a:solidFill>
+      </p:bgPr>
+    </p:bg>
+    <p:spTree>
+      <p:nvGrpSpPr>
+        <p:cNvPr id="1" name=""/>
+        <p:cNvGrpSpPr/>
+        <p:nvPr/>
+      </p:nvGrpSpPr>
+      <p:grpSpPr>
+        <a:xfrm>
+          <a:off x="0" y="0"/>
+          <a:ext cx="0" cy="0"/>
+          <a:chOff x="0" y="0"/>
+          <a:chExt cx="0" cy="0"/>
+        </a:xfrm>
+      </p:grpSpPr>
+      <p:sp>
+        <p:nvSpPr>
+          <p:cNvPr id="2" name="Shape 0"/>
+          <p:cNvSpPr/>
+          <p:nvPr/>
+        </p:nvSpPr>
+        <p:spPr>
+          <a:xfrm>
+            <a:off x="0" y="0"/>
+            <a:ext cx="146304" cy="5143500"/>
+          </a:xfrm>
+          <a:prstGeom prst="rect">
+            <a:avLst/>
+          </a:prstGeom>
+          <a:solidFill>
+            <a:srgbClr val="1E2761"/>
+          </a:solidFill>
+          <a:ln/>
+        </p:spPr>
+      </p:sp>
+      <p:sp>
+        <p:nvSpPr>
+          <p:cNvPr id="3" name="Text 1"/>
+          <p:cNvSpPr/>
+          <p:nvPr/>
+        </p:nvSpPr>
+        <p:spPr>
+          <a:xfrm>
+            <a:off x="5669280" y="274320"/>
+            <a:ext cx="3291840" cy="274320"/>
+          </a:xfrm>
+          <a:prstGeom prst="rect">
+            <a:avLst/>
+          </a:prstGeom>
+          <a:noFill/>
+          <a:ln/>
+        </p:spPr>
+        <p:txBody>
+          <a:bodyPr wrap="square" lIns="0" tIns="0" rIns="0" bIns="0" rtlCol="0" anchor="ctr"/>
+          <a:lstStyle/>
+          <a:p>
+            <a:pPr algn="r" indent="0" marL="0">
+              <a:buNone/>
+            </a:pPr>
+            <a:r>
+              <a:rPr lang="en-US" sz="1000" dirty="0">
+                <a:solidFill>
+                  <a:srgbClr val="6B7280"/>
+                </a:solidFill>
+                <a:latin typeface="Calibri" pitchFamily="34" charset="0"/>
+                <a:ea typeface="Calibri" pitchFamily="34" charset="-122"/>
+                <a:cs typeface="Calibri" pitchFamily="34" charset="-120"/>
+              </a:rPr>
+              <a:t>Day 1 · Module 1 · Demo</a:t>
+            </a:r>
+            <a:endParaRPr lang="en-US" sz="1000" dirty="0"/>
+          </a:p>
+        </p:txBody>
+      </p:sp>
+      <p:sp>
+        <p:nvSpPr>
+          <p:cNvPr id="4" name="Text 2"/>
+          <p:cNvSpPr/>
+          <p:nvPr/>
+        </p:nvSpPr>
+        <p:spPr>
+          <a:xfrm>
+            <a:off x="548640" y="1051560"/>
+            <a:ext cx="5486400" cy="502920"/>
+          </a:xfrm>
+          <a:prstGeom prst="rect">
+            <a:avLst/>
+          </a:prstGeom>
+          <a:noFill/>
+          <a:ln/>
+        </p:spPr>
+        <p:txBody>
+          <a:bodyPr wrap="square" lIns="0" tIns="0" rIns="0" bIns="0" rtlCol="0" anchor="ctr"/>
+          <a:lstStyle/>
+          <a:p>
+            <a:pPr indent="0" marL="0">
+              <a:buNone/>
+            </a:pPr>
+            <a:r>
+              <a:rPr lang="en-US" sz="3200" b="1" spc="800" kern="0" dirty="0">
+                <a:solidFill>
+                  <a:srgbClr val="1E2761"/>
+                </a:solidFill>
+                <a:latin typeface="Calibri" pitchFamily="34" charset="0"/>
+                <a:ea typeface="Calibri" pitchFamily="34" charset="-122"/>
+                <a:cs typeface="Calibri" pitchFamily="34" charset="-120"/>
+              </a:rPr>
+              <a:t>DEMO</a:t>
+            </a:r>
+            <a:endParaRPr lang="en-US" sz="3200" dirty="0"/>
+          </a:p>
+        </p:txBody>
+      </p:sp>
+      <p:sp>
+        <p:nvSpPr>
+          <p:cNvPr id="5" name="Text 3"/>
+          <p:cNvSpPr/>
+          <p:nvPr/>
+        </p:nvSpPr>
+        <p:spPr>
+          <a:xfrm>
+            <a:off x="548640" y="1691640"/>
+            <a:ext cx="8046720" cy="914400"/>
+          </a:xfrm>
+          <a:prstGeom prst="rect">
+            <a:avLst/>
+          </a:prstGeom>
+          <a:noFill/>
+          <a:ln/>
+        </p:spPr>
+        <p:txBody>
+          <a:bodyPr wrap="square" lIns="0" tIns="0" rIns="0" bIns="0" rtlCol="0" anchor="ctr"/>
+          <a:lstStyle/>
+          <a:p>
+            <a:pPr indent="0" marL="0">
+              <a:buNone/>
+            </a:pPr>
+            <a:r>
+              <a:rPr lang="en-US" sz="3000" b="1" dirty="0">
+                <a:solidFill>
+                  <a:srgbClr val="1E2761"/>
+                </a:solidFill>
+                <a:latin typeface="Calibri" pitchFamily="34" charset="0"/>
+                <a:ea typeface="Calibri" pitchFamily="34" charset="-122"/>
+                <a:cs typeface="Calibri" pitchFamily="34" charset="-120"/>
+              </a:rPr>
+              <a:t>What an agent adds — live diff</a:t>
+            </a:r>
+            <a:endParaRPr lang="en-US" sz="3000" dirty="0"/>
+          </a:p>
+        </p:txBody>
+      </p:sp>
+      <p:sp>
+        <p:nvSpPr>
+          <p:cNvPr id="6" name="Text 4"/>
+          <p:cNvSpPr/>
+          <p:nvPr/>
+        </p:nvSpPr>
+        <p:spPr>
+          <a:xfrm>
+            <a:off x="6583680" y="1051560"/>
+            <a:ext cx="2194560" cy="502920"/>
+          </a:xfrm>
+          <a:prstGeom prst="rect">
+            <a:avLst/>
+          </a:prstGeom>
+          <a:noFill/>
+          <a:ln/>
+        </p:spPr>
+        <p:txBody>
+          <a:bodyPr wrap="square" lIns="0" tIns="0" rIns="0" bIns="0" rtlCol="0" anchor="ctr"/>
+          <a:lstStyle/>
+          <a:p>
+            <a:pPr algn="r" indent="0" marL="0">
+              <a:buNone/>
+            </a:pPr>
+            <a:r>
+              <a:rPr lang="en-US" sz="1800" i="1" dirty="0">
+                <a:solidFill>
+                  <a:srgbClr val="6B7280"/>
+                </a:solidFill>
+                <a:latin typeface="Calibri" pitchFamily="34" charset="0"/>
+                <a:ea typeface="Calibri" pitchFamily="34" charset="-122"/>
+                <a:cs typeface="Calibri" pitchFamily="34" charset="-120"/>
+              </a:rPr>
+              <a:t>~4 min</a:t>
+            </a:r>
+            <a:endParaRPr lang="en-US" sz="1800" dirty="0"/>
+          </a:p>
+        </p:txBody>
+      </p:sp>
+      <p:sp>
+        <p:nvSpPr>
+          <p:cNvPr id="7" name="Text 5"/>
+          <p:cNvSpPr/>
+          <p:nvPr/>
+        </p:nvSpPr>
+        <p:spPr>
+          <a:xfrm>
+            <a:off x="548640" y="2788920"/>
+            <a:ext cx="8046720" cy="1371600"/>
+          </a:xfrm>
+          <a:prstGeom prst="rect">
+            <a:avLst/>
+          </a:prstGeom>
+          <a:noFill/>
+          <a:ln/>
+        </p:spPr>
+        <p:txBody>
+          <a:bodyPr wrap="square" lIns="0" tIns="0" rIns="0" bIns="0" rtlCol="0" anchor="ctr"/>
+          <a:lstStyle/>
+          <a:p>
+            <a:pPr indent="0" marL="0">
+              <a:spcAft>
+                <a:spcPts val="600"/>
+              </a:spcAft>
+              <a:buNone/>
+            </a:pPr>
+            <a:r>
+              <a:rPr lang="en-US" sz="1600" dirty="0">
+                <a:solidFill>
+                  <a:srgbClr val="212121"/>
+                </a:solidFill>
+                <a:latin typeface="Calibri" pitchFamily="34" charset="0"/>
+                <a:ea typeface="Calibri" pitchFamily="34" charset="-122"/>
+                <a:cs typeface="Calibri" pitchFamily="34" charset="-120"/>
+              </a:rPr>
+              <a:t>Two terminal panes, same question. Left: raw LLM call — no tool, no session, no memory. Right: MAF Agent with get_current_time tool + explicit session. Left says it can't get the time and forgets Turn 1; right calls the tool, gets the real time, and recalls the earlier question. Makes the 'agent wraps LLM' diagram tangible.</a:t>
+            </a:r>
+            <a:endParaRPr lang="en-US" sz="1600" dirty="0"/>
+          </a:p>
+        </p:txBody>
+      </p:sp>
+      <p:sp>
+        <p:nvSpPr>
+          <p:cNvPr id="8" name="Text 6"/>
+          <p:cNvSpPr/>
+          <p:nvPr/>
+        </p:nvSpPr>
+        <p:spPr>
+          <a:xfrm>
+            <a:off x="548640" y="4434840"/>
+            <a:ext cx="8046720" cy="320040"/>
+          </a:xfrm>
+          <a:prstGeom prst="rect">
+            <a:avLst/>
+          </a:prstGeom>
+          <a:noFill/>
+          <a:ln/>
+        </p:spPr>
+        <p:txBody>
+          <a:bodyPr wrap="square" lIns="0" tIns="0" rIns="0" bIns="0" rtlCol="0" anchor="ctr"/>
+          <a:lstStyle/>
+          <a:p>
+            <a:pPr indent="0" marL="0">
+              <a:buNone/>
+            </a:pPr>
+            <a:r>
+              <a:rPr lang="en-US" sz="1100" i="1" dirty="0">
+                <a:solidFill>
+                  <a:srgbClr val="6B7280"/>
+                </a:solidFill>
+                <a:latin typeface="Calibri" pitchFamily="34" charset="0"/>
+                <a:ea typeface="Calibri" pitchFamily="34" charset="-122"/>
+                <a:cs typeface="Calibri" pitchFamily="34" charset="-120"/>
+              </a:rPr>
+              <a:t>Runbook: demos/day1/module-1-demo-2-agent-diff.md</a:t>
+            </a:r>
+            <a:endParaRPr lang="en-US" sz="1100" dirty="0"/>
+          </a:p>
+        </p:txBody>
+      </p:sp>
+    </p:spTree>
+  </p:cSld>
+  <p:clrMapOvr>
+    <a:masterClrMapping/>
+  </p:clrMapOvr>
+</p:sld>
+</file>
+
+<file path=ppt/slides/slide6.xml><?xml version="1.0" encoding="utf-8"?>
+<p:sld xmlns:a="http://schemas.openxmlformats.org/drawingml/2006/main" xmlns:r="http://schemas.openxmlformats.org/officeDocument/2006/relationships" xmlns:p="http://schemas.openxmlformats.org/presentationml/2006/main">
+  <p:cSld name="Slide 6">
+    <p:bg>
+      <p:bgPr>
+        <a:solidFill>
+          <a:srgbClr val="FFFFFF"/>
+        </a:solidFill>
+      </p:bgPr>
+    </p:bg>
+    <p:spTree>
+      <p:nvGrpSpPr>
+        <p:cNvPr id="1" name=""/>
+        <p:cNvGrpSpPr/>
+        <p:nvPr/>
+      </p:nvGrpSpPr>
+      <p:grpSpPr>
+        <a:xfrm>
+          <a:off x="0" y="0"/>
+          <a:ext cx="0" cy="0"/>
+          <a:chOff x="0" y="0"/>
+          <a:chExt cx="0" cy="0"/>
+        </a:xfrm>
+      </p:grpSpPr>
+      <p:sp>
+        <p:nvSpPr>
+          <p:cNvPr id="2" name="Shape 0"/>
+          <p:cNvSpPr/>
+          <p:nvPr/>
+        </p:nvSpPr>
+        <p:spPr>
+          <a:xfrm>
+            <a:off x="0" y="0"/>
+            <a:ext cx="54864" cy="5143500"/>
+          </a:xfrm>
+          <a:prstGeom prst="rect">
+            <a:avLst/>
+          </a:prstGeom>
+          <a:solidFill>
+            <a:srgbClr val="1E2761"/>
+          </a:solidFill>
+          <a:ln/>
+        </p:spPr>
+      </p:sp>
+      <p:sp>
+        <p:nvSpPr>
+          <p:cNvPr id="3" name="Text 1"/>
+          <p:cNvSpPr/>
+          <p:nvPr/>
+        </p:nvSpPr>
+        <p:spPr>
+          <a:xfrm>
+            <a:off x="5669280" y="274320"/>
+            <a:ext cx="3291840" cy="274320"/>
+          </a:xfrm>
+          <a:prstGeom prst="rect">
+            <a:avLst/>
+          </a:prstGeom>
+          <a:noFill/>
+          <a:ln/>
+        </p:spPr>
+        <p:txBody>
+          <a:bodyPr wrap="square" lIns="0" tIns="0" rIns="0" bIns="0" rtlCol="0" anchor="ctr"/>
+          <a:lstStyle/>
+          <a:p>
+            <a:pPr algn="r" indent="0" marL="0">
+              <a:buNone/>
+            </a:pPr>
+            <a:r>
+              <a:rPr lang="en-US" sz="1000" dirty="0">
+                <a:solidFill>
+                  <a:srgbClr val="6B7280"/>
+                </a:solidFill>
+                <a:latin typeface="Calibri" pitchFamily="34" charset="0"/>
+                <a:ea typeface="Calibri" pitchFamily="34" charset="-122"/>
+                <a:cs typeface="Calibri" pitchFamily="34" charset="-120"/>
+              </a:rPr>
+              <a:t>Day 1 · Module 1</a:t>
+            </a:r>
+            <a:endParaRPr lang="en-US" sz="1000" dirty="0"/>
+          </a:p>
+        </p:txBody>
+      </p:sp>
+      <p:sp>
+        <p:nvSpPr>
+          <p:cNvPr id="4" name="Text 2"/>
+          <p:cNvSpPr/>
+          <p:nvPr/>
+        </p:nvSpPr>
+        <p:spPr>
+          <a:xfrm>
+            <a:off x="365760" y="320040"/>
+            <a:ext cx="6217920" cy="640080"/>
+          </a:xfrm>
+          <a:prstGeom prst="rect">
+            <a:avLst/>
+          </a:prstGeom>
+          <a:noFill/>
+          <a:ln/>
+        </p:spPr>
+        <p:txBody>
+          <a:bodyPr wrap="square" lIns="0" tIns="0" rIns="0" bIns="0" rtlCol="0" anchor="ctr"/>
+          <a:lstStyle/>
+          <a:p>
+            <a:pPr indent="0" marL="0">
+              <a:buNone/>
+            </a:pPr>
+            <a:r>
+              <a:rPr lang="en-US" sz="2800" b="1" dirty="0">
+                <a:solidFill>
+                  <a:srgbClr val="1E2761"/>
+                </a:solidFill>
+                <a:latin typeface="Calibri" pitchFamily="34" charset="0"/>
+                <a:ea typeface="Calibri" pitchFamily="34" charset="-122"/>
+                <a:cs typeface="Calibri" pitchFamily="34" charset="-120"/>
+              </a:rPr>
+              <a:t>Three surfaces you can build on</a:t>
+            </a:r>
+            <a:endParaRPr lang="en-US" sz="2800" dirty="0"/>
+          </a:p>
+        </p:txBody>
+      </p:sp>
+      <p:graphicFrame>
+        <p:nvGraphicFramePr>
+          <p:cNvPr id="7" name="Table 0"/>
           <p:cNvGraphicFramePr>
             <a:graphicFrameLocks noGrp="1"/>
           </p:cNvGraphicFramePr>
@@ -4413,2071 +7631,6 @@
 </p:sld>
 </file>
 
-<file path=ppt/slides/slide4.xml><?xml version="1.0" encoding="utf-8"?>
-<p:sld xmlns:a="http://schemas.openxmlformats.org/drawingml/2006/main" xmlns:r="http://schemas.openxmlformats.org/officeDocument/2006/relationships" xmlns:p="http://schemas.openxmlformats.org/presentationml/2006/main">
-  <p:cSld name="Slide 4">
-    <p:bg>
-      <p:bgPr>
-        <a:solidFill>
-          <a:srgbClr val="FFFFFF"/>
-        </a:solidFill>
-      </p:bgPr>
-    </p:bg>
-    <p:spTree>
-      <p:nvGrpSpPr>
-        <p:cNvPr id="1" name=""/>
-        <p:cNvGrpSpPr/>
-        <p:nvPr/>
-      </p:nvGrpSpPr>
-      <p:grpSpPr>
-        <a:xfrm>
-          <a:off x="0" y="0"/>
-          <a:ext cx="0" cy="0"/>
-          <a:chOff x="0" y="0"/>
-          <a:chExt cx="0" cy="0"/>
-        </a:xfrm>
-      </p:grpSpPr>
-      <p:sp>
-        <p:nvSpPr>
-          <p:cNvPr id="2" name="Shape 0"/>
-          <p:cNvSpPr/>
-          <p:nvPr/>
-        </p:nvSpPr>
-        <p:spPr>
-          <a:xfrm>
-            <a:off x="0" y="0"/>
-            <a:ext cx="54864" cy="5143500"/>
-          </a:xfrm>
-          <a:prstGeom prst="rect">
-            <a:avLst/>
-          </a:prstGeom>
-          <a:solidFill>
-            <a:srgbClr val="1E2761"/>
-          </a:solidFill>
-          <a:ln/>
-        </p:spPr>
-      </p:sp>
-      <p:sp>
-        <p:nvSpPr>
-          <p:cNvPr id="3" name="Text 1"/>
-          <p:cNvSpPr/>
-          <p:nvPr/>
-        </p:nvSpPr>
-        <p:spPr>
-          <a:xfrm>
-            <a:off x="5669280" y="274320"/>
-            <a:ext cx="3291840" cy="274320"/>
-          </a:xfrm>
-          <a:prstGeom prst="rect">
-            <a:avLst/>
-          </a:prstGeom>
-          <a:noFill/>
-          <a:ln/>
-        </p:spPr>
-        <p:txBody>
-          <a:bodyPr wrap="square" lIns="0" tIns="0" rIns="0" bIns="0" rtlCol="0" anchor="ctr"/>
-          <a:lstStyle/>
-          <a:p>
-            <a:pPr algn="r" indent="0" marL="0">
-              <a:buNone/>
-            </a:pPr>
-            <a:r>
-              <a:rPr lang="en-US" sz="1000" dirty="0">
-                <a:solidFill>
-                  <a:srgbClr val="6B7280"/>
-                </a:solidFill>
-                <a:latin typeface="Calibri" pitchFamily="34" charset="0"/>
-                <a:ea typeface="Calibri" pitchFamily="34" charset="-122"/>
-                <a:cs typeface="Calibri" pitchFamily="34" charset="-120"/>
-              </a:rPr>
-              <a:t>Day 1 · Module 1</a:t>
-            </a:r>
-            <a:endParaRPr lang="en-US" sz="1000" dirty="0"/>
-          </a:p>
-        </p:txBody>
-      </p:sp>
-      <p:sp>
-        <p:nvSpPr>
-          <p:cNvPr id="4" name="Text 2"/>
-          <p:cNvSpPr/>
-          <p:nvPr/>
-        </p:nvSpPr>
-        <p:spPr>
-          <a:xfrm>
-            <a:off x="365760" y="320040"/>
-            <a:ext cx="6217920" cy="640080"/>
-          </a:xfrm>
-          <a:prstGeom prst="rect">
-            <a:avLst/>
-          </a:prstGeom>
-          <a:noFill/>
-          <a:ln/>
-        </p:spPr>
-        <p:txBody>
-          <a:bodyPr wrap="square" lIns="0" tIns="0" rIns="0" bIns="0" rtlCol="0" anchor="ctr"/>
-          <a:lstStyle/>
-          <a:p>
-            <a:pPr indent="0" marL="0">
-              <a:buNone/>
-            </a:pPr>
-            <a:r>
-              <a:rPr lang="en-US" sz="2800" b="1" dirty="0">
-                <a:solidFill>
-                  <a:srgbClr val="1E2761"/>
-                </a:solidFill>
-                <a:latin typeface="Calibri" pitchFamily="34" charset="0"/>
-                <a:ea typeface="Calibri" pitchFamily="34" charset="-122"/>
-                <a:cs typeface="Calibri" pitchFamily="34" charset="-120"/>
-              </a:rPr>
-              <a:t>Same three ingredients across every surface</a:t>
-            </a:r>
-            <a:endParaRPr lang="en-US" sz="2800" dirty="0"/>
-          </a:p>
-        </p:txBody>
-      </p:sp>
-      <p:sp>
-        <p:nvSpPr>
-          <p:cNvPr id="5" name="Shape 3"/>
-          <p:cNvSpPr/>
-          <p:nvPr/>
-        </p:nvSpPr>
-        <p:spPr>
-          <a:xfrm>
-            <a:off x="365760" y="1188720"/>
-            <a:ext cx="2651760" cy="1280160"/>
-          </a:xfrm>
-          <a:prstGeom prst="rect">
-            <a:avLst/>
-          </a:prstGeom>
-          <a:solidFill>
-            <a:srgbClr val="FFFFFF"/>
-          </a:solidFill>
-          <a:ln w="12700">
-            <a:solidFill>
-              <a:srgbClr val="1E2761"/>
-            </a:solidFill>
-            <a:prstDash val="solid"/>
-          </a:ln>
-        </p:spPr>
-      </p:sp>
-      <p:sp>
-        <p:nvSpPr>
-          <p:cNvPr id="6" name="Text 4"/>
-          <p:cNvSpPr/>
-          <p:nvPr/>
-        </p:nvSpPr>
-        <p:spPr>
-          <a:xfrm>
-            <a:off x="457200" y="1325880"/>
-            <a:ext cx="2468880" cy="457200"/>
-          </a:xfrm>
-          <a:prstGeom prst="rect">
-            <a:avLst/>
-          </a:prstGeom>
-          <a:noFill/>
-          <a:ln/>
-        </p:spPr>
-        <p:txBody>
-          <a:bodyPr wrap="square" lIns="0" tIns="0" rIns="0" bIns="0" rtlCol="0" anchor="ctr"/>
-          <a:lstStyle/>
-          <a:p>
-            <a:pPr algn="ctr" indent="0" marL="0">
-              <a:buNone/>
-            </a:pPr>
-            <a:r>
-              <a:rPr lang="en-US" sz="1800" b="1" dirty="0">
-                <a:solidFill>
-                  <a:srgbClr val="1E2761"/>
-                </a:solidFill>
-                <a:latin typeface="Calibri" pitchFamily="34" charset="0"/>
-                <a:ea typeface="Calibri" pitchFamily="34" charset="-122"/>
-                <a:cs typeface="Calibri" pitchFamily="34" charset="-120"/>
-              </a:rPr>
-              <a:t>Copilot Studio</a:t>
-            </a:r>
-            <a:endParaRPr lang="en-US" sz="1800" dirty="0"/>
-          </a:p>
-        </p:txBody>
-      </p:sp>
-      <p:sp>
-        <p:nvSpPr>
-          <p:cNvPr id="7" name="Text 5"/>
-          <p:cNvSpPr/>
-          <p:nvPr/>
-        </p:nvSpPr>
-        <p:spPr>
-          <a:xfrm>
-            <a:off x="457200" y="1874520"/>
-            <a:ext cx="2468880" cy="365760"/>
-          </a:xfrm>
-          <a:prstGeom prst="rect">
-            <a:avLst/>
-          </a:prstGeom>
-          <a:noFill/>
-          <a:ln/>
-        </p:spPr>
-        <p:txBody>
-          <a:bodyPr wrap="square" lIns="0" tIns="0" rIns="0" bIns="0" rtlCol="0" anchor="ctr"/>
-          <a:lstStyle/>
-          <a:p>
-            <a:pPr algn="ctr" indent="0" marL="0">
-              <a:buNone/>
-            </a:pPr>
-            <a:r>
-              <a:rPr lang="en-US" sz="1300" dirty="0">
-                <a:solidFill>
-                  <a:srgbClr val="6B7280"/>
-                </a:solidFill>
-                <a:latin typeface="Calibri" pitchFamily="34" charset="0"/>
-                <a:ea typeface="Calibri" pitchFamily="34" charset="-122"/>
-                <a:cs typeface="Calibri" pitchFamily="34" charset="-120"/>
-              </a:rPr>
-              <a:t>SaaS · low-code</a:t>
-            </a:r>
-            <a:endParaRPr lang="en-US" sz="1300" dirty="0"/>
-          </a:p>
-        </p:txBody>
-      </p:sp>
-      <p:sp>
-        <p:nvSpPr>
-          <p:cNvPr id="8" name="Shape 6"/>
-          <p:cNvSpPr/>
-          <p:nvPr/>
-        </p:nvSpPr>
-        <p:spPr>
-          <a:xfrm>
-            <a:off x="3246120" y="1188720"/>
-            <a:ext cx="2651760" cy="1280160"/>
-          </a:xfrm>
-          <a:prstGeom prst="rect">
-            <a:avLst/>
-          </a:prstGeom>
-          <a:solidFill>
-            <a:srgbClr val="FFFFFF"/>
-          </a:solidFill>
-          <a:ln w="12700">
-            <a:solidFill>
-              <a:srgbClr val="1E2761"/>
-            </a:solidFill>
-            <a:prstDash val="solid"/>
-          </a:ln>
-        </p:spPr>
-      </p:sp>
-      <p:sp>
-        <p:nvSpPr>
-          <p:cNvPr id="9" name="Text 7"/>
-          <p:cNvSpPr/>
-          <p:nvPr/>
-        </p:nvSpPr>
-        <p:spPr>
-          <a:xfrm>
-            <a:off x="3337560" y="1325880"/>
-            <a:ext cx="2468880" cy="457200"/>
-          </a:xfrm>
-          <a:prstGeom prst="rect">
-            <a:avLst/>
-          </a:prstGeom>
-          <a:noFill/>
-          <a:ln/>
-        </p:spPr>
-        <p:txBody>
-          <a:bodyPr wrap="square" lIns="0" tIns="0" rIns="0" bIns="0" rtlCol="0" anchor="ctr"/>
-          <a:lstStyle/>
-          <a:p>
-            <a:pPr algn="ctr" indent="0" marL="0">
-              <a:buNone/>
-            </a:pPr>
-            <a:r>
-              <a:rPr lang="en-US" sz="1800" b="1" dirty="0">
-                <a:solidFill>
-                  <a:srgbClr val="1E2761"/>
-                </a:solidFill>
-                <a:latin typeface="Calibri" pitchFamily="34" charset="0"/>
-                <a:ea typeface="Calibri" pitchFamily="34" charset="-122"/>
-                <a:cs typeface="Calibri" pitchFamily="34" charset="-120"/>
-              </a:rPr>
-              <a:t>Foundry Agent Service</a:t>
-            </a:r>
-            <a:endParaRPr lang="en-US" sz="1800" dirty="0"/>
-          </a:p>
-        </p:txBody>
-      </p:sp>
-      <p:sp>
-        <p:nvSpPr>
-          <p:cNvPr id="10" name="Text 8"/>
-          <p:cNvSpPr/>
-          <p:nvPr/>
-        </p:nvSpPr>
-        <p:spPr>
-          <a:xfrm>
-            <a:off x="3337560" y="1874520"/>
-            <a:ext cx="2468880" cy="365760"/>
-          </a:xfrm>
-          <a:prstGeom prst="rect">
-            <a:avLst/>
-          </a:prstGeom>
-          <a:noFill/>
-          <a:ln/>
-        </p:spPr>
-        <p:txBody>
-          <a:bodyPr wrap="square" lIns="0" tIns="0" rIns="0" bIns="0" rtlCol="0" anchor="ctr"/>
-          <a:lstStyle/>
-          <a:p>
-            <a:pPr algn="ctr" indent="0" marL="0">
-              <a:buNone/>
-            </a:pPr>
-            <a:r>
-              <a:rPr lang="en-US" sz="1300" dirty="0">
-                <a:solidFill>
-                  <a:srgbClr val="6B7280"/>
-                </a:solidFill>
-                <a:latin typeface="Calibri" pitchFamily="34" charset="0"/>
-                <a:ea typeface="Calibri" pitchFamily="34" charset="-122"/>
-                <a:cs typeface="Calibri" pitchFamily="34" charset="-120"/>
-              </a:rPr>
-              <a:t>PaaS · managed runtime</a:t>
-            </a:r>
-            <a:endParaRPr lang="en-US" sz="1300" dirty="0"/>
-          </a:p>
-        </p:txBody>
-      </p:sp>
-      <p:sp>
-        <p:nvSpPr>
-          <p:cNvPr id="11" name="Shape 9"/>
-          <p:cNvSpPr/>
-          <p:nvPr/>
-        </p:nvSpPr>
-        <p:spPr>
-          <a:xfrm>
-            <a:off x="6126480" y="1188720"/>
-            <a:ext cx="2651760" cy="1280160"/>
-          </a:xfrm>
-          <a:prstGeom prst="rect">
-            <a:avLst/>
-          </a:prstGeom>
-          <a:solidFill>
-            <a:srgbClr val="FFFFFF"/>
-          </a:solidFill>
-          <a:ln w="12700">
-            <a:solidFill>
-              <a:srgbClr val="1E2761"/>
-            </a:solidFill>
-            <a:prstDash val="solid"/>
-          </a:ln>
-        </p:spPr>
-      </p:sp>
-      <p:sp>
-        <p:nvSpPr>
-          <p:cNvPr id="12" name="Text 10"/>
-          <p:cNvSpPr/>
-          <p:nvPr/>
-        </p:nvSpPr>
-        <p:spPr>
-          <a:xfrm>
-            <a:off x="6217920" y="1325880"/>
-            <a:ext cx="2468880" cy="457200"/>
-          </a:xfrm>
-          <a:prstGeom prst="rect">
-            <a:avLst/>
-          </a:prstGeom>
-          <a:noFill/>
-          <a:ln/>
-        </p:spPr>
-        <p:txBody>
-          <a:bodyPr wrap="square" lIns="0" tIns="0" rIns="0" bIns="0" rtlCol="0" anchor="ctr"/>
-          <a:lstStyle/>
-          <a:p>
-            <a:pPr algn="ctr" indent="0" marL="0">
-              <a:buNone/>
-            </a:pPr>
-            <a:r>
-              <a:rPr lang="en-US" sz="1800" b="1" dirty="0">
-                <a:solidFill>
-                  <a:srgbClr val="1E2761"/>
-                </a:solidFill>
-                <a:latin typeface="Calibri" pitchFamily="34" charset="0"/>
-                <a:ea typeface="Calibri" pitchFamily="34" charset="-122"/>
-                <a:cs typeface="Calibri" pitchFamily="34" charset="-120"/>
-              </a:rPr>
-              <a:t>MAF + containers</a:t>
-            </a:r>
-            <a:endParaRPr lang="en-US" sz="1800" dirty="0"/>
-          </a:p>
-        </p:txBody>
-      </p:sp>
-      <p:sp>
-        <p:nvSpPr>
-          <p:cNvPr id="13" name="Text 11"/>
-          <p:cNvSpPr/>
-          <p:nvPr/>
-        </p:nvSpPr>
-        <p:spPr>
-          <a:xfrm>
-            <a:off x="6217920" y="1874520"/>
-            <a:ext cx="2468880" cy="365760"/>
-          </a:xfrm>
-          <a:prstGeom prst="rect">
-            <a:avLst/>
-          </a:prstGeom>
-          <a:noFill/>
-          <a:ln/>
-        </p:spPr>
-        <p:txBody>
-          <a:bodyPr wrap="square" lIns="0" tIns="0" rIns="0" bIns="0" rtlCol="0" anchor="ctr"/>
-          <a:lstStyle/>
-          <a:p>
-            <a:pPr algn="ctr" indent="0" marL="0">
-              <a:buNone/>
-            </a:pPr>
-            <a:r>
-              <a:rPr lang="en-US" sz="1300" dirty="0">
-                <a:solidFill>
-                  <a:srgbClr val="6B7280"/>
-                </a:solidFill>
-                <a:latin typeface="Calibri" pitchFamily="34" charset="0"/>
-                <a:ea typeface="Calibri" pitchFamily="34" charset="-122"/>
-                <a:cs typeface="Calibri" pitchFamily="34" charset="-120"/>
-              </a:rPr>
-              <a:t>IaaS · you own everything</a:t>
-            </a:r>
-            <a:endParaRPr lang="en-US" sz="1300" dirty="0"/>
-          </a:p>
-        </p:txBody>
-      </p:sp>
-      <p:sp>
-        <p:nvSpPr>
-          <p:cNvPr id="14" name="Text 12"/>
-          <p:cNvSpPr/>
-          <p:nvPr/>
-        </p:nvSpPr>
-        <p:spPr>
-          <a:xfrm>
-            <a:off x="365760" y="2788920"/>
-            <a:ext cx="8412480" cy="320040"/>
-          </a:xfrm>
-          <a:prstGeom prst="rect">
-            <a:avLst/>
-          </a:prstGeom>
-          <a:noFill/>
-          <a:ln/>
-        </p:spPr>
-        <p:txBody>
-          <a:bodyPr wrap="square" lIns="0" tIns="0" rIns="0" bIns="0" rtlCol="0" anchor="ctr"/>
-          <a:lstStyle/>
-          <a:p>
-            <a:pPr algn="ctr" indent="0" marL="0">
-              <a:buNone/>
-            </a:pPr>
-            <a:r>
-              <a:rPr lang="en-US" sz="1400" i="1" dirty="0">
-                <a:solidFill>
-                  <a:srgbClr val="6B7280"/>
-                </a:solidFill>
-                <a:latin typeface="Calibri" pitchFamily="34" charset="0"/>
-                <a:ea typeface="Calibri" pitchFamily="34" charset="-122"/>
-                <a:cs typeface="Calibri" pitchFamily="34" charset="-120"/>
-              </a:rPr>
-              <a:t>All three need:</a:t>
-            </a:r>
-            <a:endParaRPr lang="en-US" sz="1400" dirty="0"/>
-          </a:p>
-        </p:txBody>
-      </p:sp>
-      <p:sp>
-        <p:nvSpPr>
-          <p:cNvPr id="15" name="Shape 13"/>
-          <p:cNvSpPr/>
-          <p:nvPr/>
-        </p:nvSpPr>
-        <p:spPr>
-          <a:xfrm>
-            <a:off x="685800" y="3200400"/>
-            <a:ext cx="2377440" cy="731520"/>
-          </a:xfrm>
-          <a:prstGeom prst="roundRect">
-            <a:avLst>
-              <a:gd name="adj" fmla="val 18750"/>
-            </a:avLst>
-          </a:prstGeom>
-          <a:solidFill>
-            <a:srgbClr val="1E2761"/>
-          </a:solidFill>
-          <a:ln/>
-        </p:spPr>
-      </p:sp>
-      <p:sp>
-        <p:nvSpPr>
-          <p:cNvPr id="16" name="Text 14"/>
-          <p:cNvSpPr/>
-          <p:nvPr/>
-        </p:nvSpPr>
-        <p:spPr>
-          <a:xfrm>
-            <a:off x="685800" y="3200400"/>
-            <a:ext cx="2377440" cy="731520"/>
-          </a:xfrm>
-          <a:prstGeom prst="rect">
-            <a:avLst/>
-          </a:prstGeom>
-          <a:noFill/>
-          <a:ln/>
-        </p:spPr>
-        <p:txBody>
-          <a:bodyPr wrap="square" lIns="0" tIns="0" rIns="0" bIns="0" rtlCol="0" anchor="ctr"/>
-          <a:lstStyle/>
-          <a:p>
-            <a:pPr algn="ctr" indent="0" marL="0">
-              <a:buNone/>
-            </a:pPr>
-            <a:r>
-              <a:rPr lang="en-US" sz="2200" b="1" dirty="0">
-                <a:solidFill>
-                  <a:srgbClr val="FFFFFF"/>
-                </a:solidFill>
-                <a:latin typeface="Calibri" pitchFamily="34" charset="0"/>
-                <a:ea typeface="Calibri" pitchFamily="34" charset="-122"/>
-                <a:cs typeface="Calibri" pitchFamily="34" charset="-120"/>
-              </a:rPr>
-              <a:t>Model</a:t>
-            </a:r>
-            <a:endParaRPr lang="en-US" sz="2200" dirty="0"/>
-          </a:p>
-        </p:txBody>
-      </p:sp>
-      <p:sp>
-        <p:nvSpPr>
-          <p:cNvPr id="17" name="Shape 15"/>
-          <p:cNvSpPr/>
-          <p:nvPr/>
-        </p:nvSpPr>
-        <p:spPr>
-          <a:xfrm>
-            <a:off x="3383280" y="3200400"/>
-            <a:ext cx="2377440" cy="731520"/>
-          </a:xfrm>
-          <a:prstGeom prst="roundRect">
-            <a:avLst>
-              <a:gd name="adj" fmla="val 18750"/>
-            </a:avLst>
-          </a:prstGeom>
-          <a:solidFill>
-            <a:srgbClr val="1E2761"/>
-          </a:solidFill>
-          <a:ln/>
-        </p:spPr>
-      </p:sp>
-      <p:sp>
-        <p:nvSpPr>
-          <p:cNvPr id="18" name="Text 16"/>
-          <p:cNvSpPr/>
-          <p:nvPr/>
-        </p:nvSpPr>
-        <p:spPr>
-          <a:xfrm>
-            <a:off x="3383280" y="3200400"/>
-            <a:ext cx="2377440" cy="731520"/>
-          </a:xfrm>
-          <a:prstGeom prst="rect">
-            <a:avLst/>
-          </a:prstGeom>
-          <a:noFill/>
-          <a:ln/>
-        </p:spPr>
-        <p:txBody>
-          <a:bodyPr wrap="square" lIns="0" tIns="0" rIns="0" bIns="0" rtlCol="0" anchor="ctr"/>
-          <a:lstStyle/>
-          <a:p>
-            <a:pPr algn="ctr" indent="0" marL="0">
-              <a:buNone/>
-            </a:pPr>
-            <a:r>
-              <a:rPr lang="en-US" sz="2200" b="1" dirty="0">
-                <a:solidFill>
-                  <a:srgbClr val="FFFFFF"/>
-                </a:solidFill>
-                <a:latin typeface="Calibri" pitchFamily="34" charset="0"/>
-                <a:ea typeface="Calibri" pitchFamily="34" charset="-122"/>
-                <a:cs typeface="Calibri" pitchFamily="34" charset="-120"/>
-              </a:rPr>
-              <a:t>Instructions</a:t>
-            </a:r>
-            <a:endParaRPr lang="en-US" sz="2200" dirty="0"/>
-          </a:p>
-        </p:txBody>
-      </p:sp>
-      <p:sp>
-        <p:nvSpPr>
-          <p:cNvPr id="19" name="Shape 17"/>
-          <p:cNvSpPr/>
-          <p:nvPr/>
-        </p:nvSpPr>
-        <p:spPr>
-          <a:xfrm>
-            <a:off x="6080760" y="3200400"/>
-            <a:ext cx="2377440" cy="731520"/>
-          </a:xfrm>
-          <a:prstGeom prst="roundRect">
-            <a:avLst>
-              <a:gd name="adj" fmla="val 18750"/>
-            </a:avLst>
-          </a:prstGeom>
-          <a:solidFill>
-            <a:srgbClr val="1E2761"/>
-          </a:solidFill>
-          <a:ln/>
-        </p:spPr>
-      </p:sp>
-      <p:sp>
-        <p:nvSpPr>
-          <p:cNvPr id="20" name="Text 18"/>
-          <p:cNvSpPr/>
-          <p:nvPr/>
-        </p:nvSpPr>
-        <p:spPr>
-          <a:xfrm>
-            <a:off x="6080760" y="3200400"/>
-            <a:ext cx="2377440" cy="731520"/>
-          </a:xfrm>
-          <a:prstGeom prst="rect">
-            <a:avLst/>
-          </a:prstGeom>
-          <a:noFill/>
-          <a:ln/>
-        </p:spPr>
-        <p:txBody>
-          <a:bodyPr wrap="square" lIns="0" tIns="0" rIns="0" bIns="0" rtlCol="0" anchor="ctr"/>
-          <a:lstStyle/>
-          <a:p>
-            <a:pPr algn="ctr" indent="0" marL="0">
-              <a:buNone/>
-            </a:pPr>
-            <a:r>
-              <a:rPr lang="en-US" sz="2200" b="1" dirty="0">
-                <a:solidFill>
-                  <a:srgbClr val="FFFFFF"/>
-                </a:solidFill>
-                <a:latin typeface="Calibri" pitchFamily="34" charset="0"/>
-                <a:ea typeface="Calibri" pitchFamily="34" charset="-122"/>
-                <a:cs typeface="Calibri" pitchFamily="34" charset="-120"/>
-              </a:rPr>
-              <a:t>Tools</a:t>
-            </a:r>
-            <a:endParaRPr lang="en-US" sz="2200" dirty="0"/>
-          </a:p>
-        </p:txBody>
-      </p:sp>
-      <p:sp>
-        <p:nvSpPr>
-          <p:cNvPr id="21" name="Text 19"/>
-          <p:cNvSpPr/>
-          <p:nvPr/>
-        </p:nvSpPr>
-        <p:spPr>
-          <a:xfrm>
-            <a:off x="365760" y="4297680"/>
-            <a:ext cx="8412480" cy="457200"/>
-          </a:xfrm>
-          <a:prstGeom prst="rect">
-            <a:avLst/>
-          </a:prstGeom>
-          <a:noFill/>
-          <a:ln/>
-        </p:spPr>
-        <p:txBody>
-          <a:bodyPr wrap="square" rtlCol="0" anchor="ctr"/>
-          <a:lstStyle/>
-          <a:p>
-            <a:pPr algn="ctr" indent="0" marL="0">
-              <a:buNone/>
-            </a:pPr>
-            <a:r>
-              <a:rPr lang="en-US" sz="1400" i="1" dirty="0">
-                <a:solidFill>
-                  <a:srgbClr val="1E2761"/>
-                </a:solidFill>
-                <a:latin typeface="Calibri" pitchFamily="34" charset="0"/>
-                <a:ea typeface="Calibri" pitchFamily="34" charset="-122"/>
-                <a:cs typeface="Calibri" pitchFamily="34" charset="-120"/>
-              </a:rPr>
-              <a:t>Same ingredients everywhere. What changes is how much code you write and who owns the runtime.</a:t>
-            </a:r>
-            <a:endParaRPr lang="en-US" sz="1400" dirty="0"/>
-          </a:p>
-        </p:txBody>
-      </p:sp>
-    </p:spTree>
-  </p:cSld>
-  <p:clrMapOvr>
-    <a:masterClrMapping/>
-  </p:clrMapOvr>
-</p:sld>
-</file>
-
-<file path=ppt/slides/slide5.xml><?xml version="1.0" encoding="utf-8"?>
-<p:sld xmlns:a="http://schemas.openxmlformats.org/drawingml/2006/main" xmlns:r="http://schemas.openxmlformats.org/officeDocument/2006/relationships" xmlns:p="http://schemas.openxmlformats.org/presentationml/2006/main">
-  <p:cSld name="Slide 5">
-    <p:bg>
-      <p:bgPr>
-        <a:solidFill>
-          <a:srgbClr val="FFFFFF"/>
-        </a:solidFill>
-      </p:bgPr>
-    </p:bg>
-    <p:spTree>
-      <p:nvGrpSpPr>
-        <p:cNvPr id="1" name=""/>
-        <p:cNvGrpSpPr/>
-        <p:nvPr/>
-      </p:nvGrpSpPr>
-      <p:grpSpPr>
-        <a:xfrm>
-          <a:off x="0" y="0"/>
-          <a:ext cx="0" cy="0"/>
-          <a:chOff x="0" y="0"/>
-          <a:chExt cx="0" cy="0"/>
-        </a:xfrm>
-      </p:grpSpPr>
-      <p:sp>
-        <p:nvSpPr>
-          <p:cNvPr id="2" name="Shape 0"/>
-          <p:cNvSpPr/>
-          <p:nvPr/>
-        </p:nvSpPr>
-        <p:spPr>
-          <a:xfrm>
-            <a:off x="0" y="0"/>
-            <a:ext cx="54864" cy="5143500"/>
-          </a:xfrm>
-          <a:prstGeom prst="rect">
-            <a:avLst/>
-          </a:prstGeom>
-          <a:solidFill>
-            <a:srgbClr val="1E2761"/>
-          </a:solidFill>
-          <a:ln/>
-        </p:spPr>
-      </p:sp>
-      <p:sp>
-        <p:nvSpPr>
-          <p:cNvPr id="3" name="Text 1"/>
-          <p:cNvSpPr/>
-          <p:nvPr/>
-        </p:nvSpPr>
-        <p:spPr>
-          <a:xfrm>
-            <a:off x="5669280" y="274320"/>
-            <a:ext cx="3291840" cy="274320"/>
-          </a:xfrm>
-          <a:prstGeom prst="rect">
-            <a:avLst/>
-          </a:prstGeom>
-          <a:noFill/>
-          <a:ln/>
-        </p:spPr>
-        <p:txBody>
-          <a:bodyPr wrap="square" lIns="0" tIns="0" rIns="0" bIns="0" rtlCol="0" anchor="ctr"/>
-          <a:lstStyle/>
-          <a:p>
-            <a:pPr algn="r" indent="0" marL="0">
-              <a:buNone/>
-            </a:pPr>
-            <a:r>
-              <a:rPr lang="en-US" sz="1000" dirty="0">
-                <a:solidFill>
-                  <a:srgbClr val="6B7280"/>
-                </a:solidFill>
-                <a:latin typeface="Calibri" pitchFamily="34" charset="0"/>
-                <a:ea typeface="Calibri" pitchFamily="34" charset="-122"/>
-                <a:cs typeface="Calibri" pitchFamily="34" charset="-120"/>
-              </a:rPr>
-              <a:t>Day 1 · Module 1</a:t>
-            </a:r>
-            <a:endParaRPr lang="en-US" sz="1000" dirty="0"/>
-          </a:p>
-        </p:txBody>
-      </p:sp>
-      <p:sp>
-        <p:nvSpPr>
-          <p:cNvPr id="4" name="Text 2"/>
-          <p:cNvSpPr/>
-          <p:nvPr/>
-        </p:nvSpPr>
-        <p:spPr>
-          <a:xfrm>
-            <a:off x="365760" y="320040"/>
-            <a:ext cx="6217920" cy="640080"/>
-          </a:xfrm>
-          <a:prstGeom prst="rect">
-            <a:avLst/>
-          </a:prstGeom>
-          <a:noFill/>
-          <a:ln/>
-        </p:spPr>
-        <p:txBody>
-          <a:bodyPr wrap="square" lIns="0" tIns="0" rIns="0" bIns="0" rtlCol="0" anchor="ctr"/>
-          <a:lstStyle/>
-          <a:p>
-            <a:pPr indent="0" marL="0">
-              <a:buNone/>
-            </a:pPr>
-            <a:r>
-              <a:rPr lang="en-US" sz="2800" b="1" dirty="0">
-                <a:solidFill>
-                  <a:srgbClr val="1E2761"/>
-                </a:solidFill>
-                <a:latin typeface="Calibri" pitchFamily="34" charset="0"/>
-                <a:ea typeface="Calibri" pitchFamily="34" charset="-122"/>
-                <a:cs typeface="Calibri" pitchFamily="34" charset="-120"/>
-              </a:rPr>
-              <a:t>A decision framework, visualized</a:t>
-            </a:r>
-            <a:endParaRPr lang="en-US" sz="2800" dirty="0"/>
-          </a:p>
-        </p:txBody>
-      </p:sp>
-      <p:sp>
-        <p:nvSpPr>
-          <p:cNvPr id="5" name="Text 3"/>
-          <p:cNvSpPr/>
-          <p:nvPr/>
-        </p:nvSpPr>
-        <p:spPr>
-          <a:xfrm>
-            <a:off x="365760" y="1143000"/>
-            <a:ext cx="4023360" cy="320040"/>
-          </a:xfrm>
-          <a:prstGeom prst="rect">
-            <a:avLst/>
-          </a:prstGeom>
-          <a:noFill/>
-          <a:ln/>
-        </p:spPr>
-        <p:txBody>
-          <a:bodyPr wrap="square" lIns="0" tIns="0" rIns="0" bIns="0" rtlCol="0" anchor="ctr"/>
-          <a:lstStyle/>
-          <a:p>
-            <a:pPr algn="l" indent="0" marL="0">
-              <a:buNone/>
-            </a:pPr>
-            <a:r>
-              <a:rPr lang="en-US" sz="1300" b="1" dirty="0">
-                <a:solidFill>
-                  <a:srgbClr val="1E2761"/>
-                </a:solidFill>
-                <a:latin typeface="Calibri" pitchFamily="34" charset="0"/>
-                <a:ea typeface="Calibri" pitchFamily="34" charset="-122"/>
-                <a:cs typeface="Calibri" pitchFamily="34" charset="-120"/>
-              </a:rPr>
-              <a:t>More control, more code</a:t>
-            </a:r>
-            <a:endParaRPr lang="en-US" sz="1300" dirty="0"/>
-          </a:p>
-        </p:txBody>
-      </p:sp>
-      <p:sp>
-        <p:nvSpPr>
-          <p:cNvPr id="6" name="Text 4"/>
-          <p:cNvSpPr/>
-          <p:nvPr/>
-        </p:nvSpPr>
-        <p:spPr>
-          <a:xfrm>
-            <a:off x="4754880" y="1143000"/>
-            <a:ext cx="4023360" cy="320040"/>
-          </a:xfrm>
-          <a:prstGeom prst="rect">
-            <a:avLst/>
-          </a:prstGeom>
-          <a:noFill/>
-          <a:ln/>
-        </p:spPr>
-        <p:txBody>
-          <a:bodyPr wrap="square" lIns="0" tIns="0" rIns="0" bIns="0" rtlCol="0" anchor="ctr"/>
-          <a:lstStyle/>
-          <a:p>
-            <a:pPr algn="r" indent="0" marL="0">
-              <a:buNone/>
-            </a:pPr>
-            <a:r>
-              <a:rPr lang="en-US" sz="1300" b="1" dirty="0">
-                <a:solidFill>
-                  <a:srgbClr val="1E2761"/>
-                </a:solidFill>
-                <a:latin typeface="Calibri" pitchFamily="34" charset="0"/>
-                <a:ea typeface="Calibri" pitchFamily="34" charset="-122"/>
-                <a:cs typeface="Calibri" pitchFamily="34" charset="-120"/>
-              </a:rPr>
-              <a:t>Faster to build, less customization</a:t>
-            </a:r>
-            <a:endParaRPr lang="en-US" sz="1300" dirty="0"/>
-          </a:p>
-        </p:txBody>
-      </p:sp>
-      <p:sp>
-        <p:nvSpPr>
-          <p:cNvPr id="7" name="Shape 5"/>
-          <p:cNvSpPr/>
-          <p:nvPr/>
-        </p:nvSpPr>
-        <p:spPr>
-          <a:xfrm>
-            <a:off x="548640" y="1645920"/>
-            <a:ext cx="2682240" cy="640080"/>
-          </a:xfrm>
-          <a:prstGeom prst="rect">
-            <a:avLst/>
-          </a:prstGeom>
-          <a:solidFill>
-            <a:srgbClr val="0F1A44"/>
-          </a:solidFill>
-          <a:ln w="12700">
-            <a:solidFill>
-              <a:srgbClr val="FFFFFF"/>
-            </a:solidFill>
-            <a:prstDash val="solid"/>
-          </a:ln>
-        </p:spPr>
-      </p:sp>
-      <p:sp>
-        <p:nvSpPr>
-          <p:cNvPr id="8" name="Text 6"/>
-          <p:cNvSpPr/>
-          <p:nvPr/>
-        </p:nvSpPr>
-        <p:spPr>
-          <a:xfrm>
-            <a:off x="548640" y="1645920"/>
-            <a:ext cx="2682240" cy="640080"/>
-          </a:xfrm>
-          <a:prstGeom prst="rect">
-            <a:avLst/>
-          </a:prstGeom>
-          <a:noFill/>
-          <a:ln/>
-        </p:spPr>
-        <p:txBody>
-          <a:bodyPr wrap="square" lIns="0" tIns="0" rIns="0" bIns="0" rtlCol="0" anchor="ctr"/>
-          <a:lstStyle/>
-          <a:p>
-            <a:pPr algn="ctr" indent="0" marL="0">
-              <a:buNone/>
-            </a:pPr>
-            <a:r>
-              <a:rPr lang="en-US" sz="2200" b="1" dirty="0">
-                <a:solidFill>
-                  <a:srgbClr val="FFFFFF"/>
-                </a:solidFill>
-                <a:latin typeface="Calibri" pitchFamily="34" charset="0"/>
-                <a:ea typeface="Calibri" pitchFamily="34" charset="-122"/>
-                <a:cs typeface="Calibri" pitchFamily="34" charset="-120"/>
-              </a:rPr>
-              <a:t>IaaS</a:t>
-            </a:r>
-            <a:endParaRPr lang="en-US" sz="2200" dirty="0"/>
-          </a:p>
-        </p:txBody>
-      </p:sp>
-      <p:sp>
-        <p:nvSpPr>
-          <p:cNvPr id="9" name="Shape 7"/>
-          <p:cNvSpPr/>
-          <p:nvPr/>
-        </p:nvSpPr>
-        <p:spPr>
-          <a:xfrm>
-            <a:off x="3230880" y="1645920"/>
-            <a:ext cx="2682240" cy="640080"/>
-          </a:xfrm>
-          <a:prstGeom prst="rect">
-            <a:avLst/>
-          </a:prstGeom>
-          <a:solidFill>
-            <a:srgbClr val="1E2761"/>
-          </a:solidFill>
-          <a:ln w="12700">
-            <a:solidFill>
-              <a:srgbClr val="FFFFFF"/>
-            </a:solidFill>
-            <a:prstDash val="solid"/>
-          </a:ln>
-        </p:spPr>
-      </p:sp>
-      <p:sp>
-        <p:nvSpPr>
-          <p:cNvPr id="10" name="Text 8"/>
-          <p:cNvSpPr/>
-          <p:nvPr/>
-        </p:nvSpPr>
-        <p:spPr>
-          <a:xfrm>
-            <a:off x="3230880" y="1645920"/>
-            <a:ext cx="2682240" cy="640080"/>
-          </a:xfrm>
-          <a:prstGeom prst="rect">
-            <a:avLst/>
-          </a:prstGeom>
-          <a:noFill/>
-          <a:ln/>
-        </p:spPr>
-        <p:txBody>
-          <a:bodyPr wrap="square" lIns="0" tIns="0" rIns="0" bIns="0" rtlCol="0" anchor="ctr"/>
-          <a:lstStyle/>
-          <a:p>
-            <a:pPr algn="ctr" indent="0" marL="0">
-              <a:buNone/>
-            </a:pPr>
-            <a:r>
-              <a:rPr lang="en-US" sz="2200" b="1" dirty="0">
-                <a:solidFill>
-                  <a:srgbClr val="FFFFFF"/>
-                </a:solidFill>
-                <a:latin typeface="Calibri" pitchFamily="34" charset="0"/>
-                <a:ea typeface="Calibri" pitchFamily="34" charset="-122"/>
-                <a:cs typeface="Calibri" pitchFamily="34" charset="-120"/>
-              </a:rPr>
-              <a:t>PaaS</a:t>
-            </a:r>
-            <a:endParaRPr lang="en-US" sz="2200" dirty="0"/>
-          </a:p>
-        </p:txBody>
-      </p:sp>
-      <p:sp>
-        <p:nvSpPr>
-          <p:cNvPr id="11" name="Shape 9"/>
-          <p:cNvSpPr/>
-          <p:nvPr/>
-        </p:nvSpPr>
-        <p:spPr>
-          <a:xfrm>
-            <a:off x="5913120" y="1645920"/>
-            <a:ext cx="2682240" cy="640080"/>
-          </a:xfrm>
-          <a:prstGeom prst="rect">
-            <a:avLst/>
-          </a:prstGeom>
-          <a:solidFill>
-            <a:srgbClr val="6B7BB0"/>
-          </a:solidFill>
-          <a:ln w="12700">
-            <a:solidFill>
-              <a:srgbClr val="FFFFFF"/>
-            </a:solidFill>
-            <a:prstDash val="solid"/>
-          </a:ln>
-        </p:spPr>
-      </p:sp>
-      <p:sp>
-        <p:nvSpPr>
-          <p:cNvPr id="12" name="Text 10"/>
-          <p:cNvSpPr/>
-          <p:nvPr/>
-        </p:nvSpPr>
-        <p:spPr>
-          <a:xfrm>
-            <a:off x="5913120" y="1645920"/>
-            <a:ext cx="2682240" cy="640080"/>
-          </a:xfrm>
-          <a:prstGeom prst="rect">
-            <a:avLst/>
-          </a:prstGeom>
-          <a:noFill/>
-          <a:ln/>
-        </p:spPr>
-        <p:txBody>
-          <a:bodyPr wrap="square" lIns="0" tIns="0" rIns="0" bIns="0" rtlCol="0" anchor="ctr"/>
-          <a:lstStyle/>
-          <a:p>
-            <a:pPr algn="ctr" indent="0" marL="0">
-              <a:buNone/>
-            </a:pPr>
-            <a:r>
-              <a:rPr lang="en-US" sz="2200" b="1" dirty="0">
-                <a:solidFill>
-                  <a:srgbClr val="FFFFFF"/>
-                </a:solidFill>
-                <a:latin typeface="Calibri" pitchFamily="34" charset="0"/>
-                <a:ea typeface="Calibri" pitchFamily="34" charset="-122"/>
-                <a:cs typeface="Calibri" pitchFamily="34" charset="-120"/>
-              </a:rPr>
-              <a:t>SaaS</a:t>
-            </a:r>
-            <a:endParaRPr lang="en-US" sz="2200" dirty="0"/>
-          </a:p>
-        </p:txBody>
-      </p:sp>
-      <p:sp>
-        <p:nvSpPr>
-          <p:cNvPr id="13" name="Text 11"/>
-          <p:cNvSpPr/>
-          <p:nvPr/>
-        </p:nvSpPr>
-        <p:spPr>
-          <a:xfrm>
-            <a:off x="548640" y="2377440"/>
-            <a:ext cx="2682240" cy="365760"/>
-          </a:xfrm>
-          <a:prstGeom prst="rect">
-            <a:avLst/>
-          </a:prstGeom>
-          <a:noFill/>
-          <a:ln/>
-        </p:spPr>
-        <p:txBody>
-          <a:bodyPr wrap="square" lIns="0" tIns="0" rIns="0" bIns="0" rtlCol="0" anchor="ctr"/>
-          <a:lstStyle/>
-          <a:p>
-            <a:pPr algn="ctr" indent="0" marL="0">
-              <a:buNone/>
-            </a:pPr>
-            <a:r>
-              <a:rPr lang="en-US" sz="1300" b="1" dirty="0">
-                <a:solidFill>
-                  <a:srgbClr val="1E2761"/>
-                </a:solidFill>
-                <a:latin typeface="Calibri" pitchFamily="34" charset="0"/>
-                <a:ea typeface="Calibri" pitchFamily="34" charset="-122"/>
-                <a:cs typeface="Calibri" pitchFamily="34" charset="-120"/>
-              </a:rPr>
-              <a:t>Containers + OSS frameworks</a:t>
-            </a:r>
-            <a:endParaRPr lang="en-US" sz="1300" dirty="0"/>
-          </a:p>
-        </p:txBody>
-      </p:sp>
-      <p:sp>
-        <p:nvSpPr>
-          <p:cNvPr id="14" name="Text 12"/>
-          <p:cNvSpPr/>
-          <p:nvPr/>
-        </p:nvSpPr>
-        <p:spPr>
-          <a:xfrm>
-            <a:off x="3230880" y="2377440"/>
-            <a:ext cx="2682240" cy="365760"/>
-          </a:xfrm>
-          <a:prstGeom prst="rect">
-            <a:avLst/>
-          </a:prstGeom>
-          <a:noFill/>
-          <a:ln/>
-        </p:spPr>
-        <p:txBody>
-          <a:bodyPr wrap="square" lIns="0" tIns="0" rIns="0" bIns="0" rtlCol="0" anchor="ctr"/>
-          <a:lstStyle/>
-          <a:p>
-            <a:pPr algn="ctr" indent="0" marL="0">
-              <a:buNone/>
-            </a:pPr>
-            <a:r>
-              <a:rPr lang="en-US" sz="1300" b="1" dirty="0">
-                <a:solidFill>
-                  <a:srgbClr val="1E2761"/>
-                </a:solidFill>
-                <a:latin typeface="Calibri" pitchFamily="34" charset="0"/>
-                <a:ea typeface="Calibri" pitchFamily="34" charset="-122"/>
-                <a:cs typeface="Calibri" pitchFamily="34" charset="-120"/>
-              </a:rPr>
-              <a:t>Foundry Agent Service + MAF</a:t>
-            </a:r>
-            <a:endParaRPr lang="en-US" sz="1300" dirty="0"/>
-          </a:p>
-        </p:txBody>
-      </p:sp>
-      <p:sp>
-        <p:nvSpPr>
-          <p:cNvPr id="15" name="Text 13"/>
-          <p:cNvSpPr/>
-          <p:nvPr/>
-        </p:nvSpPr>
-        <p:spPr>
-          <a:xfrm>
-            <a:off x="5913120" y="2377440"/>
-            <a:ext cx="2682240" cy="365760"/>
-          </a:xfrm>
-          <a:prstGeom prst="rect">
-            <a:avLst/>
-          </a:prstGeom>
-          <a:noFill/>
-          <a:ln/>
-        </p:spPr>
-        <p:txBody>
-          <a:bodyPr wrap="square" lIns="0" tIns="0" rIns="0" bIns="0" rtlCol="0" anchor="ctr"/>
-          <a:lstStyle/>
-          <a:p>
-            <a:pPr algn="ctr" indent="0" marL="0">
-              <a:buNone/>
-            </a:pPr>
-            <a:r>
-              <a:rPr lang="en-US" sz="1300" b="1" dirty="0">
-                <a:solidFill>
-                  <a:srgbClr val="1E2761"/>
-                </a:solidFill>
-                <a:latin typeface="Calibri" pitchFamily="34" charset="0"/>
-                <a:ea typeface="Calibri" pitchFamily="34" charset="-122"/>
-                <a:cs typeface="Calibri" pitchFamily="34" charset="-120"/>
-              </a:rPr>
-              <a:t>Copilot Studio</a:t>
-            </a:r>
-            <a:endParaRPr lang="en-US" sz="1300" dirty="0"/>
-          </a:p>
-        </p:txBody>
-      </p:sp>
-      <p:sp>
-        <p:nvSpPr>
-          <p:cNvPr id="16" name="Text 14"/>
-          <p:cNvSpPr/>
-          <p:nvPr/>
-        </p:nvSpPr>
-        <p:spPr>
-          <a:xfrm>
-            <a:off x="640080" y="2788920"/>
-            <a:ext cx="2499360" cy="1280160"/>
-          </a:xfrm>
-          <a:prstGeom prst="rect">
-            <a:avLst/>
-          </a:prstGeom>
-          <a:noFill/>
-          <a:ln/>
-        </p:spPr>
-        <p:txBody>
-          <a:bodyPr wrap="square" lIns="0" tIns="0" rIns="0" bIns="0" rtlCol="0" anchor="t"/>
-          <a:lstStyle/>
-          <a:p>
-            <a:pPr algn="ctr" indent="0" marL="0">
-              <a:buNone/>
-            </a:pPr>
-            <a:r>
-              <a:rPr lang="en-US" sz="1200" dirty="0">
-                <a:solidFill>
-                  <a:srgbClr val="212121"/>
-                </a:solidFill>
-                <a:latin typeface="Calibri" pitchFamily="34" charset="0"/>
-                <a:ea typeface="Calibri" pitchFamily="34" charset="-122"/>
-                <a:cs typeface="Calibri" pitchFamily="34" charset="-120"/>
-              </a:rPr>
-              <a:t>You own everything. Not covered.</a:t>
-            </a:r>
-            <a:endParaRPr lang="en-US" sz="1200" dirty="0"/>
-          </a:p>
-        </p:txBody>
-      </p:sp>
-      <p:sp>
-        <p:nvSpPr>
-          <p:cNvPr id="17" name="Text 15"/>
-          <p:cNvSpPr/>
-          <p:nvPr/>
-        </p:nvSpPr>
-        <p:spPr>
-          <a:xfrm>
-            <a:off x="3322320" y="2788920"/>
-            <a:ext cx="2499360" cy="1280160"/>
-          </a:xfrm>
-          <a:prstGeom prst="rect">
-            <a:avLst/>
-          </a:prstGeom>
-          <a:noFill/>
-          <a:ln/>
-        </p:spPr>
-        <p:txBody>
-          <a:bodyPr wrap="square" lIns="0" tIns="0" rIns="0" bIns="0" rtlCol="0" anchor="t"/>
-          <a:lstStyle/>
-          <a:p>
-            <a:pPr algn="ctr" indent="0" marL="0">
-              <a:buNone/>
-            </a:pPr>
-            <a:r>
-              <a:rPr lang="en-US" sz="1200" dirty="0">
-                <a:solidFill>
-                  <a:srgbClr val="212121"/>
-                </a:solidFill>
-                <a:latin typeface="Calibri" pitchFamily="34" charset="0"/>
-                <a:ea typeface="Calibri" pitchFamily="34" charset="-122"/>
-                <a:cs typeface="Calibri" pitchFamily="34" charset="-120"/>
-              </a:rPr>
-              <a:t>Managed runtime; you own the agent code. This workshop.</a:t>
-            </a:r>
-            <a:endParaRPr lang="en-US" sz="1200" dirty="0"/>
-          </a:p>
-        </p:txBody>
-      </p:sp>
-      <p:sp>
-        <p:nvSpPr>
-          <p:cNvPr id="18" name="Text 16"/>
-          <p:cNvSpPr/>
-          <p:nvPr/>
-        </p:nvSpPr>
-        <p:spPr>
-          <a:xfrm>
-            <a:off x="6004560" y="2788920"/>
-            <a:ext cx="2499360" cy="1280160"/>
-          </a:xfrm>
-          <a:prstGeom prst="rect">
-            <a:avLst/>
-          </a:prstGeom>
-          <a:noFill/>
-          <a:ln/>
-        </p:spPr>
-        <p:txBody>
-          <a:bodyPr wrap="square" lIns="0" tIns="0" rIns="0" bIns="0" rtlCol="0" anchor="t"/>
-          <a:lstStyle/>
-          <a:p>
-            <a:pPr algn="ctr" indent="0" marL="0">
-              <a:buNone/>
-            </a:pPr>
-            <a:r>
-              <a:rPr lang="en-US" sz="1200" dirty="0">
-                <a:solidFill>
-                  <a:srgbClr val="212121"/>
-                </a:solidFill>
-                <a:latin typeface="Calibri" pitchFamily="34" charset="0"/>
-                <a:ea typeface="Calibri" pitchFamily="34" charset="-122"/>
-                <a:cs typeface="Calibri" pitchFamily="34" charset="-120"/>
-              </a:rPr>
-              <a:t>Portal-first, low-code. Not covered.</a:t>
-            </a:r>
-            <a:endParaRPr lang="en-US" sz="1200" dirty="0"/>
-          </a:p>
-        </p:txBody>
-      </p:sp>
-      <p:sp>
-        <p:nvSpPr>
-          <p:cNvPr id="19" name="Shape 17"/>
-          <p:cNvSpPr/>
-          <p:nvPr/>
-        </p:nvSpPr>
-        <p:spPr>
-          <a:xfrm>
-            <a:off x="365760" y="4343400"/>
-            <a:ext cx="8412480" cy="457200"/>
-          </a:xfrm>
-          <a:prstGeom prst="rect">
-            <a:avLst/>
-          </a:prstGeom>
-          <a:solidFill>
-            <a:srgbClr val="CADCFC"/>
-          </a:solidFill>
-          <a:ln/>
-        </p:spPr>
-      </p:sp>
-      <p:sp>
-        <p:nvSpPr>
-          <p:cNvPr id="20" name="Text 18"/>
-          <p:cNvSpPr/>
-          <p:nvPr/>
-        </p:nvSpPr>
-        <p:spPr>
-          <a:xfrm>
-            <a:off x="502920" y="4370832"/>
-            <a:ext cx="8138160" cy="402336"/>
-          </a:xfrm>
-          <a:prstGeom prst="rect">
-            <a:avLst/>
-          </a:prstGeom>
-          <a:noFill/>
-          <a:ln/>
-        </p:spPr>
-        <p:txBody>
-          <a:bodyPr wrap="square" lIns="0" tIns="0" rIns="0" bIns="0" rtlCol="0" anchor="ctr"/>
-          <a:lstStyle/>
-          <a:p>
-            <a:pPr indent="0" marL="0">
-              <a:buNone/>
-            </a:pPr>
-            <a:r>
-              <a:rPr lang="en-US" sz="1400" b="1" dirty="0">
-                <a:solidFill>
-                  <a:srgbClr val="1E2761"/>
-                </a:solidFill>
-                <a:latin typeface="Calibri" pitchFamily="34" charset="0"/>
-                <a:ea typeface="Calibri" pitchFamily="34" charset="-122"/>
-                <a:cs typeface="Calibri" pitchFamily="34" charset="-120"/>
-              </a:rPr>
-              <a:t>This workshop lives in PaaS territory. </a:t>
-            </a:r>
-            <a:pPr indent="0" marL="0">
-              <a:buNone/>
-            </a:pPr>
-            <a:r>
-              <a:rPr lang="en-US" sz="1400" dirty="0">
-                <a:solidFill>
-                  <a:srgbClr val="1E2761"/>
-                </a:solidFill>
-                <a:latin typeface="Calibri" pitchFamily="34" charset="0"/>
-                <a:ea typeface="Calibri" pitchFamily="34" charset="-122"/>
-                <a:cs typeface="Calibri" pitchFamily="34" charset="-120"/>
-              </a:rPr>
-              <a:t>You write real code; you don't run the infrastructure.</a:t>
-            </a:r>
-            <a:endParaRPr lang="en-US" sz="1400" dirty="0"/>
-          </a:p>
-        </p:txBody>
-      </p:sp>
-    </p:spTree>
-  </p:cSld>
-  <p:clrMapOvr>
-    <a:masterClrMapping/>
-  </p:clrMapOvr>
-</p:sld>
-</file>
-
-<file path=ppt/slides/slide6.xml><?xml version="1.0" encoding="utf-8"?>
-<p:sld xmlns:a="http://schemas.openxmlformats.org/drawingml/2006/main" xmlns:r="http://schemas.openxmlformats.org/officeDocument/2006/relationships" xmlns:p="http://schemas.openxmlformats.org/presentationml/2006/main">
-  <p:cSld name="Slide 6">
-    <p:bg>
-      <p:bgPr>
-        <a:solidFill>
-          <a:srgbClr val="FFFFFF"/>
-        </a:solidFill>
-      </p:bgPr>
-    </p:bg>
-    <p:spTree>
-      <p:nvGrpSpPr>
-        <p:cNvPr id="1" name=""/>
-        <p:cNvGrpSpPr/>
-        <p:nvPr/>
-      </p:nvGrpSpPr>
-      <p:grpSpPr>
-        <a:xfrm>
-          <a:off x="0" y="0"/>
-          <a:ext cx="0" cy="0"/>
-          <a:chOff x="0" y="0"/>
-          <a:chExt cx="0" cy="0"/>
-        </a:xfrm>
-      </p:grpSpPr>
-      <p:sp>
-        <p:nvSpPr>
-          <p:cNvPr id="2" name="Shape 0"/>
-          <p:cNvSpPr/>
-          <p:nvPr/>
-        </p:nvSpPr>
-        <p:spPr>
-          <a:xfrm>
-            <a:off x="0" y="0"/>
-            <a:ext cx="54864" cy="5143500"/>
-          </a:xfrm>
-          <a:prstGeom prst="rect">
-            <a:avLst/>
-          </a:prstGeom>
-          <a:solidFill>
-            <a:srgbClr val="1E2761"/>
-          </a:solidFill>
-          <a:ln/>
-        </p:spPr>
-      </p:sp>
-      <p:sp>
-        <p:nvSpPr>
-          <p:cNvPr id="3" name="Text 1"/>
-          <p:cNvSpPr/>
-          <p:nvPr/>
-        </p:nvSpPr>
-        <p:spPr>
-          <a:xfrm>
-            <a:off x="5669280" y="274320"/>
-            <a:ext cx="3291840" cy="274320"/>
-          </a:xfrm>
-          <a:prstGeom prst="rect">
-            <a:avLst/>
-          </a:prstGeom>
-          <a:noFill/>
-          <a:ln/>
-        </p:spPr>
-        <p:txBody>
-          <a:bodyPr wrap="square" lIns="0" tIns="0" rIns="0" bIns="0" rtlCol="0" anchor="ctr"/>
-          <a:lstStyle/>
-          <a:p>
-            <a:pPr algn="r" indent="0" marL="0">
-              <a:buNone/>
-            </a:pPr>
-            <a:r>
-              <a:rPr lang="en-US" sz="1000" dirty="0">
-                <a:solidFill>
-                  <a:srgbClr val="6B7280"/>
-                </a:solidFill>
-                <a:latin typeface="Calibri" pitchFamily="34" charset="0"/>
-                <a:ea typeface="Calibri" pitchFamily="34" charset="-122"/>
-                <a:cs typeface="Calibri" pitchFamily="34" charset="-120"/>
-              </a:rPr>
-              <a:t>Day 1 · Module 1</a:t>
-            </a:r>
-            <a:endParaRPr lang="en-US" sz="1000" dirty="0"/>
-          </a:p>
-        </p:txBody>
-      </p:sp>
-      <p:sp>
-        <p:nvSpPr>
-          <p:cNvPr id="4" name="Text 2"/>
-          <p:cNvSpPr/>
-          <p:nvPr/>
-        </p:nvSpPr>
-        <p:spPr>
-          <a:xfrm>
-            <a:off x="365760" y="320040"/>
-            <a:ext cx="6217920" cy="640080"/>
-          </a:xfrm>
-          <a:prstGeom prst="rect">
-            <a:avLst/>
-          </a:prstGeom>
-          <a:noFill/>
-          <a:ln/>
-        </p:spPr>
-        <p:txBody>
-          <a:bodyPr wrap="square" lIns="0" tIns="0" rIns="0" bIns="0" rtlCol="0" anchor="ctr"/>
-          <a:lstStyle/>
-          <a:p>
-            <a:pPr indent="0" marL="0">
-              <a:buNone/>
-            </a:pPr>
-            <a:r>
-              <a:rPr lang="en-US" sz="2800" b="1" dirty="0">
-                <a:solidFill>
-                  <a:srgbClr val="1E2761"/>
-                </a:solidFill>
-                <a:latin typeface="Calibri" pitchFamily="34" charset="0"/>
-                <a:ea typeface="Calibri" pitchFamily="34" charset="-122"/>
-                <a:cs typeface="Calibri" pitchFamily="34" charset="-120"/>
-              </a:rPr>
-              <a:t>When is an agent the right answer?</a:t>
-            </a:r>
-            <a:endParaRPr lang="en-US" sz="2800" dirty="0"/>
-          </a:p>
-        </p:txBody>
-      </p:sp>
-      <p:sp>
-        <p:nvSpPr>
-          <p:cNvPr id="5" name="Text 3"/>
-          <p:cNvSpPr/>
-          <p:nvPr/>
-        </p:nvSpPr>
-        <p:spPr>
-          <a:xfrm>
-            <a:off x="365760" y="1097280"/>
-            <a:ext cx="8412480" cy="365760"/>
-          </a:xfrm>
-          <a:prstGeom prst="rect">
-            <a:avLst/>
-          </a:prstGeom>
-          <a:noFill/>
-          <a:ln/>
-        </p:spPr>
-        <p:txBody>
-          <a:bodyPr wrap="square" lIns="0" tIns="0" rIns="0" bIns="0" rtlCol="0" anchor="ctr"/>
-          <a:lstStyle/>
-          <a:p>
-            <a:pPr indent="0" marL="0">
-              <a:buNone/>
-            </a:pPr>
-            <a:r>
-              <a:rPr lang="en-US" sz="1400" i="1" dirty="0">
-                <a:solidFill>
-                  <a:srgbClr val="6B7280"/>
-                </a:solidFill>
-                <a:latin typeface="Calibri" pitchFamily="34" charset="0"/>
-                <a:ea typeface="Calibri" pitchFamily="34" charset="-122"/>
-                <a:cs typeface="Calibri" pitchFamily="34" charset="-120"/>
-              </a:rPr>
-              <a:t>Not every LLM problem needs an agent. Match complexity to need.</a:t>
-            </a:r>
-            <a:endParaRPr lang="en-US" sz="1400" dirty="0"/>
-          </a:p>
-        </p:txBody>
-      </p:sp>
-      <p:sp>
-        <p:nvSpPr>
-          <p:cNvPr id="6" name="Shape 4"/>
-          <p:cNvSpPr/>
-          <p:nvPr/>
-        </p:nvSpPr>
-        <p:spPr>
-          <a:xfrm>
-            <a:off x="640080" y="4160520"/>
-            <a:ext cx="7863840" cy="0"/>
-          </a:xfrm>
-          <a:prstGeom prst="line">
-            <a:avLst/>
-          </a:prstGeom>
-          <a:noFill/>
-          <a:ln w="25400">
-            <a:solidFill>
-              <a:srgbClr val="1E2761"/>
-            </a:solidFill>
-            <a:prstDash val="solid"/>
-            <a:tailEnd type="triangle"/>
-          </a:ln>
-        </p:spPr>
-      </p:sp>
-      <p:sp>
-        <p:nvSpPr>
-          <p:cNvPr id="7" name="Text 5"/>
-          <p:cNvSpPr/>
-          <p:nvPr/>
-        </p:nvSpPr>
-        <p:spPr>
-          <a:xfrm>
-            <a:off x="365760" y="4389120"/>
-            <a:ext cx="8412480" cy="320040"/>
-          </a:xfrm>
-          <a:prstGeom prst="rect">
-            <a:avLst/>
-          </a:prstGeom>
-          <a:noFill/>
-          <a:ln/>
-        </p:spPr>
-        <p:txBody>
-          <a:bodyPr wrap="square" lIns="0" tIns="0" rIns="0" bIns="0" rtlCol="0" anchor="ctr"/>
-          <a:lstStyle/>
-          <a:p>
-            <a:pPr algn="ctr" indent="0" marL="0">
-              <a:buNone/>
-            </a:pPr>
-            <a:r>
-              <a:rPr lang="en-US" sz="1200" i="1" dirty="0">
-                <a:solidFill>
-                  <a:srgbClr val="6B7280"/>
-                </a:solidFill>
-                <a:latin typeface="Calibri" pitchFamily="34" charset="0"/>
-                <a:ea typeface="Calibri" pitchFamily="34" charset="-122"/>
-                <a:cs typeface="Calibri" pitchFamily="34" charset="-120"/>
-              </a:rPr>
-              <a:t>Reach for the leftmost pattern that actually solves your problem</a:t>
-            </a:r>
-            <a:endParaRPr lang="en-US" sz="1200" dirty="0"/>
-          </a:p>
-        </p:txBody>
-      </p:sp>
-      <p:sp>
-        <p:nvSpPr>
-          <p:cNvPr id="8" name="Shape 6"/>
-          <p:cNvSpPr/>
-          <p:nvPr/>
-        </p:nvSpPr>
-        <p:spPr>
-          <a:xfrm>
-            <a:off x="365760" y="1737360"/>
-            <a:ext cx="2651760" cy="2286000"/>
-          </a:xfrm>
-          <a:prstGeom prst="rect">
-            <a:avLst/>
-          </a:prstGeom>
-          <a:solidFill>
-            <a:srgbClr val="FFFFFF"/>
-          </a:solidFill>
-          <a:ln w="12700">
-            <a:solidFill>
-              <a:srgbClr val="1E2761"/>
-            </a:solidFill>
-            <a:prstDash val="solid"/>
-          </a:ln>
-        </p:spPr>
-      </p:sp>
-      <p:sp>
-        <p:nvSpPr>
-          <p:cNvPr id="9" name="Text 7"/>
-          <p:cNvSpPr/>
-          <p:nvPr/>
-        </p:nvSpPr>
-        <p:spPr>
-          <a:xfrm>
-            <a:off x="502920" y="1874520"/>
-            <a:ext cx="2377440" cy="457200"/>
-          </a:xfrm>
-          <a:prstGeom prst="rect">
-            <a:avLst/>
-          </a:prstGeom>
-          <a:noFill/>
-          <a:ln/>
-        </p:spPr>
-        <p:txBody>
-          <a:bodyPr wrap="square" lIns="0" tIns="0" rIns="0" bIns="0" rtlCol="0" anchor="ctr"/>
-          <a:lstStyle/>
-          <a:p>
-            <a:pPr algn="ctr" indent="0" marL="0">
-              <a:buNone/>
-            </a:pPr>
-            <a:r>
-              <a:rPr lang="en-US" sz="1600" b="1" dirty="0">
-                <a:solidFill>
-                  <a:srgbClr val="1E2761"/>
-                </a:solidFill>
-                <a:latin typeface="Calibri" pitchFamily="34" charset="0"/>
-                <a:ea typeface="Calibri" pitchFamily="34" charset="-122"/>
-                <a:cs typeface="Calibri" pitchFamily="34" charset="-120"/>
-              </a:rPr>
-              <a:t>Direct LLM call</a:t>
-            </a:r>
-            <a:endParaRPr lang="en-US" sz="1600" dirty="0"/>
-          </a:p>
-        </p:txBody>
-      </p:sp>
-      <p:sp>
-        <p:nvSpPr>
-          <p:cNvPr id="10" name="Text 8"/>
-          <p:cNvSpPr/>
-          <p:nvPr/>
-        </p:nvSpPr>
-        <p:spPr>
-          <a:xfrm>
-            <a:off x="502920" y="2423160"/>
-            <a:ext cx="2377440" cy="822960"/>
-          </a:xfrm>
-          <a:prstGeom prst="rect">
-            <a:avLst/>
-          </a:prstGeom>
-          <a:noFill/>
-          <a:ln/>
-        </p:spPr>
-        <p:txBody>
-          <a:bodyPr wrap="square" lIns="0" tIns="0" rIns="0" bIns="0" rtlCol="0" anchor="t"/>
-          <a:lstStyle/>
-          <a:p>
-            <a:pPr algn="ctr" indent="0" marL="0">
-              <a:buNone/>
-            </a:pPr>
-            <a:r>
-              <a:rPr lang="en-US" sz="1200" i="1" dirty="0">
-                <a:solidFill>
-                  <a:srgbClr val="212121"/>
-                </a:solidFill>
-                <a:latin typeface="Calibri" pitchFamily="34" charset="0"/>
-                <a:ea typeface="Calibri" pitchFamily="34" charset="-122"/>
-                <a:cs typeface="Calibri" pitchFamily="34" charset="-120"/>
-              </a:rPr>
-              <a:t>"Summarize this document."</a:t>
-            </a:r>
-            <a:endParaRPr lang="en-US" sz="1200" dirty="0"/>
-          </a:p>
-        </p:txBody>
-      </p:sp>
-      <p:sp>
-        <p:nvSpPr>
-          <p:cNvPr id="11" name="Text 9"/>
-          <p:cNvSpPr/>
-          <p:nvPr/>
-        </p:nvSpPr>
-        <p:spPr>
-          <a:xfrm>
-            <a:off x="502920" y="3337560"/>
-            <a:ext cx="2377440" cy="640080"/>
-          </a:xfrm>
-          <a:prstGeom prst="rect">
-            <a:avLst/>
-          </a:prstGeom>
-          <a:noFill/>
-          <a:ln/>
-        </p:spPr>
-        <p:txBody>
-          <a:bodyPr wrap="square" lIns="0" tIns="0" rIns="0" bIns="0" rtlCol="0" anchor="t"/>
-          <a:lstStyle/>
-          <a:p>
-            <a:pPr algn="ctr" indent="0" marL="0">
-              <a:buNone/>
-            </a:pPr>
-            <a:r>
-              <a:rPr lang="en-US" sz="1100" dirty="0">
-                <a:solidFill>
-                  <a:srgbClr val="6B7280"/>
-                </a:solidFill>
-                <a:latin typeface="Calibri" pitchFamily="34" charset="0"/>
-                <a:ea typeface="Calibri" pitchFamily="34" charset="-122"/>
-                <a:cs typeface="Calibri" pitchFamily="34" charset="-120"/>
-              </a:rPr>
-              <a:t>No tools · no iteration · cheap · easy to eval</a:t>
-            </a:r>
-            <a:endParaRPr lang="en-US" sz="1100" dirty="0"/>
-          </a:p>
-        </p:txBody>
-      </p:sp>
-      <p:sp>
-        <p:nvSpPr>
-          <p:cNvPr id="12" name="Shape 10"/>
-          <p:cNvSpPr/>
-          <p:nvPr/>
-        </p:nvSpPr>
-        <p:spPr>
-          <a:xfrm>
-            <a:off x="3246120" y="1737360"/>
-            <a:ext cx="2651760" cy="2286000"/>
-          </a:xfrm>
-          <a:prstGeom prst="rect">
-            <a:avLst/>
-          </a:prstGeom>
-          <a:solidFill>
-            <a:srgbClr val="FFFFFF"/>
-          </a:solidFill>
-          <a:ln w="12700">
-            <a:solidFill>
-              <a:srgbClr val="1E2761"/>
-            </a:solidFill>
-            <a:prstDash val="solid"/>
-          </a:ln>
-        </p:spPr>
-      </p:sp>
-      <p:sp>
-        <p:nvSpPr>
-          <p:cNvPr id="13" name="Text 11"/>
-          <p:cNvSpPr/>
-          <p:nvPr/>
-        </p:nvSpPr>
-        <p:spPr>
-          <a:xfrm>
-            <a:off x="3383280" y="1874520"/>
-            <a:ext cx="2377440" cy="457200"/>
-          </a:xfrm>
-          <a:prstGeom prst="rect">
-            <a:avLst/>
-          </a:prstGeom>
-          <a:noFill/>
-          <a:ln/>
-        </p:spPr>
-        <p:txBody>
-          <a:bodyPr wrap="square" lIns="0" tIns="0" rIns="0" bIns="0" rtlCol="0" anchor="ctr"/>
-          <a:lstStyle/>
-          <a:p>
-            <a:pPr algn="ctr" indent="0" marL="0">
-              <a:buNone/>
-            </a:pPr>
-            <a:r>
-              <a:rPr lang="en-US" sz="1600" b="1" dirty="0">
-                <a:solidFill>
-                  <a:srgbClr val="1E2761"/>
-                </a:solidFill>
-                <a:latin typeface="Calibri" pitchFamily="34" charset="0"/>
-                <a:ea typeface="Calibri" pitchFamily="34" charset="-122"/>
-                <a:cs typeface="Calibri" pitchFamily="34" charset="-120"/>
-              </a:rPr>
-              <a:t>Single agent with tools</a:t>
-            </a:r>
-            <a:endParaRPr lang="en-US" sz="1600" dirty="0"/>
-          </a:p>
-        </p:txBody>
-      </p:sp>
-      <p:sp>
-        <p:nvSpPr>
-          <p:cNvPr id="14" name="Text 12"/>
-          <p:cNvSpPr/>
-          <p:nvPr/>
-        </p:nvSpPr>
-        <p:spPr>
-          <a:xfrm>
-            <a:off x="3383280" y="2423160"/>
-            <a:ext cx="2377440" cy="822960"/>
-          </a:xfrm>
-          <a:prstGeom prst="rect">
-            <a:avLst/>
-          </a:prstGeom>
-          <a:noFill/>
-          <a:ln/>
-        </p:spPr>
-        <p:txBody>
-          <a:bodyPr wrap="square" lIns="0" tIns="0" rIns="0" bIns="0" rtlCol="0" anchor="t"/>
-          <a:lstStyle/>
-          <a:p>
-            <a:pPr algn="ctr" indent="0" marL="0">
-              <a:buNone/>
-            </a:pPr>
-            <a:r>
-              <a:rPr lang="en-US" sz="1200" i="1" dirty="0">
-                <a:solidFill>
-                  <a:srgbClr val="212121"/>
-                </a:solidFill>
-                <a:latin typeface="Calibri" pitchFamily="34" charset="0"/>
-                <a:ea typeface="Calibri" pitchFamily="34" charset="-122"/>
-                <a:cs typeface="Calibri" pitchFamily="34" charset="-120"/>
-              </a:rPr>
-              <a:t>"Answer with sources; open a ticket if needed."</a:t>
-            </a:r>
-            <a:endParaRPr lang="en-US" sz="1200" dirty="0"/>
-          </a:p>
-        </p:txBody>
-      </p:sp>
-      <p:sp>
-        <p:nvSpPr>
-          <p:cNvPr id="15" name="Text 13"/>
-          <p:cNvSpPr/>
-          <p:nvPr/>
-        </p:nvSpPr>
-        <p:spPr>
-          <a:xfrm>
-            <a:off x="3383280" y="3337560"/>
-            <a:ext cx="2377440" cy="640080"/>
-          </a:xfrm>
-          <a:prstGeom prst="rect">
-            <a:avLst/>
-          </a:prstGeom>
-          <a:noFill/>
-          <a:ln/>
-        </p:spPr>
-        <p:txBody>
-          <a:bodyPr wrap="square" lIns="0" tIns="0" rIns="0" bIns="0" rtlCol="0" anchor="t"/>
-          <a:lstStyle/>
-          <a:p>
-            <a:pPr algn="ctr" indent="0" marL="0">
-              <a:buNone/>
-            </a:pPr>
-            <a:r>
-              <a:rPr lang="en-US" sz="1100" dirty="0">
-                <a:solidFill>
-                  <a:srgbClr val="6B7280"/>
-                </a:solidFill>
-                <a:latin typeface="Calibri" pitchFamily="34" charset="0"/>
-                <a:ea typeface="Calibri" pitchFamily="34" charset="-122"/>
-                <a:cs typeface="Calibri" pitchFamily="34" charset="-120"/>
-              </a:rPr>
-              <a:t>Iteration · tool calls · harder to eval</a:t>
-            </a:r>
-            <a:endParaRPr lang="en-US" sz="1100" dirty="0"/>
-          </a:p>
-        </p:txBody>
-      </p:sp>
-      <p:sp>
-        <p:nvSpPr>
-          <p:cNvPr id="16" name="Shape 14"/>
-          <p:cNvSpPr/>
-          <p:nvPr/>
-        </p:nvSpPr>
-        <p:spPr>
-          <a:xfrm>
-            <a:off x="6126480" y="1737360"/>
-            <a:ext cx="2651760" cy="2286000"/>
-          </a:xfrm>
-          <a:prstGeom prst="rect">
-            <a:avLst/>
-          </a:prstGeom>
-          <a:solidFill>
-            <a:srgbClr val="FFFFFF"/>
-          </a:solidFill>
-          <a:ln w="12700">
-            <a:solidFill>
-              <a:srgbClr val="1E2761"/>
-            </a:solidFill>
-            <a:prstDash val="solid"/>
-          </a:ln>
-        </p:spPr>
-      </p:sp>
-      <p:sp>
-        <p:nvSpPr>
-          <p:cNvPr id="17" name="Text 15"/>
-          <p:cNvSpPr/>
-          <p:nvPr/>
-        </p:nvSpPr>
-        <p:spPr>
-          <a:xfrm>
-            <a:off x="6263640" y="1874520"/>
-            <a:ext cx="2377440" cy="457200"/>
-          </a:xfrm>
-          <a:prstGeom prst="rect">
-            <a:avLst/>
-          </a:prstGeom>
-          <a:noFill/>
-          <a:ln/>
-        </p:spPr>
-        <p:txBody>
-          <a:bodyPr wrap="square" lIns="0" tIns="0" rIns="0" bIns="0" rtlCol="0" anchor="ctr"/>
-          <a:lstStyle/>
-          <a:p>
-            <a:pPr algn="ctr" indent="0" marL="0">
-              <a:buNone/>
-            </a:pPr>
-            <a:r>
-              <a:rPr lang="en-US" sz="1600" b="1" dirty="0">
-                <a:solidFill>
-                  <a:srgbClr val="1E2761"/>
-                </a:solidFill>
-                <a:latin typeface="Calibri" pitchFamily="34" charset="0"/>
-                <a:ea typeface="Calibri" pitchFamily="34" charset="-122"/>
-                <a:cs typeface="Calibri" pitchFamily="34" charset="-120"/>
-              </a:rPr>
-              <a:t>Multi-agent workflow</a:t>
-            </a:r>
-            <a:endParaRPr lang="en-US" sz="1600" dirty="0"/>
-          </a:p>
-        </p:txBody>
-      </p:sp>
-      <p:sp>
-        <p:nvSpPr>
-          <p:cNvPr id="18" name="Text 16"/>
-          <p:cNvSpPr/>
-          <p:nvPr/>
-        </p:nvSpPr>
-        <p:spPr>
-          <a:xfrm>
-            <a:off x="6263640" y="2423160"/>
-            <a:ext cx="2377440" cy="822960"/>
-          </a:xfrm>
-          <a:prstGeom prst="rect">
-            <a:avLst/>
-          </a:prstGeom>
-          <a:noFill/>
-          <a:ln/>
-        </p:spPr>
-        <p:txBody>
-          <a:bodyPr wrap="square" lIns="0" tIns="0" rIns="0" bIns="0" rtlCol="0" anchor="t"/>
-          <a:lstStyle/>
-          <a:p>
-            <a:pPr algn="ctr" indent="0" marL="0">
-              <a:buNone/>
-            </a:pPr>
-            <a:r>
-              <a:rPr lang="en-US" sz="1200" i="1" dirty="0">
-                <a:solidFill>
-                  <a:srgbClr val="212121"/>
-                </a:solidFill>
-                <a:latin typeface="Calibri" pitchFamily="34" charset="0"/>
-                <a:ea typeface="Calibri" pitchFamily="34" charset="-122"/>
-                <a:cs typeface="Calibri" pitchFamily="34" charset="-120"/>
-              </a:rPr>
-              <a:t>"Plan → retrieve → verify → act."</a:t>
-            </a:r>
-            <a:endParaRPr lang="en-US" sz="1200" dirty="0"/>
-          </a:p>
-        </p:txBody>
-      </p:sp>
-      <p:sp>
-        <p:nvSpPr>
-          <p:cNvPr id="19" name="Text 17"/>
-          <p:cNvSpPr/>
-          <p:nvPr/>
-        </p:nvSpPr>
-        <p:spPr>
-          <a:xfrm>
-            <a:off x="6263640" y="3337560"/>
-            <a:ext cx="2377440" cy="640080"/>
-          </a:xfrm>
-          <a:prstGeom prst="rect">
-            <a:avLst/>
-          </a:prstGeom>
-          <a:noFill/>
-          <a:ln/>
-        </p:spPr>
-        <p:txBody>
-          <a:bodyPr wrap="square" lIns="0" tIns="0" rIns="0" bIns="0" rtlCol="0" anchor="t"/>
-          <a:lstStyle/>
-          <a:p>
-            <a:pPr algn="ctr" indent="0" marL="0">
-              <a:buNone/>
-            </a:pPr>
-            <a:r>
-              <a:rPr lang="en-US" sz="1100" dirty="0">
-                <a:solidFill>
-                  <a:srgbClr val="6B7280"/>
-                </a:solidFill>
-                <a:latin typeface="Calibri" pitchFamily="34" charset="0"/>
-                <a:ea typeface="Calibri" pitchFamily="34" charset="-122"/>
-                <a:cs typeface="Calibri" pitchFamily="34" charset="-120"/>
-              </a:rPr>
-              <a:t>Multiple roles · costly · new failure modes</a:t>
-            </a:r>
-            <a:endParaRPr lang="en-US" sz="1100" dirty="0"/>
-          </a:p>
-        </p:txBody>
-      </p:sp>
-    </p:spTree>
-  </p:cSld>
-  <p:clrMapOvr>
-    <a:masterClrMapping/>
-  </p:clrMapOvr>
-</p:sld>
-</file>
-
 <file path=ppt/slides/slide7.xml><?xml version="1.0" encoding="utf-8"?>
 <p:sld xmlns:a="http://schemas.openxmlformats.org/drawingml/2006/main" xmlns:r="http://schemas.openxmlformats.org/officeDocument/2006/relationships" xmlns:p="http://schemas.openxmlformats.org/presentationml/2006/main">
   <p:cSld name="Slide 7">
@@ -6594,7 +7747,7 @@
                 <a:ea typeface="Calibri" pitchFamily="34" charset="-122"/>
                 <a:cs typeface="Calibri" pitchFamily="34" charset="-120"/>
               </a:rPr>
-              <a:t>What Foundry gives you</a:t>
+              <a:t>Same three ingredients across every surface</a:t>
             </a:r>
             <a:endParaRPr lang="en-US" sz="2800" dirty="0"/>
           </a:p>
@@ -6602,14 +7755,39 @@
       </p:sp>
       <p:sp>
         <p:nvSpPr>
-          <p:cNvPr id="5" name="Text 3"/>
-          <p:cNvSpPr/>
-          <p:nvPr/>
-        </p:nvSpPr>
-        <p:spPr>
-          <a:xfrm>
-            <a:off x="365760" y="1097280"/>
-            <a:ext cx="8412480" cy="3749040"/>
+          <p:cNvPr id="5" name="Shape 3"/>
+          <p:cNvSpPr/>
+          <p:nvPr/>
+        </p:nvSpPr>
+        <p:spPr>
+          <a:xfrm>
+            <a:off x="365760" y="1188720"/>
+            <a:ext cx="2651760" cy="1280160"/>
+          </a:xfrm>
+          <a:prstGeom prst="rect">
+            <a:avLst/>
+          </a:prstGeom>
+          <a:solidFill>
+            <a:srgbClr val="FFFFFF"/>
+          </a:solidFill>
+          <a:ln w="12700">
+            <a:solidFill>
+              <a:srgbClr val="1E2761"/>
+            </a:solidFill>
+            <a:prstDash val="solid"/>
+          </a:ln>
+        </p:spPr>
+      </p:sp>
+      <p:sp>
+        <p:nvSpPr>
+          <p:cNvPr id="6" name="Text 4"/>
+          <p:cNvSpPr/>
+          <p:nvPr/>
+        </p:nvSpPr>
+        <p:spPr>
+          <a:xfrm>
+            <a:off x="457200" y="1325880"/>
+            <a:ext cx="2468880" cy="457200"/>
           </a:xfrm>
           <a:prstGeom prst="rect">
             <a:avLst/>
@@ -6618,154 +7796,530 @@
           <a:ln/>
         </p:spPr>
         <p:txBody>
+          <a:bodyPr wrap="square" lIns="0" tIns="0" rIns="0" bIns="0" rtlCol="0" anchor="ctr"/>
+          <a:lstStyle/>
+          <a:p>
+            <a:pPr algn="ctr" indent="0" marL="0">
+              <a:buNone/>
+            </a:pPr>
+            <a:r>
+              <a:rPr lang="en-US" sz="1800" b="1" dirty="0">
+                <a:solidFill>
+                  <a:srgbClr val="1E2761"/>
+                </a:solidFill>
+                <a:latin typeface="Calibri" pitchFamily="34" charset="0"/>
+                <a:ea typeface="Calibri" pitchFamily="34" charset="-122"/>
+                <a:cs typeface="Calibri" pitchFamily="34" charset="-120"/>
+              </a:rPr>
+              <a:t>Copilot Studio</a:t>
+            </a:r>
+            <a:endParaRPr lang="en-US" sz="1800" dirty="0"/>
+          </a:p>
+        </p:txBody>
+      </p:sp>
+      <p:sp>
+        <p:nvSpPr>
+          <p:cNvPr id="7" name="Text 5"/>
+          <p:cNvSpPr/>
+          <p:nvPr/>
+        </p:nvSpPr>
+        <p:spPr>
+          <a:xfrm>
+            <a:off x="457200" y="1874520"/>
+            <a:ext cx="2468880" cy="365760"/>
+          </a:xfrm>
+          <a:prstGeom prst="rect">
+            <a:avLst/>
+          </a:prstGeom>
+          <a:noFill/>
+          <a:ln/>
+        </p:spPr>
+        <p:txBody>
+          <a:bodyPr wrap="square" lIns="0" tIns="0" rIns="0" bIns="0" rtlCol="0" anchor="ctr"/>
+          <a:lstStyle/>
+          <a:p>
+            <a:pPr algn="ctr" indent="0" marL="0">
+              <a:buNone/>
+            </a:pPr>
+            <a:r>
+              <a:rPr lang="en-US" sz="1300" dirty="0">
+                <a:solidFill>
+                  <a:srgbClr val="6B7280"/>
+                </a:solidFill>
+                <a:latin typeface="Calibri" pitchFamily="34" charset="0"/>
+                <a:ea typeface="Calibri" pitchFamily="34" charset="-122"/>
+                <a:cs typeface="Calibri" pitchFamily="34" charset="-120"/>
+              </a:rPr>
+              <a:t>SaaS · low-code</a:t>
+            </a:r>
+            <a:endParaRPr lang="en-US" sz="1300" dirty="0"/>
+          </a:p>
+        </p:txBody>
+      </p:sp>
+      <p:sp>
+        <p:nvSpPr>
+          <p:cNvPr id="8" name="Shape 6"/>
+          <p:cNvSpPr/>
+          <p:nvPr/>
+        </p:nvSpPr>
+        <p:spPr>
+          <a:xfrm>
+            <a:off x="3246120" y="1188720"/>
+            <a:ext cx="2651760" cy="1280160"/>
+          </a:xfrm>
+          <a:prstGeom prst="rect">
+            <a:avLst/>
+          </a:prstGeom>
+          <a:solidFill>
+            <a:srgbClr val="FFFFFF"/>
+          </a:solidFill>
+          <a:ln w="12700">
+            <a:solidFill>
+              <a:srgbClr val="1E2761"/>
+            </a:solidFill>
+            <a:prstDash val="solid"/>
+          </a:ln>
+        </p:spPr>
+      </p:sp>
+      <p:sp>
+        <p:nvSpPr>
+          <p:cNvPr id="9" name="Text 7"/>
+          <p:cNvSpPr/>
+          <p:nvPr/>
+        </p:nvSpPr>
+        <p:spPr>
+          <a:xfrm>
+            <a:off x="3337560" y="1325880"/>
+            <a:ext cx="2468880" cy="457200"/>
+          </a:xfrm>
+          <a:prstGeom prst="rect">
+            <a:avLst/>
+          </a:prstGeom>
+          <a:noFill/>
+          <a:ln/>
+        </p:spPr>
+        <p:txBody>
+          <a:bodyPr wrap="square" lIns="0" tIns="0" rIns="0" bIns="0" rtlCol="0" anchor="ctr"/>
+          <a:lstStyle/>
+          <a:p>
+            <a:pPr algn="ctr" indent="0" marL="0">
+              <a:buNone/>
+            </a:pPr>
+            <a:r>
+              <a:rPr lang="en-US" sz="1800" b="1" dirty="0">
+                <a:solidFill>
+                  <a:srgbClr val="1E2761"/>
+                </a:solidFill>
+                <a:latin typeface="Calibri" pitchFamily="34" charset="0"/>
+                <a:ea typeface="Calibri" pitchFamily="34" charset="-122"/>
+                <a:cs typeface="Calibri" pitchFamily="34" charset="-120"/>
+              </a:rPr>
+              <a:t>Foundry Agent Service</a:t>
+            </a:r>
+            <a:endParaRPr lang="en-US" sz="1800" dirty="0"/>
+          </a:p>
+        </p:txBody>
+      </p:sp>
+      <p:sp>
+        <p:nvSpPr>
+          <p:cNvPr id="10" name="Text 8"/>
+          <p:cNvSpPr/>
+          <p:nvPr/>
+        </p:nvSpPr>
+        <p:spPr>
+          <a:xfrm>
+            <a:off x="3337560" y="1874520"/>
+            <a:ext cx="2468880" cy="365760"/>
+          </a:xfrm>
+          <a:prstGeom prst="rect">
+            <a:avLst/>
+          </a:prstGeom>
+          <a:noFill/>
+          <a:ln/>
+        </p:spPr>
+        <p:txBody>
+          <a:bodyPr wrap="square" lIns="0" tIns="0" rIns="0" bIns="0" rtlCol="0" anchor="ctr"/>
+          <a:lstStyle/>
+          <a:p>
+            <a:pPr algn="ctr" indent="0" marL="0">
+              <a:buNone/>
+            </a:pPr>
+            <a:r>
+              <a:rPr lang="en-US" sz="1300" dirty="0">
+                <a:solidFill>
+                  <a:srgbClr val="6B7280"/>
+                </a:solidFill>
+                <a:latin typeface="Calibri" pitchFamily="34" charset="0"/>
+                <a:ea typeface="Calibri" pitchFamily="34" charset="-122"/>
+                <a:cs typeface="Calibri" pitchFamily="34" charset="-120"/>
+              </a:rPr>
+              <a:t>PaaS · managed runtime</a:t>
+            </a:r>
+            <a:endParaRPr lang="en-US" sz="1300" dirty="0"/>
+          </a:p>
+        </p:txBody>
+      </p:sp>
+      <p:sp>
+        <p:nvSpPr>
+          <p:cNvPr id="11" name="Shape 9"/>
+          <p:cNvSpPr/>
+          <p:nvPr/>
+        </p:nvSpPr>
+        <p:spPr>
+          <a:xfrm>
+            <a:off x="6126480" y="1188720"/>
+            <a:ext cx="2651760" cy="1280160"/>
+          </a:xfrm>
+          <a:prstGeom prst="rect">
+            <a:avLst/>
+          </a:prstGeom>
+          <a:solidFill>
+            <a:srgbClr val="FFFFFF"/>
+          </a:solidFill>
+          <a:ln w="12700">
+            <a:solidFill>
+              <a:srgbClr val="1E2761"/>
+            </a:solidFill>
+            <a:prstDash val="solid"/>
+          </a:ln>
+        </p:spPr>
+      </p:sp>
+      <p:sp>
+        <p:nvSpPr>
+          <p:cNvPr id="12" name="Text 10"/>
+          <p:cNvSpPr/>
+          <p:nvPr/>
+        </p:nvSpPr>
+        <p:spPr>
+          <a:xfrm>
+            <a:off x="6217920" y="1325880"/>
+            <a:ext cx="2468880" cy="457200"/>
+          </a:xfrm>
+          <a:prstGeom prst="rect">
+            <a:avLst/>
+          </a:prstGeom>
+          <a:noFill/>
+          <a:ln/>
+        </p:spPr>
+        <p:txBody>
+          <a:bodyPr wrap="square" lIns="0" tIns="0" rIns="0" bIns="0" rtlCol="0" anchor="ctr"/>
+          <a:lstStyle/>
+          <a:p>
+            <a:pPr algn="ctr" indent="0" marL="0">
+              <a:buNone/>
+            </a:pPr>
+            <a:r>
+              <a:rPr lang="en-US" sz="1800" b="1" dirty="0">
+                <a:solidFill>
+                  <a:srgbClr val="1E2761"/>
+                </a:solidFill>
+                <a:latin typeface="Calibri" pitchFamily="34" charset="0"/>
+                <a:ea typeface="Calibri" pitchFamily="34" charset="-122"/>
+                <a:cs typeface="Calibri" pitchFamily="34" charset="-120"/>
+              </a:rPr>
+              <a:t>MAF + containers</a:t>
+            </a:r>
+            <a:endParaRPr lang="en-US" sz="1800" dirty="0"/>
+          </a:p>
+        </p:txBody>
+      </p:sp>
+      <p:sp>
+        <p:nvSpPr>
+          <p:cNvPr id="13" name="Text 11"/>
+          <p:cNvSpPr/>
+          <p:nvPr/>
+        </p:nvSpPr>
+        <p:spPr>
+          <a:xfrm>
+            <a:off x="6217920" y="1874520"/>
+            <a:ext cx="2468880" cy="365760"/>
+          </a:xfrm>
+          <a:prstGeom prst="rect">
+            <a:avLst/>
+          </a:prstGeom>
+          <a:noFill/>
+          <a:ln/>
+        </p:spPr>
+        <p:txBody>
+          <a:bodyPr wrap="square" lIns="0" tIns="0" rIns="0" bIns="0" rtlCol="0" anchor="ctr"/>
+          <a:lstStyle/>
+          <a:p>
+            <a:pPr algn="ctr" indent="0" marL="0">
+              <a:buNone/>
+            </a:pPr>
+            <a:r>
+              <a:rPr lang="en-US" sz="1300" dirty="0">
+                <a:solidFill>
+                  <a:srgbClr val="6B7280"/>
+                </a:solidFill>
+                <a:latin typeface="Calibri" pitchFamily="34" charset="0"/>
+                <a:ea typeface="Calibri" pitchFamily="34" charset="-122"/>
+                <a:cs typeface="Calibri" pitchFamily="34" charset="-120"/>
+              </a:rPr>
+              <a:t>IaaS · you own everything</a:t>
+            </a:r>
+            <a:endParaRPr lang="en-US" sz="1300" dirty="0"/>
+          </a:p>
+        </p:txBody>
+      </p:sp>
+      <p:sp>
+        <p:nvSpPr>
+          <p:cNvPr id="14" name="Text 12"/>
+          <p:cNvSpPr/>
+          <p:nvPr/>
+        </p:nvSpPr>
+        <p:spPr>
+          <a:xfrm>
+            <a:off x="365760" y="2788920"/>
+            <a:ext cx="8412480" cy="320040"/>
+          </a:xfrm>
+          <a:prstGeom prst="rect">
+            <a:avLst/>
+          </a:prstGeom>
+          <a:noFill/>
+          <a:ln/>
+        </p:spPr>
+        <p:txBody>
+          <a:bodyPr wrap="square" lIns="0" tIns="0" rIns="0" bIns="0" rtlCol="0" anchor="ctr"/>
+          <a:lstStyle/>
+          <a:p>
+            <a:pPr algn="ctr" indent="0" marL="0">
+              <a:buNone/>
+            </a:pPr>
+            <a:r>
+              <a:rPr lang="en-US" sz="1400" i="1" dirty="0">
+                <a:solidFill>
+                  <a:srgbClr val="6B7280"/>
+                </a:solidFill>
+                <a:latin typeface="Calibri" pitchFamily="34" charset="0"/>
+                <a:ea typeface="Calibri" pitchFamily="34" charset="-122"/>
+                <a:cs typeface="Calibri" pitchFamily="34" charset="-120"/>
+              </a:rPr>
+              <a:t>All three need:</a:t>
+            </a:r>
+            <a:endParaRPr lang="en-US" sz="1400" dirty="0"/>
+          </a:p>
+        </p:txBody>
+      </p:sp>
+      <p:sp>
+        <p:nvSpPr>
+          <p:cNvPr id="15" name="Shape 13"/>
+          <p:cNvSpPr/>
+          <p:nvPr/>
+        </p:nvSpPr>
+        <p:spPr>
+          <a:xfrm>
+            <a:off x="685800" y="3200400"/>
+            <a:ext cx="2377440" cy="731520"/>
+          </a:xfrm>
+          <a:prstGeom prst="roundRect">
+            <a:avLst>
+              <a:gd name="adj" fmla="val 18750"/>
+            </a:avLst>
+          </a:prstGeom>
+          <a:solidFill>
+            <a:srgbClr val="1E2761"/>
+          </a:solidFill>
+          <a:ln/>
+        </p:spPr>
+      </p:sp>
+      <p:sp>
+        <p:nvSpPr>
+          <p:cNvPr id="16" name="Text 14"/>
+          <p:cNvSpPr/>
+          <p:nvPr/>
+        </p:nvSpPr>
+        <p:spPr>
+          <a:xfrm>
+            <a:off x="685800" y="3200400"/>
+            <a:ext cx="2377440" cy="731520"/>
+          </a:xfrm>
+          <a:prstGeom prst="rect">
+            <a:avLst/>
+          </a:prstGeom>
+          <a:noFill/>
+          <a:ln/>
+        </p:spPr>
+        <p:txBody>
+          <a:bodyPr wrap="square" lIns="0" tIns="0" rIns="0" bIns="0" rtlCol="0" anchor="ctr"/>
+          <a:lstStyle/>
+          <a:p>
+            <a:pPr algn="ctr" indent="0" marL="0">
+              <a:buNone/>
+            </a:pPr>
+            <a:r>
+              <a:rPr lang="en-US" sz="2200" b="1" dirty="0">
+                <a:solidFill>
+                  <a:srgbClr val="FFFFFF"/>
+                </a:solidFill>
+                <a:latin typeface="Calibri" pitchFamily="34" charset="0"/>
+                <a:ea typeface="Calibri" pitchFamily="34" charset="-122"/>
+                <a:cs typeface="Calibri" pitchFamily="34" charset="-120"/>
+              </a:rPr>
+              <a:t>Model</a:t>
+            </a:r>
+            <a:endParaRPr lang="en-US" sz="2200" dirty="0"/>
+          </a:p>
+        </p:txBody>
+      </p:sp>
+      <p:sp>
+        <p:nvSpPr>
+          <p:cNvPr id="17" name="Shape 15"/>
+          <p:cNvSpPr/>
+          <p:nvPr/>
+        </p:nvSpPr>
+        <p:spPr>
+          <a:xfrm>
+            <a:off x="3383280" y="3200400"/>
+            <a:ext cx="2377440" cy="731520"/>
+          </a:xfrm>
+          <a:prstGeom prst="roundRect">
+            <a:avLst>
+              <a:gd name="adj" fmla="val 18750"/>
+            </a:avLst>
+          </a:prstGeom>
+          <a:solidFill>
+            <a:srgbClr val="1E2761"/>
+          </a:solidFill>
+          <a:ln/>
+        </p:spPr>
+      </p:sp>
+      <p:sp>
+        <p:nvSpPr>
+          <p:cNvPr id="18" name="Text 16"/>
+          <p:cNvSpPr/>
+          <p:nvPr/>
+        </p:nvSpPr>
+        <p:spPr>
+          <a:xfrm>
+            <a:off x="3383280" y="3200400"/>
+            <a:ext cx="2377440" cy="731520"/>
+          </a:xfrm>
+          <a:prstGeom prst="rect">
+            <a:avLst/>
+          </a:prstGeom>
+          <a:noFill/>
+          <a:ln/>
+        </p:spPr>
+        <p:txBody>
+          <a:bodyPr wrap="square" lIns="0" tIns="0" rIns="0" bIns="0" rtlCol="0" anchor="ctr"/>
+          <a:lstStyle/>
+          <a:p>
+            <a:pPr algn="ctr" indent="0" marL="0">
+              <a:buNone/>
+            </a:pPr>
+            <a:r>
+              <a:rPr lang="en-US" sz="2200" b="1" dirty="0">
+                <a:solidFill>
+                  <a:srgbClr val="FFFFFF"/>
+                </a:solidFill>
+                <a:latin typeface="Calibri" pitchFamily="34" charset="0"/>
+                <a:ea typeface="Calibri" pitchFamily="34" charset="-122"/>
+                <a:cs typeface="Calibri" pitchFamily="34" charset="-120"/>
+              </a:rPr>
+              <a:t>Instructions</a:t>
+            </a:r>
+            <a:endParaRPr lang="en-US" sz="2200" dirty="0"/>
+          </a:p>
+        </p:txBody>
+      </p:sp>
+      <p:sp>
+        <p:nvSpPr>
+          <p:cNvPr id="19" name="Shape 17"/>
+          <p:cNvSpPr/>
+          <p:nvPr/>
+        </p:nvSpPr>
+        <p:spPr>
+          <a:xfrm>
+            <a:off x="6080760" y="3200400"/>
+            <a:ext cx="2377440" cy="731520"/>
+          </a:xfrm>
+          <a:prstGeom prst="roundRect">
+            <a:avLst>
+              <a:gd name="adj" fmla="val 18750"/>
+            </a:avLst>
+          </a:prstGeom>
+          <a:solidFill>
+            <a:srgbClr val="1E2761"/>
+          </a:solidFill>
+          <a:ln/>
+        </p:spPr>
+      </p:sp>
+      <p:sp>
+        <p:nvSpPr>
+          <p:cNvPr id="20" name="Text 18"/>
+          <p:cNvSpPr/>
+          <p:nvPr/>
+        </p:nvSpPr>
+        <p:spPr>
+          <a:xfrm>
+            <a:off x="6080760" y="3200400"/>
+            <a:ext cx="2377440" cy="731520"/>
+          </a:xfrm>
+          <a:prstGeom prst="rect">
+            <a:avLst/>
+          </a:prstGeom>
+          <a:noFill/>
+          <a:ln/>
+        </p:spPr>
+        <p:txBody>
+          <a:bodyPr wrap="square" lIns="0" tIns="0" rIns="0" bIns="0" rtlCol="0" anchor="ctr"/>
+          <a:lstStyle/>
+          <a:p>
+            <a:pPr algn="ctr" indent="0" marL="0">
+              <a:buNone/>
+            </a:pPr>
+            <a:r>
+              <a:rPr lang="en-US" sz="2200" b="1" dirty="0">
+                <a:solidFill>
+                  <a:srgbClr val="FFFFFF"/>
+                </a:solidFill>
+                <a:latin typeface="Calibri" pitchFamily="34" charset="0"/>
+                <a:ea typeface="Calibri" pitchFamily="34" charset="-122"/>
+                <a:cs typeface="Calibri" pitchFamily="34" charset="-120"/>
+              </a:rPr>
+              <a:t>Tools</a:t>
+            </a:r>
+            <a:endParaRPr lang="en-US" sz="2200" dirty="0"/>
+          </a:p>
+        </p:txBody>
+      </p:sp>
+      <p:sp>
+        <p:nvSpPr>
+          <p:cNvPr id="21" name="Text 19"/>
+          <p:cNvSpPr/>
+          <p:nvPr/>
+        </p:nvSpPr>
+        <p:spPr>
+          <a:xfrm>
+            <a:off x="365760" y="4297680"/>
+            <a:ext cx="8412480" cy="457200"/>
+          </a:xfrm>
+          <a:prstGeom prst="rect">
+            <a:avLst/>
+          </a:prstGeom>
+          <a:noFill/>
+          <a:ln/>
+        </p:spPr>
+        <p:txBody>
           <a:bodyPr wrap="square" rtlCol="0" anchor="ctr"/>
           <a:lstStyle/>
           <a:p>
-            <a:pPr marL="342900" indent="-342900">
-              <a:spcAft>
-                <a:spcPts val="600"/>
-              </a:spcAft>
-              <a:buSzPct val="100000"/>
-              <a:buChar char="•"/>
-            </a:pPr>
-            <a:r>
-              <a:rPr lang="en-US" sz="1500" dirty="0">
-                <a:solidFill>
-                  <a:srgbClr val="212121"/>
-                </a:solidFill>
-                <a:latin typeface="Calibri" pitchFamily="34" charset="0"/>
-                <a:ea typeface="Calibri" pitchFamily="34" charset="-122"/>
-                <a:cs typeface="Calibri" pitchFamily="34" charset="-120"/>
-              </a:rPr>
-              <a:t>Model deployments (frontier and open models)</a:t>
-            </a:r>
-            <a:endParaRPr lang="en-US" sz="1500" dirty="0"/>
-          </a:p>
-          <a:p>
-            <a:pPr marL="342900" indent="-342900">
-              <a:spcAft>
-                <a:spcPts val="600"/>
-              </a:spcAft>
-              <a:buSzPct val="100000"/>
-              <a:buChar char="•"/>
-            </a:pPr>
-            <a:r>
-              <a:rPr lang="en-US" sz="1500" dirty="0">
-                <a:solidFill>
-                  <a:srgbClr val="212121"/>
-                </a:solidFill>
-                <a:latin typeface="Calibri" pitchFamily="34" charset="0"/>
-                <a:ea typeface="Calibri" pitchFamily="34" charset="-122"/>
-                <a:cs typeface="Calibri" pitchFamily="34" charset="-120"/>
-              </a:rPr>
-              <a:t>Playgrounds — chat, agent, evaluation</a:t>
-            </a:r>
-            <a:endParaRPr lang="en-US" sz="1500" dirty="0"/>
-          </a:p>
-          <a:p>
-            <a:pPr marL="342900" indent="-342900">
-              <a:spcAft>
-                <a:spcPts val="600"/>
-              </a:spcAft>
-              <a:buSzPct val="100000"/>
-              <a:buChar char="•"/>
-            </a:pPr>
-            <a:r>
-              <a:rPr lang="en-US" sz="1500" dirty="0">
-                <a:solidFill>
-                  <a:srgbClr val="212121"/>
-                </a:solidFill>
-                <a:latin typeface="Calibri" pitchFamily="34" charset="0"/>
-                <a:ea typeface="Calibri" pitchFamily="34" charset="-122"/>
-                <a:cs typeface="Calibri" pitchFamily="34" charset="-120"/>
-              </a:rPr>
-              <a:t>Foundry Agent Service — runtime for Prompt agents (portal-authored, no code) and Hosted agents (your code, containerized, Foundry-run)</a:t>
-            </a:r>
-            <a:endParaRPr lang="en-US" sz="1500" dirty="0"/>
-          </a:p>
-          <a:p>
-            <a:pPr marL="342900" indent="-342900">
-              <a:spcAft>
-                <a:spcPts val="600"/>
-              </a:spcAft>
-              <a:buSzPct val="100000"/>
-              <a:buChar char="•"/>
-            </a:pPr>
-            <a:r>
-              <a:rPr lang="en-US" sz="1500" dirty="0">
-                <a:solidFill>
-                  <a:srgbClr val="212121"/>
-                </a:solidFill>
-                <a:latin typeface="Calibri" pitchFamily="34" charset="0"/>
-                <a:ea typeface="Calibri" pitchFamily="34" charset="-122"/>
-                <a:cs typeface="Calibri" pitchFamily="34" charset="-120"/>
-              </a:rPr>
-              <a:t>Responses API — the single model + tools entry point; call it from your own code running anywhere</a:t>
-            </a:r>
-            <a:endParaRPr lang="en-US" sz="1500" dirty="0"/>
-          </a:p>
-          <a:p>
-            <a:pPr marL="342900" indent="-342900">
-              <a:spcAft>
-                <a:spcPts val="600"/>
-              </a:spcAft>
-              <a:buSzPct val="100000"/>
-              <a:buChar char="•"/>
-            </a:pPr>
-            <a:r>
-              <a:rPr lang="en-US" sz="1500" dirty="0">
-                <a:solidFill>
-                  <a:srgbClr val="212121"/>
-                </a:solidFill>
-                <a:latin typeface="Calibri" pitchFamily="34" charset="0"/>
-                <a:ea typeface="Calibri" pitchFamily="34" charset="-122"/>
-                <a:cs typeface="Calibri" pitchFamily="34" charset="-120"/>
-              </a:rPr>
-              <a:t>Foundry Toolbox — curated tool/connector catalog, exposed via MCP</a:t>
-            </a:r>
-            <a:endParaRPr lang="en-US" sz="1500" dirty="0"/>
-          </a:p>
-          <a:p>
-            <a:pPr marL="342900" indent="-342900">
-              <a:spcAft>
-                <a:spcPts val="600"/>
-              </a:spcAft>
-              <a:buSzPct val="100000"/>
-              <a:buChar char="•"/>
-            </a:pPr>
-            <a:r>
-              <a:rPr lang="en-US" sz="1500" dirty="0">
-                <a:solidFill>
-                  <a:srgbClr val="212121"/>
-                </a:solidFill>
-                <a:latin typeface="Calibri" pitchFamily="34" charset="0"/>
-                <a:ea typeface="Calibri" pitchFamily="34" charset="-122"/>
-                <a:cs typeface="Calibri" pitchFamily="34" charset="-120"/>
-              </a:rPr>
-              <a:t>Foundry IQ — enterprise knowledge and grounding layer</a:t>
-            </a:r>
-            <a:endParaRPr lang="en-US" sz="1500" dirty="0"/>
-          </a:p>
-          <a:p>
-            <a:pPr marL="342900" indent="-342900">
-              <a:spcAft>
-                <a:spcPts val="600"/>
-              </a:spcAft>
-              <a:buSzPct val="100000"/>
-              <a:buChar char="•"/>
-            </a:pPr>
-            <a:r>
-              <a:rPr lang="en-US" sz="1500" dirty="0">
-                <a:solidFill>
-                  <a:srgbClr val="212121"/>
-                </a:solidFill>
-                <a:latin typeface="Calibri" pitchFamily="34" charset="0"/>
-                <a:ea typeface="Calibri" pitchFamily="34" charset="-122"/>
-                <a:cs typeface="Calibri" pitchFamily="34" charset="-120"/>
-              </a:rPr>
-              <a:t>Evaluators, tracing, and safety</a:t>
-            </a:r>
-            <a:endParaRPr lang="en-US" sz="1500" dirty="0"/>
+            <a:pPr algn="ctr" indent="0" marL="0">
+              <a:buNone/>
+            </a:pPr>
+            <a:r>
+              <a:rPr lang="en-US" sz="1400" i="1" dirty="0">
+                <a:solidFill>
+                  <a:srgbClr val="1E2761"/>
+                </a:solidFill>
+                <a:latin typeface="Calibri" pitchFamily="34" charset="0"/>
+                <a:ea typeface="Calibri" pitchFamily="34" charset="-122"/>
+                <a:cs typeface="Calibri" pitchFamily="34" charset="-120"/>
+              </a:rPr>
+              <a:t>Same ingredients everywhere. What changes is how much code you write and who owns the runtime.</a:t>
+            </a:r>
+            <a:endParaRPr lang="en-US" sz="1400" dirty="0"/>
           </a:p>
         </p:txBody>
       </p:sp>
@@ -6893,7 +8447,7 @@
                 <a:ea typeface="Calibri" pitchFamily="34" charset="-122"/>
                 <a:cs typeface="Calibri" pitchFamily="34" charset="-120"/>
               </a:rPr>
-              <a:t>What MAF gives you</a:t>
+              <a:t>A decision framework, visualized</a:t>
             </a:r>
             <a:endParaRPr lang="en-US" sz="2800" dirty="0"/>
           </a:p>
@@ -6907,8 +8461,8 @@
         </p:nvSpPr>
         <p:spPr>
           <a:xfrm>
-            <a:off x="365760" y="1097280"/>
-            <a:ext cx="8412480" cy="3749040"/>
+            <a:off x="365760" y="1143000"/>
+            <a:ext cx="4023360" cy="320040"/>
           </a:xfrm>
           <a:prstGeom prst="rect">
             <a:avLst/>
@@ -6917,18 +8471,401 @@
           <a:ln/>
         </p:spPr>
         <p:txBody>
-          <a:bodyPr wrap="square" rtlCol="0" anchor="ctr"/>
-          <a:lstStyle/>
-          <a:p>
-            <a:pPr marL="342900" indent="-342900">
-              <a:spcAft>
-                <a:spcPts val="600"/>
-              </a:spcAft>
-              <a:buSzPct val="100000"/>
-              <a:buChar char="•"/>
-            </a:pPr>
-            <a:r>
-              <a:rPr lang="en-US" sz="1500" dirty="0">
+          <a:bodyPr wrap="square" lIns="0" tIns="0" rIns="0" bIns="0" rtlCol="0" anchor="ctr"/>
+          <a:lstStyle/>
+          <a:p>
+            <a:pPr algn="l" indent="0" marL="0">
+              <a:buNone/>
+            </a:pPr>
+            <a:r>
+              <a:rPr lang="en-US" sz="1300" b="1" dirty="0">
+                <a:solidFill>
+                  <a:srgbClr val="1E2761"/>
+                </a:solidFill>
+                <a:latin typeface="Calibri" pitchFamily="34" charset="0"/>
+                <a:ea typeface="Calibri" pitchFamily="34" charset="-122"/>
+                <a:cs typeface="Calibri" pitchFamily="34" charset="-120"/>
+              </a:rPr>
+              <a:t>More control, more code</a:t>
+            </a:r>
+            <a:endParaRPr lang="en-US" sz="1300" dirty="0"/>
+          </a:p>
+        </p:txBody>
+      </p:sp>
+      <p:sp>
+        <p:nvSpPr>
+          <p:cNvPr id="6" name="Text 4"/>
+          <p:cNvSpPr/>
+          <p:nvPr/>
+        </p:nvSpPr>
+        <p:spPr>
+          <a:xfrm>
+            <a:off x="4754880" y="1143000"/>
+            <a:ext cx="4023360" cy="320040"/>
+          </a:xfrm>
+          <a:prstGeom prst="rect">
+            <a:avLst/>
+          </a:prstGeom>
+          <a:noFill/>
+          <a:ln/>
+        </p:spPr>
+        <p:txBody>
+          <a:bodyPr wrap="square" lIns="0" tIns="0" rIns="0" bIns="0" rtlCol="0" anchor="ctr"/>
+          <a:lstStyle/>
+          <a:p>
+            <a:pPr algn="r" indent="0" marL="0">
+              <a:buNone/>
+            </a:pPr>
+            <a:r>
+              <a:rPr lang="en-US" sz="1300" b="1" dirty="0">
+                <a:solidFill>
+                  <a:srgbClr val="1E2761"/>
+                </a:solidFill>
+                <a:latin typeface="Calibri" pitchFamily="34" charset="0"/>
+                <a:ea typeface="Calibri" pitchFamily="34" charset="-122"/>
+                <a:cs typeface="Calibri" pitchFamily="34" charset="-120"/>
+              </a:rPr>
+              <a:t>Faster to build, less customization</a:t>
+            </a:r>
+            <a:endParaRPr lang="en-US" sz="1300" dirty="0"/>
+          </a:p>
+        </p:txBody>
+      </p:sp>
+      <p:sp>
+        <p:nvSpPr>
+          <p:cNvPr id="7" name="Shape 5"/>
+          <p:cNvSpPr/>
+          <p:nvPr/>
+        </p:nvSpPr>
+        <p:spPr>
+          <a:xfrm>
+            <a:off x="548640" y="1645920"/>
+            <a:ext cx="2682240" cy="640080"/>
+          </a:xfrm>
+          <a:prstGeom prst="rect">
+            <a:avLst/>
+          </a:prstGeom>
+          <a:solidFill>
+            <a:srgbClr val="0F1A44"/>
+          </a:solidFill>
+          <a:ln w="12700">
+            <a:solidFill>
+              <a:srgbClr val="FFFFFF"/>
+            </a:solidFill>
+            <a:prstDash val="solid"/>
+          </a:ln>
+        </p:spPr>
+      </p:sp>
+      <p:sp>
+        <p:nvSpPr>
+          <p:cNvPr id="8" name="Text 6"/>
+          <p:cNvSpPr/>
+          <p:nvPr/>
+        </p:nvSpPr>
+        <p:spPr>
+          <a:xfrm>
+            <a:off x="548640" y="1645920"/>
+            <a:ext cx="2682240" cy="640080"/>
+          </a:xfrm>
+          <a:prstGeom prst="rect">
+            <a:avLst/>
+          </a:prstGeom>
+          <a:noFill/>
+          <a:ln/>
+        </p:spPr>
+        <p:txBody>
+          <a:bodyPr wrap="square" lIns="0" tIns="0" rIns="0" bIns="0" rtlCol="0" anchor="ctr"/>
+          <a:lstStyle/>
+          <a:p>
+            <a:pPr algn="ctr" indent="0" marL="0">
+              <a:buNone/>
+            </a:pPr>
+            <a:r>
+              <a:rPr lang="en-US" sz="2200" b="1" dirty="0">
+                <a:solidFill>
+                  <a:srgbClr val="FFFFFF"/>
+                </a:solidFill>
+                <a:latin typeface="Calibri" pitchFamily="34" charset="0"/>
+                <a:ea typeface="Calibri" pitchFamily="34" charset="-122"/>
+                <a:cs typeface="Calibri" pitchFamily="34" charset="-120"/>
+              </a:rPr>
+              <a:t>IaaS</a:t>
+            </a:r>
+            <a:endParaRPr lang="en-US" sz="2200" dirty="0"/>
+          </a:p>
+        </p:txBody>
+      </p:sp>
+      <p:sp>
+        <p:nvSpPr>
+          <p:cNvPr id="9" name="Shape 7"/>
+          <p:cNvSpPr/>
+          <p:nvPr/>
+        </p:nvSpPr>
+        <p:spPr>
+          <a:xfrm>
+            <a:off x="3230880" y="1645920"/>
+            <a:ext cx="2682240" cy="640080"/>
+          </a:xfrm>
+          <a:prstGeom prst="rect">
+            <a:avLst/>
+          </a:prstGeom>
+          <a:solidFill>
+            <a:srgbClr val="1E2761"/>
+          </a:solidFill>
+          <a:ln w="12700">
+            <a:solidFill>
+              <a:srgbClr val="FFFFFF"/>
+            </a:solidFill>
+            <a:prstDash val="solid"/>
+          </a:ln>
+        </p:spPr>
+      </p:sp>
+      <p:sp>
+        <p:nvSpPr>
+          <p:cNvPr id="10" name="Text 8"/>
+          <p:cNvSpPr/>
+          <p:nvPr/>
+        </p:nvSpPr>
+        <p:spPr>
+          <a:xfrm>
+            <a:off x="3230880" y="1645920"/>
+            <a:ext cx="2682240" cy="640080"/>
+          </a:xfrm>
+          <a:prstGeom prst="rect">
+            <a:avLst/>
+          </a:prstGeom>
+          <a:noFill/>
+          <a:ln/>
+        </p:spPr>
+        <p:txBody>
+          <a:bodyPr wrap="square" lIns="0" tIns="0" rIns="0" bIns="0" rtlCol="0" anchor="ctr"/>
+          <a:lstStyle/>
+          <a:p>
+            <a:pPr algn="ctr" indent="0" marL="0">
+              <a:buNone/>
+            </a:pPr>
+            <a:r>
+              <a:rPr lang="en-US" sz="2200" b="1" dirty="0">
+                <a:solidFill>
+                  <a:srgbClr val="FFFFFF"/>
+                </a:solidFill>
+                <a:latin typeface="Calibri" pitchFamily="34" charset="0"/>
+                <a:ea typeface="Calibri" pitchFamily="34" charset="-122"/>
+                <a:cs typeface="Calibri" pitchFamily="34" charset="-120"/>
+              </a:rPr>
+              <a:t>PaaS</a:t>
+            </a:r>
+            <a:endParaRPr lang="en-US" sz="2200" dirty="0"/>
+          </a:p>
+        </p:txBody>
+      </p:sp>
+      <p:sp>
+        <p:nvSpPr>
+          <p:cNvPr id="11" name="Shape 9"/>
+          <p:cNvSpPr/>
+          <p:nvPr/>
+        </p:nvSpPr>
+        <p:spPr>
+          <a:xfrm>
+            <a:off x="5913120" y="1645920"/>
+            <a:ext cx="2682240" cy="640080"/>
+          </a:xfrm>
+          <a:prstGeom prst="rect">
+            <a:avLst/>
+          </a:prstGeom>
+          <a:solidFill>
+            <a:srgbClr val="6B7BB0"/>
+          </a:solidFill>
+          <a:ln w="12700">
+            <a:solidFill>
+              <a:srgbClr val="FFFFFF"/>
+            </a:solidFill>
+            <a:prstDash val="solid"/>
+          </a:ln>
+        </p:spPr>
+      </p:sp>
+      <p:sp>
+        <p:nvSpPr>
+          <p:cNvPr id="12" name="Text 10"/>
+          <p:cNvSpPr/>
+          <p:nvPr/>
+        </p:nvSpPr>
+        <p:spPr>
+          <a:xfrm>
+            <a:off x="5913120" y="1645920"/>
+            <a:ext cx="2682240" cy="640080"/>
+          </a:xfrm>
+          <a:prstGeom prst="rect">
+            <a:avLst/>
+          </a:prstGeom>
+          <a:noFill/>
+          <a:ln/>
+        </p:spPr>
+        <p:txBody>
+          <a:bodyPr wrap="square" lIns="0" tIns="0" rIns="0" bIns="0" rtlCol="0" anchor="ctr"/>
+          <a:lstStyle/>
+          <a:p>
+            <a:pPr algn="ctr" indent="0" marL="0">
+              <a:buNone/>
+            </a:pPr>
+            <a:r>
+              <a:rPr lang="en-US" sz="2200" b="1" dirty="0">
+                <a:solidFill>
+                  <a:srgbClr val="FFFFFF"/>
+                </a:solidFill>
+                <a:latin typeface="Calibri" pitchFamily="34" charset="0"/>
+                <a:ea typeface="Calibri" pitchFamily="34" charset="-122"/>
+                <a:cs typeface="Calibri" pitchFamily="34" charset="-120"/>
+              </a:rPr>
+              <a:t>SaaS</a:t>
+            </a:r>
+            <a:endParaRPr lang="en-US" sz="2200" dirty="0"/>
+          </a:p>
+        </p:txBody>
+      </p:sp>
+      <p:sp>
+        <p:nvSpPr>
+          <p:cNvPr id="13" name="Text 11"/>
+          <p:cNvSpPr/>
+          <p:nvPr/>
+        </p:nvSpPr>
+        <p:spPr>
+          <a:xfrm>
+            <a:off x="548640" y="2377440"/>
+            <a:ext cx="2682240" cy="365760"/>
+          </a:xfrm>
+          <a:prstGeom prst="rect">
+            <a:avLst/>
+          </a:prstGeom>
+          <a:noFill/>
+          <a:ln/>
+        </p:spPr>
+        <p:txBody>
+          <a:bodyPr wrap="square" lIns="0" tIns="0" rIns="0" bIns="0" rtlCol="0" anchor="ctr"/>
+          <a:lstStyle/>
+          <a:p>
+            <a:pPr algn="ctr" indent="0" marL="0">
+              <a:buNone/>
+            </a:pPr>
+            <a:r>
+              <a:rPr lang="en-US" sz="1300" b="1" dirty="0">
+                <a:solidFill>
+                  <a:srgbClr val="1E2761"/>
+                </a:solidFill>
+                <a:latin typeface="Calibri" pitchFamily="34" charset="0"/>
+                <a:ea typeface="Calibri" pitchFamily="34" charset="-122"/>
+                <a:cs typeface="Calibri" pitchFamily="34" charset="-120"/>
+              </a:rPr>
+              <a:t>Containers + OSS frameworks</a:t>
+            </a:r>
+            <a:endParaRPr lang="en-US" sz="1300" dirty="0"/>
+          </a:p>
+        </p:txBody>
+      </p:sp>
+      <p:sp>
+        <p:nvSpPr>
+          <p:cNvPr id="14" name="Text 12"/>
+          <p:cNvSpPr/>
+          <p:nvPr/>
+        </p:nvSpPr>
+        <p:spPr>
+          <a:xfrm>
+            <a:off x="3230880" y="2377440"/>
+            <a:ext cx="2682240" cy="365760"/>
+          </a:xfrm>
+          <a:prstGeom prst="rect">
+            <a:avLst/>
+          </a:prstGeom>
+          <a:noFill/>
+          <a:ln/>
+        </p:spPr>
+        <p:txBody>
+          <a:bodyPr wrap="square" lIns="0" tIns="0" rIns="0" bIns="0" rtlCol="0" anchor="ctr"/>
+          <a:lstStyle/>
+          <a:p>
+            <a:pPr algn="ctr" indent="0" marL="0">
+              <a:buNone/>
+            </a:pPr>
+            <a:r>
+              <a:rPr lang="en-US" sz="1300" b="1" dirty="0">
+                <a:solidFill>
+                  <a:srgbClr val="1E2761"/>
+                </a:solidFill>
+                <a:latin typeface="Calibri" pitchFamily="34" charset="0"/>
+                <a:ea typeface="Calibri" pitchFamily="34" charset="-122"/>
+                <a:cs typeface="Calibri" pitchFamily="34" charset="-120"/>
+              </a:rPr>
+              <a:t>Foundry Agent Service + MAF</a:t>
+            </a:r>
+            <a:endParaRPr lang="en-US" sz="1300" dirty="0"/>
+          </a:p>
+        </p:txBody>
+      </p:sp>
+      <p:sp>
+        <p:nvSpPr>
+          <p:cNvPr id="15" name="Text 13"/>
+          <p:cNvSpPr/>
+          <p:nvPr/>
+        </p:nvSpPr>
+        <p:spPr>
+          <a:xfrm>
+            <a:off x="5913120" y="2377440"/>
+            <a:ext cx="2682240" cy="365760"/>
+          </a:xfrm>
+          <a:prstGeom prst="rect">
+            <a:avLst/>
+          </a:prstGeom>
+          <a:noFill/>
+          <a:ln/>
+        </p:spPr>
+        <p:txBody>
+          <a:bodyPr wrap="square" lIns="0" tIns="0" rIns="0" bIns="0" rtlCol="0" anchor="ctr"/>
+          <a:lstStyle/>
+          <a:p>
+            <a:pPr algn="ctr" indent="0" marL="0">
+              <a:buNone/>
+            </a:pPr>
+            <a:r>
+              <a:rPr lang="en-US" sz="1300" b="1" dirty="0">
+                <a:solidFill>
+                  <a:srgbClr val="1E2761"/>
+                </a:solidFill>
+                <a:latin typeface="Calibri" pitchFamily="34" charset="0"/>
+                <a:ea typeface="Calibri" pitchFamily="34" charset="-122"/>
+                <a:cs typeface="Calibri" pitchFamily="34" charset="-120"/>
+              </a:rPr>
+              <a:t>Copilot Studio</a:t>
+            </a:r>
+            <a:endParaRPr lang="en-US" sz="1300" dirty="0"/>
+          </a:p>
+        </p:txBody>
+      </p:sp>
+      <p:sp>
+        <p:nvSpPr>
+          <p:cNvPr id="16" name="Text 14"/>
+          <p:cNvSpPr/>
+          <p:nvPr/>
+        </p:nvSpPr>
+        <p:spPr>
+          <a:xfrm>
+            <a:off x="640080" y="2788920"/>
+            <a:ext cx="2499360" cy="1280160"/>
+          </a:xfrm>
+          <a:prstGeom prst="rect">
+            <a:avLst/>
+          </a:prstGeom>
+          <a:noFill/>
+          <a:ln/>
+        </p:spPr>
+        <p:txBody>
+          <a:bodyPr wrap="square" lIns="0" tIns="0" rIns="0" bIns="0" rtlCol="0" anchor="t"/>
+          <a:lstStyle/>
+          <a:p>
+            <a:pPr algn="ctr" indent="0" marL="0">
+              <a:buNone/>
+            </a:pPr>
+            <a:r>
+              <a:rPr lang="en-US" sz="1200" dirty="0">
                 <a:solidFill>
                   <a:srgbClr val="212121"/>
                 </a:solidFill>
@@ -6936,20 +8873,38 @@
                 <a:ea typeface="Calibri" pitchFamily="34" charset="-122"/>
                 <a:cs typeface="Calibri" pitchFamily="34" charset="-120"/>
               </a:rPr>
-              <a:t>One SDK for authoring agents — Python and C#</a:t>
-            </a:r>
-            <a:endParaRPr lang="en-US" sz="1500" dirty="0"/>
-          </a:p>
-          <a:p>
-            <a:pPr marL="342900" indent="-342900">
-              <a:spcAft>
-                <a:spcPts val="600"/>
-              </a:spcAft>
-              <a:buSzPct val="100000"/>
-              <a:buChar char="•"/>
-            </a:pPr>
-            <a:r>
-              <a:rPr lang="en-US" sz="1500" dirty="0">
+              <a:t>You own everything. Not covered.</a:t>
+            </a:r>
+            <a:endParaRPr lang="en-US" sz="1200" dirty="0"/>
+          </a:p>
+        </p:txBody>
+      </p:sp>
+      <p:sp>
+        <p:nvSpPr>
+          <p:cNvPr id="17" name="Text 15"/>
+          <p:cNvSpPr/>
+          <p:nvPr/>
+        </p:nvSpPr>
+        <p:spPr>
+          <a:xfrm>
+            <a:off x="3322320" y="2788920"/>
+            <a:ext cx="2499360" cy="1280160"/>
+          </a:xfrm>
+          <a:prstGeom prst="rect">
+            <a:avLst/>
+          </a:prstGeom>
+          <a:noFill/>
+          <a:ln/>
+        </p:spPr>
+        <p:txBody>
+          <a:bodyPr wrap="square" lIns="0" tIns="0" rIns="0" bIns="0" rtlCol="0" anchor="t"/>
+          <a:lstStyle/>
+          <a:p>
+            <a:pPr algn="ctr" indent="0" marL="0">
+              <a:buNone/>
+            </a:pPr>
+            <a:r>
+              <a:rPr lang="en-US" sz="1200" dirty="0">
                 <a:solidFill>
                   <a:srgbClr val="212121"/>
                 </a:solidFill>
@@ -6957,20 +8912,38 @@
                 <a:ea typeface="Calibri" pitchFamily="34" charset="-122"/>
                 <a:cs typeface="Calibri" pitchFamily="34" charset="-120"/>
               </a:rPr>
-              <a:t>One vocabulary: agents, threads, tools, runs</a:t>
-            </a:r>
-            <a:endParaRPr lang="en-US" sz="1500" dirty="0"/>
-          </a:p>
-          <a:p>
-            <a:pPr marL="342900" indent="-342900">
-              <a:spcAft>
-                <a:spcPts val="600"/>
-              </a:spcAft>
-              <a:buSzPct val="100000"/>
-              <a:buChar char="•"/>
-            </a:pPr>
-            <a:r>
-              <a:rPr lang="en-US" sz="1500" dirty="0">
+              <a:t>Managed runtime; you own the agent code. This workshop.</a:t>
+            </a:r>
+            <a:endParaRPr lang="en-US" sz="1200" dirty="0"/>
+          </a:p>
+        </p:txBody>
+      </p:sp>
+      <p:sp>
+        <p:nvSpPr>
+          <p:cNvPr id="18" name="Text 16"/>
+          <p:cNvSpPr/>
+          <p:nvPr/>
+        </p:nvSpPr>
+        <p:spPr>
+          <a:xfrm>
+            <a:off x="6004560" y="2788920"/>
+            <a:ext cx="2499360" cy="1280160"/>
+          </a:xfrm>
+          <a:prstGeom prst="rect">
+            <a:avLst/>
+          </a:prstGeom>
+          <a:noFill/>
+          <a:ln/>
+        </p:spPr>
+        <p:txBody>
+          <a:bodyPr wrap="square" lIns="0" tIns="0" rIns="0" bIns="0" rtlCol="0" anchor="t"/>
+          <a:lstStyle/>
+          <a:p>
+            <a:pPr algn="ctr" indent="0" marL="0">
+              <a:buNone/>
+            </a:pPr>
+            <a:r>
+              <a:rPr lang="en-US" sz="1200" dirty="0">
                 <a:solidFill>
                   <a:srgbClr val="212121"/>
                 </a:solidFill>
@@ -6978,72 +8951,82 @@
                 <a:ea typeface="Calibri" pitchFamily="34" charset="-122"/>
                 <a:cs typeface="Calibri" pitchFamily="34" charset="-120"/>
               </a:rPr>
-              <a:t>First-class streaming, memory, structured outputs</a:t>
-            </a:r>
-            <a:endParaRPr lang="en-US" sz="1500" dirty="0"/>
-          </a:p>
-          <a:p>
-            <a:pPr marL="342900" indent="-342900">
-              <a:spcAft>
-                <a:spcPts val="600"/>
-              </a:spcAft>
-              <a:buSzPct val="100000"/>
-              <a:buChar char="•"/>
-            </a:pPr>
-            <a:r>
-              <a:rPr lang="en-US" sz="1500" dirty="0">
-                <a:solidFill>
-                  <a:srgbClr val="212121"/>
-                </a:solidFill>
-                <a:latin typeface="Calibri" pitchFamily="34" charset="0"/>
-                <a:ea typeface="Calibri" pitchFamily="34" charset="-122"/>
-                <a:cs typeface="Calibri" pitchFamily="34" charset="-120"/>
-              </a:rPr>
-              <a:t>Multi-agent orchestration primitives</a:t>
-            </a:r>
-            <a:endParaRPr lang="en-US" sz="1500" dirty="0"/>
-          </a:p>
-          <a:p>
-            <a:pPr marL="342900" indent="-342900">
-              <a:spcAft>
-                <a:spcPts val="600"/>
-              </a:spcAft>
-              <a:buSzPct val="100000"/>
-              <a:buChar char="•"/>
-            </a:pPr>
-            <a:r>
-              <a:rPr lang="en-US" sz="1500" dirty="0">
-                <a:solidFill>
-                  <a:srgbClr val="212121"/>
-                </a:solidFill>
-                <a:latin typeface="Calibri" pitchFamily="34" charset="0"/>
-                <a:ea typeface="Calibri" pitchFamily="34" charset="-122"/>
-                <a:cs typeface="Calibri" pitchFamily="34" charset="-120"/>
-              </a:rPr>
-              <a:t>Consumes Foundry Toolbox and MCP servers</a:t>
-            </a:r>
-            <a:endParaRPr lang="en-US" sz="1500" dirty="0"/>
-          </a:p>
-          <a:p>
-            <a:pPr marL="342900" indent="-342900">
-              <a:spcAft>
-                <a:spcPts val="600"/>
-              </a:spcAft>
-              <a:buSzPct val="100000"/>
-              <a:buChar char="•"/>
-            </a:pPr>
-            <a:r>
-              <a:rPr lang="en-US" sz="1500" dirty="0">
-                <a:solidFill>
-                  <a:srgbClr val="212121"/>
-                </a:solidFill>
-                <a:latin typeface="Calibri" pitchFamily="34" charset="0"/>
-                <a:ea typeface="Calibri" pitchFamily="34" charset="-122"/>
-                <a:cs typeface="Calibri" pitchFamily="34" charset="-120"/>
-              </a:rPr>
-              <a:t>The successor to Semantic Kernel and AutoGen patterns (both out of scope)</a:t>
-            </a:r>
-            <a:endParaRPr lang="en-US" sz="1500" dirty="0"/>
+              <a:t>Portal-first, low-code. Not covered.</a:t>
+            </a:r>
+            <a:endParaRPr lang="en-US" sz="1200" dirty="0"/>
+          </a:p>
+        </p:txBody>
+      </p:sp>
+      <p:sp>
+        <p:nvSpPr>
+          <p:cNvPr id="19" name="Shape 17"/>
+          <p:cNvSpPr/>
+          <p:nvPr/>
+        </p:nvSpPr>
+        <p:spPr>
+          <a:xfrm>
+            <a:off x="365760" y="4343400"/>
+            <a:ext cx="8412480" cy="457200"/>
+          </a:xfrm>
+          <a:prstGeom prst="rect">
+            <a:avLst/>
+          </a:prstGeom>
+          <a:solidFill>
+            <a:srgbClr val="CADCFC"/>
+          </a:solidFill>
+          <a:ln/>
+        </p:spPr>
+      </p:sp>
+      <p:sp>
+        <p:nvSpPr>
+          <p:cNvPr id="20" name="Text 18"/>
+          <p:cNvSpPr/>
+          <p:nvPr/>
+        </p:nvSpPr>
+        <p:spPr>
+          <a:xfrm>
+            <a:off x="502920" y="4370832"/>
+            <a:ext cx="8138160" cy="402336"/>
+          </a:xfrm>
+          <a:prstGeom prst="rect">
+            <a:avLst/>
+          </a:prstGeom>
+          <a:noFill/>
+          <a:ln/>
+        </p:spPr>
+        <p:txBody>
+          <a:bodyPr wrap="square" lIns="0" tIns="0" rIns="0" bIns="0" rtlCol="0" anchor="ctr"/>
+          <a:lstStyle/>
+          <a:p>
+            <a:pPr indent="0" marL="0">
+              <a:buNone/>
+            </a:pPr>
+            <a:r>
+              <a:rPr lang="en-US" sz="1400" b="1" dirty="0">
+                <a:solidFill>
+                  <a:srgbClr val="1E2761"/>
+                </a:solidFill>
+                <a:latin typeface="Calibri" pitchFamily="34" charset="0"/>
+                <a:ea typeface="Calibri" pitchFamily="34" charset="-122"/>
+                <a:cs typeface="Calibri" pitchFamily="34" charset="-120"/>
+              </a:rPr>
+              <a:t>This workshop lives in PaaS territory. </a:t>
+            </a:r>
+            <a:pPr indent="0" marL="0">
+              <a:buNone/>
+            </a:pPr>
+            <a:r>
+              <a:rPr lang="en-US" sz="1400" dirty="0">
+                <a:solidFill>
+                  <a:srgbClr val="1E2761"/>
+                </a:solidFill>
+                <a:latin typeface="Calibri" pitchFamily="34" charset="0"/>
+                <a:ea typeface="Calibri" pitchFamily="34" charset="-122"/>
+                <a:cs typeface="Calibri" pitchFamily="34" charset="-120"/>
+              </a:rPr>
+              <a:t>You write real code; you don't run the infrastructure.</a:t>
+            </a:r>
+            <a:endParaRPr lang="en-US" sz="1400" dirty="0"/>
           </a:p>
         </p:txBody>
       </p:sp>
@@ -7171,7 +9154,7 @@
                 <a:ea typeface="Calibri" pitchFamily="34" charset="-122"/>
                 <a:cs typeface="Calibri" pitchFamily="34" charset="-120"/>
               </a:rPr>
-              <a:t>What we will and won't cover</a:t>
+              <a:t>When is an agent the right answer?</a:t>
             </a:r>
             <a:endParaRPr lang="en-US" sz="2800" dirty="0"/>
           </a:p>
@@ -7186,7 +9169,7 @@
         <p:spPr>
           <a:xfrm>
             <a:off x="365760" y="1097280"/>
-            <a:ext cx="4069080" cy="365760"/>
+            <a:ext cx="8412480" cy="365760"/>
           </a:xfrm>
           <a:prstGeom prst="rect">
             <a:avLst/>
@@ -7202,7 +9185,134 @@
               <a:buNone/>
             </a:pPr>
             <a:r>
-              <a:rPr lang="en-US" sz="2000" b="1" dirty="0">
+              <a:rPr lang="en-US" sz="1400" i="1" dirty="0">
+                <a:solidFill>
+                  <a:srgbClr val="6B7280"/>
+                </a:solidFill>
+                <a:latin typeface="Calibri" pitchFamily="34" charset="0"/>
+                <a:ea typeface="Calibri" pitchFamily="34" charset="-122"/>
+                <a:cs typeface="Calibri" pitchFamily="34" charset="-120"/>
+              </a:rPr>
+              <a:t>Not every LLM problem needs an agent. Match complexity to need.</a:t>
+            </a:r>
+            <a:endParaRPr lang="en-US" sz="1400" dirty="0"/>
+          </a:p>
+        </p:txBody>
+      </p:sp>
+      <p:sp>
+        <p:nvSpPr>
+          <p:cNvPr id="6" name="Shape 4"/>
+          <p:cNvSpPr/>
+          <p:nvPr/>
+        </p:nvSpPr>
+        <p:spPr>
+          <a:xfrm>
+            <a:off x="640080" y="4160520"/>
+            <a:ext cx="7863840" cy="0"/>
+          </a:xfrm>
+          <a:prstGeom prst="line">
+            <a:avLst/>
+          </a:prstGeom>
+          <a:noFill/>
+          <a:ln w="25400">
+            <a:solidFill>
+              <a:srgbClr val="1E2761"/>
+            </a:solidFill>
+            <a:prstDash val="solid"/>
+            <a:tailEnd type="triangle"/>
+          </a:ln>
+        </p:spPr>
+      </p:sp>
+      <p:sp>
+        <p:nvSpPr>
+          <p:cNvPr id="7" name="Text 5"/>
+          <p:cNvSpPr/>
+          <p:nvPr/>
+        </p:nvSpPr>
+        <p:spPr>
+          <a:xfrm>
+            <a:off x="365760" y="4389120"/>
+            <a:ext cx="8412480" cy="320040"/>
+          </a:xfrm>
+          <a:prstGeom prst="rect">
+            <a:avLst/>
+          </a:prstGeom>
+          <a:noFill/>
+          <a:ln/>
+        </p:spPr>
+        <p:txBody>
+          <a:bodyPr wrap="square" lIns="0" tIns="0" rIns="0" bIns="0" rtlCol="0" anchor="ctr"/>
+          <a:lstStyle/>
+          <a:p>
+            <a:pPr algn="ctr" indent="0" marL="0">
+              <a:buNone/>
+            </a:pPr>
+            <a:r>
+              <a:rPr lang="en-US" sz="1200" i="1" dirty="0">
+                <a:solidFill>
+                  <a:srgbClr val="6B7280"/>
+                </a:solidFill>
+                <a:latin typeface="Calibri" pitchFamily="34" charset="0"/>
+                <a:ea typeface="Calibri" pitchFamily="34" charset="-122"/>
+                <a:cs typeface="Calibri" pitchFamily="34" charset="-120"/>
+              </a:rPr>
+              <a:t>Reach for the leftmost pattern that actually solves your problem</a:t>
+            </a:r>
+            <a:endParaRPr lang="en-US" sz="1200" dirty="0"/>
+          </a:p>
+        </p:txBody>
+      </p:sp>
+      <p:sp>
+        <p:nvSpPr>
+          <p:cNvPr id="8" name="Shape 6"/>
+          <p:cNvSpPr/>
+          <p:nvPr/>
+        </p:nvSpPr>
+        <p:spPr>
+          <a:xfrm>
+            <a:off x="365760" y="1737360"/>
+            <a:ext cx="2651760" cy="2286000"/>
+          </a:xfrm>
+          <a:prstGeom prst="rect">
+            <a:avLst/>
+          </a:prstGeom>
+          <a:solidFill>
+            <a:srgbClr val="FFFFFF"/>
+          </a:solidFill>
+          <a:ln w="12700">
+            <a:solidFill>
+              <a:srgbClr val="1E2761"/>
+            </a:solidFill>
+            <a:prstDash val="solid"/>
+          </a:ln>
+        </p:spPr>
+      </p:sp>
+      <p:sp>
+        <p:nvSpPr>
+          <p:cNvPr id="9" name="Text 7"/>
+          <p:cNvSpPr/>
+          <p:nvPr/>
+        </p:nvSpPr>
+        <p:spPr>
+          <a:xfrm>
+            <a:off x="502920" y="1874520"/>
+            <a:ext cx="2377440" cy="457200"/>
+          </a:xfrm>
+          <a:prstGeom prst="rect">
+            <a:avLst/>
+          </a:prstGeom>
+          <a:noFill/>
+          <a:ln/>
+        </p:spPr>
+        <p:txBody>
+          <a:bodyPr wrap="square" lIns="0" tIns="0" rIns="0" bIns="0" rtlCol="0" anchor="ctr"/>
+          <a:lstStyle/>
+          <a:p>
+            <a:pPr algn="ctr" indent="0" marL="0">
+              <a:buNone/>
+            </a:pPr>
+            <a:r>
+              <a:rPr lang="en-US" sz="1600" b="1" dirty="0">
                 <a:solidFill>
                   <a:srgbClr val="1E2761"/>
                 </a:solidFill>
@@ -7210,22 +9320,22 @@
                 <a:ea typeface="Calibri" pitchFamily="34" charset="-122"/>
                 <a:cs typeface="Calibri" pitchFamily="34" charset="-120"/>
               </a:rPr>
-              <a:t>Covered</a:t>
-            </a:r>
-            <a:endParaRPr lang="en-US" sz="2000" dirty="0"/>
-          </a:p>
-        </p:txBody>
-      </p:sp>
-      <p:sp>
-        <p:nvSpPr>
-          <p:cNvPr id="6" name="Text 4"/>
-          <p:cNvSpPr/>
-          <p:nvPr/>
-        </p:nvSpPr>
-        <p:spPr>
-          <a:xfrm>
-            <a:off x="4709160" y="1097280"/>
-            <a:ext cx="4069080" cy="365760"/>
+              <a:t>Direct LLM call</a:t>
+            </a:r>
+            <a:endParaRPr lang="en-US" sz="1600" dirty="0"/>
+          </a:p>
+        </p:txBody>
+      </p:sp>
+      <p:sp>
+        <p:nvSpPr>
+          <p:cNvPr id="10" name="Text 8"/>
+          <p:cNvSpPr/>
+          <p:nvPr/>
+        </p:nvSpPr>
+        <p:spPr>
+          <a:xfrm>
+            <a:off x="502920" y="2423160"/>
+            <a:ext cx="2377440" cy="822960"/>
           </a:xfrm>
           <a:prstGeom prst="rect">
             <a:avLst/>
@@ -7234,14 +9344,117 @@
           <a:ln/>
         </p:spPr>
         <p:txBody>
+          <a:bodyPr wrap="square" lIns="0" tIns="0" rIns="0" bIns="0" rtlCol="0" anchor="t"/>
+          <a:lstStyle/>
+          <a:p>
+            <a:pPr algn="ctr" indent="0" marL="0">
+              <a:buNone/>
+            </a:pPr>
+            <a:r>
+              <a:rPr lang="en-US" sz="1200" i="1" dirty="0">
+                <a:solidFill>
+                  <a:srgbClr val="212121"/>
+                </a:solidFill>
+                <a:latin typeface="Calibri" pitchFamily="34" charset="0"/>
+                <a:ea typeface="Calibri" pitchFamily="34" charset="-122"/>
+                <a:cs typeface="Calibri" pitchFamily="34" charset="-120"/>
+              </a:rPr>
+              <a:t>"Summarize this document."</a:t>
+            </a:r>
+            <a:endParaRPr lang="en-US" sz="1200" dirty="0"/>
+          </a:p>
+        </p:txBody>
+      </p:sp>
+      <p:sp>
+        <p:nvSpPr>
+          <p:cNvPr id="11" name="Text 9"/>
+          <p:cNvSpPr/>
+          <p:nvPr/>
+        </p:nvSpPr>
+        <p:spPr>
+          <a:xfrm>
+            <a:off x="502920" y="3337560"/>
+            <a:ext cx="2377440" cy="640080"/>
+          </a:xfrm>
+          <a:prstGeom prst="rect">
+            <a:avLst/>
+          </a:prstGeom>
+          <a:noFill/>
+          <a:ln/>
+        </p:spPr>
+        <p:txBody>
+          <a:bodyPr wrap="square" lIns="0" tIns="0" rIns="0" bIns="0" rtlCol="0" anchor="t"/>
+          <a:lstStyle/>
+          <a:p>
+            <a:pPr algn="ctr" indent="0" marL="0">
+              <a:buNone/>
+            </a:pPr>
+            <a:r>
+              <a:rPr lang="en-US" sz="1100" dirty="0">
+                <a:solidFill>
+                  <a:srgbClr val="6B7280"/>
+                </a:solidFill>
+                <a:latin typeface="Calibri" pitchFamily="34" charset="0"/>
+                <a:ea typeface="Calibri" pitchFamily="34" charset="-122"/>
+                <a:cs typeface="Calibri" pitchFamily="34" charset="-120"/>
+              </a:rPr>
+              <a:t>No tools · no iteration · cheap · easy to eval</a:t>
+            </a:r>
+            <a:endParaRPr lang="en-US" sz="1100" dirty="0"/>
+          </a:p>
+        </p:txBody>
+      </p:sp>
+      <p:sp>
+        <p:nvSpPr>
+          <p:cNvPr id="12" name="Shape 10"/>
+          <p:cNvSpPr/>
+          <p:nvPr/>
+        </p:nvSpPr>
+        <p:spPr>
+          <a:xfrm>
+            <a:off x="3246120" y="1737360"/>
+            <a:ext cx="2651760" cy="2286000"/>
+          </a:xfrm>
+          <a:prstGeom prst="rect">
+            <a:avLst/>
+          </a:prstGeom>
+          <a:solidFill>
+            <a:srgbClr val="FFFFFF"/>
+          </a:solidFill>
+          <a:ln w="12700">
+            <a:solidFill>
+              <a:srgbClr val="1E2761"/>
+            </a:solidFill>
+            <a:prstDash val="solid"/>
+          </a:ln>
+        </p:spPr>
+      </p:sp>
+      <p:sp>
+        <p:nvSpPr>
+          <p:cNvPr id="13" name="Text 11"/>
+          <p:cNvSpPr/>
+          <p:nvPr/>
+        </p:nvSpPr>
+        <p:spPr>
+          <a:xfrm>
+            <a:off x="3383280" y="1874520"/>
+            <a:ext cx="2377440" cy="457200"/>
+          </a:xfrm>
+          <a:prstGeom prst="rect">
+            <a:avLst/>
+          </a:prstGeom>
+          <a:noFill/>
+          <a:ln/>
+        </p:spPr>
+        <p:txBody>
           <a:bodyPr wrap="square" lIns="0" tIns="0" rIns="0" bIns="0" rtlCol="0" anchor="ctr"/>
           <a:lstStyle/>
           <a:p>
-            <a:pPr indent="0" marL="0">
+            <a:pPr algn="ctr" indent="0" marL="0">
               <a:buNone/>
             </a:pPr>
             <a:r>
-              <a:rPr lang="en-US" sz="2000" b="1" dirty="0">
+              <a:rPr lang="en-US" sz="1600" b="1" dirty="0">
                 <a:solidFill>
                   <a:srgbClr val="1E2761"/>
                 </a:solidFill>
@@ -7249,22 +9462,22 @@
                 <a:ea typeface="Calibri" pitchFamily="34" charset="-122"/>
                 <a:cs typeface="Calibri" pitchFamily="34" charset="-120"/>
               </a:rPr>
-              <a:t>Out of scope</a:t>
-            </a:r>
-            <a:endParaRPr lang="en-US" sz="2000" dirty="0"/>
-          </a:p>
-        </p:txBody>
-      </p:sp>
-      <p:sp>
-        <p:nvSpPr>
-          <p:cNvPr id="7" name="Text 5"/>
-          <p:cNvSpPr/>
-          <p:nvPr/>
-        </p:nvSpPr>
-        <p:spPr>
-          <a:xfrm>
-            <a:off x="365760" y="1554480"/>
-            <a:ext cx="4069080" cy="3291840"/>
+              <a:t>Single agent with tools</a:t>
+            </a:r>
+            <a:endParaRPr lang="en-US" sz="1600" dirty="0"/>
+          </a:p>
+        </p:txBody>
+      </p:sp>
+      <p:sp>
+        <p:nvSpPr>
+          <p:cNvPr id="14" name="Text 12"/>
+          <p:cNvSpPr/>
+          <p:nvPr/>
+        </p:nvSpPr>
+        <p:spPr>
+          <a:xfrm>
+            <a:off x="3383280" y="2423160"/>
+            <a:ext cx="2377440" cy="822960"/>
           </a:xfrm>
           <a:prstGeom prst="rect">
             <a:avLst/>
@@ -7273,18 +9486,14 @@
           <a:ln/>
         </p:spPr>
         <p:txBody>
-          <a:bodyPr wrap="square" rtlCol="0" anchor="ctr"/>
-          <a:lstStyle/>
-          <a:p>
-            <a:pPr marL="342900" indent="-342900">
-              <a:spcAft>
-                <a:spcPts val="600"/>
-              </a:spcAft>
-              <a:buSzPct val="100000"/>
-              <a:buChar char="•"/>
-            </a:pPr>
-            <a:r>
-              <a:rPr lang="en-US" sz="1500" dirty="0">
+          <a:bodyPr wrap="square" lIns="0" tIns="0" rIns="0" bIns="0" rtlCol="0" anchor="t"/>
+          <a:lstStyle/>
+          <a:p>
+            <a:pPr algn="ctr" indent="0" marL="0">
+              <a:buNone/>
+            </a:pPr>
+            <a:r>
+              <a:rPr lang="en-US" sz="1200" i="1" dirty="0">
                 <a:solidFill>
                   <a:srgbClr val="212121"/>
                 </a:solidFill>
@@ -7292,20 +9501,141 @@
                 <a:ea typeface="Calibri" pitchFamily="34" charset="-122"/>
                 <a:cs typeface="Calibri" pitchFamily="34" charset="-120"/>
               </a:rPr>
-              <a:t>Foundry (portal, deployments, connections)</a:t>
-            </a:r>
-            <a:endParaRPr lang="en-US" sz="1500" dirty="0"/>
-          </a:p>
-          <a:p>
-            <a:pPr marL="342900" indent="-342900">
-              <a:spcAft>
-                <a:spcPts val="600"/>
-              </a:spcAft>
-              <a:buSzPct val="100000"/>
-              <a:buChar char="•"/>
-            </a:pPr>
-            <a:r>
-              <a:rPr lang="en-US" sz="1500" dirty="0">
+              <a:t>"Answer with sources; open a ticket if needed."</a:t>
+            </a:r>
+            <a:endParaRPr lang="en-US" sz="1200" dirty="0"/>
+          </a:p>
+        </p:txBody>
+      </p:sp>
+      <p:sp>
+        <p:nvSpPr>
+          <p:cNvPr id="15" name="Text 13"/>
+          <p:cNvSpPr/>
+          <p:nvPr/>
+        </p:nvSpPr>
+        <p:spPr>
+          <a:xfrm>
+            <a:off x="3383280" y="3337560"/>
+            <a:ext cx="2377440" cy="640080"/>
+          </a:xfrm>
+          <a:prstGeom prst="rect">
+            <a:avLst/>
+          </a:prstGeom>
+          <a:noFill/>
+          <a:ln/>
+        </p:spPr>
+        <p:txBody>
+          <a:bodyPr wrap="square" lIns="0" tIns="0" rIns="0" bIns="0" rtlCol="0" anchor="t"/>
+          <a:lstStyle/>
+          <a:p>
+            <a:pPr algn="ctr" indent="0" marL="0">
+              <a:buNone/>
+            </a:pPr>
+            <a:r>
+              <a:rPr lang="en-US" sz="1100" dirty="0">
+                <a:solidFill>
+                  <a:srgbClr val="6B7280"/>
+                </a:solidFill>
+                <a:latin typeface="Calibri" pitchFamily="34" charset="0"/>
+                <a:ea typeface="Calibri" pitchFamily="34" charset="-122"/>
+                <a:cs typeface="Calibri" pitchFamily="34" charset="-120"/>
+              </a:rPr>
+              <a:t>Iteration · tool calls · harder to eval</a:t>
+            </a:r>
+            <a:endParaRPr lang="en-US" sz="1100" dirty="0"/>
+          </a:p>
+        </p:txBody>
+      </p:sp>
+      <p:sp>
+        <p:nvSpPr>
+          <p:cNvPr id="16" name="Shape 14"/>
+          <p:cNvSpPr/>
+          <p:nvPr/>
+        </p:nvSpPr>
+        <p:spPr>
+          <a:xfrm>
+            <a:off x="6126480" y="1737360"/>
+            <a:ext cx="2651760" cy="2286000"/>
+          </a:xfrm>
+          <a:prstGeom prst="rect">
+            <a:avLst/>
+          </a:prstGeom>
+          <a:solidFill>
+            <a:srgbClr val="FFFFFF"/>
+          </a:solidFill>
+          <a:ln w="12700">
+            <a:solidFill>
+              <a:srgbClr val="1E2761"/>
+            </a:solidFill>
+            <a:prstDash val="solid"/>
+          </a:ln>
+        </p:spPr>
+      </p:sp>
+      <p:sp>
+        <p:nvSpPr>
+          <p:cNvPr id="17" name="Text 15"/>
+          <p:cNvSpPr/>
+          <p:nvPr/>
+        </p:nvSpPr>
+        <p:spPr>
+          <a:xfrm>
+            <a:off x="6263640" y="1874520"/>
+            <a:ext cx="2377440" cy="457200"/>
+          </a:xfrm>
+          <a:prstGeom prst="rect">
+            <a:avLst/>
+          </a:prstGeom>
+          <a:noFill/>
+          <a:ln/>
+        </p:spPr>
+        <p:txBody>
+          <a:bodyPr wrap="square" lIns="0" tIns="0" rIns="0" bIns="0" rtlCol="0" anchor="ctr"/>
+          <a:lstStyle/>
+          <a:p>
+            <a:pPr algn="ctr" indent="0" marL="0">
+              <a:buNone/>
+            </a:pPr>
+            <a:r>
+              <a:rPr lang="en-US" sz="1600" b="1" dirty="0">
+                <a:solidFill>
+                  <a:srgbClr val="1E2761"/>
+                </a:solidFill>
+                <a:latin typeface="Calibri" pitchFamily="34" charset="0"/>
+                <a:ea typeface="Calibri" pitchFamily="34" charset="-122"/>
+                <a:cs typeface="Calibri" pitchFamily="34" charset="-120"/>
+              </a:rPr>
+              <a:t>Multi-agent workflow</a:t>
+            </a:r>
+            <a:endParaRPr lang="en-US" sz="1600" dirty="0"/>
+          </a:p>
+        </p:txBody>
+      </p:sp>
+      <p:sp>
+        <p:nvSpPr>
+          <p:cNvPr id="18" name="Text 16"/>
+          <p:cNvSpPr/>
+          <p:nvPr/>
+        </p:nvSpPr>
+        <p:spPr>
+          <a:xfrm>
+            <a:off x="6263640" y="2423160"/>
+            <a:ext cx="2377440" cy="822960"/>
+          </a:xfrm>
+          <a:prstGeom prst="rect">
+            <a:avLst/>
+          </a:prstGeom>
+          <a:noFill/>
+          <a:ln/>
+        </p:spPr>
+        <p:txBody>
+          <a:bodyPr wrap="square" lIns="0" tIns="0" rIns="0" bIns="0" rtlCol="0" anchor="t"/>
+          <a:lstStyle/>
+          <a:p>
+            <a:pPr algn="ctr" indent="0" marL="0">
+              <a:buNone/>
+            </a:pPr>
+            <a:r>
+              <a:rPr lang="en-US" sz="1200" i="1" dirty="0">
                 <a:solidFill>
                   <a:srgbClr val="212121"/>
                 </a:solidFill>
@@ -7313,106 +9643,22 @@
                 <a:ea typeface="Calibri" pitchFamily="34" charset="-122"/>
                 <a:cs typeface="Calibri" pitchFamily="34" charset="-120"/>
               </a:rPr>
-              <a:t>MAF — three ways to run an agent (Prompt agent, Hosted agent, Responses API from your own code)</a:t>
-            </a:r>
-            <a:endParaRPr lang="en-US" sz="1500" dirty="0"/>
-          </a:p>
-          <a:p>
-            <a:pPr marL="342900" indent="-342900">
-              <a:spcAft>
-                <a:spcPts val="600"/>
-              </a:spcAft>
-              <a:buSzPct val="100000"/>
-              <a:buChar char="•"/>
-            </a:pPr>
-            <a:r>
-              <a:rPr lang="en-US" sz="1500" dirty="0">
-                <a:solidFill>
-                  <a:srgbClr val="212121"/>
-                </a:solidFill>
-                <a:latin typeface="Calibri" pitchFamily="34" charset="0"/>
-                <a:ea typeface="Calibri" pitchFamily="34" charset="-122"/>
-                <a:cs typeface="Calibri" pitchFamily="34" charset="-120"/>
-              </a:rPr>
-              <a:t>Toolbox and Foundry IQ</a:t>
-            </a:r>
-            <a:endParaRPr lang="en-US" sz="1500" dirty="0"/>
-          </a:p>
-          <a:p>
-            <a:pPr marL="342900" indent="-342900">
-              <a:spcAft>
-                <a:spcPts val="600"/>
-              </a:spcAft>
-              <a:buSzPct val="100000"/>
-              <a:buChar char="•"/>
-            </a:pPr>
-            <a:r>
-              <a:rPr lang="en-US" sz="1500" dirty="0">
-                <a:solidFill>
-                  <a:srgbClr val="212121"/>
-                </a:solidFill>
-                <a:latin typeface="Calibri" pitchFamily="34" charset="0"/>
-                <a:ea typeface="Calibri" pitchFamily="34" charset="-122"/>
-                <a:cs typeface="Calibri" pitchFamily="34" charset="-120"/>
-              </a:rPr>
-              <a:t>MCP consumption and (stretch) authoring</a:t>
-            </a:r>
-            <a:endParaRPr lang="en-US" sz="1500" dirty="0"/>
-          </a:p>
-          <a:p>
-            <a:pPr marL="342900" indent="-342900">
-              <a:spcAft>
-                <a:spcPts val="600"/>
-              </a:spcAft>
-              <a:buSzPct val="100000"/>
-              <a:buChar char="•"/>
-            </a:pPr>
-            <a:r>
-              <a:rPr lang="en-US" sz="1500" dirty="0">
-                <a:solidFill>
-                  <a:srgbClr val="212121"/>
-                </a:solidFill>
-                <a:latin typeface="Calibri" pitchFamily="34" charset="0"/>
-                <a:ea typeface="Calibri" pitchFamily="34" charset="-122"/>
-                <a:cs typeface="Calibri" pitchFamily="34" charset="-120"/>
-              </a:rPr>
-              <a:t>Evaluation at every layer</a:t>
-            </a:r>
-            <a:endParaRPr lang="en-US" sz="1500" dirty="0"/>
-          </a:p>
-          <a:p>
-            <a:pPr marL="342900" indent="-342900">
-              <a:spcAft>
-                <a:spcPts val="600"/>
-              </a:spcAft>
-              <a:buSzPct val="100000"/>
-              <a:buChar char="•"/>
-            </a:pPr>
-            <a:r>
-              <a:rPr lang="en-US" sz="1500" dirty="0">
-                <a:solidFill>
-                  <a:srgbClr val="212121"/>
-                </a:solidFill>
-                <a:latin typeface="Calibri" pitchFamily="34" charset="0"/>
-                <a:ea typeface="Calibri" pitchFamily="34" charset="-122"/>
-                <a:cs typeface="Calibri" pitchFamily="34" charset="-120"/>
-              </a:rPr>
-              <a:t>Production concerns: observability, identity, cost</a:t>
-            </a:r>
-            <a:endParaRPr lang="en-US" sz="1500" dirty="0"/>
-          </a:p>
-        </p:txBody>
-      </p:sp>
-      <p:sp>
-        <p:nvSpPr>
-          <p:cNvPr id="8" name="Text 6"/>
-          <p:cNvSpPr/>
-          <p:nvPr/>
-        </p:nvSpPr>
-        <p:spPr>
-          <a:xfrm>
-            <a:off x="4709160" y="1554480"/>
-            <a:ext cx="4069080" cy="3291840"/>
+              <a:t>"Plan → retrieve → verify → act."</a:t>
+            </a:r>
+            <a:endParaRPr lang="en-US" sz="1200" dirty="0"/>
+          </a:p>
+        </p:txBody>
+      </p:sp>
+      <p:sp>
+        <p:nvSpPr>
+          <p:cNvPr id="19" name="Text 17"/>
+          <p:cNvSpPr/>
+          <p:nvPr/>
+        </p:nvSpPr>
+        <p:spPr>
+          <a:xfrm>
+            <a:off x="6263640" y="3337560"/>
+            <a:ext cx="2377440" cy="640080"/>
           </a:xfrm>
           <a:prstGeom prst="rect">
             <a:avLst/>
@@ -7421,133 +9667,24 @@
           <a:ln/>
         </p:spPr>
         <p:txBody>
-          <a:bodyPr wrap="square" rtlCol="0" anchor="ctr"/>
-          <a:lstStyle/>
-          <a:p>
-            <a:pPr marL="342900" indent="-342900">
-              <a:spcAft>
-                <a:spcPts val="600"/>
-              </a:spcAft>
-              <a:buSzPct val="100000"/>
-              <a:buChar char="•"/>
-            </a:pPr>
-            <a:r>
-              <a:rPr lang="en-US" sz="1500" dirty="0">
-                <a:solidFill>
-                  <a:srgbClr val="212121"/>
-                </a:solidFill>
-                <a:latin typeface="Calibri" pitchFamily="34" charset="0"/>
-                <a:ea typeface="Calibri" pitchFamily="34" charset="-122"/>
-                <a:cs typeface="Calibri" pitchFamily="34" charset="-120"/>
-              </a:rPr>
-              <a:t>Copilot Studio (different audience)</a:t>
-            </a:r>
-            <a:endParaRPr lang="en-US" sz="1500" dirty="0"/>
-          </a:p>
-          <a:p>
-            <a:pPr marL="342900" indent="-342900">
-              <a:spcAft>
-                <a:spcPts val="600"/>
-              </a:spcAft>
-              <a:buSzPct val="100000"/>
-              <a:buChar char="•"/>
-            </a:pPr>
-            <a:r>
-              <a:rPr lang="en-US" sz="1500" dirty="0">
-                <a:solidFill>
-                  <a:srgbClr val="212121"/>
-                </a:solidFill>
-                <a:latin typeface="Calibri" pitchFamily="34" charset="0"/>
-                <a:ea typeface="Calibri" pitchFamily="34" charset="-122"/>
-                <a:cs typeface="Calibri" pitchFamily="34" charset="-120"/>
-              </a:rPr>
-              <a:t>Semantic Kernel (MAF is the forward direction)</a:t>
-            </a:r>
-            <a:endParaRPr lang="en-US" sz="1500" dirty="0"/>
-          </a:p>
-          <a:p>
-            <a:pPr marL="342900" indent="-342900">
-              <a:spcAft>
-                <a:spcPts val="600"/>
-              </a:spcAft>
-              <a:buSzPct val="100000"/>
-              <a:buChar char="•"/>
-            </a:pPr>
-            <a:r>
-              <a:rPr lang="en-US" sz="1500" dirty="0">
-                <a:solidFill>
-                  <a:srgbClr val="212121"/>
-                </a:solidFill>
-                <a:latin typeface="Calibri" pitchFamily="34" charset="0"/>
-                <a:ea typeface="Calibri" pitchFamily="34" charset="-122"/>
-                <a:cs typeface="Calibri" pitchFamily="34" charset="-120"/>
-              </a:rPr>
-              <a:t>AutoGen (research-lineage predecessor)</a:t>
-            </a:r>
-            <a:endParaRPr lang="en-US" sz="1500" dirty="0"/>
-          </a:p>
-          <a:p>
-            <a:pPr marL="342900" indent="-342900">
-              <a:spcAft>
-                <a:spcPts val="600"/>
-              </a:spcAft>
-              <a:buSzPct val="100000"/>
-              <a:buChar char="•"/>
-            </a:pPr>
-            <a:r>
-              <a:rPr lang="en-US" sz="1500" dirty="0">
-                <a:solidFill>
-                  <a:srgbClr val="212121"/>
-                </a:solidFill>
-                <a:latin typeface="Calibri" pitchFamily="34" charset="0"/>
-                <a:ea typeface="Calibri" pitchFamily="34" charset="-122"/>
-                <a:cs typeface="Calibri" pitchFamily="34" charset="-120"/>
-              </a:rPr>
-              <a:t>Third-party frameworks (LangChain, CrewAI, etc.)</a:t>
-            </a:r>
-            <a:endParaRPr lang="en-US" sz="1500" dirty="0"/>
-          </a:p>
-          <a:p>
-            <a:pPr marL="342900" indent="-342900">
-              <a:spcAft>
-                <a:spcPts val="600"/>
-              </a:spcAft>
-              <a:buSzPct val="100000"/>
-              <a:buChar char="•"/>
-            </a:pPr>
-            <a:r>
-              <a:rPr lang="en-US" sz="1500" dirty="0">
-                <a:solidFill>
-                  <a:srgbClr val="212121"/>
-                </a:solidFill>
-                <a:latin typeface="Calibri" pitchFamily="34" charset="0"/>
-                <a:ea typeface="Calibri" pitchFamily="34" charset="-122"/>
-                <a:cs typeface="Calibri" pitchFamily="34" charset="-120"/>
-              </a:rPr>
-              <a:t>Model fine-tuning, distillation, training</a:t>
-            </a:r>
-            <a:endParaRPr lang="en-US" sz="1500" dirty="0"/>
-          </a:p>
-          <a:p>
-            <a:pPr marL="342900" indent="-342900">
-              <a:spcAft>
-                <a:spcPts val="600"/>
-              </a:spcAft>
-              <a:buSzPct val="100000"/>
-              <a:buChar char="•"/>
-            </a:pPr>
-            <a:r>
-              <a:rPr lang="en-US" sz="1500" dirty="0">
-                <a:solidFill>
-                  <a:srgbClr val="212121"/>
-                </a:solidFill>
-                <a:latin typeface="Calibri" pitchFamily="34" charset="0"/>
-                <a:ea typeface="Calibri" pitchFamily="34" charset="-122"/>
-                <a:cs typeface="Calibri" pitchFamily="34" charset="-120"/>
-              </a:rPr>
-              <a:t>On-prem / air-gapped deployments</a:t>
-            </a:r>
-            <a:endParaRPr lang="en-US" sz="1500" dirty="0"/>
+          <a:bodyPr wrap="square" lIns="0" tIns="0" rIns="0" bIns="0" rtlCol="0" anchor="t"/>
+          <a:lstStyle/>
+          <a:p>
+            <a:pPr algn="ctr" indent="0" marL="0">
+              <a:buNone/>
+            </a:pPr>
+            <a:r>
+              <a:rPr lang="en-US" sz="1100" dirty="0">
+                <a:solidFill>
+                  <a:srgbClr val="6B7280"/>
+                </a:solidFill>
+                <a:latin typeface="Calibri" pitchFamily="34" charset="0"/>
+                <a:ea typeface="Calibri" pitchFamily="34" charset="-122"/>
+                <a:cs typeface="Calibri" pitchFamily="34" charset="-120"/>
+              </a:rPr>
+              <a:t>Multiple roles · costly · new failure modes</a:t>
+            </a:r>
+            <a:endParaRPr lang="en-US" sz="1100" dirty="0"/>
           </a:p>
         </p:txBody>
       </p:sp>
